--- a/Unit decks/Unit 06 - Performance Management Setup.pptx
+++ b/Unit decks/Unit 06 - Performance Management Setup.pptx
@@ -739,6 +739,23 @@
             </a:r>
             <a:endParaRPr lang="en-US" dirty="0"/>
           </a:p>
+          <a:p/>
+          <a:p>
+            <a:r>
+              <a:t>Professional insights:</a:t>
+            </a:r>
+          </a:p>
+          <a:p/>
+          <a:p>
+            <a:r>
+              <a:t>Bridge 1 · Decomposing the Big Picture: Large efforts succeed when the work is organised into manageable sections with clear ownership, after a disciplined assessment of the true starting condition.</a:t>
+            </a:r>
+          </a:p>
+          <a:p>
+            <a:r>
+              <a:t>Source: Journal, 5 August 2026 — Professional Insights: Strategy</a:t>
+            </a:r>
+          </a:p>
         </p:txBody>
       </p:sp>
       <p:sp>
@@ -943,6 +960,23 @@
             </a:r>
             <a:endParaRPr lang="en-US" dirty="0"/>
           </a:p>
+          <a:p/>
+          <a:p>
+            <a:r>
+              <a:t>Professional insights:</a:t>
+            </a:r>
+          </a:p>
+          <a:p/>
+          <a:p>
+            <a:r>
+              <a:t>Step 1 · Prepare the Foundation: Strategy becomes executable when decision rights, boundaries and accountability are defined before the pressure arrives. Set the standards explicitly, and name the seriousness of a situation honestly when it comes.</a:t>
+            </a:r>
+          </a:p>
+          <a:p>
+            <a:r>
+              <a:t>Source: Journal, 20 July 2026 — Professional Insights: Strategy</a:t>
+            </a:r>
+          </a:p>
         </p:txBody>
       </p:sp>
       <p:sp>
@@ -1045,6 +1079,34 @@
             </a:r>
             <a:endParaRPr lang="en-US" dirty="0"/>
           </a:p>
+          <a:p/>
+          <a:p>
+            <a:r>
+              <a:t>Professional insights:</a:t>
+            </a:r>
+          </a:p>
+          <a:p/>
+          <a:p>
+            <a:r>
+              <a:t>Accountability at the top: A culture that holds everyone accountable except the most powerful runs on performance for junior people and immunity for senior ones. No role is above the standards the culture requires.</a:t>
+            </a:r>
+          </a:p>
+          <a:p>
+            <a:r>
+              <a:t>Source: Journal, 15 January 2026 — Professional Insights: Culture</a:t>
+            </a:r>
+          </a:p>
+          <a:p/>
+          <a:p>
+            <a:r>
+              <a:t>The leader’s evidence: The condition of the organisation, the experience of its people and the consistency of its operations reveal whether leadership capability has been translated into practice. Use this with “Cumulative outcome trajectory”.</a:t>
+            </a:r>
+          </a:p>
+          <a:p>
+            <a:r>
+              <a:t>Source: Journal, 16 July 2026 — Professional Insights: Leadership</a:t>
+            </a:r>
+          </a:p>
         </p:txBody>
       </p:sp>
       <p:sp>
@@ -1234,6 +1296,23 @@
 - ✎ Reflection — Your Enterprise Signal Write down what you believe are the top three enterprise performance priorities right now. Then compare with a colleague. What does any divergence reveal? — My top 3 enterprise performance priorities right now: 1. 2. 3. What any divergence with colleagues reveals...</a:t>
             </a:r>
             <a:endParaRPr lang="en-US" dirty="0"/>
+          </a:p>
+          <a:p/>
+          <a:p>
+            <a:r>
+              <a:t>Professional insights:</a:t>
+            </a:r>
+          </a:p>
+          <a:p/>
+          <a:p>
+            <a:r>
+              <a:t>Same data, same truth: A system loses reliability when people say what authority wants to hear. Capability without alignment can still produce poor collective outcomes.</a:t>
+            </a:r>
+          </a:p>
+          <a:p>
+            <a:r>
+              <a:t>Source: Journal, 30 August 2026 — Professional Insights: Strategy</a:t>
+            </a:r>
           </a:p>
         </p:txBody>
       </p:sp>
@@ -1464,6 +1543,34 @@
 - ✎ Reflection — Your Dominant Gap Which of the three Execution Gaps is most present in your organisation right now? Why does it persist despite being understood? — The dominant gap in my organisation is Gap ___ because... It persists despite being understood because... The intervention I would prioritise: ...</a:t>
             </a:r>
             <a:endParaRPr lang="en-US" dirty="0"/>
+          </a:p>
+          <a:p/>
+          <a:p>
+            <a:r>
+              <a:t>Professional insights:</a:t>
+            </a:r>
+          </a:p>
+          <a:p/>
+          <a:p>
+            <a:r>
+              <a:t>Gap 3 · Incentive Misalignment: Cultures that take the value people produce without returning it equitably erode the motivation that produced it. People stop caring about the harvest when they know they will not share in it.</a:t>
+            </a:r>
+          </a:p>
+          <a:p>
+            <a:r>
+              <a:t>Source: Journal, 2 February 2026 — Professional Insights: Culture</a:t>
+            </a:r>
+          </a:p>
+          <a:p/>
+          <a:p>
+            <a:r>
+              <a:t>What the system rewards: When an organisation visibly rewards self-promotion, people spend their energy positioning and the quiet contributor is overlooked. Raise the people who did the work without angling for the credit, so that contribution becomes the path upward.</a:t>
+            </a:r>
+          </a:p>
+          <a:p>
+            <a:r>
+              <a:t>Source: Journal, 15 June 2026 — Professional Insights: Culture</a:t>
+            </a:r>
           </a:p>
         </p:txBody>
       </p:sp>
@@ -2103,6 +2210,23 @@
 - ✎ Reflection — EXECUTION Self-Score Rate your current PM system 1–5 against each letter. Which scored lowest? What is the cost of that gap in your current context? EEnterprise — Strategy First XeXecution — Line-of-Sight EEvidence — Evidence-Based CCollective — Shared Ownership UUnderstand — Outcomes First TTransparent — Measurement Logic IIncentive — Aligned Incentives OOngoing — Review Rhythm NNavigate — Collective Insight Lowest score, why, the cost, and one change you will make</a:t>
             </a:r>
             <a:endParaRPr lang="en-US" dirty="0"/>
+          </a:p>
+          <a:p/>
+          <a:p>
+            <a:r>
+              <a:t>Professional insights:</a:t>
+            </a:r>
+          </a:p>
+          <a:p/>
+          <a:p>
+            <a:r>
+              <a:t>C · Collective Ownership: Organisations flourish when responsibility is shared, every unit contributes to the common purpose and dependence on a few individuals falls away.</a:t>
+            </a:r>
+          </a:p>
+          <a:p>
+            <a:r>
+              <a:t>Source: Journal, 5 August 2026 — Professional Insights: Culture</a:t>
+            </a:r>
           </a:p>
         </p:txBody>
       </p:sp>
@@ -2933,6 +3057,23 @@
             </a:r>
             <a:endParaRPr lang="en-US" dirty="0"/>
           </a:p>
+          <a:p/>
+          <a:p>
+            <a:r>
+              <a:t>Professional insights:</a:t>
+            </a:r>
+          </a:p>
+          <a:p/>
+          <a:p>
+            <a:r>
+              <a:t>Numbers and judgement: Numbers should inform decision-making while judgement stays in charge. A dashboard can show strength while the heart of the system is drifting. Use this with “A management system converts reports into movement”.</a:t>
+            </a:r>
+          </a:p>
+          <a:p>
+            <a:r>
+              <a:t>Source: Journal, 8 July 2026 — Professional Insights: Strategy</a:t>
+            </a:r>
+          </a:p>
         </p:txBody>
       </p:sp>
       <p:sp>
@@ -3146,6 +3287,23 @@
             </a:r>
             <a:endParaRPr lang="en-US" dirty="0"/>
           </a:p>
+          <a:p/>
+          <a:p>
+            <a:r>
+              <a:t>Professional insights:</a:t>
+            </a:r>
+          </a:p>
+          <a:p/>
+          <a:p>
+            <a:r>
+              <a:t>F · Foster a Results Culture: Culture is revealed through the way work is assigned, recognised and maintained. When only highly visible work is rewarded, essential support functions disengage. People need to know their contribution matters even when senior leaders do not see it.</a:t>
+            </a:r>
+          </a:p>
+          <a:p>
+            <a:r>
+              <a:t>Source: Journal, 10 July 2026 — Professional Insights: Culture</a:t>
+            </a:r>
+          </a:p>
         </p:txBody>
       </p:sp>
       <p:sp>
@@ -3370,6 +3528,34 @@
 - ✎ Reflection — Your Rating Experience Thinking about your current team or role: which rating most accurately reflects the performance standard you are measuring toward? What does the leadership response to that rating look like in practice? — My reflection on the rating scale and how it applies to my current context...</a:t>
             </a:r>
             <a:endParaRPr lang="en-US" dirty="0"/>
+          </a:p>
+          <a:p/>
+          <a:p>
+            <a:r>
+              <a:t>Professional insights:</a:t>
+            </a:r>
+          </a:p>
+          <a:p/>
+          <a:p>
+            <a:r>
+              <a:t>Accurate ratings: The most meaningful feedback is the most accurate. Leaders who inflate assessments to avoid discomfort deprive people of the truth they need to grow. Use this with 3 · Meets Expectations as SOLID GOLD.</a:t>
+            </a:r>
+          </a:p>
+          <a:p>
+            <a:r>
+              <a:t>Source: Journal, 31 January 2026 — Professional Insights: Leadership</a:t>
+            </a:r>
+          </a:p>
+          <a:p/>
+          <a:p>
+            <a:r>
+              <a:t>Discretionary effort: Reviews usually account for results, milestones and behaviours, and rarely for who showed up when the work got hard. Add one question to the review: when the last difficult initiative needed discretionary effort, who came and who stayed away?</a:t>
+            </a:r>
+          </a:p>
+          <a:p>
+            <a:r>
+              <a:t>Source: Journal, 19 April 2026 — Professional Insights: Leadership</a:t>
+            </a:r>
           </a:p>
         </p:txBody>
       </p:sp>

--- a/Unit decks/Unit 06 - Performance Management Setup.pptx
+++ b/Unit decks/Unit 06 - Performance Management Setup.pptx
@@ -537,6 +537,23 @@
             </a:r>
             <a:endParaRPr lang="en-US" dirty="0"/>
           </a:p>
+          <a:p/>
+          <a:p>
+            <a:r>
+              <a:t>Source detail (S2R® manuscript):</a:t>
+            </a:r>
+          </a:p>
+          <a:p/>
+          <a:p>
+            <a:r>
+              <a:t>Module context: The Influence module equips participants to understand how each CXO role transforms strategic intent into execution reality. In this phase, leaders move from being architects of strategy to engineers of execution flow: unclogging resistance and establishing the accountability architecture required to sustain momentum under pressure.</a:t>
+            </a:r>
+          </a:p>
+          <a:p>
+            <a:r>
+              <a:t>Throughout this module, participants explore how different functional perspectives interpret direction, and identify the specific steps where these interpretations create either cross-functional tension or powerful reinforcement.</a:t>
+            </a:r>
+          </a:p>
         </p:txBody>
       </p:sp>
       <p:sp>
@@ -631,6 +648,28 @@
             </a:r>
             <a:endParaRPr lang="en-US" dirty="0"/>
           </a:p>
+          <a:p/>
+          <a:p>
+            <a:r>
+              <a:t>Source detail (S2R® manuscript):</a:t>
+            </a:r>
+          </a:p>
+          <a:p/>
+          <a:p>
+            <a:r>
+              <a:t>Where this section sits: Performance management is the intelligence layer that determines whether the high-level organisational objectives actually translate into observable progress, or whether they remain aspirational statements in a presentation deck that is reviewed at the beginning of the year and quietly forgotten by the middle of it.</a:t>
+            </a:r>
+          </a:p>
+          <a:p>
+            <a:r>
+              <a:t>Moving from strategy design to execution requires a bridge. Without this bridge, strategic goals may be intellectually coherent but operationally invisible. They exist in language that leadership understands, but that language has not been translated into the daily decisions, priorities, and habits of the people responsible for delivery.</a:t>
+            </a:r>
+          </a:p>
+          <a:p>
+            <a:r>
+              <a:t>The primary purpose of performance management is to build and sustain that bridge, ensuring that every ounce of individual effort contributes to the organisation’s strategic direction. Without it, organisations generate what might be called random acts of excellence: genuine effort, real capability, strong intentions, none of which reliably move the needle.</a:t>
+            </a:r>
+          </a:p>
         </p:txBody>
       </p:sp>
       <p:sp>
@@ -742,6 +781,44 @@
           <a:p/>
           <a:p>
             <a:r>
+              <a:t>Source detail (S2R® manuscript):</a:t>
+            </a:r>
+          </a:p>
+          <a:p/>
+          <a:p>
+            <a:r>
+              <a:t>How the PM system builds the bridge: Performance management frameworks create a line of sight: a direct, visible connection between enterprise strategy and individual contribution. When this line of sight exists, performance management becomes a motivational system and stops being a compliance exercise. An employee can sit down on a Monday morning and understand precisely how their work connects to the organisation’s most critical outcomes.</a:t>
+            </a:r>
+          </a:p>
+          <a:p/>
+          <a:p>
+            <a:r>
+              <a:t>What each bridge function does:</a:t>
+            </a:r>
+          </a:p>
+          <a:p>
+            <a:r>
+              <a:t>Decomposing the Big Picture: Breaking each Key Result into functional measurable delivery signals: the specific, daily contributions required from every team. Strategy descends from the enterprise level to the desk level.</a:t>
+            </a:r>
+          </a:p>
+          <a:p>
+            <a:r>
+              <a:t>Defining the Logic of Success: Establishing exactly how performance is measured, where the data comes from, and which levers carry the most weight. This removes ambiguity and ensures that the rules of the game are agreed before the game is played.</a:t>
+            </a:r>
+          </a:p>
+          <a:p>
+            <a:r>
+              <a:t>Calibrating the Rhythm: Setting incremental targets so that leaders are never guessing about whether they are on track. The calculation logic is straightforward, and it tells the leadership team exactly what “on track” looks like every single month.</a:t>
+            </a:r>
+          </a:p>
+          <a:p>
+            <a:r>
+              <a:t>Structuring the Dialogue: Establishing a cadence for reviews so that performance updates become active leadership conversations: structured moments where the team asks what this data means and what to do next. A performance update is more than a data entry.</a:t>
+            </a:r>
+          </a:p>
+          <a:p/>
+          <a:p>
+            <a:r>
               <a:t>Professional insights:</a:t>
             </a:r>
           </a:p>
@@ -859,6 +936,60 @@
             </a:r>
             <a:endParaRPr lang="en-US" dirty="0"/>
           </a:p>
+          <a:p/>
+          <a:p>
+            <a:r>
+              <a:t>Source detail (S2R® manuscript):</a:t>
+            </a:r>
+          </a:p>
+          <a:p/>
+          <a:p>
+            <a:r>
+              <a:t>The S2R® position: A PM system fails when it is built solely for compliance, using pressure and monitoring to force results. The Strategy2Results® approach is built on a fundamentally different architecture: shared commitment, where the scorecard is a product of alignment and shared ownership, with no directive issued from above.</a:t>
+            </a:r>
+          </a:p>
+          <a:p>
+            <a:r>
+              <a:t>Understanding the difference between these two architectures is essential for every leader.</a:t>
+            </a:r>
+          </a:p>
+          <a:p/>
+          <a:p>
+            <a:r>
+              <a:t>Five further pairs (compliance architecture first, commitment architecture second):</a:t>
+            </a:r>
+          </a:p>
+          <a:p>
+            <a:r>
+              <a:t>Imposed: OKRs and KPIs are assigned from the top down. Co-Created: OKRs and KPIs are developed through alignment dialogue; the people responsible for delivery have a voice in how delivery is defined.</a:t>
+            </a:r>
+          </a:p>
+          <a:p>
+            <a:r>
+              <a:t>Evaluative: Measurement is used to judge past failure. Educational: Measurement is used for learning and course correction.</a:t>
+            </a:r>
+          </a:p>
+          <a:p>
+            <a:r>
+              <a:t>High Pressure: Targets are set at unrealistic maximums. Execution Reality: Targets are meaningful stretches grounded in operational reality.</a:t>
+            </a:r>
+          </a:p>
+          <a:p>
+            <a:r>
+              <a:t>Retrospective: Reviews only look at what went wrong. Prospective: Reviews look back to adjust the path forward.</a:t>
+            </a:r>
+          </a:p>
+          <a:p>
+            <a:r>
+              <a:t>Isolated: Accountability sits with the individual alone. Shared: Both the leader and the KPI owner share responsibility for outcomes.</a:t>
+            </a:r>
+          </a:p>
+          <a:p/>
+          <a:p>
+            <a:r>
+              <a:t>A critical point for every leader in the room: Performance Management is a leadership discipline. It is the continuous monitoring of strategic intent. When a leader delegates performance management entirely to HR, they have effectively delegated responsibility for strategy execution, and surrendered their ability to know whether the strategy is working.</a:t>
+            </a:r>
+          </a:p>
         </p:txBody>
       </p:sp>
       <p:sp>
@@ -963,6 +1094,65 @@
           <a:p/>
           <a:p>
             <a:r>
+              <a:t>Source detail (S2R® manuscript):</a:t>
+            </a:r>
+          </a:p>
+          <a:p/>
+          <a:p>
+            <a:r>
+              <a:t>Why the rules come first: Before cascading indicators into individual scorecards, a leader must standardise the rules of the game. This removes subjective judgement and replaces it with a data-driven framework for coaching and accountability.</a:t>
+            </a:r>
+          </a:p>
+          <a:p/>
+          <a:p>
+            <a:r>
+              <a:t>Step 1 · Prepare the Foundation, the leader’s actions:</a:t>
+            </a:r>
+          </a:p>
+          <a:p>
+            <a:r>
+              <a:t>Rating Scale (select the scale): Use a numbering rating system with clear, non-negotiable descriptors. Ensure every leader in the organisation uses the same scale in the same way.</a:t>
+            </a:r>
+          </a:p>
+          <a:p>
+            <a:r>
+              <a:t>Performance Thresholds (define thresholds): Articulate in concrete behavioural and results terms what “Outstanding” actually looks like in practice, in the specific context of each role.</a:t>
+            </a:r>
+          </a:p>
+          <a:p>
+            <a:r>
+              <a:t>Evidence Standards (identify evidence): Decide now what data sources (system reports, operational audits, peer feedback, customer data) will be used to support each rating. This removes the potential for disputes later.</a:t>
+            </a:r>
+          </a:p>
+          <a:p>
+            <a:r>
+              <a:t>Review Routine (establish the routine): Set the frequency of review: monthly dashboards for operational signals, quarterly deep-dives for strategic progress, annual reviews for overall performance and development.</a:t>
+            </a:r>
+          </a:p>
+          <a:p/>
+          <a:p>
+            <a:r>
+              <a:t>Step 2 · The Cascade, translating strategy to the frontline: Once the foundation is set, the leader works with the team to translate Key Results and Goals into individual delivery outcomes and KPIs. This is the cascade: the moment when enterprise strategy descends from the executive level to the individual desk. The leader’s role in the cascade is specific:</a:t>
+            </a:r>
+          </a:p>
+          <a:p>
+            <a:r>
+              <a:t>Verify the Data (verify data sources): Ensure that every measure is supported by a verifiable, system-generated or independently auditable data source. Performance cannot be managed on the basis of “gut feelings” or self-reported progress.</a:t>
+            </a:r>
+          </a:p>
+          <a:p>
+            <a:r>
+              <a:t>Assign Ownership: Every delivery goal or KPI must have a clear, named owner: a single individual who is accountable for its progress. A team, a committee or a shared responsibility cannot stand in as the owner.</a:t>
+            </a:r>
+          </a:p>
+          <a:p>
+            <a:r>
+              <a:t>Focus on Learning: Ensure that review sessions are structured around solving bottlenecks and accelerating progress. Reporting numbers to confirm they have been entered correctly does not make a review.</a:t>
+            </a:r>
+          </a:p>
+          <a:p/>
+          <a:p>
+            <a:r>
               <a:t>Professional insights:</a:t>
             </a:r>
           </a:p>
@@ -1082,6 +1272,34 @@
           <a:p/>
           <a:p>
             <a:r>
+              <a:t>Source detail (S2R® manuscript):</a:t>
+            </a:r>
+          </a:p>
+          <a:p/>
+          <a:p>
+            <a:r>
+              <a:t>The distinction in one line: The team is measured on the quality and completion of specific activities. The leader is measured on the cumulative outcome that those activities produce.</a:t>
+            </a:r>
+          </a:p>
+          <a:p/>
+          <a:p>
+            <a:r>
+              <a:t>Example: The strategic goal is to reduce complaint resolution time from 48 hours to 12 hours.</a:t>
+            </a:r>
+          </a:p>
+          <a:p>
+            <a:r>
+              <a:t>The team is measured on their daily processing speed, quality of resolution, and adherence to handling protocols.</a:t>
+            </a:r>
+          </a:p>
+          <a:p>
+            <a:r>
+              <a:t>The leader is measured on the steady, cumulative reduction in cycle time (the −0.42 hours of improvement per week) that demonstrates the strategy is gaining traction. If the team is active but the number is not moving, the leader must intervene.</a:t>
+            </a:r>
+          </a:p>
+          <a:p/>
+          <a:p>
+            <a:r>
               <a:t>Professional insights:</a:t>
             </a:r>
           </a:p>
@@ -1201,6 +1419,18 @@
             </a:r>
             <a:endParaRPr lang="en-US" dirty="0"/>
           </a:p>
+          <a:p/>
+          <a:p>
+            <a:r>
+              <a:t>Source detail (S2R® manuscript):</a:t>
+            </a:r>
+          </a:p>
+          <a:p/>
+          <a:p>
+            <a:r>
+              <a:t>Where this section sits: Performance management becomes fragile when success is measured in silos. If every department builds its own dashboard in isolation, the enterprise strategy dissolves into a collection of competing priorities, each legitimate within its own boundary, none of them aligned to a common direction.</a:t>
+            </a:r>
+          </a:p>
         </p:txBody>
       </p:sp>
       <p:sp>
@@ -1296,6 +1526,23 @@
 - ✎ Reflection — Your Enterprise Signal Write down what you believe are the top three enterprise performance priorities right now. Then compare with a colleague. What does any divergence reveal? — My top 3 enterprise performance priorities right now: 1. 2. 3. What any divergence with colleagues reveals...</a:t>
             </a:r>
             <a:endParaRPr lang="en-US" dirty="0"/>
+          </a:p>
+          <a:p/>
+          <a:p>
+            <a:r>
+              <a:t>Source detail (S2R® manuscript):</a:t>
+            </a:r>
+          </a:p>
+          <a:p/>
+          <a:p>
+            <a:r>
+              <a:t>The Brigade image: Think of the executive team as The Alignment Brigade, more than heads of departments. Every leader carries deep professional instincts about what “progress” looks like. A CFO sees progress in the margins. A CTO sees it in system uptime and deployment velocity. A CHRO sees it in engagement scores and leadership capability. These instincts are valuable, but if they are not synchronised, they create measurement imbalances that fragment the organisation’s understanding of its own performance.</a:t>
+            </a:r>
+          </a:p>
+          <a:p>
+            <a:r>
+              <a:t>The Brigade’s role is to ensure that these individual signals of success resonate together as a single, coherent enterprise system. By identifying the PM Hot Zones (the areas where each executive role naturally focuses its measurement attention), the leadership team can design a performance architecture that keeps the entire organisation moving in one direction.</a:t>
+            </a:r>
           </a:p>
           <a:p/>
           <a:p>
@@ -1438,6 +1685,68 @@
             </a:r>
             <a:endParaRPr lang="en-US" dirty="0"/>
           </a:p>
+          <a:p/>
+          <a:p>
+            <a:r>
+              <a:t>Source detail (S2R® manuscript):</a:t>
+            </a:r>
+          </a:p>
+          <a:p/>
+          <a:p>
+            <a:r>
+              <a:t>Natural bias and alignment contribution of each role:</a:t>
+            </a:r>
+          </a:p>
+          <a:p>
+            <a:r>
+              <a:t>CEO · Enterprise Visibility. Natural bias: growth, milestones, and market position. Alignment contribution: connects the Big Picture organisational goals to functional execution signals across all departments.</a:t>
+            </a:r>
+          </a:p>
+          <a:p>
+            <a:r>
+              <a:t>CFO · Financial Signals. Natural bias: revenue, cost discipline, and ROI. Alignment contribution: links financial health to the operational drivers that create value, as well as to the outcomes they produce.</a:t>
+            </a:r>
+          </a:p>
+          <a:p>
+            <a:r>
+              <a:t>COO · Execution Rhythm. Natural bias: throughput, cycle times, and reliability. Alignment contribution: creates a sustainable and measurable pace of work that actually reaches strategic targets.</a:t>
+            </a:r>
+          </a:p>
+          <a:p>
+            <a:r>
+              <a:t>CHRO · Capability &amp; Behaviour. Natural bias: engagement and leadership effectiveness. Alignment contribution: ensures the “how” (culture) and the “who” (skills and capability) support execution.</a:t>
+            </a:r>
+          </a:p>
+          <a:p>
+            <a:r>
+              <a:t>CTO/CIO · System Enablement. Natural bias: system reliability and digital deployment. Alignment contribution: ensures that the data used for performance management is accurate, timely, and visible.</a:t>
+            </a:r>
+          </a:p>
+          <a:p>
+            <a:r>
+              <a:t>CMO · Market Signal. Natural bias: brand awareness and customer sentiment. Alignment contribution: measures the customer journey from first contact to long-term advocacy.</a:t>
+            </a:r>
+          </a:p>
+          <a:p>
+            <a:r>
+              <a:t>CCO · Revenue Velocity. Natural bias: pipeline strength and conversion speed. Alignment contribution: focuses on long-term customer value ahead of short-term transactional results.</a:t>
+            </a:r>
+          </a:p>
+          <a:p>
+            <a:r>
+              <a:t>CPO · Supply Reliability. Natural bias: procurement efficiency and resource flow. Alignment contribution: aligns supply chain and resource availability with the organisation’s actual execution capacity.</a:t>
+            </a:r>
+          </a:p>
+          <a:p>
+            <a:r>
+              <a:t>CRO · Risk &amp; Governance. Natural bias: compliance and operational risk signals. Alignment contribution: weaves stability and governance discipline into the way results are delivered.</a:t>
+            </a:r>
+          </a:p>
+          <a:p>
+            <a:r>
+              <a:t>CSO · Strategic Coherence. Natural bias: milestone tracking and initiative health. Alignment contribution: prevents measurement drift and keeps the enterprise anchored to the original strategic intent.</a:t>
+            </a:r>
+          </a:p>
         </p:txBody>
       </p:sp>
       <p:sp>
@@ -1547,6 +1856,40 @@
           <a:p/>
           <a:p>
             <a:r>
+              <a:t>Source detail (S2R® manuscript):</a:t>
+            </a:r>
+          </a:p>
+          <a:p/>
+          <a:p>
+            <a:r>
+              <a:t>The risk of the isolated measure: When leadership roles stop talking to each other and begin looking only at their own functional charts, three dangerous execution gaps appear, each capable of undermining strategy delivery even when individual departments are performing well.</a:t>
+            </a:r>
+          </a:p>
+          <a:p/>
+          <a:p>
+            <a:r>
+              <a:t>Gap 1 in practice: The Marketing Leader reports that leads are up and declares the quarter a success. The Operations Leader reports that the fulfilment backlog is growing and declares a crisis. The Finance Leader reports neutral margins and is uncertain what to conclude. All three are reading genuine data. None of them is reading the same story. Without an agreed enterprise progress signal, leadership conversations fragment into functional defences, and the organisation does not know whether it is winning or losing.</a:t>
+            </a:r>
+          </a:p>
+          <a:p>
+            <a:r>
+              <a:t>Gap 2 in practice: The most strategically important work often happens between departments: in the handoffs, the integrations, the coordination zones that no single function owns. If that work is not visible on any specific functional dashboard, it becomes invisible and, by default, unmanaged. What is not managed does not improve.</a:t>
+            </a:r>
+          </a:p>
+          <a:p>
+            <a:r>
+              <a:t>Gap 3 in practice: Teams will always play to the scoreboard. If the scoreboard only tracks their department’s metrics, they will optimise their own world, even when that optimisation inadvertently slows down the rest of the organisation. A sales team that closes deals without considering operational capacity creates a backlog. A finance function that optimises cost without considering capability creates a talent shortage. Misaligned scorecards are enough to produce incentive misalignment, even where intentions are good.</a:t>
+            </a:r>
+          </a:p>
+          <a:p/>
+          <a:p>
+            <a:r>
+              <a:t>The leadership imperative: Performance management is a collective discipline. While each leader brings a specialised perspective to the table, the goal is to weave those perspectives into a single Source of Truth: one agreed enterprise progress signal that the entire leadership team reads and interprets together. This ensures that when the organisation says it is making progress, it means it from every angle of the business, well beyond the one angle that is performing best this quarter.</a:t>
+            </a:r>
+          </a:p>
+          <a:p/>
+          <a:p>
+            <a:r>
               <a:t>Professional insights:</a:t>
             </a:r>
           </a:p>
@@ -1673,6 +2016,44 @@
             </a:r>
             <a:endParaRPr lang="en-US" dirty="0"/>
           </a:p>
+          <a:p/>
+          <a:p>
+            <a:r>
+              <a:t>Source detail (S2R® manuscript):</a:t>
+            </a:r>
+          </a:p>
+          <a:p/>
+          <a:p>
+            <a:r>
+              <a:t>The shift in design logic: The design logic of performance management is evolving rapidly. For decades, organisations relied on the annual performance review as the primary mechanism for evaluating performance. That model is now being systematically replaced by Continuous Performance Management: a real-time, feedback-rich approach to monitoring and guiding execution.</a:t>
+            </a:r>
+          </a:p>
+          <a:p>
+            <a:r>
+              <a:t>Research across global organisations reveals a clear and accelerating shift, and organisations using continuous feedback structures report significantly higher employee retention. Quarterly check-ins and structured one-on-one conversations are replacing the once-a-year evaluation event.</a:t>
+            </a:r>
+          </a:p>
+          <a:p>
+            <a:r>
+              <a:t>The reason is straightforward. In fast-moving operating environments, leadership cannot afford to wait twelve months to discover that execution has drifted off course. By the time an annual review reveals the gap between strategy and delivery, months of irreversible momentum have been lost. Performance management must operate as a living system of execution monitoring: responsive, forward-looking, and cadence-driven.</a:t>
+            </a:r>
+          </a:p>
+          <a:p/>
+          <a:p>
+            <a:r>
+              <a:t>Performance management in your organisation: It is highly likely that your organisation already has a formal Performance Management system in place, whether it is a global enterprise platform such as Workday or SAP SuccessFactors, a mid-market solution such as BambooHR or Personio, a specialised continuous feedback tool such as Lattice or 15Five, or a locally designed Excel-based scorecard.</a:t>
+            </a:r>
+          </a:p>
+          <a:p>
+            <a:r>
+              <a:t>Many organisations treat their PM system as a black box: data goes in, a rating comes out, and no one is entirely certain how the two are connected. When leaders understand only the mechanics of the system (which fields to complete, which buttons to click, which columns to populate), the system feels like a compliance exercise. It generates administrative burden without generating execution intelligence.</a:t>
+            </a:r>
+          </a:p>
+          <a:p>
+            <a:r>
+              <a:t>When leaders understand the logic of performance management (why the system is designed the way it is, what each component is intended to surface, and how the pieces connect to strategy), the same system transforms into a lever for clarity, alignment, and execution visibility. The question changes from “Did people complete the form?” to “Does our performance system actually tell us whether the strategy is working?” That is the perspective from which every leader in this programme must engage with their PM system.</a:t>
+            </a:r>
+          </a:p>
         </p:txBody>
       </p:sp>
       <p:sp>
@@ -1860,6 +2241,28 @@
             </a:r>
             <a:endParaRPr lang="en-US" dirty="0"/>
           </a:p>
+          <a:p/>
+          <a:p>
+            <a:r>
+              <a:t>Source detail (S2R® manuscript):</a:t>
+            </a:r>
+          </a:p>
+          <a:p/>
+          <a:p>
+            <a:r>
+              <a:t>The collective progress signal: The overall measure of enterprise performance is a collective progress signal. It integrates the movement of critical execution indicators across all functions into a single reference point that allows the executive team to answer one central question with shared understanding: Is the strategy advancing at the pace required to reach the intended outcome?</a:t>
+            </a:r>
+          </a:p>
+          <a:p>
+            <a:r>
+              <a:t>Without an agreed overall progress signal, leadership conversations fragment. Operations sees improvement in cycle time. Finance sees no financial impact yet. HR sees cultural progress. Strategy sees milestone completion. Each function reports progress through its own perspective, and the leadership team never arrives at a shared verdict on whether the enterprise is winning.</a:t>
+            </a:r>
+          </a:p>
+          <a:p>
+            <a:r>
+              <a:t>The Converging Zone prevents this fragmentation by creating one common interpretation of execution reality. Multiple narratives give way to a single progress signal, the agreed overall measure, that anchors every leadership dialogue about execution.</a:t>
+            </a:r>
+          </a:p>
         </p:txBody>
       </p:sp>
       <p:sp>
@@ -1964,6 +2367,38 @@
             </a:r>
             <a:endParaRPr lang="en-US" dirty="0"/>
           </a:p>
+          <a:p/>
+          <a:p>
+            <a:r>
+              <a:t>Source detail (S2R® manuscript):</a:t>
+            </a:r>
+          </a:p>
+          <a:p/>
+          <a:p>
+            <a:r>
+              <a:t>How the collective progress signal is used: The agreed overall measure becomes the anchor for leadership dialogue. It supports three distinct types of executive question.</a:t>
+            </a:r>
+          </a:p>
+          <a:p>
+            <a:r>
+              <a:t>What each question type reveals:</a:t>
+            </a:r>
+          </a:p>
+          <a:p>
+            <a:r>
+              <a:t>Execution Traction: Is the strategy moving forward at the expected pace? Are we on track, ahead, or behind the planned trajectory?</a:t>
+            </a:r>
+          </a:p>
+          <a:p>
+            <a:r>
+              <a:t>Execution Balance: Which strategic outcomes are advancing faster or slower than the collective index? Where is the organisation accelerating, and where is it lagging?</a:t>
+            </a:r>
+          </a:p>
+          <a:p>
+            <a:r>
+              <a:t>Execution Intervention: Where should leadership attention focus to accelerate enterprise progress? Which bottlenecks require executive-level resolution?</a:t>
+            </a:r>
+          </a:p>
         </p:txBody>
       </p:sp>
       <p:sp>
@@ -2079,6 +2514,51 @@
 - ✎ Reflection — Apply the Formula Choose one current strategic priority. Calculate your cumulative progress percentage. What does the number tell you about whether you are on trajectory? — Strategic priority: ... Baseline: ___ | Current: ___ | Target: ___ Cumulative Progress % = ___ What this tells me about trajectory: ...</a:t>
             </a:r>
             <a:endParaRPr lang="en-US" dirty="0"/>
+          </a:p>
+          <a:p/>
+          <a:p>
+            <a:r>
+              <a:t>Source detail (S2R® manuscript):</a:t>
+            </a:r>
+          </a:p>
+          <a:p/>
+          <a:p>
+            <a:r>
+              <a:t>Completing the design: In the Converging Zone, the leadership team completes the design of the performance management system by agreeing on how progress will be observed over time. This agreement has three elements that work together to create the execution rhythm of the organisation.</a:t>
+            </a:r>
+          </a:p>
+          <a:p/>
+          <a:p>
+            <a:r>
+              <a:t>What each element answers and why it matters:</a:t>
+            </a:r>
+          </a:p>
+          <a:p>
+            <a:r>
+              <a:t>Reporting Cadence. What it answers: When do we examine execution progress? Why it matters: Without an agreed rhythm, reviews become irregular and reactive. Leaders engage with performance data only when a crisis forces the issue, by which time drift has become entrenched.</a:t>
+            </a:r>
+          </a:p>
+          <a:p>
+            <a:r>
+              <a:t>Periodic Measures. What it answers: What is the current performance level at each review point? Why it matters: Periodic measures provide the raw evidence of movement. They answer: what is the current state of execution right now? Alone, they do not show whether the organisation is progressing fast enough.</a:t>
+            </a:r>
+          </a:p>
+          <a:p>
+            <a:r>
+              <a:t>Cumulative Progress. What it answers: How far have we moved toward the target, as a percentage of the total journey? Why it matters: Cumulative progress converts periodic measurements into a trajectory signal, showing the current number together with the direction and velocity of strategic movement.</a:t>
+            </a:r>
+          </a:p>
+          <a:p/>
+          <a:p>
+            <a:r>
+              <a:t>Reading the complaint resolution example: The value tells the leadership team that 22% of the strategic journey has been completed. It transforms the raw number (40 hours) into a directional signal, and triggers the leadership question: is 22% progress consistent with the time elapsed? If the organisation is 30% through the reporting period but has achieved only 22% of the target movement, the strategy is running behind pace and intervention is required.</a:t>
+            </a:r>
+          </a:p>
+          <a:p/>
+          <a:p>
+            <a:r>
+              <a:t>When the three are aligned: When reporting cadence, periodic measures, and cumulative progress are aligned, the leadership team gains continuous visibility of strategy execution. Every reporting cycle answers the same central question: are we moving closer to the Success in Practice? If the answer is yes, momentum is reinforced. If the answer is no, leadership intervenes. This is the discipline that transforms performance measurement into a living system of execution intelligence.</a:t>
+            </a:r>
           </a:p>
         </p:txBody>
       </p:sp>
@@ -2214,6 +2694,75 @@
           <a:p/>
           <a:p>
             <a:r>
+              <a:t>Source detail (S2R® manuscript):</a:t>
+            </a:r>
+          </a:p>
+          <a:p/>
+          <a:p>
+            <a:r>
+              <a:t>Purpose of the principles: Regardless of which platform an organisation uses, an effective Performance Management system should be guided by the EXECUTION principles. These principles ensure that performance management functions as an execution intelligence system.</a:t>
+            </a:r>
+          </a:p>
+          <a:p/>
+          <a:p>
+            <a:r>
+              <a:t>Further explanation and the leadership question for each principle:</a:t>
+            </a:r>
+          </a:p>
+          <a:p>
+            <a:r>
+              <a:t>E · Enterprise: Strategy First. Performance management must begin with strategic intent, and metrics follow. The first question is “What strategic outcomes must the organisation deliver?”; “What should we measure?” comes second. Measures of progress should emerge directly from Key Results. When this principle is ignored, organisations measure activity and lose sight of progress. Leadership question: Are our measures directly tied to the strategic outcomes the organisation must deliver?</a:t>
+            </a:r>
+          </a:p>
+          <a:p>
+            <a:r>
+              <a:t>X · eXecution: Line-of-Sight. A well-designed PM system creates a clear line of sight between enterprise strategy and individual contribution: from Strategy to Key Results to Operational Delivery to Individual Contribution. When this connection is visible, performance management becomes motivational and stops feeling administrative. Leadership question: Can every person in the organisation clearly explain how their work contributes to enterprise outcomes?</a:t>
+            </a:r>
+          </a:p>
+          <a:p>
+            <a:r>
+              <a:t>E · Evidence: Evidence-Based Measurement. Performance evaluation must rely on clear and verifiable evidence. Leaders must know what data source supports each measure, how frequently data is updated, and who validates it. Evidence-based measurement grounds performance conversations in data and takes opinion out of them. Leadership question: Do we have reliable and verifiable data sources for every measure we track?</a:t>
+            </a:r>
+          </a:p>
+          <a:p>
+            <a:r>
+              <a:t>C · Collective: Collective Ownership. Performance management must reinforce collective responsibility for execution. Strategy execution happens between functions as well as within them. The PM system must encourage cross-functional ownership, shared success metrics, and joint accountability. Leadership question: Are strategic outcomes owned collectively across functions, or isolated within departments?</a:t>
+            </a:r>
+          </a:p>
+          <a:p>
+            <a:r>
+              <a:t>U · Understand: Outcomes First. Performance management must prioritise outcomes over activity. Activity measures answer “Did we do the work?” Outcome measures answer “Did the work produce the intended result?” The PM system must focus on signals that reveal whether strategy is advancing. Leadership question: Are we measuring meaningful outcomes or simply tracking activity?</a:t>
+            </a:r>
+          </a:p>
+          <a:p>
+            <a:r>
+              <a:t>T · Transparent: Measurement Logic. Everyone should understand what is being measured, how it is measured, how ratings are determined, and what improvement looks like. Transparency builds trust and reduces the anxiety and perceived arbitrariness that undermine performance conversations. Leadership question: Do people clearly understand how performance ratings and evaluations are determined?</a:t>
+            </a:r>
+          </a:p>
+          <a:p>
+            <a:r>
+              <a:t>I · Incentive: Incentive Alignment. Reward structures, recognition mechanisms, and career advancement signals must align with the measures of strategic progress. When incentives contradict the measures of delivery, individuals optimise for the reward at the expense of the strategy, weakening execution discipline. Leadership question: Do our incentives reinforce the strategic outcomes and behaviours we expect people to deliver?</a:t>
+            </a:r>
+          </a:p>
+          <a:p>
+            <a:r>
+              <a:t>O · Ongoing: Review Rhythm. Performance management must operate through a consistent review cadence. Monthly reviews monitor operational signals. Quarterly reviews evaluate strategic progress. Annual reviews assess long-term performance and development. Without a defined rhythm, reviews become irregular and reactive. Leadership question: Do we have a consistent cadence for reviewing performance and strategy execution?</a:t>
+            </a:r>
+          </a:p>
+          <a:p>
+            <a:r>
+              <a:t>N · Navigate: Collective Insight. Performance data must be interpreted collectively by the leadership team. Individual dashboards provide signals, but leadership must combine those signals into a shared interpretation of enterprise progress, particularly in the Converging Zone. Leadership question: Do leadership discussions produce a shared interpretation of enterprise progress?</a:t>
+            </a:r>
+          </a:p>
+          <a:p/>
+          <a:p>
+            <a:r>
+              <a:t>When these principles guide the PM process, performance management stops being a reporting mechanism and becomes something far more valuable: a leadership system for monitoring strategy execution in real time, ensuring that leaders are tracking the organisation’s movement toward its strategic destination as well as measuring effort.</a:t>
+            </a:r>
+          </a:p>
+          <a:p/>
+          <a:p>
+            <a:r>
               <a:t>Professional insights:</a:t>
             </a:r>
           </a:p>
@@ -2426,6 +2975,38 @@
 Key Result: Shared case management module live within 6 months; cross-facility consultation rate at or above 70% within 18 months.</a:t>
             </a:r>
             <a:endParaRPr lang="en-US" dirty="0"/>
+          </a:p>
+          <a:p/>
+          <a:p>
+            <a:r>
+              <a:t>Source detail (S2R® manuscript):</a:t>
+            </a:r>
+          </a:p>
+          <a:p/>
+          <a:p>
+            <a:r>
+              <a:t>Participant brief: You are the executive leadership team of a major hospital chain launching the MyHealth Live Portal. The system will give patients 24/7 access to diagnostic data, reduce administrative calls, and increase trust through transparency.</a:t>
+            </a:r>
+          </a:p>
+          <a:p>
+            <a:r>
+              <a:t>The objective behind each outcome:</a:t>
+            </a:r>
+          </a:p>
+          <a:p>
+            <a:r>
+              <a:t>Outcome 1: Be the standard for fast, effortless service.</a:t>
+            </a:r>
+          </a:p>
+          <a:p>
+            <a:r>
+              <a:t>Outcome 2: Build a high-speed execution engine.</a:t>
+            </a:r>
+          </a:p>
+          <a:p>
+            <a:r>
+              <a:t>Outcome 3: Build a culture of shared ownership.</a:t>
+            </a:r>
           </a:p>
         </p:txBody>
       </p:sp>
@@ -2564,6 +3145,43 @@
             </a:r>
             <a:endParaRPr lang="en-US" dirty="0"/>
           </a:p>
+          <a:p/>
+          <a:p>
+            <a:r>
+              <a:t>Source detail (S2R® manuscript):</a:t>
+            </a:r>
+          </a:p>
+          <a:p/>
+          <a:p>
+            <a:r>
+              <a:t>Short task briefs and worksheet tables (each sits with the fuller task above):</a:t>
+            </a:r>
+          </a:p>
+          <a:p>
+            <a:r>
+              <a:t>Task 1 · PM Scorecard Architecture: Design the categories your organisation will use to evaluate performance. Worksheet columns: PM Category; What Does This Category Measure?; Weight (%).</a:t>
+            </a:r>
+          </a:p>
+          <a:p>
+            <a:r>
+              <a:t>Task 2 · Scoring Logic Design: Define the performance scoring logic for your organisation. Worksheet columns: Rating; Performance Meaning; Evidence Required.</a:t>
+            </a:r>
+          </a:p>
+          <a:p>
+            <a:r>
+              <a:t>Task 4 · Reporting Cadence Design: Decide how often performance should be reviewed and provide the rationale for each decision. Worksheet columns: Cadence Option (Weekly, Monthly, Quarterly); Decision (Yes / No); Rationale.</a:t>
+            </a:r>
+          </a:p>
+          <a:p>
+            <a:r>
+              <a:t>Task 5 · Periodic Measures Selection: Define the values that will be captured at each reporting period. Worksheet: one row for each Reporting Period (Period 1 to Period 4) and one column for each of the three strategic outcomes.</a:t>
+            </a:r>
+          </a:p>
+          <a:p>
+            <a:r>
+              <a:t>Task 6 · Reporting Tool Design: Design the leadership dashboard that will track progress and calculate cumulative performance. This may be a simple Excel tool or structured Word document. Explain the calculation logic your team will use, and identify who owns each measure. Worksheet columns: Dashboard Component; Data Source; Calculation Logic / Owner.</a:t>
+            </a:r>
+          </a:p>
         </p:txBody>
       </p:sp>
       <p:sp>
@@ -2667,6 +3285,18 @@
             </a:r>
             <a:endParaRPr lang="en-US" dirty="0"/>
           </a:p>
+          <a:p/>
+          <a:p>
+            <a:r>
+              <a:t>Source detail (S2R® manuscript):</a:t>
+            </a:r>
+          </a:p>
+          <a:p/>
+          <a:p>
+            <a:r>
+              <a:t>Short task brief (Simulate the Baseline): Estimate the current baseline performance levels for the organisation. Worksheet columns: Strategic Outcome; Baseline, with one row for each of the three strategic outcomes.</a:t>
+            </a:r>
+          </a:p>
         </p:txBody>
       </p:sp>
       <p:sp>
@@ -2769,6 +3399,43 @@
             </a:r>
             <a:endParaRPr lang="en-US" dirty="0"/>
           </a:p>
+          <a:p/>
+          <a:p>
+            <a:r>
+              <a:t>Source detail (S2R® manuscript):</a:t>
+            </a:r>
+          </a:p>
+          <a:p/>
+          <a:p>
+            <a:r>
+              <a:t>The unit in summary: The Performance Management Setup unit establishes the visibility infrastructure of execution. It recognises a critical leadership reality: strategy only becomes real when progress toward its outcomes can be clearly observed, interpreted, and acted upon. Many organisations remain extremely busy yet struggle to determine whether their activity is actually advancing strategic results. Performance Management addresses this gap by creating a structured system that converts strategic intent into observable progress signals.</a:t>
+            </a:r>
+          </a:p>
+          <a:p>
+            <a:r>
+              <a:t>The unit progresses through four stages that build this capability progressively.</a:t>
+            </a:r>
+          </a:p>
+          <a:p>
+            <a:r>
+              <a:t>Awareness (What): Leaders develop a clear understanding of Performance Management as a system for monitoring strategy execution. The PM system operates as the organisational dashboard that reveals whether the work being done is moving the enterprise closer to its intended outcomes. The PM Scorecard architecture introduces a structured framework for evaluating performance across strategic priorities, operational delivery, and behavioural alignment. This architecture establishes transparency in how progress is measured and ensures that every Key Result has visible ownership and accountability.</a:t>
+            </a:r>
+          </a:p>
+          <a:p>
+            <a:r>
+              <a:t>Intelligence (Why): Leaders explore why performance measurement disciplines determine execution outcomes. Strategy and execution are connected through the performance management system; without this bridge, strategic goals remain aspirational statements and never become operational realities. The PM system decomposes Key Results into measurable delivery signals, defines the evidence required to evaluate progress, and establishes the cadence through which leaders monitor advancement. The system also reinforces a commitment-based architecture of execution, where measures of progress are developed through alignment dialogue. In this way, performance management becomes a leadership mechanism for guiding learning, adjustment, and sustained strategic momentum.</a:t>
+            </a:r>
+          </a:p>
+          <a:p>
+            <a:r>
+              <a:t>Extrapolating (Where): Leaders examine where performance management challenges most commonly emerge across the executive team. Each CXO role naturally interprets progress through its functional perspective: finance emphasises financial performance, operations prioritises throughput and reliability, technology focuses on system capability, and marketing interprets customer signals. When these perspectives operate independently, organisations develop fragmented dashboards and competing definitions of progress. The Alignment Brigade concept highlights the need for cross-CXO coordination in designing the performance architecture, ensuring that the measures of delivery across functions reinforce the same strategic direction.</a:t>
+            </a:r>
+          </a:p>
+          <a:p>
+            <a:r>
+              <a:t>Integration (Collective): The Converging Zone establishes the enterprise performance architecture. The leadership team aligns on a shared interpretation of progress by defining three essential elements of the PM system: the reporting cadence, the periodic measures that capture execution signals, and the cumulative progress indicator that shows movement from baseline toward the strategic target. These elements combine to create a collective progress signal that becomes the strategic heartbeat of execution. Through this shared signal, leadership discussions shift from fragmented functional reporting to a unified interpretation of enterprise progress, enabling the executive team to determine whether the organisation is moving closer to the Success in Practice, and where intervention is required to sustain momentum.</a:t>
+            </a:r>
+          </a:p>
         </p:txBody>
       </p:sp>
       <p:sp>
@@ -2962,6 +3629,40 @@
             </a:r>
             <a:endParaRPr lang="en-US" dirty="0"/>
           </a:p>
+          <a:p/>
+          <a:p>
+            <a:r>
+              <a:t>Source detail (S2R® manuscript):</a:t>
+            </a:r>
+          </a:p>
+          <a:p/>
+          <a:p>
+            <a:r>
+              <a:t>The central problem (activity and progress): Performance Management Setup creates the visibility infrastructure that allows your organisation to see whether the work being done is actually moving the Key Results forward. Surveillance and pressure have no place in it.</a:t>
+            </a:r>
+          </a:p>
+          <a:p>
+            <a:r>
+              <a:t>Most organisations confuse activity with progress. People are busy. Initiatives are running. Reports are produced. Yet the fundamental question (are we closer to the Success in Practice today than we were last month?) is rarely answered with confidence.</a:t>
+            </a:r>
+          </a:p>
+          <a:p>
+            <a:r>
+              <a:t>This setup is about creating the infrastructure that answers that question with confidence. It is the leadership discipline of monitoring strategy in real time: how leaders decide whether to stay the course, pivot, or double down, based on hard evidence.</a:t>
+            </a:r>
+          </a:p>
+          <a:p/>
+          <a:p>
+            <a:r>
+              <a:t>The goal of this section: to shift the perspective of your team. Performance management is often dreaded because it is viewed as a policing tool. We need to reframe it as the visibility infrastructure of organisational progress toward the Success in Practice.</a:t>
+            </a:r>
+          </a:p>
+          <a:p/>
+          <a:p>
+            <a:r>
+              <a:t>Facilitator framing: When you introduce Performance Management Setup, ask leaders to clear their minds of the words “surveillance” and “pressure”. Ask them to picture the dashboard of a high-performance vehicle. A dashboard gives the driver accurate, real-time information so that they can make better decisions: whether to accelerate, adjust course, or pull over and refuel. It passes no judgement on the driver. The Performance Management system is the organisational equivalent: the visibility infrastructure of strategy execution.</a:t>
+            </a:r>
+          </a:p>
         </p:txBody>
       </p:sp>
       <p:sp>
@@ -3060,6 +3761,45 @@
           <a:p/>
           <a:p>
             <a:r>
+              <a:t>Source detail (S2R® manuscript):</a:t>
+            </a:r>
+          </a:p>
+          <a:p/>
+          <a:p>
+            <a:r>
+              <a:t>Why the distinction comes first: Before exploring how to design a Performance Management system, leaders must first resolve a confusion that undermines execution in most organisations. The terms performance measurement and performance management are routinely used as if they mean the same thing, and treating them as interchangeable is one of the most common reasons that well-designed scorecards produce no change in execution.</a:t>
+            </a:r>
+          </a:p>
+          <a:p/>
+          <a:p>
+            <a:r>
+              <a:t>Performance measurement in full: Performance measurement is the act of collecting, tracking, and interpreting data about results. It provides the evidence of what has occurred. A measurement system captures complaint resolution times, decision cycle durations, collaboration rates, revenue attainment, customer satisfaction scores: the numbers that describe organisational reality at a given point in time.</a:t>
+            </a:r>
+          </a:p>
+          <a:p>
+            <a:r>
+              <a:t>Performance management in full: Performance management is the broader leadership discipline of using that data, combined with accountability structures, deliberate conversations, and timely decisions, to shape what happens next. It reaches beyond any report or dashboard: it is the leadership response to what measurement reveals. It answers a different and more consequential question than measurement does.</a:t>
+            </a:r>
+          </a:p>
+          <a:p>
+            <a:r>
+              <a:t>Measurement is an input. Management is the response. One without the other produces either data without direction, or instinct without evidence.</a:t>
+            </a:r>
+          </a:p>
+          <a:p/>
+          <a:p>
+            <a:r>
+              <a:t>A critical distinction for every leader: Many organisations invest heavily in measurement infrastructure (dashboards, platforms, KPI libraries) and very little in management discipline. The result is that data exists in abundance, but the conversations, decisions, and interventions that should follow from that data never materialise. Leaders look at numbers. The numbers do not change the work.</a:t>
+            </a:r>
+          </a:p>
+          <a:p>
+            <a:r>
+              <a:t>The purpose of the Performance Management Setup in S2R® is to build both: a rigorous measurement architecture and a leadership management discipline that converts data into execution momentum.</a:t>
+            </a:r>
+          </a:p>
+          <a:p/>
+          <a:p>
+            <a:r>
               <a:t>Professional insights:</a:t>
             </a:r>
           </a:p>
@@ -3176,6 +3916,50 @@
             </a:r>
             <a:endParaRPr lang="en-US" dirty="0"/>
           </a:p>
+          <a:p/>
+          <a:p>
+            <a:r>
+              <a:t>Source detail (S2R® manuscript):</a:t>
+            </a:r>
+          </a:p>
+          <a:p/>
+          <a:p>
+            <a:r>
+              <a:t>What comes first: Neither measurement nor management comes first. Both are downstream of something more foundational: clarity about what success looks like. Before an organisation can measure performance, it must define what it is measuring toward. Before it can manage performance, it needs agreed standards against which to manage.</a:t>
+            </a:r>
+          </a:p>
+          <a:p/>
+          <a:p>
+            <a:r>
+              <a:t>The leadership question at each step of the sequence for building an effective PM system:</a:t>
+            </a:r>
+          </a:p>
+          <a:p>
+            <a:r>
+              <a:t>1. Define success: What does excellent performance look like in this role, at this level, in this organisation? This is defined in the earlier units of the S2R® programme.</a:t>
+            </a:r>
+          </a:p>
+          <a:p>
+            <a:r>
+              <a:t>2. Design the management system: What structure, ownership, accountability, cadence, and consequences will govern how we respond to performance data? This is the essence of this unit.</a:t>
+            </a:r>
+          </a:p>
+          <a:p>
+            <a:r>
+              <a:t>3. Design the measurement infrastructure: What gets tracked, how often, by whom, and in what format?</a:t>
+            </a:r>
+          </a:p>
+          <a:p>
+            <a:r>
+              <a:t>4. Manage using what measurement reveals: What conversations, decisions, interventions, and recognitions does this data require from us?</a:t>
+            </a:r>
+          </a:p>
+          <a:p/>
+          <a:p>
+            <a:r>
+              <a:t>Why the sequence matters: Many organisations build dashboards before they have built accountability. They measure everything and manage nothing. The data exists. The conversations do not.</a:t>
+            </a:r>
+          </a:p>
         </p:txBody>
       </p:sp>
       <p:sp>
@@ -3290,6 +4074,54 @@
           <a:p/>
           <a:p>
             <a:r>
+              <a:t>Source detail (S2R® manuscript):</a:t>
+            </a:r>
+          </a:p>
+          <a:p/>
+          <a:p>
+            <a:r>
+              <a:t>What the framework exists to do: At its core, a Performance Management system is a standardised framework, often visualised through a Performance Management Scorecard, that ensures everyone is playing by the same rules and moving in the same direction. Before examining the specific data components of such a system, it is important to understand what the framework exists to do: it bridges the gap between high-level strategy and daily habits.</a:t>
+            </a:r>
+          </a:p>
+          <a:p>
+            <a:r>
+              <a:t>A well-designed PM system must perform five distinct functions. Each function addresses a specific organisational dysfunction that, left unresolved, quietly erodes execution discipline. These five functions form the FACES framework.</a:t>
+            </a:r>
+          </a:p>
+          <a:p/>
+          <a:p>
+            <a:r>
+              <a:t>Each function and the problem it solves:</a:t>
+            </a:r>
+          </a:p>
+          <a:p>
+            <a:r>
+              <a:t>F · Foster a Results Culture. Function: creates a fair and consistent environment where behaviours that produce tangible results are recognised and valued. The problem it solves: without this, organisations inadvertently reward visibility, seniority, or effort over actual results. High performers become frustrated. Underperformance is quietly tolerated.</a:t>
+            </a:r>
+          </a:p>
+          <a:p>
+            <a:r>
+              <a:t>A · Align Individual Performance. Function: creates a clear line of sight so each individual understands how their daily actions directly contribute to enterprise outcomes. The problem it solves: without this, employees are disconnected from strategy. They complete tasks without understanding which tasks actually move the needle and which ones are simply keeping them busy.</a:t>
+            </a:r>
+          </a:p>
+          <a:p>
+            <a:r>
+              <a:t>C · Create Measurement Transparency. Function: removes ambiguity in performance evaluation by making the logic, criteria, and expectations visible and understood by all. The problem it solves: without this, performance reviews feel arbitrary. Employees do not know what is being measured, how it is weighted, or what “excellent” actually looks like in practice.</a:t>
+            </a:r>
+          </a:p>
+          <a:p>
+            <a:r>
+              <a:t>E · Embed Shared Accountability. Function: ensures every Key Result or KPI is explicitly owned, making accountability visible, traceable, and non-transferable. The problem it solves: without this, Key Results are owned by committees, which means they are owned by no one. When there is no name next to a number, there is no accountability, only the appearance of it.</a:t>
+            </a:r>
+          </a:p>
+          <a:p>
+            <a:r>
+              <a:t>S · Support Continuous Development. Function: shifts performance conversations from judgement to coaching, identifying targeted areas for individual growth and capability building. The problem it solves: without this, reviews are retrospective verdicts. Leaders deliver a rating and move on. The employee leaves knowing what score they received, with no guidance on what to do differently.</a:t>
+            </a:r>
+          </a:p>
+          <a:p/>
+          <a:p>
+            <a:r>
               <a:t>Professional insights:</a:t>
             </a:r>
           </a:p>
@@ -3414,6 +4246,54 @@
             </a:r>
             <a:endParaRPr lang="en-US" dirty="0"/>
           </a:p>
+          <a:p/>
+          <a:p>
+            <a:r>
+              <a:t>Source detail (S2R® manuscript):</a:t>
+            </a:r>
+          </a:p>
+          <a:p/>
+          <a:p>
+            <a:r>
+              <a:t>Why the architecture is needed: To ensure the Performance Management system functions effectively, leaders must define the accountability and measurement frameworks that will monitor performance objectively. These structures ensure that performance measurement captures what was achieved, how it was accomplished, and its overall impact on the organisation’s mission.</a:t>
+            </a:r>
+          </a:p>
+          <a:p>
+            <a:r>
+              <a:t>A common framework is to set up categories of progress: progress directly contributing to Strategy advancement, progress directly attributable to Operational excellence, and progress directly attributable to cultural behaviour.</a:t>
+            </a:r>
+          </a:p>
+          <a:p>
+            <a:r>
+              <a:t>The three categories together form the PM Scorecard Architecture. They reflect a deliberate leadership philosophy: that sustainable organisational performance requires leaders who deliver results, run strong operations, and strengthen the culture simultaneously. The Three Sights of Progress ensure that the organisation rewards those leaders, and withholds that reward from leaders who excel in one dimension at the expense of the others.</a:t>
+            </a:r>
+          </a:p>
+          <a:p>
+            <a:r>
+              <a:t>These Three Sights of Progress are often given weights, either at an organisational level or at an individual level.</a:t>
+            </a:r>
+          </a:p>
+          <a:p/>
+          <a:p>
+            <a:r>
+              <a:t>Purpose and typical measurement inputs of each category:</a:t>
+            </a:r>
+          </a:p>
+          <a:p>
+            <a:r>
+              <a:t>Strategy Category. Purpose: focuses on the organisation’s strategic priorities. Measures whether leaders are delivering the Key Results linked to enterprise OKRs that define the organisation’s future direction. Typical measurement inputs: strategic OKRs, cross-functional initiatives, transformation milestones, enterprise impact metrics.</a:t>
+            </a:r>
+          </a:p>
+          <a:p>
+            <a:r>
+              <a:t>Operational Category. Purpose: represents the execution engine of the organisation. Measures how effectively leaders manage the core responsibilities of their role, including quality, efficiency, and service delivery. Typical measurement inputs: department KPIs, service levels, productivity, operational efficiency, budget adherence.</a:t>
+            </a:r>
+          </a:p>
+          <a:p>
+            <a:r>
+              <a:t>Behavioural &amp; Values Alignment. Purpose: ensures that performance is achieved in a way that strengthens the organisation’s culture and leadership standards. Evaluates whether people consistently demonstrate the organisation’s values. Typical measurement inputs: 360° feedback, demonstrated behaviours in daily interactions.</a:t>
+            </a:r>
+          </a:p>
         </p:txBody>
       </p:sp>
       <p:sp>
@@ -3528,6 +4408,177 @@
 - ✎ Reflection — Your Rating Experience Thinking about your current team or role: which rating most accurately reflects the performance standard you are measuring toward? What does the leadership response to that rating look like in practice? — My reflection on the rating scale and how it applies to my current context...</a:t>
             </a:r>
             <a:endParaRPr lang="en-US" dirty="0"/>
+          </a:p>
+          <a:p/>
+          <a:p>
+            <a:r>
+              <a:t>Source detail (S2R® manuscript):</a:t>
+            </a:r>
+          </a:p>
+          <a:p/>
+          <a:p>
+            <a:r>
+              <a:t>Why a standardised scale: To maintain objectivity within the Performance Management system, organisations use a standardised scoring scale, typically a 1 to 5 scale. This scale defines, in precise and measurable terms, what each rating represents, ensuring a common language of performance that transcends departmental boundaries and minimises individual manager bias.</a:t>
+            </a:r>
+          </a:p>
+          <a:p>
+            <a:r>
+              <a:t>Each point on the scale is clearly defined with explicit performance descriptors and criteria. This ensures that ratings are based on demonstrated evidence of performance against agreed expectations, with subjective judgement removed. The scale is applied at an individual level across all performance components, with ratings assigned based on verifiable outcomes, behavioural demonstration, and delivery against Key Results or KPIs.</a:t>
+            </a:r>
+          </a:p>
+          <a:p>
+            <a:r>
+              <a:t>By anchoring performance in clearly defined standards, the system achieves three critical outcomes:</a:t>
+            </a:r>
+          </a:p>
+          <a:p>
+            <a:r>
+              <a:t>- Personal bias is significantly reduced: ratings can be challenged and defended against explicit criteria, which take the place of managerial opinion.</a:t>
+            </a:r>
+          </a:p>
+          <a:p>
+            <a:r>
+              <a:t>- A shared language of performance is established across teams and functions: a “3” means the same thing in Finance as it does in Operations.</a:t>
+            </a:r>
+          </a:p>
+          <a:p>
+            <a:r>
+              <a:t>- Evaluation becomes consistent, comparable, and defensible, enabling fair decisions on rewards, development, and advancement.</a:t>
+            </a:r>
+          </a:p>
+          <a:p/>
+          <a:p>
+            <a:r>
+              <a:t>Performance descriptor and detailed criteria for each rating:</a:t>
+            </a:r>
+          </a:p>
+          <a:p>
+            <a:r>
+              <a:t>1 · Poor: Delivery is consistently below the agreed standard. Fails to meet core expectations and requires immediate corrective action.</a:t>
+            </a:r>
+          </a:p>
+          <a:p>
+            <a:r>
+              <a:t>2 · Needs Improvement: Performance is inconsistent or variable. While some targets may be met, the individual requires active intervention or coaching to achieve the baseline standard.</a:t>
+            </a:r>
+          </a:p>
+          <a:p>
+            <a:r>
+              <a:t>3 · Meets Expectations: The “Solid Gold” standard. Consistently and reliably delivers on all agreed KPIs and behavioural expectations. This is the bedrock of organisational stability.</a:t>
+            </a:r>
+          </a:p>
+          <a:p>
+            <a:r>
+              <a:t>4 · Exceeds Expectations: Regularly delivers above standard. Demonstrates significant initiative, high-quality output, and the ability to solve complex problems beyond the immediate scope of the role.</a:t>
+            </a:r>
+          </a:p>
+          <a:p>
+            <a:r>
+              <a:t>5 · Outstanding: Proactive, self-directed, and transformative. These individuals exceed all targets and elevate the performance and morale of the teams around them.</a:t>
+            </a:r>
+          </a:p>
+          <a:p/>
+          <a:p>
+            <a:r>
+              <a:t>Scoring triggers decision: For the PM system to function as a management tool as well as a measurement tool, each rating level should trigger a specific leadership response. When a rating scale is not designed to trigger a decision, it undermines the very purpose for which it was designed. Leaders read the criteria and nod. Then they do not know what to do.</a:t>
+            </a:r>
+          </a:p>
+          <a:p>
+            <a:r>
+              <a:t>Required leadership response at each rating (to read with the responses above):</a:t>
+            </a:r>
+          </a:p>
+          <a:p>
+            <a:r>
+              <a:t>1 · Poor: Immediate corrective action plan. Formal performance discussion. Clear timeline for improvement with defined milestones.</a:t>
+            </a:r>
+          </a:p>
+          <a:p>
+            <a:r>
+              <a:t>2 · Needs Improvement: Active coaching intervention. Structured support plan. Increased review frequency (bi-weekly check-ins).</a:t>
+            </a:r>
+          </a:p>
+          <a:p>
+            <a:r>
+              <a:t>3 · Meets Expectations: Sustain and recognise. Identify specific development levers to move toward a 4.</a:t>
+            </a:r>
+          </a:p>
+          <a:p>
+            <a:r>
+              <a:t>4 · Exceeds Expectations: Acknowledge contribution formally. Create stretch opportunities. Discuss advancement pathway.</a:t>
+            </a:r>
+          </a:p>
+          <a:p>
+            <a:r>
+              <a:t>5 · Outstanding: Formal recognition. Strategic deployment: leverage this person’s capability to elevate others. Succession consideration.</a:t>
+            </a:r>
+          </a:p>
+          <a:p/>
+          <a:p>
+            <a:r>
+              <a:t>Facilitator note, the “Solid Gold” reframe in full: In many organisations, a rating of 3 (“Meets Expectations”) carries an unintended stigma. It is often interpreted as “average”, “ordinary”, or “just enough”. As a result, leaders may feel pressure to inflate ratings to avoid difficult conversations, while team members may feel undervalued despite delivering what is required. This interpretation is flawed and creates significant distortion in the performance management system.</a:t>
+            </a:r>
+          </a:p>
+          <a:p>
+            <a:r>
+              <a:t>The “Solid Gold” framing for a rating of 3 is a deliberate reframe. A rating of 3 represents consistent, reliable delivery against agreed expectations. It signals that an individual is meeting their commitments, maintaining standards, and contributing predictably to the organisation’s execution. This level of performance is foundational.</a:t>
+            </a:r>
+          </a:p>
+          <a:p>
+            <a:r>
+              <a:t>Organisations fail because consistent execution is missing. Strategy depends on the ability of the majority of the organisation to deliver reliably over time. Without this stability, even the strongest strategy will not translate into results, and no strategy survives contact with execution.</a:t>
+            </a:r>
+          </a:p>
+          <a:p>
+            <a:r>
+              <a:t>For this reason, a rating of 3 should be positioned as “Solid Gold”. It reflects: dependability in delivery; consistency across key responsibilities; adherence to expected standards; contribution to overall execution stability.</a:t>
+            </a:r>
+          </a:p>
+          <a:p>
+            <a:r>
+              <a:t>A small number of high performers cannot compensate for widespread inconsistency. Sustainable performance is built on a strong base of individuals who consistently meet expectations.</a:t>
+            </a:r>
+          </a:p>
+          <a:p>
+            <a:r>
+              <a:t>Leaders must therefore reinforce that: a rating of 3 is the standard of professional performance; it is the baseline required for effective execution; higher ratings (4 and 5) represent differentiation beyond this foundation and do not replace it. Reinforce this with your teams: a 3 is the foundation on which everything else is built.</a:t>
+            </a:r>
+          </a:p>
+          <a:p>
+            <a:r>
+              <a:t>When this framing is understood and applied consistently: ratings become credible and meaningful; performance conversations become honest and grounded in evidence; the organisation builds a stable execution engine capable of delivering strategy.</a:t>
+            </a:r>
+          </a:p>
+          <a:p/>
+          <a:p>
+            <a:r>
+              <a:t>The impact of a calibrated system: When a performance management system is functioning correctly, the performance review becomes a no-surprise event. Because the criteria are transparent and the weighting is predetermined, team members understand exactly where they stand at any given moment. They know what is being measured, how much it counts, and what each rating means, including what leadership will do in response.</a:t>
+            </a:r>
+          </a:p>
+          <a:p>
+            <a:r>
+              <a:t>This transparency produces three powerful shifts in the organisational dynamic:</a:t>
+            </a:r>
+          </a:p>
+          <a:p>
+            <a:r>
+              <a:t>- Strategic Transparency: Every employee sees exactly how their specific contribution fuels the enterprise’s broader strategic goals. The line of sight between individual effort and organisational outcome becomes visible and motivating.</a:t>
+            </a:r>
+          </a:p>
+          <a:p>
+            <a:r>
+              <a:t>- Shift in Dynamics: The relationship between a leader and their team evolves from one of top-down oversight to one of shared investment in a common outcome. The scorecard becomes a shared tool and stops being a judgement handed down from above.</a:t>
+            </a:r>
+          </a:p>
+          <a:p>
+            <a:r>
+              <a:t>- Pathways to Excellence: The rating scale provides a clear roadmap for growth, showing exactly what is required to move from one level to the next. Ambition becomes actionable.</a:t>
+            </a:r>
+          </a:p>
+          <a:p>
+            <a:r>
+              <a:t>By anchoring ratings in clear descriptors and decision triggers, the organisation replaces subjective, instinct-based assessment with a rigorous, high-alignment framework that drives execution.</a:t>
+            </a:r>
           </a:p>
           <a:p/>
           <a:p>

--- a/Unit decks/Unit 06 - Performance Management Setup.pptx
+++ b/Unit decks/Unit 06 - Performance Management Setup.pptx
@@ -1977,12 +1977,12 @@
           <a:p>
             <a:r>
               <a:rPr lang="en-US" dirty="0"/>
-              <a:t>3.1 — THE ALIGNMENT BRIGADE (Executive team as PM system)
-</a:t>
+              <a:t>3.1 — THE COLLECTIVE INTELLIGENCE FOR EXECUTION DISCIPLINE (Executive team as PM system)
+Every leader carries deep professional instincts about what “progress” looks like. </a:t>
             </a:r>
             <a:r>
               <a:rPr dirty="0"/>
-              <a:t>Every leader carries deep professional instincts about what “progress” looks like. </a:t>
+              <a:t/>
             </a:r>
             <a:endParaRPr lang="en-ZA" dirty="0"/>
           </a:p>
@@ -3383,7 +3383,7 @@
           <a:p>
             <a:r>
               <a:rPr lang="en-GB" dirty="0"/>
-              <a:t>Step 4 needs the group’s Enterprise OKRs. Each group confirms them in Unit 3, part 4.2, first.</a:t>
+              <a:t>Step 4 needs the group’s Enterprise OKRs. Each group confirms them in Unit 3, part 5.2, first.</a:t>
             </a:r>
           </a:p>
         </p:txBody>
@@ -12442,7 +12442,7 @@
                 <a:ea typeface="Calibri" pitchFamily="34" charset="-122"/>
                 <a:cs typeface="Calibri" pitchFamily="34" charset="-120"/>
               </a:rPr>
-              <a:t>3.1 · The Alignment Brigade</a:t>
+              <a:t>3.1 · The Collective Intelligence for Execution Discipline</a:t>
             </a:r>
             <a:endParaRPr lang="en-US" sz="2600" dirty="0"/>
           </a:p>
@@ -15953,6 +15953,2328 @@
 
 <file path=ppt/slides/slide24.xml><?xml version="1.0" encoding="utf-8"?>
 <p:sld xmlns:a="http://schemas.openxmlformats.org/drawingml/2006/main" xmlns:r="http://schemas.openxmlformats.org/officeDocument/2006/relationships" xmlns:p="http://schemas.openxmlformats.org/presentationml/2006/main">
+  <p:cSld name="Slide 26">
+    <p:bg>
+      <p:bgPr>
+        <a:solidFill>
+          <a:srgbClr val="FFFFFF"/>
+        </a:solidFill>
+        <a:effectLst/>
+      </p:bgPr>
+    </p:bg>
+    <p:spTree>
+      <p:nvGrpSpPr>
+        <p:cNvPr id="1" name=""/>
+        <p:cNvGrpSpPr/>
+        <p:nvPr/>
+      </p:nvGrpSpPr>
+      <p:grpSpPr>
+        <a:xfrm>
+          <a:off x="0" y="0"/>
+          <a:ext cx="0" cy="0"/>
+          <a:chOff x="0" y="0"/>
+          <a:chExt cx="0" cy="0"/>
+        </a:xfrm>
+      </p:grpSpPr>
+      <p:sp>
+        <p:nvSpPr>
+          <p:cNvPr id="2" name="Text 0"/>
+          <p:cNvSpPr txBox="1"/>
+          <p:nvPr/>
+        </p:nvSpPr>
+        <p:spPr>
+          <a:xfrm>
+            <a:off x="548640" y="411480"/>
+            <a:ext cx="11064240" cy="868680"/>
+          </a:xfrm>
+          <a:prstGeom prst="rect">
+            <a:avLst/>
+          </a:prstGeom>
+          <a:noFill/>
+          <a:ln/>
+        </p:spPr>
+        <p:txBody>
+          <a:bodyPr wrap="square" lIns="0" tIns="0" rIns="0" bIns="0" rtlCol="0" anchor="ctr"/>
+          <a:lstStyle/>
+          <a:p>
+            <a:pPr marL="0" indent="0">
+              <a:buNone/>
+            </a:pPr>
+            <a:r>
+              <a:rPr lang="en-US" sz="3600" b="1" dirty="0">
+                <a:solidFill>
+                  <a:srgbClr val="1A5C2C"/>
+                </a:solidFill>
+                <a:latin typeface="Cambria" pitchFamily="34" charset="0"/>
+                <a:ea typeface="Cambria" pitchFamily="34" charset="-122"/>
+                <a:cs typeface="Cambria" pitchFamily="34" charset="-120"/>
+              </a:rPr>
+              <a:t>Step 1 · Scoring Logic</a:t>
+            </a:r>
+            <a:endParaRPr lang="en-US" sz="3600" dirty="0"/>
+          </a:p>
+        </p:txBody>
+      </p:sp>
+      <p:sp>
+        <p:nvSpPr>
+          <p:cNvPr id="3" name="Shape 1"/>
+          <p:cNvSpPr/>
+          <p:nvPr/>
+        </p:nvSpPr>
+        <p:spPr>
+          <a:xfrm>
+            <a:off x="548640" y="1631061"/>
+            <a:ext cx="570738" cy="570738"/>
+          </a:xfrm>
+          <a:prstGeom prst="ellipse">
+            <a:avLst/>
+          </a:prstGeom>
+          <a:solidFill>
+            <a:srgbClr val="1A5C2C"/>
+          </a:solidFill>
+          <a:ln w="12700">
+            <a:solidFill>
+              <a:srgbClr val="1A5C2C"/>
+            </a:solidFill>
+            <a:prstDash val="solid"/>
+          </a:ln>
+        </p:spPr>
+        <p:txBody>
+          <a:bodyPr/>
+          <a:lstStyle/>
+          <a:p>
+            <a:endParaRPr lang="en-ZA"/>
+          </a:p>
+        </p:txBody>
+      </p:sp>
+      <p:pic>
+        <p:nvPicPr>
+          <p:cNvPr id="4" name="Image 0" descr="preencoded.png"/>
+          <p:cNvPicPr>
+            <a:picLocks noChangeAspect="1"/>
+          </p:cNvPicPr>
+          <p:nvPr/>
+        </p:nvPicPr>
+        <p:blipFill>
+          <a:blip r:embed="rId3"/>
+          <a:stretch>
+            <a:fillRect/>
+          </a:stretch>
+        </p:blipFill>
+        <p:spPr>
+          <a:xfrm>
+            <a:off x="691325" y="1773746"/>
+            <a:ext cx="285369" cy="285369"/>
+          </a:xfrm>
+          <a:prstGeom prst="rect">
+            <a:avLst/>
+          </a:prstGeom>
+        </p:spPr>
+      </p:pic>
+      <p:sp>
+        <p:nvSpPr>
+          <p:cNvPr id="5" name="Text 2"/>
+          <p:cNvSpPr txBox="1"/>
+          <p:nvPr/>
+        </p:nvSpPr>
+        <p:spPr>
+          <a:xfrm>
+            <a:off x="1439418" y="1508760"/>
+            <a:ext cx="10200894" cy="815340"/>
+          </a:xfrm>
+          <a:prstGeom prst="rect">
+            <a:avLst/>
+          </a:prstGeom>
+          <a:noFill/>
+          <a:ln/>
+        </p:spPr>
+        <p:txBody>
+          <a:bodyPr wrap="square" lIns="0" tIns="0" rIns="0" bIns="0" rtlCol="0" anchor="ctr"/>
+          <a:lstStyle/>
+          <a:p>
+            <a:pPr marL="0" indent="0">
+              <a:buNone/>
+            </a:pPr>
+            <a:r>
+              <a:rPr lang="en-US" sz="2400" b="1" dirty="0">
+                <a:solidFill>
+                  <a:srgbClr val="1A5C2C"/>
+                </a:solidFill>
+                <a:latin typeface="Cambria" pitchFamily="34" charset="0"/>
+                <a:ea typeface="Cambria" pitchFamily="34" charset="-122"/>
+                <a:cs typeface="Cambria" pitchFamily="34" charset="-120"/>
+              </a:rPr>
+              <a:t>1  </a:t>
+            </a:r>
+            <a:r>
+              <a:rPr lang="en-US" sz="2400" dirty="0">
+                <a:solidFill>
+                  <a:srgbClr val="1F2A22"/>
+                </a:solidFill>
+                <a:latin typeface="Calibri" pitchFamily="34" charset="0"/>
+                <a:ea typeface="Calibri" pitchFamily="34" charset="-122"/>
+                <a:cs typeface="Calibri" pitchFamily="34" charset="-120"/>
+              </a:rPr>
+              <a:t>Performance level that earns this rating</a:t>
+            </a:r>
+            <a:endParaRPr lang="en-US" sz="2400" dirty="0"/>
+          </a:p>
+        </p:txBody>
+      </p:sp>
+      <p:sp>
+        <p:nvSpPr>
+          <p:cNvPr id="6" name="Shape 3"/>
+          <p:cNvSpPr/>
+          <p:nvPr/>
+        </p:nvSpPr>
+        <p:spPr>
+          <a:xfrm>
+            <a:off x="548640" y="2446401"/>
+            <a:ext cx="570738" cy="570738"/>
+          </a:xfrm>
+          <a:prstGeom prst="ellipse">
+            <a:avLst/>
+          </a:prstGeom>
+          <a:solidFill>
+            <a:srgbClr val="1A5C2C"/>
+          </a:solidFill>
+          <a:ln w="12700">
+            <a:solidFill>
+              <a:srgbClr val="1A5C2C"/>
+            </a:solidFill>
+            <a:prstDash val="solid"/>
+          </a:ln>
+        </p:spPr>
+        <p:txBody>
+          <a:bodyPr/>
+          <a:lstStyle/>
+          <a:p>
+            <a:endParaRPr lang="en-ZA"/>
+          </a:p>
+        </p:txBody>
+      </p:sp>
+      <p:pic>
+        <p:nvPicPr>
+          <p:cNvPr id="7" name="Image 1" descr="preencoded.png"/>
+          <p:cNvPicPr>
+            <a:picLocks noChangeAspect="1"/>
+          </p:cNvPicPr>
+          <p:nvPr/>
+        </p:nvPicPr>
+        <p:blipFill>
+          <a:blip r:embed="rId4"/>
+          <a:stretch>
+            <a:fillRect/>
+          </a:stretch>
+        </p:blipFill>
+        <p:spPr>
+          <a:xfrm>
+            <a:off x="691325" y="2589085"/>
+            <a:ext cx="285369" cy="285369"/>
+          </a:xfrm>
+          <a:prstGeom prst="rect">
+            <a:avLst/>
+          </a:prstGeom>
+        </p:spPr>
+      </p:pic>
+      <p:sp>
+        <p:nvSpPr>
+          <p:cNvPr id="8" name="Text 4"/>
+          <p:cNvSpPr txBox="1"/>
+          <p:nvPr/>
+        </p:nvSpPr>
+        <p:spPr>
+          <a:xfrm>
+            <a:off x="1439418" y="2324100"/>
+            <a:ext cx="10200894" cy="815340"/>
+          </a:xfrm>
+          <a:prstGeom prst="rect">
+            <a:avLst/>
+          </a:prstGeom>
+          <a:noFill/>
+          <a:ln/>
+        </p:spPr>
+        <p:txBody>
+          <a:bodyPr wrap="square" lIns="0" tIns="0" rIns="0" bIns="0" rtlCol="0" anchor="ctr"/>
+          <a:lstStyle/>
+          <a:p>
+            <a:pPr marL="0" indent="0">
+              <a:buNone/>
+            </a:pPr>
+            <a:r>
+              <a:rPr lang="en-US" sz="2400" b="1" dirty="0">
+                <a:solidFill>
+                  <a:srgbClr val="1A5C2C"/>
+                </a:solidFill>
+                <a:latin typeface="Cambria" pitchFamily="34" charset="0"/>
+                <a:ea typeface="Cambria" pitchFamily="34" charset="-122"/>
+                <a:cs typeface="Cambria" pitchFamily="34" charset="-120"/>
+              </a:rPr>
+              <a:t>2  </a:t>
+            </a:r>
+            <a:r>
+              <a:rPr lang="en-US" sz="2400" dirty="0">
+                <a:solidFill>
+                  <a:srgbClr val="1F2A22"/>
+                </a:solidFill>
+                <a:latin typeface="Calibri" pitchFamily="34" charset="0"/>
+                <a:ea typeface="Calibri" pitchFamily="34" charset="-122"/>
+                <a:cs typeface="Calibri" pitchFamily="34" charset="-120"/>
+              </a:rPr>
+              <a:t>Evidence required to confirm it</a:t>
+            </a:r>
+            <a:endParaRPr lang="en-US" sz="2400" dirty="0"/>
+          </a:p>
+        </p:txBody>
+      </p:sp>
+      <p:sp>
+        <p:nvSpPr>
+          <p:cNvPr id="9" name="Shape 5"/>
+          <p:cNvSpPr/>
+          <p:nvPr/>
+        </p:nvSpPr>
+        <p:spPr>
+          <a:xfrm>
+            <a:off x="548640" y="3261741"/>
+            <a:ext cx="570738" cy="570738"/>
+          </a:xfrm>
+          <a:prstGeom prst="ellipse">
+            <a:avLst/>
+          </a:prstGeom>
+          <a:solidFill>
+            <a:srgbClr val="1A5C2C"/>
+          </a:solidFill>
+          <a:ln w="12700">
+            <a:solidFill>
+              <a:srgbClr val="1A5C2C"/>
+            </a:solidFill>
+            <a:prstDash val="solid"/>
+          </a:ln>
+        </p:spPr>
+        <p:txBody>
+          <a:bodyPr/>
+          <a:lstStyle/>
+          <a:p>
+            <a:endParaRPr lang="en-ZA"/>
+          </a:p>
+        </p:txBody>
+      </p:sp>
+      <p:pic>
+        <p:nvPicPr>
+          <p:cNvPr id="10" name="Image 2" descr="preencoded.png"/>
+          <p:cNvPicPr>
+            <a:picLocks noChangeAspect="1"/>
+          </p:cNvPicPr>
+          <p:nvPr/>
+        </p:nvPicPr>
+        <p:blipFill>
+          <a:blip r:embed="rId5"/>
+          <a:stretch>
+            <a:fillRect/>
+          </a:stretch>
+        </p:blipFill>
+        <p:spPr>
+          <a:xfrm>
+            <a:off x="691325" y="3404425"/>
+            <a:ext cx="285369" cy="285369"/>
+          </a:xfrm>
+          <a:prstGeom prst="rect">
+            <a:avLst/>
+          </a:prstGeom>
+        </p:spPr>
+      </p:pic>
+      <p:sp>
+        <p:nvSpPr>
+          <p:cNvPr id="11" name="Text 6"/>
+          <p:cNvSpPr txBox="1"/>
+          <p:nvPr/>
+        </p:nvSpPr>
+        <p:spPr>
+          <a:xfrm>
+            <a:off x="1439418" y="3139440"/>
+            <a:ext cx="10200894" cy="815340"/>
+          </a:xfrm>
+          <a:prstGeom prst="rect">
+            <a:avLst/>
+          </a:prstGeom>
+          <a:noFill/>
+          <a:ln/>
+        </p:spPr>
+        <p:txBody>
+          <a:bodyPr wrap="square" lIns="0" tIns="0" rIns="0" bIns="0" rtlCol="0" anchor="ctr"/>
+          <a:lstStyle/>
+          <a:p>
+            <a:pPr marL="0" indent="0">
+              <a:buNone/>
+            </a:pPr>
+            <a:r>
+              <a:rPr lang="en-US" sz="2400" b="1" dirty="0">
+                <a:solidFill>
+                  <a:srgbClr val="1A5C2C"/>
+                </a:solidFill>
+                <a:latin typeface="Cambria" pitchFamily="34" charset="0"/>
+                <a:ea typeface="Cambria" pitchFamily="34" charset="-122"/>
+                <a:cs typeface="Cambria" pitchFamily="34" charset="-120"/>
+              </a:rPr>
+              <a:t>3  </a:t>
+            </a:r>
+            <a:r>
+              <a:rPr lang="en-US" sz="2400" dirty="0">
+                <a:solidFill>
+                  <a:srgbClr val="1F2A22"/>
+                </a:solidFill>
+                <a:latin typeface="Calibri" pitchFamily="34" charset="0"/>
+                <a:ea typeface="Calibri" pitchFamily="34" charset="-122"/>
+                <a:cs typeface="Calibri" pitchFamily="34" charset="-120"/>
+              </a:rPr>
+              <a:t>Contextual factors that might legitimately affect a rating</a:t>
+            </a:r>
+            <a:endParaRPr lang="en-US" sz="2400" dirty="0"/>
+          </a:p>
+        </p:txBody>
+      </p:sp>
+      <p:sp>
+        <p:nvSpPr>
+          <p:cNvPr id="12" name="Shape 7"/>
+          <p:cNvSpPr/>
+          <p:nvPr/>
+        </p:nvSpPr>
+        <p:spPr>
+          <a:xfrm>
+            <a:off x="548640" y="4077081"/>
+            <a:ext cx="570738" cy="570738"/>
+          </a:xfrm>
+          <a:prstGeom prst="ellipse">
+            <a:avLst/>
+          </a:prstGeom>
+          <a:solidFill>
+            <a:srgbClr val="1A5C2C"/>
+          </a:solidFill>
+          <a:ln w="12700">
+            <a:solidFill>
+              <a:srgbClr val="1A5C2C"/>
+            </a:solidFill>
+            <a:prstDash val="solid"/>
+          </a:ln>
+        </p:spPr>
+        <p:txBody>
+          <a:bodyPr/>
+          <a:lstStyle/>
+          <a:p>
+            <a:endParaRPr lang="en-ZA"/>
+          </a:p>
+        </p:txBody>
+      </p:sp>
+      <p:pic>
+        <p:nvPicPr>
+          <p:cNvPr id="13" name="Image 3" descr="preencoded.png"/>
+          <p:cNvPicPr>
+            <a:picLocks noChangeAspect="1"/>
+          </p:cNvPicPr>
+          <p:nvPr/>
+        </p:nvPicPr>
+        <p:blipFill>
+          <a:blip r:embed="rId6"/>
+          <a:stretch>
+            <a:fillRect/>
+          </a:stretch>
+        </p:blipFill>
+        <p:spPr>
+          <a:xfrm>
+            <a:off x="691325" y="4219766"/>
+            <a:ext cx="285369" cy="285369"/>
+          </a:xfrm>
+          <a:prstGeom prst="rect">
+            <a:avLst/>
+          </a:prstGeom>
+        </p:spPr>
+      </p:pic>
+      <p:sp>
+        <p:nvSpPr>
+          <p:cNvPr id="14" name="Text 8"/>
+          <p:cNvSpPr txBox="1"/>
+          <p:nvPr/>
+        </p:nvSpPr>
+        <p:spPr>
+          <a:xfrm>
+            <a:off x="1439418" y="3954780"/>
+            <a:ext cx="10200894" cy="815340"/>
+          </a:xfrm>
+          <a:prstGeom prst="rect">
+            <a:avLst/>
+          </a:prstGeom>
+          <a:noFill/>
+          <a:ln/>
+        </p:spPr>
+        <p:txBody>
+          <a:bodyPr wrap="square" lIns="0" tIns="0" rIns="0" bIns="0" rtlCol="0" anchor="ctr"/>
+          <a:lstStyle/>
+          <a:p>
+            <a:pPr marL="0" indent="0">
+              <a:buNone/>
+            </a:pPr>
+            <a:r>
+              <a:rPr lang="en-US" sz="2400" b="1" dirty="0">
+                <a:solidFill>
+                  <a:srgbClr val="1A5C2C"/>
+                </a:solidFill>
+                <a:latin typeface="Cambria" pitchFamily="34" charset="0"/>
+                <a:ea typeface="Cambria" pitchFamily="34" charset="-122"/>
+                <a:cs typeface="Cambria" pitchFamily="34" charset="-120"/>
+              </a:rPr>
+              <a:t>4  </a:t>
+            </a:r>
+            <a:r>
+              <a:rPr lang="en-US" sz="2400" dirty="0">
+                <a:solidFill>
+                  <a:srgbClr val="1F2A22"/>
+                </a:solidFill>
+                <a:latin typeface="Calibri" pitchFamily="34" charset="0"/>
+                <a:ea typeface="Calibri" pitchFamily="34" charset="-122"/>
+                <a:cs typeface="Calibri" pitchFamily="34" charset="-120"/>
+              </a:rPr>
+              <a:t>Lines of sight of progress</a:t>
+            </a:r>
+            <a:endParaRPr lang="en-US" sz="2400" dirty="0"/>
+          </a:p>
+        </p:txBody>
+      </p:sp>
+      <p:sp>
+        <p:nvSpPr>
+          <p:cNvPr id="15" name="Shape 9"/>
+          <p:cNvSpPr/>
+          <p:nvPr/>
+        </p:nvSpPr>
+        <p:spPr>
+          <a:xfrm>
+            <a:off x="548640" y="4892421"/>
+            <a:ext cx="570738" cy="570738"/>
+          </a:xfrm>
+          <a:prstGeom prst="ellipse">
+            <a:avLst/>
+          </a:prstGeom>
+          <a:solidFill>
+            <a:srgbClr val="1A5C2C"/>
+          </a:solidFill>
+          <a:ln w="12700">
+            <a:solidFill>
+              <a:srgbClr val="1A5C2C"/>
+            </a:solidFill>
+            <a:prstDash val="solid"/>
+          </a:ln>
+        </p:spPr>
+        <p:txBody>
+          <a:bodyPr/>
+          <a:lstStyle/>
+          <a:p>
+            <a:endParaRPr lang="en-ZA"/>
+          </a:p>
+        </p:txBody>
+      </p:sp>
+      <p:pic>
+        <p:nvPicPr>
+          <p:cNvPr id="16" name="Image 4" descr="preencoded.png"/>
+          <p:cNvPicPr>
+            <a:picLocks noChangeAspect="1"/>
+          </p:cNvPicPr>
+          <p:nvPr/>
+        </p:nvPicPr>
+        <p:blipFill>
+          <a:blip r:embed="rId7"/>
+          <a:stretch>
+            <a:fillRect/>
+          </a:stretch>
+        </p:blipFill>
+        <p:spPr>
+          <a:xfrm>
+            <a:off x="691325" y="5035106"/>
+            <a:ext cx="285369" cy="285369"/>
+          </a:xfrm>
+          <a:prstGeom prst="rect">
+            <a:avLst/>
+          </a:prstGeom>
+        </p:spPr>
+      </p:pic>
+      <p:sp>
+        <p:nvSpPr>
+          <p:cNvPr id="17" name="Text 10"/>
+          <p:cNvSpPr txBox="1"/>
+          <p:nvPr/>
+        </p:nvSpPr>
+        <p:spPr>
+          <a:xfrm>
+            <a:off x="1439418" y="4770120"/>
+            <a:ext cx="10200894" cy="815340"/>
+          </a:xfrm>
+          <a:prstGeom prst="rect">
+            <a:avLst/>
+          </a:prstGeom>
+          <a:noFill/>
+          <a:ln/>
+        </p:spPr>
+        <p:txBody>
+          <a:bodyPr wrap="square" lIns="0" tIns="0" rIns="0" bIns="0" rtlCol="0" anchor="ctr"/>
+          <a:lstStyle/>
+          <a:p>
+            <a:pPr marL="0" indent="0">
+              <a:buNone/>
+            </a:pPr>
+            <a:r>
+              <a:rPr lang="en-US" sz="2400" b="1" dirty="0">
+                <a:solidFill>
+                  <a:srgbClr val="1A5C2C"/>
+                </a:solidFill>
+                <a:latin typeface="Cambria" pitchFamily="34" charset="0"/>
+                <a:ea typeface="Cambria" pitchFamily="34" charset="-122"/>
+                <a:cs typeface="Cambria" pitchFamily="34" charset="-120"/>
+              </a:rPr>
+              <a:t>5  </a:t>
+            </a:r>
+            <a:r>
+              <a:rPr lang="en-US" sz="2400" dirty="0">
+                <a:solidFill>
+                  <a:srgbClr val="1F2A22"/>
+                </a:solidFill>
+                <a:latin typeface="Calibri" pitchFamily="34" charset="0"/>
+                <a:ea typeface="Calibri" pitchFamily="34" charset="-122"/>
+                <a:cs typeface="Calibri" pitchFamily="34" charset="-120"/>
+              </a:rPr>
+              <a:t>Review cadence and why</a:t>
+            </a:r>
+            <a:endParaRPr lang="en-US" sz="2400" dirty="0"/>
+          </a:p>
+        </p:txBody>
+      </p:sp>
+      <p:sp>
+        <p:nvSpPr>
+          <p:cNvPr id="18" name="Shape 11"/>
+          <p:cNvSpPr/>
+          <p:nvPr/>
+        </p:nvSpPr>
+        <p:spPr>
+          <a:xfrm>
+            <a:off x="548640" y="5707761"/>
+            <a:ext cx="570738" cy="570738"/>
+          </a:xfrm>
+          <a:prstGeom prst="ellipse">
+            <a:avLst/>
+          </a:prstGeom>
+          <a:solidFill>
+            <a:srgbClr val="1A5C2C"/>
+          </a:solidFill>
+          <a:ln w="12700">
+            <a:solidFill>
+              <a:srgbClr val="1A5C2C"/>
+            </a:solidFill>
+            <a:prstDash val="solid"/>
+          </a:ln>
+        </p:spPr>
+        <p:txBody>
+          <a:bodyPr/>
+          <a:lstStyle/>
+          <a:p>
+            <a:endParaRPr lang="en-ZA"/>
+          </a:p>
+        </p:txBody>
+      </p:sp>
+      <p:pic>
+        <p:nvPicPr>
+          <p:cNvPr id="19" name="Image 5" descr="preencoded.png"/>
+          <p:cNvPicPr>
+            <a:picLocks noChangeAspect="1"/>
+          </p:cNvPicPr>
+          <p:nvPr/>
+        </p:nvPicPr>
+        <p:blipFill>
+          <a:blip r:embed="rId8"/>
+          <a:stretch>
+            <a:fillRect/>
+          </a:stretch>
+        </p:blipFill>
+        <p:spPr>
+          <a:xfrm>
+            <a:off x="691325" y="5850445"/>
+            <a:ext cx="285369" cy="285369"/>
+          </a:xfrm>
+          <a:prstGeom prst="rect">
+            <a:avLst/>
+          </a:prstGeom>
+        </p:spPr>
+      </p:pic>
+      <p:sp>
+        <p:nvSpPr>
+          <p:cNvPr id="20" name="Text 12"/>
+          <p:cNvSpPr txBox="1"/>
+          <p:nvPr/>
+        </p:nvSpPr>
+        <p:spPr>
+          <a:xfrm>
+            <a:off x="1439418" y="5585460"/>
+            <a:ext cx="10200894" cy="815340"/>
+          </a:xfrm>
+          <a:prstGeom prst="rect">
+            <a:avLst/>
+          </a:prstGeom>
+          <a:noFill/>
+          <a:ln/>
+        </p:spPr>
+        <p:txBody>
+          <a:bodyPr wrap="square" lIns="0" tIns="0" rIns="0" bIns="0" rtlCol="0" anchor="ctr"/>
+          <a:lstStyle/>
+          <a:p>
+            <a:pPr marL="0" indent="0">
+              <a:buNone/>
+            </a:pPr>
+            <a:r>
+              <a:rPr lang="en-US" sz="2400" b="1" dirty="0">
+                <a:solidFill>
+                  <a:srgbClr val="1A5C2C"/>
+                </a:solidFill>
+                <a:latin typeface="Cambria" pitchFamily="34" charset="0"/>
+                <a:ea typeface="Cambria" pitchFamily="34" charset="-122"/>
+                <a:cs typeface="Cambria" pitchFamily="34" charset="-120"/>
+              </a:rPr>
+              <a:t>6  </a:t>
+            </a:r>
+            <a:r>
+              <a:rPr lang="en-US" sz="2400" dirty="0">
+                <a:solidFill>
+                  <a:srgbClr val="1F2A22"/>
+                </a:solidFill>
+                <a:latin typeface="Calibri" pitchFamily="34" charset="0"/>
+                <a:ea typeface="Calibri" pitchFamily="34" charset="-122"/>
+                <a:cs typeface="Calibri" pitchFamily="34" charset="-120"/>
+              </a:rPr>
+              <a:t>Leadership response in the monthly review</a:t>
+            </a:r>
+            <a:endParaRPr lang="en-US" sz="2400" dirty="0"/>
+          </a:p>
+        </p:txBody>
+      </p:sp>
+    </p:spTree>
+  </p:cSld>
+  <p:clrMapOvr>
+    <a:masterClrMapping/>
+  </p:clrMapOvr>
+</p:sld>
+</file>
+
+<file path=ppt/slides/slide25.xml><?xml version="1.0" encoding="utf-8"?>
+<p:sld xmlns:a="http://schemas.openxmlformats.org/drawingml/2006/main" xmlns:p="http://schemas.openxmlformats.org/presentationml/2006/main" xmlns:r="http://schemas.openxmlformats.org/officeDocument/2006/relationships">
+  <p:cSld>
+    <p:bg>
+      <p:bgPr>
+        <a:solidFill>
+          <a:srgbClr val="FFFFFF"/>
+        </a:solidFill>
+        <a:effectLst/>
+      </p:bgPr>
+    </p:bg>
+    <p:spTree>
+      <p:nvGrpSpPr>
+        <p:cNvPr id="1" name=""/>
+        <p:cNvGrpSpPr/>
+        <p:nvPr/>
+      </p:nvGrpSpPr>
+      <p:grpSpPr/>
+      <p:sp>
+        <p:nvSpPr>
+          <p:cNvPr id="2" name="Text 0"/>
+          <p:cNvSpPr txBox="1"/>
+          <p:nvPr/>
+        </p:nvSpPr>
+        <p:spPr>
+          <a:xfrm>
+            <a:off x="548640" y="411480"/>
+            <a:ext cx="11064240" cy="868680"/>
+          </a:xfrm>
+          <a:prstGeom prst="rect">
+            <a:avLst/>
+          </a:prstGeom>
+          <a:noFill/>
+          <a:ln/>
+        </p:spPr>
+        <p:txBody>
+          <a:bodyPr wrap="square" lIns="0" tIns="0" rIns="0" bIns="0" rtlCol="0" anchor="ctr"/>
+          <a:lstStyle/>
+          <a:p>
+            <a:pPr marL="0" indent="0">
+              <a:buNone/>
+            </a:pPr>
+            <a:r>
+              <a:rPr lang="en-US" sz="3600" b="1" dirty="0">
+                <a:solidFill>
+                  <a:srgbClr val="1A5C2C"/>
+                </a:solidFill>
+                <a:latin typeface="Cambria" pitchFamily="34" charset="0"/>
+                <a:ea typeface="Cambria" pitchFamily="34" charset="-122"/>
+                <a:cs typeface="Cambria" pitchFamily="34" charset="-120"/>
+              </a:rPr>
+              <a:t>Step 2 · FACES</a:t>
+            </a:r>
+            <a:endParaRPr lang="en-US" sz="3600" dirty="0"/>
+          </a:p>
+        </p:txBody>
+      </p:sp>
+      <p:sp>
+        <p:nvSpPr>
+          <p:cNvPr id="3" name="Shape 1"/>
+          <p:cNvSpPr/>
+          <p:nvPr/>
+        </p:nvSpPr>
+        <p:spPr>
+          <a:xfrm>
+            <a:off x="548640" y="1677924"/>
+            <a:ext cx="640080" cy="640080"/>
+          </a:xfrm>
+          <a:prstGeom prst="ellipse">
+            <a:avLst/>
+          </a:prstGeom>
+          <a:solidFill>
+            <a:srgbClr val="1A5C2C"/>
+          </a:solidFill>
+          <a:ln w="12700">
+            <a:solidFill>
+              <a:srgbClr val="1A5C2C"/>
+            </a:solidFill>
+            <a:prstDash val="solid"/>
+          </a:ln>
+        </p:spPr>
+        <p:txBody>
+          <a:bodyPr/>
+          <a:lstStyle/>
+          <a:p>
+            <a:endParaRPr lang="en-ZA"/>
+          </a:p>
+        </p:txBody>
+      </p:sp>
+      <p:pic>
+        <p:nvPicPr>
+          <p:cNvPr id="4" name="Image 0" descr="preencoded.png"/>
+          <p:cNvPicPr>
+            <a:picLocks noChangeAspect="1"/>
+          </p:cNvPicPr>
+          <p:nvPr/>
+        </p:nvPicPr>
+        <p:blipFill>
+          <a:blip r:embed="rId2"/>
+          <a:stretch>
+            <a:fillRect/>
+          </a:stretch>
+        </p:blipFill>
+        <p:spPr>
+          <a:xfrm>
+            <a:off x="708660" y="1837944"/>
+            <a:ext cx="320040" cy="320040"/>
+          </a:xfrm>
+          <a:prstGeom prst="rect">
+            <a:avLst/>
+          </a:prstGeom>
+        </p:spPr>
+      </p:pic>
+      <p:sp>
+        <p:nvSpPr>
+          <p:cNvPr id="5" name="Text 2"/>
+          <p:cNvSpPr txBox="1"/>
+          <p:nvPr/>
+        </p:nvSpPr>
+        <p:spPr>
+          <a:xfrm>
+            <a:off x="1508760" y="1508760"/>
+            <a:ext cx="10131552" cy="978408"/>
+          </a:xfrm>
+          <a:prstGeom prst="rect">
+            <a:avLst/>
+          </a:prstGeom>
+          <a:noFill/>
+          <a:ln/>
+        </p:spPr>
+        <p:txBody>
+          <a:bodyPr wrap="square" lIns="0" tIns="0" rIns="0" bIns="0" rtlCol="0" anchor="ctr"/>
+          <a:lstStyle/>
+          <a:p>
+            <a:pPr marL="0" indent="0">
+              <a:buNone/>
+            </a:pPr>
+            <a:r>
+              <a:rPr lang="en-US" sz="2600" b="1" dirty="0">
+                <a:solidFill>
+                  <a:srgbClr val="1A5C2C"/>
+                </a:solidFill>
+                <a:latin typeface="Cambria" pitchFamily="34" charset="0"/>
+                <a:ea typeface="Cambria" pitchFamily="34" charset="-122"/>
+                <a:cs typeface="Cambria" pitchFamily="34" charset="-120"/>
+              </a:rPr>
+              <a:t>F  </a:t>
+            </a:r>
+            <a:r>
+              <a:rPr lang="en-US" sz="2600" dirty="0">
+                <a:solidFill>
+                  <a:srgbClr val="1F2A22"/>
+                </a:solidFill>
+                <a:latin typeface="Calibri" pitchFamily="34" charset="0"/>
+                <a:ea typeface="Calibri" pitchFamily="34" charset="-122"/>
+                <a:cs typeface="Calibri" pitchFamily="34" charset="-120"/>
+              </a:rPr>
+              <a:t>Foster a Results Culture</a:t>
+            </a:r>
+            <a:endParaRPr lang="en-US" sz="2600" dirty="0"/>
+          </a:p>
+        </p:txBody>
+      </p:sp>
+      <p:sp>
+        <p:nvSpPr>
+          <p:cNvPr id="6" name="Shape 3"/>
+          <p:cNvSpPr/>
+          <p:nvPr/>
+        </p:nvSpPr>
+        <p:spPr>
+          <a:xfrm>
+            <a:off x="548640" y="2656332"/>
+            <a:ext cx="640080" cy="640080"/>
+          </a:xfrm>
+          <a:prstGeom prst="ellipse">
+            <a:avLst/>
+          </a:prstGeom>
+          <a:solidFill>
+            <a:srgbClr val="1A5C2C"/>
+          </a:solidFill>
+          <a:ln w="12700">
+            <a:solidFill>
+              <a:srgbClr val="1A5C2C"/>
+            </a:solidFill>
+            <a:prstDash val="solid"/>
+          </a:ln>
+        </p:spPr>
+        <p:txBody>
+          <a:bodyPr/>
+          <a:lstStyle/>
+          <a:p>
+            <a:endParaRPr lang="en-ZA"/>
+          </a:p>
+        </p:txBody>
+      </p:sp>
+      <p:pic>
+        <p:nvPicPr>
+          <p:cNvPr id="7" name="Image 1" descr="preencoded.png"/>
+          <p:cNvPicPr>
+            <a:picLocks noChangeAspect="1"/>
+          </p:cNvPicPr>
+          <p:nvPr/>
+        </p:nvPicPr>
+        <p:blipFill>
+          <a:blip r:embed="rId6"/>
+          <a:stretch>
+            <a:fillRect/>
+          </a:stretch>
+        </p:blipFill>
+        <p:spPr>
+          <a:xfrm>
+            <a:off x="708660" y="2816352"/>
+            <a:ext cx="320040" cy="320040"/>
+          </a:xfrm>
+          <a:prstGeom prst="rect">
+            <a:avLst/>
+          </a:prstGeom>
+        </p:spPr>
+      </p:pic>
+      <p:sp>
+        <p:nvSpPr>
+          <p:cNvPr id="8" name="Text 4"/>
+          <p:cNvSpPr txBox="1"/>
+          <p:nvPr/>
+        </p:nvSpPr>
+        <p:spPr>
+          <a:xfrm>
+            <a:off x="1508760" y="2487168"/>
+            <a:ext cx="10131552" cy="978408"/>
+          </a:xfrm>
+          <a:prstGeom prst="rect">
+            <a:avLst/>
+          </a:prstGeom>
+          <a:noFill/>
+          <a:ln/>
+        </p:spPr>
+        <p:txBody>
+          <a:bodyPr wrap="square" lIns="0" tIns="0" rIns="0" bIns="0" rtlCol="0" anchor="ctr"/>
+          <a:lstStyle/>
+          <a:p>
+            <a:pPr marL="0" indent="0">
+              <a:buNone/>
+            </a:pPr>
+            <a:r>
+              <a:rPr lang="en-US" sz="2600" b="1" dirty="0">
+                <a:solidFill>
+                  <a:srgbClr val="1A5C2C"/>
+                </a:solidFill>
+                <a:latin typeface="Cambria" pitchFamily="34" charset="0"/>
+                <a:ea typeface="Cambria" pitchFamily="34" charset="-122"/>
+                <a:cs typeface="Cambria" pitchFamily="34" charset="-120"/>
+              </a:rPr>
+              <a:t>A  </a:t>
+            </a:r>
+            <a:r>
+              <a:rPr lang="en-US" sz="2600" dirty="0">
+                <a:solidFill>
+                  <a:srgbClr val="1F2A22"/>
+                </a:solidFill>
+                <a:latin typeface="Calibri" pitchFamily="34" charset="0"/>
+                <a:ea typeface="Calibri" pitchFamily="34" charset="-122"/>
+                <a:cs typeface="Calibri" pitchFamily="34" charset="-120"/>
+              </a:rPr>
+              <a:t>Align Individual Performance</a:t>
+            </a:r>
+            <a:endParaRPr lang="en-US" sz="2600" dirty="0"/>
+          </a:p>
+        </p:txBody>
+      </p:sp>
+      <p:sp>
+        <p:nvSpPr>
+          <p:cNvPr id="9" name="Shape 5"/>
+          <p:cNvSpPr/>
+          <p:nvPr/>
+        </p:nvSpPr>
+        <p:spPr>
+          <a:xfrm>
+            <a:off x="548640" y="3634740"/>
+            <a:ext cx="640080" cy="640080"/>
+          </a:xfrm>
+          <a:prstGeom prst="ellipse">
+            <a:avLst/>
+          </a:prstGeom>
+          <a:solidFill>
+            <a:srgbClr val="1A5C2C"/>
+          </a:solidFill>
+          <a:ln w="12700">
+            <a:solidFill>
+              <a:srgbClr val="1A5C2C"/>
+            </a:solidFill>
+            <a:prstDash val="solid"/>
+          </a:ln>
+        </p:spPr>
+        <p:txBody>
+          <a:bodyPr/>
+          <a:lstStyle/>
+          <a:p>
+            <a:endParaRPr lang="en-ZA"/>
+          </a:p>
+        </p:txBody>
+      </p:sp>
+      <p:pic>
+        <p:nvPicPr>
+          <p:cNvPr id="10" name="Image 2" descr="preencoded.png"/>
+          <p:cNvPicPr>
+            <a:picLocks noChangeAspect="1"/>
+          </p:cNvPicPr>
+          <p:nvPr/>
+        </p:nvPicPr>
+        <p:blipFill>
+          <a:blip r:embed="rId5"/>
+          <a:stretch>
+            <a:fillRect/>
+          </a:stretch>
+        </p:blipFill>
+        <p:spPr>
+          <a:xfrm>
+            <a:off x="708660" y="3794760"/>
+            <a:ext cx="320040" cy="320040"/>
+          </a:xfrm>
+          <a:prstGeom prst="rect">
+            <a:avLst/>
+          </a:prstGeom>
+        </p:spPr>
+      </p:pic>
+      <p:sp>
+        <p:nvSpPr>
+          <p:cNvPr id="11" name="Text 6"/>
+          <p:cNvSpPr txBox="1"/>
+          <p:nvPr/>
+        </p:nvSpPr>
+        <p:spPr>
+          <a:xfrm>
+            <a:off x="1508760" y="3465576"/>
+            <a:ext cx="10131552" cy="978408"/>
+          </a:xfrm>
+          <a:prstGeom prst="rect">
+            <a:avLst/>
+          </a:prstGeom>
+          <a:noFill/>
+          <a:ln/>
+        </p:spPr>
+        <p:txBody>
+          <a:bodyPr wrap="square" lIns="0" tIns="0" rIns="0" bIns="0" rtlCol="0" anchor="ctr"/>
+          <a:lstStyle/>
+          <a:p>
+            <a:pPr marL="0" indent="0">
+              <a:buNone/>
+            </a:pPr>
+            <a:r>
+              <a:rPr lang="en-US" sz="2600" b="1" dirty="0">
+                <a:solidFill>
+                  <a:srgbClr val="1A5C2C"/>
+                </a:solidFill>
+                <a:latin typeface="Cambria" pitchFamily="34" charset="0"/>
+                <a:ea typeface="Cambria" pitchFamily="34" charset="-122"/>
+                <a:cs typeface="Cambria" pitchFamily="34" charset="-120"/>
+              </a:rPr>
+              <a:t>C  </a:t>
+            </a:r>
+            <a:r>
+              <a:rPr lang="en-US" sz="2600" dirty="0">
+                <a:solidFill>
+                  <a:srgbClr val="1F2A22"/>
+                </a:solidFill>
+                <a:latin typeface="Calibri" pitchFamily="34" charset="0"/>
+                <a:ea typeface="Calibri" pitchFamily="34" charset="-122"/>
+                <a:cs typeface="Calibri" pitchFamily="34" charset="-120"/>
+              </a:rPr>
+              <a:t>Create Measurement Transparency</a:t>
+            </a:r>
+            <a:endParaRPr lang="en-US" sz="2600" dirty="0"/>
+          </a:p>
+        </p:txBody>
+      </p:sp>
+      <p:sp>
+        <p:nvSpPr>
+          <p:cNvPr id="12" name="Shape 7"/>
+          <p:cNvSpPr/>
+          <p:nvPr/>
+        </p:nvSpPr>
+        <p:spPr>
+          <a:xfrm>
+            <a:off x="548640" y="4613148"/>
+            <a:ext cx="640080" cy="640080"/>
+          </a:xfrm>
+          <a:prstGeom prst="ellipse">
+            <a:avLst/>
+          </a:prstGeom>
+          <a:solidFill>
+            <a:srgbClr val="1A5C2C"/>
+          </a:solidFill>
+          <a:ln w="12700">
+            <a:solidFill>
+              <a:srgbClr val="1A5C2C"/>
+            </a:solidFill>
+            <a:prstDash val="solid"/>
+          </a:ln>
+        </p:spPr>
+        <p:txBody>
+          <a:bodyPr/>
+          <a:lstStyle/>
+          <a:p>
+            <a:endParaRPr lang="en-ZA"/>
+          </a:p>
+        </p:txBody>
+      </p:sp>
+      <p:pic>
+        <p:nvPicPr>
+          <p:cNvPr id="13" name="Image 3" descr="preencoded.png"/>
+          <p:cNvPicPr>
+            <a:picLocks noChangeAspect="1"/>
+          </p:cNvPicPr>
+          <p:nvPr/>
+        </p:nvPicPr>
+        <p:blipFill>
+          <a:blip r:embed="rId4"/>
+          <a:stretch>
+            <a:fillRect/>
+          </a:stretch>
+        </p:blipFill>
+        <p:spPr>
+          <a:xfrm>
+            <a:off x="708660" y="4773168"/>
+            <a:ext cx="320040" cy="320040"/>
+          </a:xfrm>
+          <a:prstGeom prst="rect">
+            <a:avLst/>
+          </a:prstGeom>
+        </p:spPr>
+      </p:pic>
+      <p:sp>
+        <p:nvSpPr>
+          <p:cNvPr id="14" name="Text 8"/>
+          <p:cNvSpPr txBox="1"/>
+          <p:nvPr/>
+        </p:nvSpPr>
+        <p:spPr>
+          <a:xfrm>
+            <a:off x="1508760" y="4443984"/>
+            <a:ext cx="10131552" cy="978408"/>
+          </a:xfrm>
+          <a:prstGeom prst="rect">
+            <a:avLst/>
+          </a:prstGeom>
+          <a:noFill/>
+          <a:ln/>
+        </p:spPr>
+        <p:txBody>
+          <a:bodyPr wrap="square" lIns="0" tIns="0" rIns="0" bIns="0" rtlCol="0" anchor="ctr"/>
+          <a:lstStyle/>
+          <a:p>
+            <a:pPr marL="0" indent="0">
+              <a:buNone/>
+            </a:pPr>
+            <a:r>
+              <a:rPr lang="en-US" sz="2600" b="1" dirty="0">
+                <a:solidFill>
+                  <a:srgbClr val="1A5C2C"/>
+                </a:solidFill>
+                <a:latin typeface="Cambria" pitchFamily="34" charset="0"/>
+                <a:ea typeface="Cambria" pitchFamily="34" charset="-122"/>
+                <a:cs typeface="Cambria" pitchFamily="34" charset="-120"/>
+              </a:rPr>
+              <a:t>E  </a:t>
+            </a:r>
+            <a:r>
+              <a:rPr lang="en-US" sz="2600" dirty="0">
+                <a:solidFill>
+                  <a:srgbClr val="1F2A22"/>
+                </a:solidFill>
+                <a:latin typeface="Calibri" pitchFamily="34" charset="0"/>
+                <a:ea typeface="Calibri" pitchFamily="34" charset="-122"/>
+                <a:cs typeface="Calibri" pitchFamily="34" charset="-120"/>
+              </a:rPr>
+              <a:t>Embed Shared Accountability</a:t>
+            </a:r>
+            <a:endParaRPr lang="en-US" sz="2600" dirty="0"/>
+          </a:p>
+        </p:txBody>
+      </p:sp>
+      <p:sp>
+        <p:nvSpPr>
+          <p:cNvPr id="15" name="Shape 9"/>
+          <p:cNvSpPr/>
+          <p:nvPr/>
+        </p:nvSpPr>
+        <p:spPr>
+          <a:xfrm>
+            <a:off x="548640" y="5591556"/>
+            <a:ext cx="640080" cy="640080"/>
+          </a:xfrm>
+          <a:prstGeom prst="ellipse">
+            <a:avLst/>
+          </a:prstGeom>
+          <a:solidFill>
+            <a:srgbClr val="1A5C2C"/>
+          </a:solidFill>
+          <a:ln w="12700">
+            <a:solidFill>
+              <a:srgbClr val="1A5C2C"/>
+            </a:solidFill>
+            <a:prstDash val="solid"/>
+          </a:ln>
+        </p:spPr>
+        <p:txBody>
+          <a:bodyPr/>
+          <a:lstStyle/>
+          <a:p>
+            <a:endParaRPr lang="en-ZA"/>
+          </a:p>
+        </p:txBody>
+      </p:sp>
+      <p:pic>
+        <p:nvPicPr>
+          <p:cNvPr id="16" name="Image 4" descr="preencoded.png"/>
+          <p:cNvPicPr>
+            <a:picLocks noChangeAspect="1"/>
+          </p:cNvPicPr>
+          <p:nvPr/>
+        </p:nvPicPr>
+        <p:blipFill>
+          <a:blip r:embed="rId3"/>
+          <a:stretch>
+            <a:fillRect/>
+          </a:stretch>
+        </p:blipFill>
+        <p:spPr>
+          <a:xfrm>
+            <a:off x="708660" y="5751576"/>
+            <a:ext cx="320040" cy="320040"/>
+          </a:xfrm>
+          <a:prstGeom prst="rect">
+            <a:avLst/>
+          </a:prstGeom>
+        </p:spPr>
+      </p:pic>
+      <p:sp>
+        <p:nvSpPr>
+          <p:cNvPr id="17" name="Text 10"/>
+          <p:cNvSpPr txBox="1"/>
+          <p:nvPr/>
+        </p:nvSpPr>
+        <p:spPr>
+          <a:xfrm>
+            <a:off x="1508760" y="5422392"/>
+            <a:ext cx="10131552" cy="978408"/>
+          </a:xfrm>
+          <a:prstGeom prst="rect">
+            <a:avLst/>
+          </a:prstGeom>
+          <a:noFill/>
+          <a:ln/>
+        </p:spPr>
+        <p:txBody>
+          <a:bodyPr wrap="square" lIns="0" tIns="0" rIns="0" bIns="0" rtlCol="0" anchor="ctr"/>
+          <a:lstStyle/>
+          <a:p>
+            <a:pPr marL="0" indent="0">
+              <a:buNone/>
+            </a:pPr>
+            <a:r>
+              <a:rPr lang="en-US" sz="2600" b="1" dirty="0">
+                <a:solidFill>
+                  <a:srgbClr val="1A5C2C"/>
+                </a:solidFill>
+                <a:latin typeface="Cambria" pitchFamily="34" charset="0"/>
+                <a:ea typeface="Cambria" pitchFamily="34" charset="-122"/>
+                <a:cs typeface="Cambria" pitchFamily="34" charset="-120"/>
+              </a:rPr>
+              <a:t>S  </a:t>
+            </a:r>
+            <a:r>
+              <a:rPr lang="en-US" sz="2600" dirty="0">
+                <a:solidFill>
+                  <a:srgbClr val="1F2A22"/>
+                </a:solidFill>
+                <a:latin typeface="Calibri" pitchFamily="34" charset="0"/>
+                <a:ea typeface="Calibri" pitchFamily="34" charset="-122"/>
+                <a:cs typeface="Calibri" pitchFamily="34" charset="-120"/>
+              </a:rPr>
+              <a:t>Support Continuous Development</a:t>
+            </a:r>
+            <a:endParaRPr lang="en-US" sz="2600" dirty="0"/>
+          </a:p>
+        </p:txBody>
+      </p:sp>
+    </p:spTree>
+  </p:cSld>
+  <p:clrMapOvr>
+    <a:masterClrMapping/>
+  </p:clrMapOvr>
+</p:sld>
+</file>
+
+<file path=ppt/slides/slide26.xml><?xml version="1.0" encoding="utf-8"?>
+<p:sld xmlns:a="http://schemas.openxmlformats.org/drawingml/2006/main" xmlns:p="http://schemas.openxmlformats.org/presentationml/2006/main" xmlns:r="http://schemas.openxmlformats.org/officeDocument/2006/relationships">
+  <p:cSld>
+    <p:bg>
+      <p:bgPr>
+        <a:solidFill>
+          <a:srgbClr val="FFFFFF"/>
+        </a:solidFill>
+        <a:effectLst/>
+      </p:bgPr>
+    </p:bg>
+    <p:spTree>
+      <p:nvGrpSpPr>
+        <p:cNvPr id="1" name=""/>
+        <p:cNvGrpSpPr/>
+        <p:nvPr/>
+      </p:nvGrpSpPr>
+      <p:grpSpPr/>
+      <p:sp>
+        <p:nvSpPr>
+          <p:cNvPr id="2" name="Text 0"/>
+          <p:cNvSpPr txBox="1"/>
+          <p:nvPr/>
+        </p:nvSpPr>
+        <p:spPr>
+          <a:xfrm>
+            <a:off x="548640" y="411480"/>
+            <a:ext cx="11064240" cy="868680"/>
+          </a:xfrm>
+          <a:prstGeom prst="rect">
+            <a:avLst/>
+          </a:prstGeom>
+          <a:noFill/>
+          <a:ln/>
+        </p:spPr>
+        <p:txBody>
+          <a:bodyPr wrap="square" lIns="0" tIns="0" rIns="0" bIns="0" rtlCol="0" anchor="ctr"/>
+          <a:lstStyle/>
+          <a:p>
+            <a:pPr marL="0" indent="0">
+              <a:buNone/>
+            </a:pPr>
+            <a:r>
+              <a:rPr lang="en-US" sz="3600" b="1" dirty="0">
+                <a:solidFill>
+                  <a:srgbClr val="1A5C2C"/>
+                </a:solidFill>
+                <a:latin typeface="Cambria" pitchFamily="34" charset="0"/>
+                <a:ea typeface="Cambria" pitchFamily="34" charset="-122"/>
+                <a:cs typeface="Cambria" pitchFamily="34" charset="-120"/>
+              </a:rPr>
+              <a:t>Step 3 · EXECUTION</a:t>
+            </a:r>
+            <a:endParaRPr lang="en-US" sz="3600" dirty="0"/>
+          </a:p>
+        </p:txBody>
+      </p:sp>
+      <p:sp>
+        <p:nvSpPr>
+          <p:cNvPr id="3" name="Shape 1"/>
+          <p:cNvSpPr/>
+          <p:nvPr/>
+        </p:nvSpPr>
+        <p:spPr>
+          <a:xfrm>
+            <a:off x="548640" y="1590294"/>
+            <a:ext cx="380492" cy="380492"/>
+          </a:xfrm>
+          <a:prstGeom prst="ellipse">
+            <a:avLst/>
+          </a:prstGeom>
+          <a:solidFill>
+            <a:srgbClr val="1A5C2C"/>
+          </a:solidFill>
+          <a:ln w="12700">
+            <a:solidFill>
+              <a:srgbClr val="1A5C2C"/>
+            </a:solidFill>
+            <a:prstDash val="solid"/>
+          </a:ln>
+        </p:spPr>
+        <p:txBody>
+          <a:bodyPr/>
+          <a:lstStyle/>
+          <a:p>
+            <a:endParaRPr lang="en-ZA"/>
+          </a:p>
+        </p:txBody>
+      </p:sp>
+      <p:pic>
+        <p:nvPicPr>
+          <p:cNvPr id="4" name="Image 0" descr="preencoded.png"/>
+          <p:cNvPicPr>
+            <a:picLocks noChangeAspect="1"/>
+          </p:cNvPicPr>
+          <p:nvPr/>
+        </p:nvPicPr>
+        <p:blipFill>
+          <a:blip r:embed="rId2"/>
+          <a:stretch>
+            <a:fillRect/>
+          </a:stretch>
+        </p:blipFill>
+        <p:spPr>
+          <a:xfrm>
+            <a:off x="643763" y="1685417"/>
+            <a:ext cx="190246" cy="190246"/>
+          </a:xfrm>
+          <a:prstGeom prst="rect">
+            <a:avLst/>
+          </a:prstGeom>
+        </p:spPr>
+      </p:pic>
+      <p:sp>
+        <p:nvSpPr>
+          <p:cNvPr id="5" name="Text 2"/>
+          <p:cNvSpPr txBox="1"/>
+          <p:nvPr/>
+        </p:nvSpPr>
+        <p:spPr>
+          <a:xfrm>
+            <a:off x="1249172" y="1508760"/>
+            <a:ext cx="10391140" cy="543560"/>
+          </a:xfrm>
+          <a:prstGeom prst="rect">
+            <a:avLst/>
+          </a:prstGeom>
+          <a:noFill/>
+          <a:ln/>
+        </p:spPr>
+        <p:txBody>
+          <a:bodyPr wrap="square" lIns="0" tIns="0" rIns="0" bIns="0" rtlCol="0" anchor="ctr"/>
+          <a:lstStyle/>
+          <a:p>
+            <a:pPr marL="0" indent="0">
+              <a:buNone/>
+            </a:pPr>
+            <a:r>
+              <a:rPr lang="en-US" sz="2400" b="1" dirty="0">
+                <a:solidFill>
+                  <a:srgbClr val="1A5C2C"/>
+                </a:solidFill>
+                <a:latin typeface="Cambria" pitchFamily="34" charset="0"/>
+                <a:ea typeface="Cambria" pitchFamily="34" charset="-122"/>
+                <a:cs typeface="Cambria" pitchFamily="34" charset="-120"/>
+              </a:rPr>
+              <a:t>E  </a:t>
+            </a:r>
+            <a:r>
+              <a:rPr lang="en-US" sz="2400" dirty="0">
+                <a:solidFill>
+                  <a:srgbClr val="1F2A22"/>
+                </a:solidFill>
+                <a:latin typeface="Calibri" pitchFamily="34" charset="0"/>
+                <a:ea typeface="Calibri" pitchFamily="34" charset="-122"/>
+                <a:cs typeface="Calibri" pitchFamily="34" charset="-120"/>
+              </a:rPr>
+              <a:t>Enterprise: Strategy First</a:t>
+            </a:r>
+            <a:endParaRPr lang="en-US" sz="2400" dirty="0"/>
+          </a:p>
+        </p:txBody>
+      </p:sp>
+      <p:sp>
+        <p:nvSpPr>
+          <p:cNvPr id="6" name="Shape 3"/>
+          <p:cNvSpPr/>
+          <p:nvPr/>
+        </p:nvSpPr>
+        <p:spPr>
+          <a:xfrm>
+            <a:off x="548640" y="2133854"/>
+            <a:ext cx="380492" cy="380492"/>
+          </a:xfrm>
+          <a:prstGeom prst="ellipse">
+            <a:avLst/>
+          </a:prstGeom>
+          <a:solidFill>
+            <a:srgbClr val="1A5C2C"/>
+          </a:solidFill>
+          <a:ln w="12700">
+            <a:solidFill>
+              <a:srgbClr val="1A5C2C"/>
+            </a:solidFill>
+            <a:prstDash val="solid"/>
+          </a:ln>
+        </p:spPr>
+        <p:txBody>
+          <a:bodyPr/>
+          <a:lstStyle/>
+          <a:p>
+            <a:endParaRPr lang="en-ZA"/>
+          </a:p>
+        </p:txBody>
+      </p:sp>
+      <p:pic>
+        <p:nvPicPr>
+          <p:cNvPr id="7" name="Image 1" descr="preencoded.png"/>
+          <p:cNvPicPr>
+            <a:picLocks noChangeAspect="1"/>
+          </p:cNvPicPr>
+          <p:nvPr/>
+        </p:nvPicPr>
+        <p:blipFill>
+          <a:blip r:embed="rId2"/>
+          <a:stretch>
+            <a:fillRect/>
+          </a:stretch>
+        </p:blipFill>
+        <p:spPr>
+          <a:xfrm>
+            <a:off x="643763" y="2228977"/>
+            <a:ext cx="190246" cy="190246"/>
+          </a:xfrm>
+          <a:prstGeom prst="rect">
+            <a:avLst/>
+          </a:prstGeom>
+        </p:spPr>
+      </p:pic>
+      <p:sp>
+        <p:nvSpPr>
+          <p:cNvPr id="8" name="Text 4"/>
+          <p:cNvSpPr txBox="1"/>
+          <p:nvPr/>
+        </p:nvSpPr>
+        <p:spPr>
+          <a:xfrm>
+            <a:off x="1249172" y="2052320"/>
+            <a:ext cx="10391140" cy="543560"/>
+          </a:xfrm>
+          <a:prstGeom prst="rect">
+            <a:avLst/>
+          </a:prstGeom>
+          <a:noFill/>
+          <a:ln/>
+        </p:spPr>
+        <p:txBody>
+          <a:bodyPr wrap="square" lIns="0" tIns="0" rIns="0" bIns="0" rtlCol="0" anchor="ctr"/>
+          <a:lstStyle/>
+          <a:p>
+            <a:pPr marL="0" indent="0">
+              <a:buNone/>
+            </a:pPr>
+            <a:r>
+              <a:rPr lang="en-US" sz="2400" b="1" dirty="0">
+                <a:solidFill>
+                  <a:srgbClr val="1A5C2C"/>
+                </a:solidFill>
+                <a:latin typeface="Cambria" pitchFamily="34" charset="0"/>
+                <a:ea typeface="Cambria" pitchFamily="34" charset="-122"/>
+                <a:cs typeface="Cambria" pitchFamily="34" charset="-120"/>
+              </a:rPr>
+              <a:t>X  </a:t>
+            </a:r>
+            <a:r>
+              <a:rPr lang="en-US" sz="2400" dirty="0">
+                <a:solidFill>
+                  <a:srgbClr val="1F2A22"/>
+                </a:solidFill>
+                <a:latin typeface="Calibri" pitchFamily="34" charset="0"/>
+                <a:ea typeface="Calibri" pitchFamily="34" charset="-122"/>
+                <a:cs typeface="Calibri" pitchFamily="34" charset="-120"/>
+              </a:rPr>
+              <a:t>eXecution: Line-of-Sight</a:t>
+            </a:r>
+            <a:endParaRPr lang="en-US" sz="2400" dirty="0"/>
+          </a:p>
+        </p:txBody>
+      </p:sp>
+      <p:sp>
+        <p:nvSpPr>
+          <p:cNvPr id="9" name="Shape 5"/>
+          <p:cNvSpPr/>
+          <p:nvPr/>
+        </p:nvSpPr>
+        <p:spPr>
+          <a:xfrm>
+            <a:off x="548640" y="2677414"/>
+            <a:ext cx="380492" cy="380492"/>
+          </a:xfrm>
+          <a:prstGeom prst="ellipse">
+            <a:avLst/>
+          </a:prstGeom>
+          <a:solidFill>
+            <a:srgbClr val="1A5C2C"/>
+          </a:solidFill>
+          <a:ln w="12700">
+            <a:solidFill>
+              <a:srgbClr val="1A5C2C"/>
+            </a:solidFill>
+            <a:prstDash val="solid"/>
+          </a:ln>
+        </p:spPr>
+        <p:txBody>
+          <a:bodyPr/>
+          <a:lstStyle/>
+          <a:p>
+            <a:endParaRPr lang="en-ZA"/>
+          </a:p>
+        </p:txBody>
+      </p:sp>
+      <p:pic>
+        <p:nvPicPr>
+          <p:cNvPr id="10" name="Image 2" descr="preencoded.png"/>
+          <p:cNvPicPr>
+            <a:picLocks noChangeAspect="1"/>
+          </p:cNvPicPr>
+          <p:nvPr/>
+        </p:nvPicPr>
+        <p:blipFill>
+          <a:blip r:embed="rId2"/>
+          <a:stretch>
+            <a:fillRect/>
+          </a:stretch>
+        </p:blipFill>
+        <p:spPr>
+          <a:xfrm>
+            <a:off x="643763" y="2772537"/>
+            <a:ext cx="190246" cy="190246"/>
+          </a:xfrm>
+          <a:prstGeom prst="rect">
+            <a:avLst/>
+          </a:prstGeom>
+        </p:spPr>
+      </p:pic>
+      <p:sp>
+        <p:nvSpPr>
+          <p:cNvPr id="11" name="Text 6"/>
+          <p:cNvSpPr txBox="1"/>
+          <p:nvPr/>
+        </p:nvSpPr>
+        <p:spPr>
+          <a:xfrm>
+            <a:off x="1249172" y="2595880"/>
+            <a:ext cx="10391140" cy="543560"/>
+          </a:xfrm>
+          <a:prstGeom prst="rect">
+            <a:avLst/>
+          </a:prstGeom>
+          <a:noFill/>
+          <a:ln/>
+        </p:spPr>
+        <p:txBody>
+          <a:bodyPr wrap="square" lIns="0" tIns="0" rIns="0" bIns="0" rtlCol="0" anchor="ctr"/>
+          <a:lstStyle/>
+          <a:p>
+            <a:pPr marL="0" indent="0">
+              <a:buNone/>
+            </a:pPr>
+            <a:r>
+              <a:rPr lang="en-US" sz="2400" b="1" dirty="0">
+                <a:solidFill>
+                  <a:srgbClr val="1A5C2C"/>
+                </a:solidFill>
+                <a:latin typeface="Cambria" pitchFamily="34" charset="0"/>
+                <a:ea typeface="Cambria" pitchFamily="34" charset="-122"/>
+                <a:cs typeface="Cambria" pitchFamily="34" charset="-120"/>
+              </a:rPr>
+              <a:t>E  </a:t>
+            </a:r>
+            <a:r>
+              <a:rPr lang="en-US" sz="2400" dirty="0">
+                <a:solidFill>
+                  <a:srgbClr val="1F2A22"/>
+                </a:solidFill>
+                <a:latin typeface="Calibri" pitchFamily="34" charset="0"/>
+                <a:ea typeface="Calibri" pitchFamily="34" charset="-122"/>
+                <a:cs typeface="Calibri" pitchFamily="34" charset="-120"/>
+              </a:rPr>
+              <a:t>Evidence: Evidence-Based Measurement</a:t>
+            </a:r>
+            <a:endParaRPr lang="en-US" sz="2400" dirty="0"/>
+          </a:p>
+        </p:txBody>
+      </p:sp>
+      <p:sp>
+        <p:nvSpPr>
+          <p:cNvPr id="12" name="Shape 7"/>
+          <p:cNvSpPr/>
+          <p:nvPr/>
+        </p:nvSpPr>
+        <p:spPr>
+          <a:xfrm>
+            <a:off x="548640" y="3220974"/>
+            <a:ext cx="380492" cy="380492"/>
+          </a:xfrm>
+          <a:prstGeom prst="ellipse">
+            <a:avLst/>
+          </a:prstGeom>
+          <a:solidFill>
+            <a:srgbClr val="1A5C2C"/>
+          </a:solidFill>
+          <a:ln w="12700">
+            <a:solidFill>
+              <a:srgbClr val="1A5C2C"/>
+            </a:solidFill>
+            <a:prstDash val="solid"/>
+          </a:ln>
+        </p:spPr>
+        <p:txBody>
+          <a:bodyPr/>
+          <a:lstStyle/>
+          <a:p>
+            <a:endParaRPr lang="en-ZA"/>
+          </a:p>
+        </p:txBody>
+      </p:sp>
+      <p:pic>
+        <p:nvPicPr>
+          <p:cNvPr id="13" name="Image 3" descr="preencoded.png"/>
+          <p:cNvPicPr>
+            <a:picLocks noChangeAspect="1"/>
+          </p:cNvPicPr>
+          <p:nvPr/>
+        </p:nvPicPr>
+        <p:blipFill>
+          <a:blip r:embed="rId2"/>
+          <a:stretch>
+            <a:fillRect/>
+          </a:stretch>
+        </p:blipFill>
+        <p:spPr>
+          <a:xfrm>
+            <a:off x="643763" y="3316097"/>
+            <a:ext cx="190246" cy="190246"/>
+          </a:xfrm>
+          <a:prstGeom prst="rect">
+            <a:avLst/>
+          </a:prstGeom>
+        </p:spPr>
+      </p:pic>
+      <p:sp>
+        <p:nvSpPr>
+          <p:cNvPr id="14" name="Text 8"/>
+          <p:cNvSpPr txBox="1"/>
+          <p:nvPr/>
+        </p:nvSpPr>
+        <p:spPr>
+          <a:xfrm>
+            <a:off x="1249172" y="3139440"/>
+            <a:ext cx="10391140" cy="543560"/>
+          </a:xfrm>
+          <a:prstGeom prst="rect">
+            <a:avLst/>
+          </a:prstGeom>
+          <a:noFill/>
+          <a:ln/>
+        </p:spPr>
+        <p:txBody>
+          <a:bodyPr wrap="square" lIns="0" tIns="0" rIns="0" bIns="0" rtlCol="0" anchor="ctr"/>
+          <a:lstStyle/>
+          <a:p>
+            <a:pPr marL="0" indent="0">
+              <a:buNone/>
+            </a:pPr>
+            <a:r>
+              <a:rPr lang="en-US" sz="2400" b="1" dirty="0">
+                <a:solidFill>
+                  <a:srgbClr val="1A5C2C"/>
+                </a:solidFill>
+                <a:latin typeface="Cambria" pitchFamily="34" charset="0"/>
+                <a:ea typeface="Cambria" pitchFamily="34" charset="-122"/>
+                <a:cs typeface="Cambria" pitchFamily="34" charset="-120"/>
+              </a:rPr>
+              <a:t>C  </a:t>
+            </a:r>
+            <a:r>
+              <a:rPr lang="en-US" sz="2400" dirty="0">
+                <a:solidFill>
+                  <a:srgbClr val="1F2A22"/>
+                </a:solidFill>
+                <a:latin typeface="Calibri" pitchFamily="34" charset="0"/>
+                <a:ea typeface="Calibri" pitchFamily="34" charset="-122"/>
+                <a:cs typeface="Calibri" pitchFamily="34" charset="-120"/>
+              </a:rPr>
+              <a:t>Collective: Collective Ownership</a:t>
+            </a:r>
+            <a:endParaRPr lang="en-US" sz="2400" dirty="0"/>
+          </a:p>
+        </p:txBody>
+      </p:sp>
+      <p:sp>
+        <p:nvSpPr>
+          <p:cNvPr id="15" name="Shape 9"/>
+          <p:cNvSpPr/>
+          <p:nvPr/>
+        </p:nvSpPr>
+        <p:spPr>
+          <a:xfrm>
+            <a:off x="548640" y="3764534"/>
+            <a:ext cx="380492" cy="380492"/>
+          </a:xfrm>
+          <a:prstGeom prst="ellipse">
+            <a:avLst/>
+          </a:prstGeom>
+          <a:solidFill>
+            <a:srgbClr val="1A5C2C"/>
+          </a:solidFill>
+          <a:ln w="12700">
+            <a:solidFill>
+              <a:srgbClr val="1A5C2C"/>
+            </a:solidFill>
+            <a:prstDash val="solid"/>
+          </a:ln>
+        </p:spPr>
+        <p:txBody>
+          <a:bodyPr/>
+          <a:lstStyle/>
+          <a:p>
+            <a:endParaRPr lang="en-ZA"/>
+          </a:p>
+        </p:txBody>
+      </p:sp>
+      <p:pic>
+        <p:nvPicPr>
+          <p:cNvPr id="16" name="Image 4" descr="preencoded.png"/>
+          <p:cNvPicPr>
+            <a:picLocks noChangeAspect="1"/>
+          </p:cNvPicPr>
+          <p:nvPr/>
+        </p:nvPicPr>
+        <p:blipFill>
+          <a:blip r:embed="rId2"/>
+          <a:stretch>
+            <a:fillRect/>
+          </a:stretch>
+        </p:blipFill>
+        <p:spPr>
+          <a:xfrm>
+            <a:off x="643763" y="3859657"/>
+            <a:ext cx="190246" cy="190246"/>
+          </a:xfrm>
+          <a:prstGeom prst="rect">
+            <a:avLst/>
+          </a:prstGeom>
+        </p:spPr>
+      </p:pic>
+      <p:sp>
+        <p:nvSpPr>
+          <p:cNvPr id="17" name="Text 10"/>
+          <p:cNvSpPr txBox="1"/>
+          <p:nvPr/>
+        </p:nvSpPr>
+        <p:spPr>
+          <a:xfrm>
+            <a:off x="1249172" y="3683000"/>
+            <a:ext cx="10391140" cy="543560"/>
+          </a:xfrm>
+          <a:prstGeom prst="rect">
+            <a:avLst/>
+          </a:prstGeom>
+          <a:noFill/>
+          <a:ln/>
+        </p:spPr>
+        <p:txBody>
+          <a:bodyPr wrap="square" lIns="0" tIns="0" rIns="0" bIns="0" rtlCol="0" anchor="ctr"/>
+          <a:lstStyle/>
+          <a:p>
+            <a:pPr marL="0" indent="0">
+              <a:buNone/>
+            </a:pPr>
+            <a:r>
+              <a:rPr lang="en-US" sz="2400" b="1" dirty="0">
+                <a:solidFill>
+                  <a:srgbClr val="1A5C2C"/>
+                </a:solidFill>
+                <a:latin typeface="Cambria" pitchFamily="34" charset="0"/>
+                <a:ea typeface="Cambria" pitchFamily="34" charset="-122"/>
+                <a:cs typeface="Cambria" pitchFamily="34" charset="-120"/>
+              </a:rPr>
+              <a:t>U  </a:t>
+            </a:r>
+            <a:r>
+              <a:rPr lang="en-US" sz="2400" dirty="0">
+                <a:solidFill>
+                  <a:srgbClr val="1F2A22"/>
+                </a:solidFill>
+                <a:latin typeface="Calibri" pitchFamily="34" charset="0"/>
+                <a:ea typeface="Calibri" pitchFamily="34" charset="-122"/>
+                <a:cs typeface="Calibri" pitchFamily="34" charset="-120"/>
+              </a:rPr>
+              <a:t>Understand: Outcomes First</a:t>
+            </a:r>
+            <a:endParaRPr lang="en-US" sz="2400" dirty="0"/>
+          </a:p>
+        </p:txBody>
+      </p:sp>
+      <p:sp>
+        <p:nvSpPr>
+          <p:cNvPr id="18" name="Shape 11"/>
+          <p:cNvSpPr/>
+          <p:nvPr/>
+        </p:nvSpPr>
+        <p:spPr>
+          <a:xfrm>
+            <a:off x="548640" y="4308094"/>
+            <a:ext cx="380492" cy="380492"/>
+          </a:xfrm>
+          <a:prstGeom prst="ellipse">
+            <a:avLst/>
+          </a:prstGeom>
+          <a:solidFill>
+            <a:srgbClr val="1A5C2C"/>
+          </a:solidFill>
+          <a:ln w="12700">
+            <a:solidFill>
+              <a:srgbClr val="1A5C2C"/>
+            </a:solidFill>
+            <a:prstDash val="solid"/>
+          </a:ln>
+        </p:spPr>
+        <p:txBody>
+          <a:bodyPr/>
+          <a:lstStyle/>
+          <a:p>
+            <a:endParaRPr lang="en-ZA"/>
+          </a:p>
+        </p:txBody>
+      </p:sp>
+      <p:pic>
+        <p:nvPicPr>
+          <p:cNvPr id="19" name="Image 5" descr="preencoded.png"/>
+          <p:cNvPicPr>
+            <a:picLocks noChangeAspect="1"/>
+          </p:cNvPicPr>
+          <p:nvPr/>
+        </p:nvPicPr>
+        <p:blipFill>
+          <a:blip r:embed="rId2"/>
+          <a:stretch>
+            <a:fillRect/>
+          </a:stretch>
+        </p:blipFill>
+        <p:spPr>
+          <a:xfrm>
+            <a:off x="643763" y="4403217"/>
+            <a:ext cx="190246" cy="190246"/>
+          </a:xfrm>
+          <a:prstGeom prst="rect">
+            <a:avLst/>
+          </a:prstGeom>
+        </p:spPr>
+      </p:pic>
+      <p:sp>
+        <p:nvSpPr>
+          <p:cNvPr id="20" name="Text 12"/>
+          <p:cNvSpPr txBox="1"/>
+          <p:nvPr/>
+        </p:nvSpPr>
+        <p:spPr>
+          <a:xfrm>
+            <a:off x="1249172" y="4226560"/>
+            <a:ext cx="10391140" cy="543560"/>
+          </a:xfrm>
+          <a:prstGeom prst="rect">
+            <a:avLst/>
+          </a:prstGeom>
+          <a:noFill/>
+          <a:ln/>
+        </p:spPr>
+        <p:txBody>
+          <a:bodyPr wrap="square" lIns="0" tIns="0" rIns="0" bIns="0" rtlCol="0" anchor="ctr"/>
+          <a:lstStyle/>
+          <a:p>
+            <a:pPr marL="0" indent="0">
+              <a:buNone/>
+            </a:pPr>
+            <a:r>
+              <a:rPr lang="en-US" sz="2400" b="1" dirty="0">
+                <a:solidFill>
+                  <a:srgbClr val="1A5C2C"/>
+                </a:solidFill>
+                <a:latin typeface="Cambria" pitchFamily="34" charset="0"/>
+                <a:ea typeface="Cambria" pitchFamily="34" charset="-122"/>
+                <a:cs typeface="Cambria" pitchFamily="34" charset="-120"/>
+              </a:rPr>
+              <a:t>T  </a:t>
+            </a:r>
+            <a:r>
+              <a:rPr lang="en-US" sz="2400" dirty="0">
+                <a:solidFill>
+                  <a:srgbClr val="1F2A22"/>
+                </a:solidFill>
+                <a:latin typeface="Calibri" pitchFamily="34" charset="0"/>
+                <a:ea typeface="Calibri" pitchFamily="34" charset="-122"/>
+                <a:cs typeface="Calibri" pitchFamily="34" charset="-120"/>
+              </a:rPr>
+              <a:t>Transparent: Measurement Logic</a:t>
+            </a:r>
+            <a:endParaRPr lang="en-US" sz="2400" dirty="0"/>
+          </a:p>
+        </p:txBody>
+      </p:sp>
+      <p:sp>
+        <p:nvSpPr>
+          <p:cNvPr id="21" name="Shape 13"/>
+          <p:cNvSpPr/>
+          <p:nvPr/>
+        </p:nvSpPr>
+        <p:spPr>
+          <a:xfrm>
+            <a:off x="548640" y="4851654"/>
+            <a:ext cx="380492" cy="380492"/>
+          </a:xfrm>
+          <a:prstGeom prst="ellipse">
+            <a:avLst/>
+          </a:prstGeom>
+          <a:solidFill>
+            <a:srgbClr val="1A5C2C"/>
+          </a:solidFill>
+          <a:ln w="12700">
+            <a:solidFill>
+              <a:srgbClr val="1A5C2C"/>
+            </a:solidFill>
+            <a:prstDash val="solid"/>
+          </a:ln>
+        </p:spPr>
+        <p:txBody>
+          <a:bodyPr/>
+          <a:lstStyle/>
+          <a:p>
+            <a:endParaRPr lang="en-ZA"/>
+          </a:p>
+        </p:txBody>
+      </p:sp>
+      <p:pic>
+        <p:nvPicPr>
+          <p:cNvPr id="22" name="Image 6" descr="preencoded.png"/>
+          <p:cNvPicPr>
+            <a:picLocks noChangeAspect="1"/>
+          </p:cNvPicPr>
+          <p:nvPr/>
+        </p:nvPicPr>
+        <p:blipFill>
+          <a:blip r:embed="rId2"/>
+          <a:stretch>
+            <a:fillRect/>
+          </a:stretch>
+        </p:blipFill>
+        <p:spPr>
+          <a:xfrm>
+            <a:off x="643763" y="4946777"/>
+            <a:ext cx="190246" cy="190246"/>
+          </a:xfrm>
+          <a:prstGeom prst="rect">
+            <a:avLst/>
+          </a:prstGeom>
+        </p:spPr>
+      </p:pic>
+      <p:sp>
+        <p:nvSpPr>
+          <p:cNvPr id="23" name="Text 14"/>
+          <p:cNvSpPr txBox="1"/>
+          <p:nvPr/>
+        </p:nvSpPr>
+        <p:spPr>
+          <a:xfrm>
+            <a:off x="1249172" y="4770120"/>
+            <a:ext cx="10391140" cy="543560"/>
+          </a:xfrm>
+          <a:prstGeom prst="rect">
+            <a:avLst/>
+          </a:prstGeom>
+          <a:noFill/>
+          <a:ln/>
+        </p:spPr>
+        <p:txBody>
+          <a:bodyPr wrap="square" lIns="0" tIns="0" rIns="0" bIns="0" rtlCol="0" anchor="ctr"/>
+          <a:lstStyle/>
+          <a:p>
+            <a:pPr marL="0" indent="0">
+              <a:buNone/>
+            </a:pPr>
+            <a:r>
+              <a:rPr lang="en-US" sz="2400" b="1" dirty="0">
+                <a:solidFill>
+                  <a:srgbClr val="1A5C2C"/>
+                </a:solidFill>
+                <a:latin typeface="Cambria" pitchFamily="34" charset="0"/>
+                <a:ea typeface="Cambria" pitchFamily="34" charset="-122"/>
+                <a:cs typeface="Cambria" pitchFamily="34" charset="-120"/>
+              </a:rPr>
+              <a:t>I  </a:t>
+            </a:r>
+            <a:r>
+              <a:rPr lang="en-US" sz="2400" dirty="0">
+                <a:solidFill>
+                  <a:srgbClr val="1F2A22"/>
+                </a:solidFill>
+                <a:latin typeface="Calibri" pitchFamily="34" charset="0"/>
+                <a:ea typeface="Calibri" pitchFamily="34" charset="-122"/>
+                <a:cs typeface="Calibri" pitchFamily="34" charset="-120"/>
+              </a:rPr>
+              <a:t>Incentive: Incentive Alignment</a:t>
+            </a:r>
+            <a:endParaRPr lang="en-US" sz="2400" dirty="0"/>
+          </a:p>
+        </p:txBody>
+      </p:sp>
+      <p:sp>
+        <p:nvSpPr>
+          <p:cNvPr id="24" name="Shape 15"/>
+          <p:cNvSpPr/>
+          <p:nvPr/>
+        </p:nvSpPr>
+        <p:spPr>
+          <a:xfrm>
+            <a:off x="548640" y="5395214"/>
+            <a:ext cx="380492" cy="380492"/>
+          </a:xfrm>
+          <a:prstGeom prst="ellipse">
+            <a:avLst/>
+          </a:prstGeom>
+          <a:solidFill>
+            <a:srgbClr val="1A5C2C"/>
+          </a:solidFill>
+          <a:ln w="12700">
+            <a:solidFill>
+              <a:srgbClr val="1A5C2C"/>
+            </a:solidFill>
+            <a:prstDash val="solid"/>
+          </a:ln>
+        </p:spPr>
+        <p:txBody>
+          <a:bodyPr/>
+          <a:lstStyle/>
+          <a:p>
+            <a:endParaRPr lang="en-ZA"/>
+          </a:p>
+        </p:txBody>
+      </p:sp>
+      <p:pic>
+        <p:nvPicPr>
+          <p:cNvPr id="25" name="Image 7" descr="preencoded.png"/>
+          <p:cNvPicPr>
+            <a:picLocks noChangeAspect="1"/>
+          </p:cNvPicPr>
+          <p:nvPr/>
+        </p:nvPicPr>
+        <p:blipFill>
+          <a:blip r:embed="rId2"/>
+          <a:stretch>
+            <a:fillRect/>
+          </a:stretch>
+        </p:blipFill>
+        <p:spPr>
+          <a:xfrm>
+            <a:off x="643763" y="5490337"/>
+            <a:ext cx="190246" cy="190246"/>
+          </a:xfrm>
+          <a:prstGeom prst="rect">
+            <a:avLst/>
+          </a:prstGeom>
+        </p:spPr>
+      </p:pic>
+      <p:sp>
+        <p:nvSpPr>
+          <p:cNvPr id="26" name="Text 16"/>
+          <p:cNvSpPr txBox="1"/>
+          <p:nvPr/>
+        </p:nvSpPr>
+        <p:spPr>
+          <a:xfrm>
+            <a:off x="1249172" y="5313680"/>
+            <a:ext cx="10391140" cy="543560"/>
+          </a:xfrm>
+          <a:prstGeom prst="rect">
+            <a:avLst/>
+          </a:prstGeom>
+          <a:noFill/>
+          <a:ln/>
+        </p:spPr>
+        <p:txBody>
+          <a:bodyPr wrap="square" lIns="0" tIns="0" rIns="0" bIns="0" rtlCol="0" anchor="ctr"/>
+          <a:lstStyle/>
+          <a:p>
+            <a:pPr marL="0" indent="0">
+              <a:buNone/>
+            </a:pPr>
+            <a:r>
+              <a:rPr lang="en-US" sz="2400" b="1" dirty="0">
+                <a:solidFill>
+                  <a:srgbClr val="1A5C2C"/>
+                </a:solidFill>
+                <a:latin typeface="Cambria" pitchFamily="34" charset="0"/>
+                <a:ea typeface="Cambria" pitchFamily="34" charset="-122"/>
+                <a:cs typeface="Cambria" pitchFamily="34" charset="-120"/>
+              </a:rPr>
+              <a:t>O  </a:t>
+            </a:r>
+            <a:r>
+              <a:rPr lang="en-US" sz="2400" dirty="0">
+                <a:solidFill>
+                  <a:srgbClr val="1F2A22"/>
+                </a:solidFill>
+                <a:latin typeface="Calibri" pitchFamily="34" charset="0"/>
+                <a:ea typeface="Calibri" pitchFamily="34" charset="-122"/>
+                <a:cs typeface="Calibri" pitchFamily="34" charset="-120"/>
+              </a:rPr>
+              <a:t>Ongoing: Review Rhythm</a:t>
+            </a:r>
+            <a:endParaRPr lang="en-US" sz="2400" dirty="0"/>
+          </a:p>
+        </p:txBody>
+      </p:sp>
+      <p:sp>
+        <p:nvSpPr>
+          <p:cNvPr id="27" name="Shape 17"/>
+          <p:cNvSpPr/>
+          <p:nvPr/>
+        </p:nvSpPr>
+        <p:spPr>
+          <a:xfrm>
+            <a:off x="548640" y="5938774"/>
+            <a:ext cx="380492" cy="380492"/>
+          </a:xfrm>
+          <a:prstGeom prst="ellipse">
+            <a:avLst/>
+          </a:prstGeom>
+          <a:solidFill>
+            <a:srgbClr val="1A5C2C"/>
+          </a:solidFill>
+          <a:ln w="12700">
+            <a:solidFill>
+              <a:srgbClr val="1A5C2C"/>
+            </a:solidFill>
+            <a:prstDash val="solid"/>
+          </a:ln>
+        </p:spPr>
+        <p:txBody>
+          <a:bodyPr/>
+          <a:lstStyle/>
+          <a:p>
+            <a:endParaRPr lang="en-ZA"/>
+          </a:p>
+        </p:txBody>
+      </p:sp>
+      <p:pic>
+        <p:nvPicPr>
+          <p:cNvPr id="28" name="Image 8" descr="preencoded.png"/>
+          <p:cNvPicPr>
+            <a:picLocks noChangeAspect="1"/>
+          </p:cNvPicPr>
+          <p:nvPr/>
+        </p:nvPicPr>
+        <p:blipFill>
+          <a:blip r:embed="rId2"/>
+          <a:stretch>
+            <a:fillRect/>
+          </a:stretch>
+        </p:blipFill>
+        <p:spPr>
+          <a:xfrm>
+            <a:off x="643763" y="6033897"/>
+            <a:ext cx="190246" cy="190246"/>
+          </a:xfrm>
+          <a:prstGeom prst="rect">
+            <a:avLst/>
+          </a:prstGeom>
+        </p:spPr>
+      </p:pic>
+      <p:sp>
+        <p:nvSpPr>
+          <p:cNvPr id="29" name="Text 18"/>
+          <p:cNvSpPr txBox="1"/>
+          <p:nvPr/>
+        </p:nvSpPr>
+        <p:spPr>
+          <a:xfrm>
+            <a:off x="1249172" y="5857240"/>
+            <a:ext cx="10391140" cy="543560"/>
+          </a:xfrm>
+          <a:prstGeom prst="rect">
+            <a:avLst/>
+          </a:prstGeom>
+          <a:noFill/>
+          <a:ln/>
+        </p:spPr>
+        <p:txBody>
+          <a:bodyPr wrap="square" lIns="0" tIns="0" rIns="0" bIns="0" rtlCol="0" anchor="ctr"/>
+          <a:lstStyle/>
+          <a:p>
+            <a:pPr marL="0" indent="0">
+              <a:buNone/>
+            </a:pPr>
+            <a:r>
+              <a:rPr lang="en-US" sz="2400" b="1" dirty="0">
+                <a:solidFill>
+                  <a:srgbClr val="1A5C2C"/>
+                </a:solidFill>
+                <a:latin typeface="Cambria" pitchFamily="34" charset="0"/>
+                <a:ea typeface="Cambria" pitchFamily="34" charset="-122"/>
+                <a:cs typeface="Cambria" pitchFamily="34" charset="-120"/>
+              </a:rPr>
+              <a:t>N  </a:t>
+            </a:r>
+            <a:r>
+              <a:rPr lang="en-US" sz="2400" dirty="0">
+                <a:solidFill>
+                  <a:srgbClr val="1F2A22"/>
+                </a:solidFill>
+                <a:latin typeface="Calibri" pitchFamily="34" charset="0"/>
+                <a:ea typeface="Calibri" pitchFamily="34" charset="-122"/>
+                <a:cs typeface="Calibri" pitchFamily="34" charset="-120"/>
+              </a:rPr>
+              <a:t>Navigate: Collective Insight</a:t>
+            </a:r>
+            <a:endParaRPr lang="en-US" sz="2400" dirty="0"/>
+          </a:p>
+        </p:txBody>
+      </p:sp>
+    </p:spTree>
+  </p:cSld>
+  <p:clrMapOvr>
+    <a:masterClrMapping/>
+  </p:clrMapOvr>
+</p:sld>
+</file>
+
+<file path=ppt/slides/slide27.xml><?xml version="1.0" encoding="utf-8"?>
+<p:sld xmlns:a="http://schemas.openxmlformats.org/drawingml/2006/main" xmlns:r="http://schemas.openxmlformats.org/officeDocument/2006/relationships" xmlns:p="http://schemas.openxmlformats.org/presentationml/2006/main">
   <p:cSld name="Slide 25">
     <p:bg>
       <p:bgPr>
@@ -16600,715 +18922,7 @@
 </p:sld>
 </file>
 
-<file path=ppt/slides/slide25.xml><?xml version="1.0" encoding="utf-8"?>
-<p:sld xmlns:a="http://schemas.openxmlformats.org/drawingml/2006/main" xmlns:r="http://schemas.openxmlformats.org/officeDocument/2006/relationships" xmlns:p="http://schemas.openxmlformats.org/presentationml/2006/main">
-  <p:cSld name="Slide 26">
-    <p:bg>
-      <p:bgPr>
-        <a:solidFill>
-          <a:srgbClr val="FFFFFF"/>
-        </a:solidFill>
-        <a:effectLst/>
-      </p:bgPr>
-    </p:bg>
-    <p:spTree>
-      <p:nvGrpSpPr>
-        <p:cNvPr id="1" name=""/>
-        <p:cNvGrpSpPr/>
-        <p:nvPr/>
-      </p:nvGrpSpPr>
-      <p:grpSpPr>
-        <a:xfrm>
-          <a:off x="0" y="0"/>
-          <a:ext cx="0" cy="0"/>
-          <a:chOff x="0" y="0"/>
-          <a:chExt cx="0" cy="0"/>
-        </a:xfrm>
-      </p:grpSpPr>
-      <p:sp>
-        <p:nvSpPr>
-          <p:cNvPr id="2" name="Text 0"/>
-          <p:cNvSpPr txBox="1"/>
-          <p:nvPr/>
-        </p:nvSpPr>
-        <p:spPr>
-          <a:xfrm>
-            <a:off x="548640" y="411480"/>
-            <a:ext cx="11064240" cy="868680"/>
-          </a:xfrm>
-          <a:prstGeom prst="rect">
-            <a:avLst/>
-          </a:prstGeom>
-          <a:noFill/>
-          <a:ln/>
-        </p:spPr>
-        <p:txBody>
-          <a:bodyPr wrap="square" lIns="0" tIns="0" rIns="0" bIns="0" rtlCol="0" anchor="ctr"/>
-          <a:lstStyle/>
-          <a:p>
-            <a:pPr marL="0" indent="0">
-              <a:buNone/>
-            </a:pPr>
-            <a:r>
-              <a:rPr lang="en-US" sz="3600" b="1" dirty="0">
-                <a:solidFill>
-                  <a:srgbClr val="1A5C2C"/>
-                </a:solidFill>
-                <a:latin typeface="Cambria" pitchFamily="34" charset="0"/>
-                <a:ea typeface="Cambria" pitchFamily="34" charset="-122"/>
-                <a:cs typeface="Cambria" pitchFamily="34" charset="-120"/>
-              </a:rPr>
-              <a:t>Step 1 · Scoring Logic</a:t>
-            </a:r>
-            <a:endParaRPr lang="en-US" sz="3600" dirty="0"/>
-          </a:p>
-        </p:txBody>
-      </p:sp>
-      <p:sp>
-        <p:nvSpPr>
-          <p:cNvPr id="3" name="Shape 1"/>
-          <p:cNvSpPr/>
-          <p:nvPr/>
-        </p:nvSpPr>
-        <p:spPr>
-          <a:xfrm>
-            <a:off x="548640" y="1631061"/>
-            <a:ext cx="570738" cy="570738"/>
-          </a:xfrm>
-          <a:prstGeom prst="ellipse">
-            <a:avLst/>
-          </a:prstGeom>
-          <a:solidFill>
-            <a:srgbClr val="1A5C2C"/>
-          </a:solidFill>
-          <a:ln w="12700">
-            <a:solidFill>
-              <a:srgbClr val="1A5C2C"/>
-            </a:solidFill>
-            <a:prstDash val="solid"/>
-          </a:ln>
-        </p:spPr>
-        <p:txBody>
-          <a:bodyPr/>
-          <a:lstStyle/>
-          <a:p>
-            <a:endParaRPr lang="en-ZA"/>
-          </a:p>
-        </p:txBody>
-      </p:sp>
-      <p:pic>
-        <p:nvPicPr>
-          <p:cNvPr id="4" name="Image 0" descr="preencoded.png"/>
-          <p:cNvPicPr>
-            <a:picLocks noChangeAspect="1"/>
-          </p:cNvPicPr>
-          <p:nvPr/>
-        </p:nvPicPr>
-        <p:blipFill>
-          <a:blip r:embed="rId3"/>
-          <a:stretch>
-            <a:fillRect/>
-          </a:stretch>
-        </p:blipFill>
-        <p:spPr>
-          <a:xfrm>
-            <a:off x="691325" y="1773746"/>
-            <a:ext cx="285369" cy="285369"/>
-          </a:xfrm>
-          <a:prstGeom prst="rect">
-            <a:avLst/>
-          </a:prstGeom>
-        </p:spPr>
-      </p:pic>
-      <p:sp>
-        <p:nvSpPr>
-          <p:cNvPr id="5" name="Text 2"/>
-          <p:cNvSpPr txBox="1"/>
-          <p:nvPr/>
-        </p:nvSpPr>
-        <p:spPr>
-          <a:xfrm>
-            <a:off x="1439418" y="1508760"/>
-            <a:ext cx="10200894" cy="815340"/>
-          </a:xfrm>
-          <a:prstGeom prst="rect">
-            <a:avLst/>
-          </a:prstGeom>
-          <a:noFill/>
-          <a:ln/>
-        </p:spPr>
-        <p:txBody>
-          <a:bodyPr wrap="square" lIns="0" tIns="0" rIns="0" bIns="0" rtlCol="0" anchor="ctr"/>
-          <a:lstStyle/>
-          <a:p>
-            <a:pPr marL="0" indent="0">
-              <a:buNone/>
-            </a:pPr>
-            <a:r>
-              <a:rPr lang="en-US" sz="2400" b="1" dirty="0">
-                <a:solidFill>
-                  <a:srgbClr val="1A5C2C"/>
-                </a:solidFill>
-                <a:latin typeface="Cambria" pitchFamily="34" charset="0"/>
-                <a:ea typeface="Cambria" pitchFamily="34" charset="-122"/>
-                <a:cs typeface="Cambria" pitchFamily="34" charset="-120"/>
-              </a:rPr>
-              <a:t>1  </a:t>
-            </a:r>
-            <a:r>
-              <a:rPr lang="en-US" sz="2400" dirty="0">
-                <a:solidFill>
-                  <a:srgbClr val="1F2A22"/>
-                </a:solidFill>
-                <a:latin typeface="Calibri" pitchFamily="34" charset="0"/>
-                <a:ea typeface="Calibri" pitchFamily="34" charset="-122"/>
-                <a:cs typeface="Calibri" pitchFamily="34" charset="-120"/>
-              </a:rPr>
-              <a:t>Performance level that earns this rating</a:t>
-            </a:r>
-            <a:endParaRPr lang="en-US" sz="2400" dirty="0"/>
-          </a:p>
-        </p:txBody>
-      </p:sp>
-      <p:sp>
-        <p:nvSpPr>
-          <p:cNvPr id="6" name="Shape 3"/>
-          <p:cNvSpPr/>
-          <p:nvPr/>
-        </p:nvSpPr>
-        <p:spPr>
-          <a:xfrm>
-            <a:off x="548640" y="2446401"/>
-            <a:ext cx="570738" cy="570738"/>
-          </a:xfrm>
-          <a:prstGeom prst="ellipse">
-            <a:avLst/>
-          </a:prstGeom>
-          <a:solidFill>
-            <a:srgbClr val="1A5C2C"/>
-          </a:solidFill>
-          <a:ln w="12700">
-            <a:solidFill>
-              <a:srgbClr val="1A5C2C"/>
-            </a:solidFill>
-            <a:prstDash val="solid"/>
-          </a:ln>
-        </p:spPr>
-        <p:txBody>
-          <a:bodyPr/>
-          <a:lstStyle/>
-          <a:p>
-            <a:endParaRPr lang="en-ZA"/>
-          </a:p>
-        </p:txBody>
-      </p:sp>
-      <p:pic>
-        <p:nvPicPr>
-          <p:cNvPr id="7" name="Image 1" descr="preencoded.png"/>
-          <p:cNvPicPr>
-            <a:picLocks noChangeAspect="1"/>
-          </p:cNvPicPr>
-          <p:nvPr/>
-        </p:nvPicPr>
-        <p:blipFill>
-          <a:blip r:embed="rId4"/>
-          <a:stretch>
-            <a:fillRect/>
-          </a:stretch>
-        </p:blipFill>
-        <p:spPr>
-          <a:xfrm>
-            <a:off x="691325" y="2589085"/>
-            <a:ext cx="285369" cy="285369"/>
-          </a:xfrm>
-          <a:prstGeom prst="rect">
-            <a:avLst/>
-          </a:prstGeom>
-        </p:spPr>
-      </p:pic>
-      <p:sp>
-        <p:nvSpPr>
-          <p:cNvPr id="8" name="Text 4"/>
-          <p:cNvSpPr txBox="1"/>
-          <p:nvPr/>
-        </p:nvSpPr>
-        <p:spPr>
-          <a:xfrm>
-            <a:off x="1439418" y="2324100"/>
-            <a:ext cx="10200894" cy="815340"/>
-          </a:xfrm>
-          <a:prstGeom prst="rect">
-            <a:avLst/>
-          </a:prstGeom>
-          <a:noFill/>
-          <a:ln/>
-        </p:spPr>
-        <p:txBody>
-          <a:bodyPr wrap="square" lIns="0" tIns="0" rIns="0" bIns="0" rtlCol="0" anchor="ctr"/>
-          <a:lstStyle/>
-          <a:p>
-            <a:pPr marL="0" indent="0">
-              <a:buNone/>
-            </a:pPr>
-            <a:r>
-              <a:rPr lang="en-US" sz="2400" b="1" dirty="0">
-                <a:solidFill>
-                  <a:srgbClr val="1A5C2C"/>
-                </a:solidFill>
-                <a:latin typeface="Cambria" pitchFamily="34" charset="0"/>
-                <a:ea typeface="Cambria" pitchFamily="34" charset="-122"/>
-                <a:cs typeface="Cambria" pitchFamily="34" charset="-120"/>
-              </a:rPr>
-              <a:t>2  </a:t>
-            </a:r>
-            <a:r>
-              <a:rPr lang="en-US" sz="2400" dirty="0">
-                <a:solidFill>
-                  <a:srgbClr val="1F2A22"/>
-                </a:solidFill>
-                <a:latin typeface="Calibri" pitchFamily="34" charset="0"/>
-                <a:ea typeface="Calibri" pitchFamily="34" charset="-122"/>
-                <a:cs typeface="Calibri" pitchFamily="34" charset="-120"/>
-              </a:rPr>
-              <a:t>Evidence required to confirm it</a:t>
-            </a:r>
-            <a:endParaRPr lang="en-US" sz="2400" dirty="0"/>
-          </a:p>
-        </p:txBody>
-      </p:sp>
-      <p:sp>
-        <p:nvSpPr>
-          <p:cNvPr id="9" name="Shape 5"/>
-          <p:cNvSpPr/>
-          <p:nvPr/>
-        </p:nvSpPr>
-        <p:spPr>
-          <a:xfrm>
-            <a:off x="548640" y="3261741"/>
-            <a:ext cx="570738" cy="570738"/>
-          </a:xfrm>
-          <a:prstGeom prst="ellipse">
-            <a:avLst/>
-          </a:prstGeom>
-          <a:solidFill>
-            <a:srgbClr val="1A5C2C"/>
-          </a:solidFill>
-          <a:ln w="12700">
-            <a:solidFill>
-              <a:srgbClr val="1A5C2C"/>
-            </a:solidFill>
-            <a:prstDash val="solid"/>
-          </a:ln>
-        </p:spPr>
-        <p:txBody>
-          <a:bodyPr/>
-          <a:lstStyle/>
-          <a:p>
-            <a:endParaRPr lang="en-ZA"/>
-          </a:p>
-        </p:txBody>
-      </p:sp>
-      <p:pic>
-        <p:nvPicPr>
-          <p:cNvPr id="10" name="Image 2" descr="preencoded.png"/>
-          <p:cNvPicPr>
-            <a:picLocks noChangeAspect="1"/>
-          </p:cNvPicPr>
-          <p:nvPr/>
-        </p:nvPicPr>
-        <p:blipFill>
-          <a:blip r:embed="rId5"/>
-          <a:stretch>
-            <a:fillRect/>
-          </a:stretch>
-        </p:blipFill>
-        <p:spPr>
-          <a:xfrm>
-            <a:off x="691325" y="3404425"/>
-            <a:ext cx="285369" cy="285369"/>
-          </a:xfrm>
-          <a:prstGeom prst="rect">
-            <a:avLst/>
-          </a:prstGeom>
-        </p:spPr>
-      </p:pic>
-      <p:sp>
-        <p:nvSpPr>
-          <p:cNvPr id="11" name="Text 6"/>
-          <p:cNvSpPr txBox="1"/>
-          <p:nvPr/>
-        </p:nvSpPr>
-        <p:spPr>
-          <a:xfrm>
-            <a:off x="1439418" y="3139440"/>
-            <a:ext cx="10200894" cy="815340"/>
-          </a:xfrm>
-          <a:prstGeom prst="rect">
-            <a:avLst/>
-          </a:prstGeom>
-          <a:noFill/>
-          <a:ln/>
-        </p:spPr>
-        <p:txBody>
-          <a:bodyPr wrap="square" lIns="0" tIns="0" rIns="0" bIns="0" rtlCol="0" anchor="ctr"/>
-          <a:lstStyle/>
-          <a:p>
-            <a:pPr marL="0" indent="0">
-              <a:buNone/>
-            </a:pPr>
-            <a:r>
-              <a:rPr lang="en-US" sz="2400" b="1" dirty="0">
-                <a:solidFill>
-                  <a:srgbClr val="1A5C2C"/>
-                </a:solidFill>
-                <a:latin typeface="Cambria" pitchFamily="34" charset="0"/>
-                <a:ea typeface="Cambria" pitchFamily="34" charset="-122"/>
-                <a:cs typeface="Cambria" pitchFamily="34" charset="-120"/>
-              </a:rPr>
-              <a:t>3  </a:t>
-            </a:r>
-            <a:r>
-              <a:rPr lang="en-US" sz="2400" dirty="0">
-                <a:solidFill>
-                  <a:srgbClr val="1F2A22"/>
-                </a:solidFill>
-                <a:latin typeface="Calibri" pitchFamily="34" charset="0"/>
-                <a:ea typeface="Calibri" pitchFamily="34" charset="-122"/>
-                <a:cs typeface="Calibri" pitchFamily="34" charset="-120"/>
-              </a:rPr>
-              <a:t>Contextual factors that might legitimately affect a rating</a:t>
-            </a:r>
-            <a:endParaRPr lang="en-US" sz="2400" dirty="0"/>
-          </a:p>
-        </p:txBody>
-      </p:sp>
-      <p:sp>
-        <p:nvSpPr>
-          <p:cNvPr id="12" name="Shape 7"/>
-          <p:cNvSpPr/>
-          <p:nvPr/>
-        </p:nvSpPr>
-        <p:spPr>
-          <a:xfrm>
-            <a:off x="548640" y="4077081"/>
-            <a:ext cx="570738" cy="570738"/>
-          </a:xfrm>
-          <a:prstGeom prst="ellipse">
-            <a:avLst/>
-          </a:prstGeom>
-          <a:solidFill>
-            <a:srgbClr val="1A5C2C"/>
-          </a:solidFill>
-          <a:ln w="12700">
-            <a:solidFill>
-              <a:srgbClr val="1A5C2C"/>
-            </a:solidFill>
-            <a:prstDash val="solid"/>
-          </a:ln>
-        </p:spPr>
-        <p:txBody>
-          <a:bodyPr/>
-          <a:lstStyle/>
-          <a:p>
-            <a:endParaRPr lang="en-ZA"/>
-          </a:p>
-        </p:txBody>
-      </p:sp>
-      <p:pic>
-        <p:nvPicPr>
-          <p:cNvPr id="13" name="Image 3" descr="preencoded.png"/>
-          <p:cNvPicPr>
-            <a:picLocks noChangeAspect="1"/>
-          </p:cNvPicPr>
-          <p:nvPr/>
-        </p:nvPicPr>
-        <p:blipFill>
-          <a:blip r:embed="rId6"/>
-          <a:stretch>
-            <a:fillRect/>
-          </a:stretch>
-        </p:blipFill>
-        <p:spPr>
-          <a:xfrm>
-            <a:off x="691325" y="4219766"/>
-            <a:ext cx="285369" cy="285369"/>
-          </a:xfrm>
-          <a:prstGeom prst="rect">
-            <a:avLst/>
-          </a:prstGeom>
-        </p:spPr>
-      </p:pic>
-      <p:sp>
-        <p:nvSpPr>
-          <p:cNvPr id="14" name="Text 8"/>
-          <p:cNvSpPr txBox="1"/>
-          <p:nvPr/>
-        </p:nvSpPr>
-        <p:spPr>
-          <a:xfrm>
-            <a:off x="1439418" y="3954780"/>
-            <a:ext cx="10200894" cy="815340"/>
-          </a:xfrm>
-          <a:prstGeom prst="rect">
-            <a:avLst/>
-          </a:prstGeom>
-          <a:noFill/>
-          <a:ln/>
-        </p:spPr>
-        <p:txBody>
-          <a:bodyPr wrap="square" lIns="0" tIns="0" rIns="0" bIns="0" rtlCol="0" anchor="ctr"/>
-          <a:lstStyle/>
-          <a:p>
-            <a:pPr marL="0" indent="0">
-              <a:buNone/>
-            </a:pPr>
-            <a:r>
-              <a:rPr lang="en-US" sz="2400" b="1" dirty="0">
-                <a:solidFill>
-                  <a:srgbClr val="1A5C2C"/>
-                </a:solidFill>
-                <a:latin typeface="Cambria" pitchFamily="34" charset="0"/>
-                <a:ea typeface="Cambria" pitchFamily="34" charset="-122"/>
-                <a:cs typeface="Cambria" pitchFamily="34" charset="-120"/>
-              </a:rPr>
-              <a:t>4  </a:t>
-            </a:r>
-            <a:r>
-              <a:rPr lang="en-US" sz="2400" dirty="0">
-                <a:solidFill>
-                  <a:srgbClr val="1F2A22"/>
-                </a:solidFill>
-                <a:latin typeface="Calibri" pitchFamily="34" charset="0"/>
-                <a:ea typeface="Calibri" pitchFamily="34" charset="-122"/>
-                <a:cs typeface="Calibri" pitchFamily="34" charset="-120"/>
-              </a:rPr>
-              <a:t>Lines of sight of progress</a:t>
-            </a:r>
-            <a:endParaRPr lang="en-US" sz="2400" dirty="0"/>
-          </a:p>
-        </p:txBody>
-      </p:sp>
-      <p:sp>
-        <p:nvSpPr>
-          <p:cNvPr id="15" name="Shape 9"/>
-          <p:cNvSpPr/>
-          <p:nvPr/>
-        </p:nvSpPr>
-        <p:spPr>
-          <a:xfrm>
-            <a:off x="548640" y="4892421"/>
-            <a:ext cx="570738" cy="570738"/>
-          </a:xfrm>
-          <a:prstGeom prst="ellipse">
-            <a:avLst/>
-          </a:prstGeom>
-          <a:solidFill>
-            <a:srgbClr val="1A5C2C"/>
-          </a:solidFill>
-          <a:ln w="12700">
-            <a:solidFill>
-              <a:srgbClr val="1A5C2C"/>
-            </a:solidFill>
-            <a:prstDash val="solid"/>
-          </a:ln>
-        </p:spPr>
-        <p:txBody>
-          <a:bodyPr/>
-          <a:lstStyle/>
-          <a:p>
-            <a:endParaRPr lang="en-ZA"/>
-          </a:p>
-        </p:txBody>
-      </p:sp>
-      <p:pic>
-        <p:nvPicPr>
-          <p:cNvPr id="16" name="Image 4" descr="preencoded.png"/>
-          <p:cNvPicPr>
-            <a:picLocks noChangeAspect="1"/>
-          </p:cNvPicPr>
-          <p:nvPr/>
-        </p:nvPicPr>
-        <p:blipFill>
-          <a:blip r:embed="rId7"/>
-          <a:stretch>
-            <a:fillRect/>
-          </a:stretch>
-        </p:blipFill>
-        <p:spPr>
-          <a:xfrm>
-            <a:off x="691325" y="5035106"/>
-            <a:ext cx="285369" cy="285369"/>
-          </a:xfrm>
-          <a:prstGeom prst="rect">
-            <a:avLst/>
-          </a:prstGeom>
-        </p:spPr>
-      </p:pic>
-      <p:sp>
-        <p:nvSpPr>
-          <p:cNvPr id="17" name="Text 10"/>
-          <p:cNvSpPr txBox="1"/>
-          <p:nvPr/>
-        </p:nvSpPr>
-        <p:spPr>
-          <a:xfrm>
-            <a:off x="1439418" y="4770120"/>
-            <a:ext cx="10200894" cy="815340"/>
-          </a:xfrm>
-          <a:prstGeom prst="rect">
-            <a:avLst/>
-          </a:prstGeom>
-          <a:noFill/>
-          <a:ln/>
-        </p:spPr>
-        <p:txBody>
-          <a:bodyPr wrap="square" lIns="0" tIns="0" rIns="0" bIns="0" rtlCol="0" anchor="ctr"/>
-          <a:lstStyle/>
-          <a:p>
-            <a:pPr marL="0" indent="0">
-              <a:buNone/>
-            </a:pPr>
-            <a:r>
-              <a:rPr lang="en-US" sz="2400" b="1" dirty="0">
-                <a:solidFill>
-                  <a:srgbClr val="1A5C2C"/>
-                </a:solidFill>
-                <a:latin typeface="Cambria" pitchFamily="34" charset="0"/>
-                <a:ea typeface="Cambria" pitchFamily="34" charset="-122"/>
-                <a:cs typeface="Cambria" pitchFamily="34" charset="-120"/>
-              </a:rPr>
-              <a:t>5  </a:t>
-            </a:r>
-            <a:r>
-              <a:rPr lang="en-US" sz="2400" dirty="0">
-                <a:solidFill>
-                  <a:srgbClr val="1F2A22"/>
-                </a:solidFill>
-                <a:latin typeface="Calibri" pitchFamily="34" charset="0"/>
-                <a:ea typeface="Calibri" pitchFamily="34" charset="-122"/>
-                <a:cs typeface="Calibri" pitchFamily="34" charset="-120"/>
-              </a:rPr>
-              <a:t>Review cadence and why</a:t>
-            </a:r>
-            <a:endParaRPr lang="en-US" sz="2400" dirty="0"/>
-          </a:p>
-        </p:txBody>
-      </p:sp>
-      <p:sp>
-        <p:nvSpPr>
-          <p:cNvPr id="18" name="Shape 11"/>
-          <p:cNvSpPr/>
-          <p:nvPr/>
-        </p:nvSpPr>
-        <p:spPr>
-          <a:xfrm>
-            <a:off x="548640" y="5707761"/>
-            <a:ext cx="570738" cy="570738"/>
-          </a:xfrm>
-          <a:prstGeom prst="ellipse">
-            <a:avLst/>
-          </a:prstGeom>
-          <a:solidFill>
-            <a:srgbClr val="1A5C2C"/>
-          </a:solidFill>
-          <a:ln w="12700">
-            <a:solidFill>
-              <a:srgbClr val="1A5C2C"/>
-            </a:solidFill>
-            <a:prstDash val="solid"/>
-          </a:ln>
-        </p:spPr>
-        <p:txBody>
-          <a:bodyPr/>
-          <a:lstStyle/>
-          <a:p>
-            <a:endParaRPr lang="en-ZA"/>
-          </a:p>
-        </p:txBody>
-      </p:sp>
-      <p:pic>
-        <p:nvPicPr>
-          <p:cNvPr id="19" name="Image 5" descr="preencoded.png"/>
-          <p:cNvPicPr>
-            <a:picLocks noChangeAspect="1"/>
-          </p:cNvPicPr>
-          <p:nvPr/>
-        </p:nvPicPr>
-        <p:blipFill>
-          <a:blip r:embed="rId8"/>
-          <a:stretch>
-            <a:fillRect/>
-          </a:stretch>
-        </p:blipFill>
-        <p:spPr>
-          <a:xfrm>
-            <a:off x="691325" y="5850445"/>
-            <a:ext cx="285369" cy="285369"/>
-          </a:xfrm>
-          <a:prstGeom prst="rect">
-            <a:avLst/>
-          </a:prstGeom>
-        </p:spPr>
-      </p:pic>
-      <p:sp>
-        <p:nvSpPr>
-          <p:cNvPr id="20" name="Text 12"/>
-          <p:cNvSpPr txBox="1"/>
-          <p:nvPr/>
-        </p:nvSpPr>
-        <p:spPr>
-          <a:xfrm>
-            <a:off x="1439418" y="5585460"/>
-            <a:ext cx="10200894" cy="815340"/>
-          </a:xfrm>
-          <a:prstGeom prst="rect">
-            <a:avLst/>
-          </a:prstGeom>
-          <a:noFill/>
-          <a:ln/>
-        </p:spPr>
-        <p:txBody>
-          <a:bodyPr wrap="square" lIns="0" tIns="0" rIns="0" bIns="0" rtlCol="0" anchor="ctr"/>
-          <a:lstStyle/>
-          <a:p>
-            <a:pPr marL="0" indent="0">
-              <a:buNone/>
-            </a:pPr>
-            <a:r>
-              <a:rPr lang="en-US" sz="2400" b="1" dirty="0">
-                <a:solidFill>
-                  <a:srgbClr val="1A5C2C"/>
-                </a:solidFill>
-                <a:latin typeface="Cambria" pitchFamily="34" charset="0"/>
-                <a:ea typeface="Cambria" pitchFamily="34" charset="-122"/>
-                <a:cs typeface="Cambria" pitchFamily="34" charset="-120"/>
-              </a:rPr>
-              <a:t>6  </a:t>
-            </a:r>
-            <a:r>
-              <a:rPr lang="en-US" sz="2400" dirty="0">
-                <a:solidFill>
-                  <a:srgbClr val="1F2A22"/>
-                </a:solidFill>
-                <a:latin typeface="Calibri" pitchFamily="34" charset="0"/>
-                <a:ea typeface="Calibri" pitchFamily="34" charset="-122"/>
-                <a:cs typeface="Calibri" pitchFamily="34" charset="-120"/>
-              </a:rPr>
-              <a:t>Leadership response in the monthly review</a:t>
-            </a:r>
-            <a:endParaRPr lang="en-US" sz="2400" dirty="0"/>
-          </a:p>
-        </p:txBody>
-      </p:sp>
-    </p:spTree>
-  </p:cSld>
-  <p:clrMapOvr>
-    <a:masterClrMapping/>
-  </p:clrMapOvr>
-</p:sld>
-</file>
-
-<file path=ppt/slides/slide27.xml><?xml version="1.0" encoding="utf-8"?>
+<file path=ppt/slides/slide28.xml><?xml version="1.0" encoding="utf-8"?>
 <p:sld xmlns:a="http://schemas.openxmlformats.org/drawingml/2006/main" xmlns:r="http://schemas.openxmlformats.org/officeDocument/2006/relationships" xmlns:p="http://schemas.openxmlformats.org/presentationml/2006/main">
   <p:cSld name="Slide 28">
     <p:bg>
@@ -17501,1620 +19115,6 @@
                 <a:cs typeface="Calibri" pitchFamily="34" charset="-120"/>
               </a:rPr>
               <a:t>Specificity is the test of whether the unit has converted into intent.</a:t>
-            </a:r>
-            <a:endParaRPr lang="en-US" sz="2400" dirty="0"/>
-          </a:p>
-        </p:txBody>
-      </p:sp>
-    </p:spTree>
-  </p:cSld>
-  <p:clrMapOvr>
-    <a:masterClrMapping/>
-  </p:clrMapOvr>
-</p:sld>
-</file>
-
-<file path=ppt/slides/slide28.xml><?xml version="1.0" encoding="utf-8"?>
-<p:sld xmlns:a="http://schemas.openxmlformats.org/drawingml/2006/main" xmlns:p="http://schemas.openxmlformats.org/presentationml/2006/main" xmlns:r="http://schemas.openxmlformats.org/officeDocument/2006/relationships">
-  <p:cSld>
-    <p:bg>
-      <p:bgPr>
-        <a:solidFill>
-          <a:srgbClr val="FFFFFF"/>
-        </a:solidFill>
-        <a:effectLst/>
-      </p:bgPr>
-    </p:bg>
-    <p:spTree>
-      <p:nvGrpSpPr>
-        <p:cNvPr id="1" name=""/>
-        <p:cNvGrpSpPr/>
-        <p:nvPr/>
-      </p:nvGrpSpPr>
-      <p:grpSpPr/>
-      <p:sp>
-        <p:nvSpPr>
-          <p:cNvPr id="2" name="Text 0"/>
-          <p:cNvSpPr txBox="1"/>
-          <p:nvPr/>
-        </p:nvSpPr>
-        <p:spPr>
-          <a:xfrm>
-            <a:off x="548640" y="411480"/>
-            <a:ext cx="11064240" cy="868680"/>
-          </a:xfrm>
-          <a:prstGeom prst="rect">
-            <a:avLst/>
-          </a:prstGeom>
-          <a:noFill/>
-          <a:ln/>
-        </p:spPr>
-        <p:txBody>
-          <a:bodyPr wrap="square" lIns="0" tIns="0" rIns="0" bIns="0" rtlCol="0" anchor="ctr"/>
-          <a:lstStyle/>
-          <a:p>
-            <a:pPr marL="0" indent="0">
-              <a:buNone/>
-            </a:pPr>
-            <a:r>
-              <a:rPr lang="en-US" sz="3600" b="1" dirty="0">
-                <a:solidFill>
-                  <a:srgbClr val="1A5C2C"/>
-                </a:solidFill>
-                <a:latin typeface="Cambria" pitchFamily="34" charset="0"/>
-                <a:ea typeface="Cambria" pitchFamily="34" charset="-122"/>
-                <a:cs typeface="Cambria" pitchFamily="34" charset="-120"/>
-              </a:rPr>
-              <a:t>Step 2 · FACES</a:t>
-            </a:r>
-            <a:endParaRPr lang="en-US" sz="3600" dirty="0"/>
-          </a:p>
-        </p:txBody>
-      </p:sp>
-      <p:sp>
-        <p:nvSpPr>
-          <p:cNvPr id="3" name="Shape 1"/>
-          <p:cNvSpPr/>
-          <p:nvPr/>
-        </p:nvSpPr>
-        <p:spPr>
-          <a:xfrm>
-            <a:off x="548640" y="1677924"/>
-            <a:ext cx="640080" cy="640080"/>
-          </a:xfrm>
-          <a:prstGeom prst="ellipse">
-            <a:avLst/>
-          </a:prstGeom>
-          <a:solidFill>
-            <a:srgbClr val="1A5C2C"/>
-          </a:solidFill>
-          <a:ln w="12700">
-            <a:solidFill>
-              <a:srgbClr val="1A5C2C"/>
-            </a:solidFill>
-            <a:prstDash val="solid"/>
-          </a:ln>
-        </p:spPr>
-        <p:txBody>
-          <a:bodyPr/>
-          <a:lstStyle/>
-          <a:p>
-            <a:endParaRPr lang="en-ZA"/>
-          </a:p>
-        </p:txBody>
-      </p:sp>
-      <p:pic>
-        <p:nvPicPr>
-          <p:cNvPr id="4" name="Image 0" descr="preencoded.png"/>
-          <p:cNvPicPr>
-            <a:picLocks noChangeAspect="1"/>
-          </p:cNvPicPr>
-          <p:nvPr/>
-        </p:nvPicPr>
-        <p:blipFill>
-          <a:blip r:embed="rId2"/>
-          <a:stretch>
-            <a:fillRect/>
-          </a:stretch>
-        </p:blipFill>
-        <p:spPr>
-          <a:xfrm>
-            <a:off x="708660" y="1837944"/>
-            <a:ext cx="320040" cy="320040"/>
-          </a:xfrm>
-          <a:prstGeom prst="rect">
-            <a:avLst/>
-          </a:prstGeom>
-        </p:spPr>
-      </p:pic>
-      <p:sp>
-        <p:nvSpPr>
-          <p:cNvPr id="5" name="Text 2"/>
-          <p:cNvSpPr txBox="1"/>
-          <p:nvPr/>
-        </p:nvSpPr>
-        <p:spPr>
-          <a:xfrm>
-            <a:off x="1508760" y="1508760"/>
-            <a:ext cx="10131552" cy="978408"/>
-          </a:xfrm>
-          <a:prstGeom prst="rect">
-            <a:avLst/>
-          </a:prstGeom>
-          <a:noFill/>
-          <a:ln/>
-        </p:spPr>
-        <p:txBody>
-          <a:bodyPr wrap="square" lIns="0" tIns="0" rIns="0" bIns="0" rtlCol="0" anchor="ctr"/>
-          <a:lstStyle/>
-          <a:p>
-            <a:pPr marL="0" indent="0">
-              <a:buNone/>
-            </a:pPr>
-            <a:r>
-              <a:rPr lang="en-US" sz="2600" b="1" dirty="0">
-                <a:solidFill>
-                  <a:srgbClr val="1A5C2C"/>
-                </a:solidFill>
-                <a:latin typeface="Cambria" pitchFamily="34" charset="0"/>
-                <a:ea typeface="Cambria" pitchFamily="34" charset="-122"/>
-                <a:cs typeface="Cambria" pitchFamily="34" charset="-120"/>
-              </a:rPr>
-              <a:t>F  </a:t>
-            </a:r>
-            <a:r>
-              <a:rPr lang="en-US" sz="2600" dirty="0">
-                <a:solidFill>
-                  <a:srgbClr val="1F2A22"/>
-                </a:solidFill>
-                <a:latin typeface="Calibri" pitchFamily="34" charset="0"/>
-                <a:ea typeface="Calibri" pitchFamily="34" charset="-122"/>
-                <a:cs typeface="Calibri" pitchFamily="34" charset="-120"/>
-              </a:rPr>
-              <a:t>Foster a Results Culture</a:t>
-            </a:r>
-            <a:endParaRPr lang="en-US" sz="2600" dirty="0"/>
-          </a:p>
-        </p:txBody>
-      </p:sp>
-      <p:sp>
-        <p:nvSpPr>
-          <p:cNvPr id="6" name="Shape 3"/>
-          <p:cNvSpPr/>
-          <p:nvPr/>
-        </p:nvSpPr>
-        <p:spPr>
-          <a:xfrm>
-            <a:off x="548640" y="2656332"/>
-            <a:ext cx="640080" cy="640080"/>
-          </a:xfrm>
-          <a:prstGeom prst="ellipse">
-            <a:avLst/>
-          </a:prstGeom>
-          <a:solidFill>
-            <a:srgbClr val="1A5C2C"/>
-          </a:solidFill>
-          <a:ln w="12700">
-            <a:solidFill>
-              <a:srgbClr val="1A5C2C"/>
-            </a:solidFill>
-            <a:prstDash val="solid"/>
-          </a:ln>
-        </p:spPr>
-        <p:txBody>
-          <a:bodyPr/>
-          <a:lstStyle/>
-          <a:p>
-            <a:endParaRPr lang="en-ZA"/>
-          </a:p>
-        </p:txBody>
-      </p:sp>
-      <p:pic>
-        <p:nvPicPr>
-          <p:cNvPr id="7" name="Image 1" descr="preencoded.png"/>
-          <p:cNvPicPr>
-            <a:picLocks noChangeAspect="1"/>
-          </p:cNvPicPr>
-          <p:nvPr/>
-        </p:nvPicPr>
-        <p:blipFill>
-          <a:blip r:embed="rId6"/>
-          <a:stretch>
-            <a:fillRect/>
-          </a:stretch>
-        </p:blipFill>
-        <p:spPr>
-          <a:xfrm>
-            <a:off x="708660" y="2816352"/>
-            <a:ext cx="320040" cy="320040"/>
-          </a:xfrm>
-          <a:prstGeom prst="rect">
-            <a:avLst/>
-          </a:prstGeom>
-        </p:spPr>
-      </p:pic>
-      <p:sp>
-        <p:nvSpPr>
-          <p:cNvPr id="8" name="Text 4"/>
-          <p:cNvSpPr txBox="1"/>
-          <p:nvPr/>
-        </p:nvSpPr>
-        <p:spPr>
-          <a:xfrm>
-            <a:off x="1508760" y="2487168"/>
-            <a:ext cx="10131552" cy="978408"/>
-          </a:xfrm>
-          <a:prstGeom prst="rect">
-            <a:avLst/>
-          </a:prstGeom>
-          <a:noFill/>
-          <a:ln/>
-        </p:spPr>
-        <p:txBody>
-          <a:bodyPr wrap="square" lIns="0" tIns="0" rIns="0" bIns="0" rtlCol="0" anchor="ctr"/>
-          <a:lstStyle/>
-          <a:p>
-            <a:pPr marL="0" indent="0">
-              <a:buNone/>
-            </a:pPr>
-            <a:r>
-              <a:rPr lang="en-US" sz="2600" b="1" dirty="0">
-                <a:solidFill>
-                  <a:srgbClr val="1A5C2C"/>
-                </a:solidFill>
-                <a:latin typeface="Cambria" pitchFamily="34" charset="0"/>
-                <a:ea typeface="Cambria" pitchFamily="34" charset="-122"/>
-                <a:cs typeface="Cambria" pitchFamily="34" charset="-120"/>
-              </a:rPr>
-              <a:t>A  </a:t>
-            </a:r>
-            <a:r>
-              <a:rPr lang="en-US" sz="2600" dirty="0">
-                <a:solidFill>
-                  <a:srgbClr val="1F2A22"/>
-                </a:solidFill>
-                <a:latin typeface="Calibri" pitchFamily="34" charset="0"/>
-                <a:ea typeface="Calibri" pitchFamily="34" charset="-122"/>
-                <a:cs typeface="Calibri" pitchFamily="34" charset="-120"/>
-              </a:rPr>
-              <a:t>Align Individual Performance</a:t>
-            </a:r>
-            <a:endParaRPr lang="en-US" sz="2600" dirty="0"/>
-          </a:p>
-        </p:txBody>
-      </p:sp>
-      <p:sp>
-        <p:nvSpPr>
-          <p:cNvPr id="9" name="Shape 5"/>
-          <p:cNvSpPr/>
-          <p:nvPr/>
-        </p:nvSpPr>
-        <p:spPr>
-          <a:xfrm>
-            <a:off x="548640" y="3634740"/>
-            <a:ext cx="640080" cy="640080"/>
-          </a:xfrm>
-          <a:prstGeom prst="ellipse">
-            <a:avLst/>
-          </a:prstGeom>
-          <a:solidFill>
-            <a:srgbClr val="1A5C2C"/>
-          </a:solidFill>
-          <a:ln w="12700">
-            <a:solidFill>
-              <a:srgbClr val="1A5C2C"/>
-            </a:solidFill>
-            <a:prstDash val="solid"/>
-          </a:ln>
-        </p:spPr>
-        <p:txBody>
-          <a:bodyPr/>
-          <a:lstStyle/>
-          <a:p>
-            <a:endParaRPr lang="en-ZA"/>
-          </a:p>
-        </p:txBody>
-      </p:sp>
-      <p:pic>
-        <p:nvPicPr>
-          <p:cNvPr id="10" name="Image 2" descr="preencoded.png"/>
-          <p:cNvPicPr>
-            <a:picLocks noChangeAspect="1"/>
-          </p:cNvPicPr>
-          <p:nvPr/>
-        </p:nvPicPr>
-        <p:blipFill>
-          <a:blip r:embed="rId5"/>
-          <a:stretch>
-            <a:fillRect/>
-          </a:stretch>
-        </p:blipFill>
-        <p:spPr>
-          <a:xfrm>
-            <a:off x="708660" y="3794760"/>
-            <a:ext cx="320040" cy="320040"/>
-          </a:xfrm>
-          <a:prstGeom prst="rect">
-            <a:avLst/>
-          </a:prstGeom>
-        </p:spPr>
-      </p:pic>
-      <p:sp>
-        <p:nvSpPr>
-          <p:cNvPr id="11" name="Text 6"/>
-          <p:cNvSpPr txBox="1"/>
-          <p:nvPr/>
-        </p:nvSpPr>
-        <p:spPr>
-          <a:xfrm>
-            <a:off x="1508760" y="3465576"/>
-            <a:ext cx="10131552" cy="978408"/>
-          </a:xfrm>
-          <a:prstGeom prst="rect">
-            <a:avLst/>
-          </a:prstGeom>
-          <a:noFill/>
-          <a:ln/>
-        </p:spPr>
-        <p:txBody>
-          <a:bodyPr wrap="square" lIns="0" tIns="0" rIns="0" bIns="0" rtlCol="0" anchor="ctr"/>
-          <a:lstStyle/>
-          <a:p>
-            <a:pPr marL="0" indent="0">
-              <a:buNone/>
-            </a:pPr>
-            <a:r>
-              <a:rPr lang="en-US" sz="2600" b="1" dirty="0">
-                <a:solidFill>
-                  <a:srgbClr val="1A5C2C"/>
-                </a:solidFill>
-                <a:latin typeface="Cambria" pitchFamily="34" charset="0"/>
-                <a:ea typeface="Cambria" pitchFamily="34" charset="-122"/>
-                <a:cs typeface="Cambria" pitchFamily="34" charset="-120"/>
-              </a:rPr>
-              <a:t>C  </a:t>
-            </a:r>
-            <a:r>
-              <a:rPr lang="en-US" sz="2600" dirty="0">
-                <a:solidFill>
-                  <a:srgbClr val="1F2A22"/>
-                </a:solidFill>
-                <a:latin typeface="Calibri" pitchFamily="34" charset="0"/>
-                <a:ea typeface="Calibri" pitchFamily="34" charset="-122"/>
-                <a:cs typeface="Calibri" pitchFamily="34" charset="-120"/>
-              </a:rPr>
-              <a:t>Create Measurement Transparency</a:t>
-            </a:r>
-            <a:endParaRPr lang="en-US" sz="2600" dirty="0"/>
-          </a:p>
-        </p:txBody>
-      </p:sp>
-      <p:sp>
-        <p:nvSpPr>
-          <p:cNvPr id="12" name="Shape 7"/>
-          <p:cNvSpPr/>
-          <p:nvPr/>
-        </p:nvSpPr>
-        <p:spPr>
-          <a:xfrm>
-            <a:off x="548640" y="4613148"/>
-            <a:ext cx="640080" cy="640080"/>
-          </a:xfrm>
-          <a:prstGeom prst="ellipse">
-            <a:avLst/>
-          </a:prstGeom>
-          <a:solidFill>
-            <a:srgbClr val="1A5C2C"/>
-          </a:solidFill>
-          <a:ln w="12700">
-            <a:solidFill>
-              <a:srgbClr val="1A5C2C"/>
-            </a:solidFill>
-            <a:prstDash val="solid"/>
-          </a:ln>
-        </p:spPr>
-        <p:txBody>
-          <a:bodyPr/>
-          <a:lstStyle/>
-          <a:p>
-            <a:endParaRPr lang="en-ZA"/>
-          </a:p>
-        </p:txBody>
-      </p:sp>
-      <p:pic>
-        <p:nvPicPr>
-          <p:cNvPr id="13" name="Image 3" descr="preencoded.png"/>
-          <p:cNvPicPr>
-            <a:picLocks noChangeAspect="1"/>
-          </p:cNvPicPr>
-          <p:nvPr/>
-        </p:nvPicPr>
-        <p:blipFill>
-          <a:blip r:embed="rId4"/>
-          <a:stretch>
-            <a:fillRect/>
-          </a:stretch>
-        </p:blipFill>
-        <p:spPr>
-          <a:xfrm>
-            <a:off x="708660" y="4773168"/>
-            <a:ext cx="320040" cy="320040"/>
-          </a:xfrm>
-          <a:prstGeom prst="rect">
-            <a:avLst/>
-          </a:prstGeom>
-        </p:spPr>
-      </p:pic>
-      <p:sp>
-        <p:nvSpPr>
-          <p:cNvPr id="14" name="Text 8"/>
-          <p:cNvSpPr txBox="1"/>
-          <p:nvPr/>
-        </p:nvSpPr>
-        <p:spPr>
-          <a:xfrm>
-            <a:off x="1508760" y="4443984"/>
-            <a:ext cx="10131552" cy="978408"/>
-          </a:xfrm>
-          <a:prstGeom prst="rect">
-            <a:avLst/>
-          </a:prstGeom>
-          <a:noFill/>
-          <a:ln/>
-        </p:spPr>
-        <p:txBody>
-          <a:bodyPr wrap="square" lIns="0" tIns="0" rIns="0" bIns="0" rtlCol="0" anchor="ctr"/>
-          <a:lstStyle/>
-          <a:p>
-            <a:pPr marL="0" indent="0">
-              <a:buNone/>
-            </a:pPr>
-            <a:r>
-              <a:rPr lang="en-US" sz="2600" b="1" dirty="0">
-                <a:solidFill>
-                  <a:srgbClr val="1A5C2C"/>
-                </a:solidFill>
-                <a:latin typeface="Cambria" pitchFamily="34" charset="0"/>
-                <a:ea typeface="Cambria" pitchFamily="34" charset="-122"/>
-                <a:cs typeface="Cambria" pitchFamily="34" charset="-120"/>
-              </a:rPr>
-              <a:t>E  </a:t>
-            </a:r>
-            <a:r>
-              <a:rPr lang="en-US" sz="2600" dirty="0">
-                <a:solidFill>
-                  <a:srgbClr val="1F2A22"/>
-                </a:solidFill>
-                <a:latin typeface="Calibri" pitchFamily="34" charset="0"/>
-                <a:ea typeface="Calibri" pitchFamily="34" charset="-122"/>
-                <a:cs typeface="Calibri" pitchFamily="34" charset="-120"/>
-              </a:rPr>
-              <a:t>Embed Shared Accountability</a:t>
-            </a:r>
-            <a:endParaRPr lang="en-US" sz="2600" dirty="0"/>
-          </a:p>
-        </p:txBody>
-      </p:sp>
-      <p:sp>
-        <p:nvSpPr>
-          <p:cNvPr id="15" name="Shape 9"/>
-          <p:cNvSpPr/>
-          <p:nvPr/>
-        </p:nvSpPr>
-        <p:spPr>
-          <a:xfrm>
-            <a:off x="548640" y="5591556"/>
-            <a:ext cx="640080" cy="640080"/>
-          </a:xfrm>
-          <a:prstGeom prst="ellipse">
-            <a:avLst/>
-          </a:prstGeom>
-          <a:solidFill>
-            <a:srgbClr val="1A5C2C"/>
-          </a:solidFill>
-          <a:ln w="12700">
-            <a:solidFill>
-              <a:srgbClr val="1A5C2C"/>
-            </a:solidFill>
-            <a:prstDash val="solid"/>
-          </a:ln>
-        </p:spPr>
-        <p:txBody>
-          <a:bodyPr/>
-          <a:lstStyle/>
-          <a:p>
-            <a:endParaRPr lang="en-ZA"/>
-          </a:p>
-        </p:txBody>
-      </p:sp>
-      <p:pic>
-        <p:nvPicPr>
-          <p:cNvPr id="16" name="Image 4" descr="preencoded.png"/>
-          <p:cNvPicPr>
-            <a:picLocks noChangeAspect="1"/>
-          </p:cNvPicPr>
-          <p:nvPr/>
-        </p:nvPicPr>
-        <p:blipFill>
-          <a:blip r:embed="rId3"/>
-          <a:stretch>
-            <a:fillRect/>
-          </a:stretch>
-        </p:blipFill>
-        <p:spPr>
-          <a:xfrm>
-            <a:off x="708660" y="5751576"/>
-            <a:ext cx="320040" cy="320040"/>
-          </a:xfrm>
-          <a:prstGeom prst="rect">
-            <a:avLst/>
-          </a:prstGeom>
-        </p:spPr>
-      </p:pic>
-      <p:sp>
-        <p:nvSpPr>
-          <p:cNvPr id="17" name="Text 10"/>
-          <p:cNvSpPr txBox="1"/>
-          <p:nvPr/>
-        </p:nvSpPr>
-        <p:spPr>
-          <a:xfrm>
-            <a:off x="1508760" y="5422392"/>
-            <a:ext cx="10131552" cy="978408"/>
-          </a:xfrm>
-          <a:prstGeom prst="rect">
-            <a:avLst/>
-          </a:prstGeom>
-          <a:noFill/>
-          <a:ln/>
-        </p:spPr>
-        <p:txBody>
-          <a:bodyPr wrap="square" lIns="0" tIns="0" rIns="0" bIns="0" rtlCol="0" anchor="ctr"/>
-          <a:lstStyle/>
-          <a:p>
-            <a:pPr marL="0" indent="0">
-              <a:buNone/>
-            </a:pPr>
-            <a:r>
-              <a:rPr lang="en-US" sz="2600" b="1" dirty="0">
-                <a:solidFill>
-                  <a:srgbClr val="1A5C2C"/>
-                </a:solidFill>
-                <a:latin typeface="Cambria" pitchFamily="34" charset="0"/>
-                <a:ea typeface="Cambria" pitchFamily="34" charset="-122"/>
-                <a:cs typeface="Cambria" pitchFamily="34" charset="-120"/>
-              </a:rPr>
-              <a:t>S  </a:t>
-            </a:r>
-            <a:r>
-              <a:rPr lang="en-US" sz="2600" dirty="0">
-                <a:solidFill>
-                  <a:srgbClr val="1F2A22"/>
-                </a:solidFill>
-                <a:latin typeface="Calibri" pitchFamily="34" charset="0"/>
-                <a:ea typeface="Calibri" pitchFamily="34" charset="-122"/>
-                <a:cs typeface="Calibri" pitchFamily="34" charset="-120"/>
-              </a:rPr>
-              <a:t>Support Continuous Development</a:t>
-            </a:r>
-            <a:endParaRPr lang="en-US" sz="2600" dirty="0"/>
-          </a:p>
-        </p:txBody>
-      </p:sp>
-    </p:spTree>
-  </p:cSld>
-  <p:clrMapOvr>
-    <a:masterClrMapping/>
-  </p:clrMapOvr>
-</p:sld>
-</file>
-
-<file path=ppt/slides/slide29.xml><?xml version="1.0" encoding="utf-8"?>
-<p:sld xmlns:a="http://schemas.openxmlformats.org/drawingml/2006/main" xmlns:p="http://schemas.openxmlformats.org/presentationml/2006/main" xmlns:r="http://schemas.openxmlformats.org/officeDocument/2006/relationships">
-  <p:cSld>
-    <p:bg>
-      <p:bgPr>
-        <a:solidFill>
-          <a:srgbClr val="FFFFFF"/>
-        </a:solidFill>
-        <a:effectLst/>
-      </p:bgPr>
-    </p:bg>
-    <p:spTree>
-      <p:nvGrpSpPr>
-        <p:cNvPr id="1" name=""/>
-        <p:cNvGrpSpPr/>
-        <p:nvPr/>
-      </p:nvGrpSpPr>
-      <p:grpSpPr/>
-      <p:sp>
-        <p:nvSpPr>
-          <p:cNvPr id="2" name="Text 0"/>
-          <p:cNvSpPr txBox="1"/>
-          <p:nvPr/>
-        </p:nvSpPr>
-        <p:spPr>
-          <a:xfrm>
-            <a:off x="548640" y="411480"/>
-            <a:ext cx="11064240" cy="868680"/>
-          </a:xfrm>
-          <a:prstGeom prst="rect">
-            <a:avLst/>
-          </a:prstGeom>
-          <a:noFill/>
-          <a:ln/>
-        </p:spPr>
-        <p:txBody>
-          <a:bodyPr wrap="square" lIns="0" tIns="0" rIns="0" bIns="0" rtlCol="0" anchor="ctr"/>
-          <a:lstStyle/>
-          <a:p>
-            <a:pPr marL="0" indent="0">
-              <a:buNone/>
-            </a:pPr>
-            <a:r>
-              <a:rPr lang="en-US" sz="3600" b="1" dirty="0">
-                <a:solidFill>
-                  <a:srgbClr val="1A5C2C"/>
-                </a:solidFill>
-                <a:latin typeface="Cambria" pitchFamily="34" charset="0"/>
-                <a:ea typeface="Cambria" pitchFamily="34" charset="-122"/>
-                <a:cs typeface="Cambria" pitchFamily="34" charset="-120"/>
-              </a:rPr>
-              <a:t>Step 3 · EXECUTION</a:t>
-            </a:r>
-            <a:endParaRPr lang="en-US" sz="3600" dirty="0"/>
-          </a:p>
-        </p:txBody>
-      </p:sp>
-      <p:sp>
-        <p:nvSpPr>
-          <p:cNvPr id="3" name="Shape 1"/>
-          <p:cNvSpPr/>
-          <p:nvPr/>
-        </p:nvSpPr>
-        <p:spPr>
-          <a:xfrm>
-            <a:off x="548640" y="1590294"/>
-            <a:ext cx="380492" cy="380492"/>
-          </a:xfrm>
-          <a:prstGeom prst="ellipse">
-            <a:avLst/>
-          </a:prstGeom>
-          <a:solidFill>
-            <a:srgbClr val="1A5C2C"/>
-          </a:solidFill>
-          <a:ln w="12700">
-            <a:solidFill>
-              <a:srgbClr val="1A5C2C"/>
-            </a:solidFill>
-            <a:prstDash val="solid"/>
-          </a:ln>
-        </p:spPr>
-        <p:txBody>
-          <a:bodyPr/>
-          <a:lstStyle/>
-          <a:p>
-            <a:endParaRPr lang="en-ZA"/>
-          </a:p>
-        </p:txBody>
-      </p:sp>
-      <p:pic>
-        <p:nvPicPr>
-          <p:cNvPr id="4" name="Image 0" descr="preencoded.png"/>
-          <p:cNvPicPr>
-            <a:picLocks noChangeAspect="1"/>
-          </p:cNvPicPr>
-          <p:nvPr/>
-        </p:nvPicPr>
-        <p:blipFill>
-          <a:blip r:embed="rId2"/>
-          <a:stretch>
-            <a:fillRect/>
-          </a:stretch>
-        </p:blipFill>
-        <p:spPr>
-          <a:xfrm>
-            <a:off x="643763" y="1685417"/>
-            <a:ext cx="190246" cy="190246"/>
-          </a:xfrm>
-          <a:prstGeom prst="rect">
-            <a:avLst/>
-          </a:prstGeom>
-        </p:spPr>
-      </p:pic>
-      <p:sp>
-        <p:nvSpPr>
-          <p:cNvPr id="5" name="Text 2"/>
-          <p:cNvSpPr txBox="1"/>
-          <p:nvPr/>
-        </p:nvSpPr>
-        <p:spPr>
-          <a:xfrm>
-            <a:off x="1249172" y="1508760"/>
-            <a:ext cx="10391140" cy="543560"/>
-          </a:xfrm>
-          <a:prstGeom prst="rect">
-            <a:avLst/>
-          </a:prstGeom>
-          <a:noFill/>
-          <a:ln/>
-        </p:spPr>
-        <p:txBody>
-          <a:bodyPr wrap="square" lIns="0" tIns="0" rIns="0" bIns="0" rtlCol="0" anchor="ctr"/>
-          <a:lstStyle/>
-          <a:p>
-            <a:pPr marL="0" indent="0">
-              <a:buNone/>
-            </a:pPr>
-            <a:r>
-              <a:rPr lang="en-US" sz="2400" b="1" dirty="0">
-                <a:solidFill>
-                  <a:srgbClr val="1A5C2C"/>
-                </a:solidFill>
-                <a:latin typeface="Cambria" pitchFamily="34" charset="0"/>
-                <a:ea typeface="Cambria" pitchFamily="34" charset="-122"/>
-                <a:cs typeface="Cambria" pitchFamily="34" charset="-120"/>
-              </a:rPr>
-              <a:t>E  </a:t>
-            </a:r>
-            <a:r>
-              <a:rPr lang="en-US" sz="2400" dirty="0">
-                <a:solidFill>
-                  <a:srgbClr val="1F2A22"/>
-                </a:solidFill>
-                <a:latin typeface="Calibri" pitchFamily="34" charset="0"/>
-                <a:ea typeface="Calibri" pitchFamily="34" charset="-122"/>
-                <a:cs typeface="Calibri" pitchFamily="34" charset="-120"/>
-              </a:rPr>
-              <a:t>Enterprise: Strategy First</a:t>
-            </a:r>
-            <a:endParaRPr lang="en-US" sz="2400" dirty="0"/>
-          </a:p>
-        </p:txBody>
-      </p:sp>
-      <p:sp>
-        <p:nvSpPr>
-          <p:cNvPr id="6" name="Shape 3"/>
-          <p:cNvSpPr/>
-          <p:nvPr/>
-        </p:nvSpPr>
-        <p:spPr>
-          <a:xfrm>
-            <a:off x="548640" y="2133854"/>
-            <a:ext cx="380492" cy="380492"/>
-          </a:xfrm>
-          <a:prstGeom prst="ellipse">
-            <a:avLst/>
-          </a:prstGeom>
-          <a:solidFill>
-            <a:srgbClr val="1A5C2C"/>
-          </a:solidFill>
-          <a:ln w="12700">
-            <a:solidFill>
-              <a:srgbClr val="1A5C2C"/>
-            </a:solidFill>
-            <a:prstDash val="solid"/>
-          </a:ln>
-        </p:spPr>
-        <p:txBody>
-          <a:bodyPr/>
-          <a:lstStyle/>
-          <a:p>
-            <a:endParaRPr lang="en-ZA"/>
-          </a:p>
-        </p:txBody>
-      </p:sp>
-      <p:pic>
-        <p:nvPicPr>
-          <p:cNvPr id="7" name="Image 1" descr="preencoded.png"/>
-          <p:cNvPicPr>
-            <a:picLocks noChangeAspect="1"/>
-          </p:cNvPicPr>
-          <p:nvPr/>
-        </p:nvPicPr>
-        <p:blipFill>
-          <a:blip r:embed="rId2"/>
-          <a:stretch>
-            <a:fillRect/>
-          </a:stretch>
-        </p:blipFill>
-        <p:spPr>
-          <a:xfrm>
-            <a:off x="643763" y="2228977"/>
-            <a:ext cx="190246" cy="190246"/>
-          </a:xfrm>
-          <a:prstGeom prst="rect">
-            <a:avLst/>
-          </a:prstGeom>
-        </p:spPr>
-      </p:pic>
-      <p:sp>
-        <p:nvSpPr>
-          <p:cNvPr id="8" name="Text 4"/>
-          <p:cNvSpPr txBox="1"/>
-          <p:nvPr/>
-        </p:nvSpPr>
-        <p:spPr>
-          <a:xfrm>
-            <a:off x="1249172" y="2052320"/>
-            <a:ext cx="10391140" cy="543560"/>
-          </a:xfrm>
-          <a:prstGeom prst="rect">
-            <a:avLst/>
-          </a:prstGeom>
-          <a:noFill/>
-          <a:ln/>
-        </p:spPr>
-        <p:txBody>
-          <a:bodyPr wrap="square" lIns="0" tIns="0" rIns="0" bIns="0" rtlCol="0" anchor="ctr"/>
-          <a:lstStyle/>
-          <a:p>
-            <a:pPr marL="0" indent="0">
-              <a:buNone/>
-            </a:pPr>
-            <a:r>
-              <a:rPr lang="en-US" sz="2400" b="1" dirty="0">
-                <a:solidFill>
-                  <a:srgbClr val="1A5C2C"/>
-                </a:solidFill>
-                <a:latin typeface="Cambria" pitchFamily="34" charset="0"/>
-                <a:ea typeface="Cambria" pitchFamily="34" charset="-122"/>
-                <a:cs typeface="Cambria" pitchFamily="34" charset="-120"/>
-              </a:rPr>
-              <a:t>X  </a:t>
-            </a:r>
-            <a:r>
-              <a:rPr lang="en-US" sz="2400" dirty="0">
-                <a:solidFill>
-                  <a:srgbClr val="1F2A22"/>
-                </a:solidFill>
-                <a:latin typeface="Calibri" pitchFamily="34" charset="0"/>
-                <a:ea typeface="Calibri" pitchFamily="34" charset="-122"/>
-                <a:cs typeface="Calibri" pitchFamily="34" charset="-120"/>
-              </a:rPr>
-              <a:t>eXecution: Line-of-Sight</a:t>
-            </a:r>
-            <a:endParaRPr lang="en-US" sz="2400" dirty="0"/>
-          </a:p>
-        </p:txBody>
-      </p:sp>
-      <p:sp>
-        <p:nvSpPr>
-          <p:cNvPr id="9" name="Shape 5"/>
-          <p:cNvSpPr/>
-          <p:nvPr/>
-        </p:nvSpPr>
-        <p:spPr>
-          <a:xfrm>
-            <a:off x="548640" y="2677414"/>
-            <a:ext cx="380492" cy="380492"/>
-          </a:xfrm>
-          <a:prstGeom prst="ellipse">
-            <a:avLst/>
-          </a:prstGeom>
-          <a:solidFill>
-            <a:srgbClr val="1A5C2C"/>
-          </a:solidFill>
-          <a:ln w="12700">
-            <a:solidFill>
-              <a:srgbClr val="1A5C2C"/>
-            </a:solidFill>
-            <a:prstDash val="solid"/>
-          </a:ln>
-        </p:spPr>
-        <p:txBody>
-          <a:bodyPr/>
-          <a:lstStyle/>
-          <a:p>
-            <a:endParaRPr lang="en-ZA"/>
-          </a:p>
-        </p:txBody>
-      </p:sp>
-      <p:pic>
-        <p:nvPicPr>
-          <p:cNvPr id="10" name="Image 2" descr="preencoded.png"/>
-          <p:cNvPicPr>
-            <a:picLocks noChangeAspect="1"/>
-          </p:cNvPicPr>
-          <p:nvPr/>
-        </p:nvPicPr>
-        <p:blipFill>
-          <a:blip r:embed="rId2"/>
-          <a:stretch>
-            <a:fillRect/>
-          </a:stretch>
-        </p:blipFill>
-        <p:spPr>
-          <a:xfrm>
-            <a:off x="643763" y="2772537"/>
-            <a:ext cx="190246" cy="190246"/>
-          </a:xfrm>
-          <a:prstGeom prst="rect">
-            <a:avLst/>
-          </a:prstGeom>
-        </p:spPr>
-      </p:pic>
-      <p:sp>
-        <p:nvSpPr>
-          <p:cNvPr id="11" name="Text 6"/>
-          <p:cNvSpPr txBox="1"/>
-          <p:nvPr/>
-        </p:nvSpPr>
-        <p:spPr>
-          <a:xfrm>
-            <a:off x="1249172" y="2595880"/>
-            <a:ext cx="10391140" cy="543560"/>
-          </a:xfrm>
-          <a:prstGeom prst="rect">
-            <a:avLst/>
-          </a:prstGeom>
-          <a:noFill/>
-          <a:ln/>
-        </p:spPr>
-        <p:txBody>
-          <a:bodyPr wrap="square" lIns="0" tIns="0" rIns="0" bIns="0" rtlCol="0" anchor="ctr"/>
-          <a:lstStyle/>
-          <a:p>
-            <a:pPr marL="0" indent="0">
-              <a:buNone/>
-            </a:pPr>
-            <a:r>
-              <a:rPr lang="en-US" sz="2400" b="1" dirty="0">
-                <a:solidFill>
-                  <a:srgbClr val="1A5C2C"/>
-                </a:solidFill>
-                <a:latin typeface="Cambria" pitchFamily="34" charset="0"/>
-                <a:ea typeface="Cambria" pitchFamily="34" charset="-122"/>
-                <a:cs typeface="Cambria" pitchFamily="34" charset="-120"/>
-              </a:rPr>
-              <a:t>E  </a:t>
-            </a:r>
-            <a:r>
-              <a:rPr lang="en-US" sz="2400" dirty="0">
-                <a:solidFill>
-                  <a:srgbClr val="1F2A22"/>
-                </a:solidFill>
-                <a:latin typeface="Calibri" pitchFamily="34" charset="0"/>
-                <a:ea typeface="Calibri" pitchFamily="34" charset="-122"/>
-                <a:cs typeface="Calibri" pitchFamily="34" charset="-120"/>
-              </a:rPr>
-              <a:t>Evidence: Evidence-Based Measurement</a:t>
-            </a:r>
-            <a:endParaRPr lang="en-US" sz="2400" dirty="0"/>
-          </a:p>
-        </p:txBody>
-      </p:sp>
-      <p:sp>
-        <p:nvSpPr>
-          <p:cNvPr id="12" name="Shape 7"/>
-          <p:cNvSpPr/>
-          <p:nvPr/>
-        </p:nvSpPr>
-        <p:spPr>
-          <a:xfrm>
-            <a:off x="548640" y="3220974"/>
-            <a:ext cx="380492" cy="380492"/>
-          </a:xfrm>
-          <a:prstGeom prst="ellipse">
-            <a:avLst/>
-          </a:prstGeom>
-          <a:solidFill>
-            <a:srgbClr val="1A5C2C"/>
-          </a:solidFill>
-          <a:ln w="12700">
-            <a:solidFill>
-              <a:srgbClr val="1A5C2C"/>
-            </a:solidFill>
-            <a:prstDash val="solid"/>
-          </a:ln>
-        </p:spPr>
-        <p:txBody>
-          <a:bodyPr/>
-          <a:lstStyle/>
-          <a:p>
-            <a:endParaRPr lang="en-ZA"/>
-          </a:p>
-        </p:txBody>
-      </p:sp>
-      <p:pic>
-        <p:nvPicPr>
-          <p:cNvPr id="13" name="Image 3" descr="preencoded.png"/>
-          <p:cNvPicPr>
-            <a:picLocks noChangeAspect="1"/>
-          </p:cNvPicPr>
-          <p:nvPr/>
-        </p:nvPicPr>
-        <p:blipFill>
-          <a:blip r:embed="rId2"/>
-          <a:stretch>
-            <a:fillRect/>
-          </a:stretch>
-        </p:blipFill>
-        <p:spPr>
-          <a:xfrm>
-            <a:off x="643763" y="3316097"/>
-            <a:ext cx="190246" cy="190246"/>
-          </a:xfrm>
-          <a:prstGeom prst="rect">
-            <a:avLst/>
-          </a:prstGeom>
-        </p:spPr>
-      </p:pic>
-      <p:sp>
-        <p:nvSpPr>
-          <p:cNvPr id="14" name="Text 8"/>
-          <p:cNvSpPr txBox="1"/>
-          <p:nvPr/>
-        </p:nvSpPr>
-        <p:spPr>
-          <a:xfrm>
-            <a:off x="1249172" y="3139440"/>
-            <a:ext cx="10391140" cy="543560"/>
-          </a:xfrm>
-          <a:prstGeom prst="rect">
-            <a:avLst/>
-          </a:prstGeom>
-          <a:noFill/>
-          <a:ln/>
-        </p:spPr>
-        <p:txBody>
-          <a:bodyPr wrap="square" lIns="0" tIns="0" rIns="0" bIns="0" rtlCol="0" anchor="ctr"/>
-          <a:lstStyle/>
-          <a:p>
-            <a:pPr marL="0" indent="0">
-              <a:buNone/>
-            </a:pPr>
-            <a:r>
-              <a:rPr lang="en-US" sz="2400" b="1" dirty="0">
-                <a:solidFill>
-                  <a:srgbClr val="1A5C2C"/>
-                </a:solidFill>
-                <a:latin typeface="Cambria" pitchFamily="34" charset="0"/>
-                <a:ea typeface="Cambria" pitchFamily="34" charset="-122"/>
-                <a:cs typeface="Cambria" pitchFamily="34" charset="-120"/>
-              </a:rPr>
-              <a:t>C  </a:t>
-            </a:r>
-            <a:r>
-              <a:rPr lang="en-US" sz="2400" dirty="0">
-                <a:solidFill>
-                  <a:srgbClr val="1F2A22"/>
-                </a:solidFill>
-                <a:latin typeface="Calibri" pitchFamily="34" charset="0"/>
-                <a:ea typeface="Calibri" pitchFamily="34" charset="-122"/>
-                <a:cs typeface="Calibri" pitchFamily="34" charset="-120"/>
-              </a:rPr>
-              <a:t>Collective: Collective Ownership</a:t>
-            </a:r>
-            <a:endParaRPr lang="en-US" sz="2400" dirty="0"/>
-          </a:p>
-        </p:txBody>
-      </p:sp>
-      <p:sp>
-        <p:nvSpPr>
-          <p:cNvPr id="15" name="Shape 9"/>
-          <p:cNvSpPr/>
-          <p:nvPr/>
-        </p:nvSpPr>
-        <p:spPr>
-          <a:xfrm>
-            <a:off x="548640" y="3764534"/>
-            <a:ext cx="380492" cy="380492"/>
-          </a:xfrm>
-          <a:prstGeom prst="ellipse">
-            <a:avLst/>
-          </a:prstGeom>
-          <a:solidFill>
-            <a:srgbClr val="1A5C2C"/>
-          </a:solidFill>
-          <a:ln w="12700">
-            <a:solidFill>
-              <a:srgbClr val="1A5C2C"/>
-            </a:solidFill>
-            <a:prstDash val="solid"/>
-          </a:ln>
-        </p:spPr>
-        <p:txBody>
-          <a:bodyPr/>
-          <a:lstStyle/>
-          <a:p>
-            <a:endParaRPr lang="en-ZA"/>
-          </a:p>
-        </p:txBody>
-      </p:sp>
-      <p:pic>
-        <p:nvPicPr>
-          <p:cNvPr id="16" name="Image 4" descr="preencoded.png"/>
-          <p:cNvPicPr>
-            <a:picLocks noChangeAspect="1"/>
-          </p:cNvPicPr>
-          <p:nvPr/>
-        </p:nvPicPr>
-        <p:blipFill>
-          <a:blip r:embed="rId2"/>
-          <a:stretch>
-            <a:fillRect/>
-          </a:stretch>
-        </p:blipFill>
-        <p:spPr>
-          <a:xfrm>
-            <a:off x="643763" y="3859657"/>
-            <a:ext cx="190246" cy="190246"/>
-          </a:xfrm>
-          <a:prstGeom prst="rect">
-            <a:avLst/>
-          </a:prstGeom>
-        </p:spPr>
-      </p:pic>
-      <p:sp>
-        <p:nvSpPr>
-          <p:cNvPr id="17" name="Text 10"/>
-          <p:cNvSpPr txBox="1"/>
-          <p:nvPr/>
-        </p:nvSpPr>
-        <p:spPr>
-          <a:xfrm>
-            <a:off x="1249172" y="3683000"/>
-            <a:ext cx="10391140" cy="543560"/>
-          </a:xfrm>
-          <a:prstGeom prst="rect">
-            <a:avLst/>
-          </a:prstGeom>
-          <a:noFill/>
-          <a:ln/>
-        </p:spPr>
-        <p:txBody>
-          <a:bodyPr wrap="square" lIns="0" tIns="0" rIns="0" bIns="0" rtlCol="0" anchor="ctr"/>
-          <a:lstStyle/>
-          <a:p>
-            <a:pPr marL="0" indent="0">
-              <a:buNone/>
-            </a:pPr>
-            <a:r>
-              <a:rPr lang="en-US" sz="2400" b="1" dirty="0">
-                <a:solidFill>
-                  <a:srgbClr val="1A5C2C"/>
-                </a:solidFill>
-                <a:latin typeface="Cambria" pitchFamily="34" charset="0"/>
-                <a:ea typeface="Cambria" pitchFamily="34" charset="-122"/>
-                <a:cs typeface="Cambria" pitchFamily="34" charset="-120"/>
-              </a:rPr>
-              <a:t>U  </a:t>
-            </a:r>
-            <a:r>
-              <a:rPr lang="en-US" sz="2400" dirty="0">
-                <a:solidFill>
-                  <a:srgbClr val="1F2A22"/>
-                </a:solidFill>
-                <a:latin typeface="Calibri" pitchFamily="34" charset="0"/>
-                <a:ea typeface="Calibri" pitchFamily="34" charset="-122"/>
-                <a:cs typeface="Calibri" pitchFamily="34" charset="-120"/>
-              </a:rPr>
-              <a:t>Understand: Outcomes First</a:t>
-            </a:r>
-            <a:endParaRPr lang="en-US" sz="2400" dirty="0"/>
-          </a:p>
-        </p:txBody>
-      </p:sp>
-      <p:sp>
-        <p:nvSpPr>
-          <p:cNvPr id="18" name="Shape 11"/>
-          <p:cNvSpPr/>
-          <p:nvPr/>
-        </p:nvSpPr>
-        <p:spPr>
-          <a:xfrm>
-            <a:off x="548640" y="4308094"/>
-            <a:ext cx="380492" cy="380492"/>
-          </a:xfrm>
-          <a:prstGeom prst="ellipse">
-            <a:avLst/>
-          </a:prstGeom>
-          <a:solidFill>
-            <a:srgbClr val="1A5C2C"/>
-          </a:solidFill>
-          <a:ln w="12700">
-            <a:solidFill>
-              <a:srgbClr val="1A5C2C"/>
-            </a:solidFill>
-            <a:prstDash val="solid"/>
-          </a:ln>
-        </p:spPr>
-        <p:txBody>
-          <a:bodyPr/>
-          <a:lstStyle/>
-          <a:p>
-            <a:endParaRPr lang="en-ZA"/>
-          </a:p>
-        </p:txBody>
-      </p:sp>
-      <p:pic>
-        <p:nvPicPr>
-          <p:cNvPr id="19" name="Image 5" descr="preencoded.png"/>
-          <p:cNvPicPr>
-            <a:picLocks noChangeAspect="1"/>
-          </p:cNvPicPr>
-          <p:nvPr/>
-        </p:nvPicPr>
-        <p:blipFill>
-          <a:blip r:embed="rId2"/>
-          <a:stretch>
-            <a:fillRect/>
-          </a:stretch>
-        </p:blipFill>
-        <p:spPr>
-          <a:xfrm>
-            <a:off x="643763" y="4403217"/>
-            <a:ext cx="190246" cy="190246"/>
-          </a:xfrm>
-          <a:prstGeom prst="rect">
-            <a:avLst/>
-          </a:prstGeom>
-        </p:spPr>
-      </p:pic>
-      <p:sp>
-        <p:nvSpPr>
-          <p:cNvPr id="20" name="Text 12"/>
-          <p:cNvSpPr txBox="1"/>
-          <p:nvPr/>
-        </p:nvSpPr>
-        <p:spPr>
-          <a:xfrm>
-            <a:off x="1249172" y="4226560"/>
-            <a:ext cx="10391140" cy="543560"/>
-          </a:xfrm>
-          <a:prstGeom prst="rect">
-            <a:avLst/>
-          </a:prstGeom>
-          <a:noFill/>
-          <a:ln/>
-        </p:spPr>
-        <p:txBody>
-          <a:bodyPr wrap="square" lIns="0" tIns="0" rIns="0" bIns="0" rtlCol="0" anchor="ctr"/>
-          <a:lstStyle/>
-          <a:p>
-            <a:pPr marL="0" indent="0">
-              <a:buNone/>
-            </a:pPr>
-            <a:r>
-              <a:rPr lang="en-US" sz="2400" b="1" dirty="0">
-                <a:solidFill>
-                  <a:srgbClr val="1A5C2C"/>
-                </a:solidFill>
-                <a:latin typeface="Cambria" pitchFamily="34" charset="0"/>
-                <a:ea typeface="Cambria" pitchFamily="34" charset="-122"/>
-                <a:cs typeface="Cambria" pitchFamily="34" charset="-120"/>
-              </a:rPr>
-              <a:t>T  </a:t>
-            </a:r>
-            <a:r>
-              <a:rPr lang="en-US" sz="2400" dirty="0">
-                <a:solidFill>
-                  <a:srgbClr val="1F2A22"/>
-                </a:solidFill>
-                <a:latin typeface="Calibri" pitchFamily="34" charset="0"/>
-                <a:ea typeface="Calibri" pitchFamily="34" charset="-122"/>
-                <a:cs typeface="Calibri" pitchFamily="34" charset="-120"/>
-              </a:rPr>
-              <a:t>Transparent: Measurement Logic</a:t>
-            </a:r>
-            <a:endParaRPr lang="en-US" sz="2400" dirty="0"/>
-          </a:p>
-        </p:txBody>
-      </p:sp>
-      <p:sp>
-        <p:nvSpPr>
-          <p:cNvPr id="21" name="Shape 13"/>
-          <p:cNvSpPr/>
-          <p:nvPr/>
-        </p:nvSpPr>
-        <p:spPr>
-          <a:xfrm>
-            <a:off x="548640" y="4851654"/>
-            <a:ext cx="380492" cy="380492"/>
-          </a:xfrm>
-          <a:prstGeom prst="ellipse">
-            <a:avLst/>
-          </a:prstGeom>
-          <a:solidFill>
-            <a:srgbClr val="1A5C2C"/>
-          </a:solidFill>
-          <a:ln w="12700">
-            <a:solidFill>
-              <a:srgbClr val="1A5C2C"/>
-            </a:solidFill>
-            <a:prstDash val="solid"/>
-          </a:ln>
-        </p:spPr>
-        <p:txBody>
-          <a:bodyPr/>
-          <a:lstStyle/>
-          <a:p>
-            <a:endParaRPr lang="en-ZA"/>
-          </a:p>
-        </p:txBody>
-      </p:sp>
-      <p:pic>
-        <p:nvPicPr>
-          <p:cNvPr id="22" name="Image 6" descr="preencoded.png"/>
-          <p:cNvPicPr>
-            <a:picLocks noChangeAspect="1"/>
-          </p:cNvPicPr>
-          <p:nvPr/>
-        </p:nvPicPr>
-        <p:blipFill>
-          <a:blip r:embed="rId2"/>
-          <a:stretch>
-            <a:fillRect/>
-          </a:stretch>
-        </p:blipFill>
-        <p:spPr>
-          <a:xfrm>
-            <a:off x="643763" y="4946777"/>
-            <a:ext cx="190246" cy="190246"/>
-          </a:xfrm>
-          <a:prstGeom prst="rect">
-            <a:avLst/>
-          </a:prstGeom>
-        </p:spPr>
-      </p:pic>
-      <p:sp>
-        <p:nvSpPr>
-          <p:cNvPr id="23" name="Text 14"/>
-          <p:cNvSpPr txBox="1"/>
-          <p:nvPr/>
-        </p:nvSpPr>
-        <p:spPr>
-          <a:xfrm>
-            <a:off x="1249172" y="4770120"/>
-            <a:ext cx="10391140" cy="543560"/>
-          </a:xfrm>
-          <a:prstGeom prst="rect">
-            <a:avLst/>
-          </a:prstGeom>
-          <a:noFill/>
-          <a:ln/>
-        </p:spPr>
-        <p:txBody>
-          <a:bodyPr wrap="square" lIns="0" tIns="0" rIns="0" bIns="0" rtlCol="0" anchor="ctr"/>
-          <a:lstStyle/>
-          <a:p>
-            <a:pPr marL="0" indent="0">
-              <a:buNone/>
-            </a:pPr>
-            <a:r>
-              <a:rPr lang="en-US" sz="2400" b="1" dirty="0">
-                <a:solidFill>
-                  <a:srgbClr val="1A5C2C"/>
-                </a:solidFill>
-                <a:latin typeface="Cambria" pitchFamily="34" charset="0"/>
-                <a:ea typeface="Cambria" pitchFamily="34" charset="-122"/>
-                <a:cs typeface="Cambria" pitchFamily="34" charset="-120"/>
-              </a:rPr>
-              <a:t>I  </a:t>
-            </a:r>
-            <a:r>
-              <a:rPr lang="en-US" sz="2400" dirty="0">
-                <a:solidFill>
-                  <a:srgbClr val="1F2A22"/>
-                </a:solidFill>
-                <a:latin typeface="Calibri" pitchFamily="34" charset="0"/>
-                <a:ea typeface="Calibri" pitchFamily="34" charset="-122"/>
-                <a:cs typeface="Calibri" pitchFamily="34" charset="-120"/>
-              </a:rPr>
-              <a:t>Incentive: Incentive Alignment</a:t>
-            </a:r>
-            <a:endParaRPr lang="en-US" sz="2400" dirty="0"/>
-          </a:p>
-        </p:txBody>
-      </p:sp>
-      <p:sp>
-        <p:nvSpPr>
-          <p:cNvPr id="24" name="Shape 15"/>
-          <p:cNvSpPr/>
-          <p:nvPr/>
-        </p:nvSpPr>
-        <p:spPr>
-          <a:xfrm>
-            <a:off x="548640" y="5395214"/>
-            <a:ext cx="380492" cy="380492"/>
-          </a:xfrm>
-          <a:prstGeom prst="ellipse">
-            <a:avLst/>
-          </a:prstGeom>
-          <a:solidFill>
-            <a:srgbClr val="1A5C2C"/>
-          </a:solidFill>
-          <a:ln w="12700">
-            <a:solidFill>
-              <a:srgbClr val="1A5C2C"/>
-            </a:solidFill>
-            <a:prstDash val="solid"/>
-          </a:ln>
-        </p:spPr>
-        <p:txBody>
-          <a:bodyPr/>
-          <a:lstStyle/>
-          <a:p>
-            <a:endParaRPr lang="en-ZA"/>
-          </a:p>
-        </p:txBody>
-      </p:sp>
-      <p:pic>
-        <p:nvPicPr>
-          <p:cNvPr id="25" name="Image 7" descr="preencoded.png"/>
-          <p:cNvPicPr>
-            <a:picLocks noChangeAspect="1"/>
-          </p:cNvPicPr>
-          <p:nvPr/>
-        </p:nvPicPr>
-        <p:blipFill>
-          <a:blip r:embed="rId2"/>
-          <a:stretch>
-            <a:fillRect/>
-          </a:stretch>
-        </p:blipFill>
-        <p:spPr>
-          <a:xfrm>
-            <a:off x="643763" y="5490337"/>
-            <a:ext cx="190246" cy="190246"/>
-          </a:xfrm>
-          <a:prstGeom prst="rect">
-            <a:avLst/>
-          </a:prstGeom>
-        </p:spPr>
-      </p:pic>
-      <p:sp>
-        <p:nvSpPr>
-          <p:cNvPr id="26" name="Text 16"/>
-          <p:cNvSpPr txBox="1"/>
-          <p:nvPr/>
-        </p:nvSpPr>
-        <p:spPr>
-          <a:xfrm>
-            <a:off x="1249172" y="5313680"/>
-            <a:ext cx="10391140" cy="543560"/>
-          </a:xfrm>
-          <a:prstGeom prst="rect">
-            <a:avLst/>
-          </a:prstGeom>
-          <a:noFill/>
-          <a:ln/>
-        </p:spPr>
-        <p:txBody>
-          <a:bodyPr wrap="square" lIns="0" tIns="0" rIns="0" bIns="0" rtlCol="0" anchor="ctr"/>
-          <a:lstStyle/>
-          <a:p>
-            <a:pPr marL="0" indent="0">
-              <a:buNone/>
-            </a:pPr>
-            <a:r>
-              <a:rPr lang="en-US" sz="2400" b="1" dirty="0">
-                <a:solidFill>
-                  <a:srgbClr val="1A5C2C"/>
-                </a:solidFill>
-                <a:latin typeface="Cambria" pitchFamily="34" charset="0"/>
-                <a:ea typeface="Cambria" pitchFamily="34" charset="-122"/>
-                <a:cs typeface="Cambria" pitchFamily="34" charset="-120"/>
-              </a:rPr>
-              <a:t>O  </a:t>
-            </a:r>
-            <a:r>
-              <a:rPr lang="en-US" sz="2400" dirty="0">
-                <a:solidFill>
-                  <a:srgbClr val="1F2A22"/>
-                </a:solidFill>
-                <a:latin typeface="Calibri" pitchFamily="34" charset="0"/>
-                <a:ea typeface="Calibri" pitchFamily="34" charset="-122"/>
-                <a:cs typeface="Calibri" pitchFamily="34" charset="-120"/>
-              </a:rPr>
-              <a:t>Ongoing: Review Rhythm</a:t>
-            </a:r>
-            <a:endParaRPr lang="en-US" sz="2400" dirty="0"/>
-          </a:p>
-        </p:txBody>
-      </p:sp>
-      <p:sp>
-        <p:nvSpPr>
-          <p:cNvPr id="27" name="Shape 17"/>
-          <p:cNvSpPr/>
-          <p:nvPr/>
-        </p:nvSpPr>
-        <p:spPr>
-          <a:xfrm>
-            <a:off x="548640" y="5938774"/>
-            <a:ext cx="380492" cy="380492"/>
-          </a:xfrm>
-          <a:prstGeom prst="ellipse">
-            <a:avLst/>
-          </a:prstGeom>
-          <a:solidFill>
-            <a:srgbClr val="1A5C2C"/>
-          </a:solidFill>
-          <a:ln w="12700">
-            <a:solidFill>
-              <a:srgbClr val="1A5C2C"/>
-            </a:solidFill>
-            <a:prstDash val="solid"/>
-          </a:ln>
-        </p:spPr>
-        <p:txBody>
-          <a:bodyPr/>
-          <a:lstStyle/>
-          <a:p>
-            <a:endParaRPr lang="en-ZA"/>
-          </a:p>
-        </p:txBody>
-      </p:sp>
-      <p:pic>
-        <p:nvPicPr>
-          <p:cNvPr id="28" name="Image 8" descr="preencoded.png"/>
-          <p:cNvPicPr>
-            <a:picLocks noChangeAspect="1"/>
-          </p:cNvPicPr>
-          <p:nvPr/>
-        </p:nvPicPr>
-        <p:blipFill>
-          <a:blip r:embed="rId2"/>
-          <a:stretch>
-            <a:fillRect/>
-          </a:stretch>
-        </p:blipFill>
-        <p:spPr>
-          <a:xfrm>
-            <a:off x="643763" y="6033897"/>
-            <a:ext cx="190246" cy="190246"/>
-          </a:xfrm>
-          <a:prstGeom prst="rect">
-            <a:avLst/>
-          </a:prstGeom>
-        </p:spPr>
-      </p:pic>
-      <p:sp>
-        <p:nvSpPr>
-          <p:cNvPr id="29" name="Text 18"/>
-          <p:cNvSpPr txBox="1"/>
-          <p:nvPr/>
-        </p:nvSpPr>
-        <p:spPr>
-          <a:xfrm>
-            <a:off x="1249172" y="5857240"/>
-            <a:ext cx="10391140" cy="543560"/>
-          </a:xfrm>
-          <a:prstGeom prst="rect">
-            <a:avLst/>
-          </a:prstGeom>
-          <a:noFill/>
-          <a:ln/>
-        </p:spPr>
-        <p:txBody>
-          <a:bodyPr wrap="square" lIns="0" tIns="0" rIns="0" bIns="0" rtlCol="0" anchor="ctr"/>
-          <a:lstStyle/>
-          <a:p>
-            <a:pPr marL="0" indent="0">
-              <a:buNone/>
-            </a:pPr>
-            <a:r>
-              <a:rPr lang="en-US" sz="2400" b="1" dirty="0">
-                <a:solidFill>
-                  <a:srgbClr val="1A5C2C"/>
-                </a:solidFill>
-                <a:latin typeface="Cambria" pitchFamily="34" charset="0"/>
-                <a:ea typeface="Cambria" pitchFamily="34" charset="-122"/>
-                <a:cs typeface="Cambria" pitchFamily="34" charset="-120"/>
-              </a:rPr>
-              <a:t>N  </a:t>
-            </a:r>
-            <a:r>
-              <a:rPr lang="en-US" sz="2400" dirty="0">
-                <a:solidFill>
-                  <a:srgbClr val="1F2A22"/>
-                </a:solidFill>
-                <a:latin typeface="Calibri" pitchFamily="34" charset="0"/>
-                <a:ea typeface="Calibri" pitchFamily="34" charset="-122"/>
-                <a:cs typeface="Calibri" pitchFamily="34" charset="-120"/>
-              </a:rPr>
-              <a:t>Navigate: Collective Insight</a:t>
             </a:r>
             <a:endParaRPr lang="en-US" sz="2400" dirty="0"/>
           </a:p>

--- a/Unit decks/Unit 06 - Performance Management Setup.pptx
+++ b/Unit decks/Unit 06 - Performance Management Setup.pptx
@@ -345,7 +345,7 @@
           <a:p>
             <a:r>
               <a:rPr lang="en-GB" dirty="0"/>
-              <a:t>Unit 6 sets up enterprise performance management on two operating systems: what people deliver (the Human Operating System) and what the organisation enables (the Organisational Operating System, examined through ESRG).</a:t>
+              <a:t>Unit 6 sets up enterprise performance management on two operating systems: people performance, what people deliver (the Human Operating System), and organisational performance, what the organisation enables through its organisational conditions (the Organisational Operating System).</a:t>
             </a:r>
           </a:p>
           <a:p>
@@ -501,7 +501,7 @@
           <a:p>
             <a:r>
               <a:rPr lang="en-GB" dirty="0"/>
-              <a:t>1.4 Reflection — FACES in Your Organisation: "For the Key Result you chose in part 1.3: which FACES function is weakest in the way your organisation manages these contributions today, for the people and for the ESRG conditions? Which one management arrangement would strengthen it?"</a:t>
+              <a:t>1.4 Reflection — FACES in Your Organisation: "For the Key Result you chose in part 1.3: which FACES function is weakest in the way your organisation manages these contributions today, for the people and for the organisational conditions? Which one management arrangement would strengthen it?"</a:t>
             </a:r>
           </a:p>
           <a:p>
@@ -516,7 +516,7 @@
           <a:p>
             <a:r>
               <a:rPr lang="en-GB" dirty="0"/>
-              <a:t>Say: "These reflections are personal. Name one real, recurring shortfall and look at whether your system covers the people and the ESRG conditions. Then map one of your own organisation’s Key Results the way the Contribution Map does, and look at how your organisation manages those contributions through FACES."</a:t>
+              <a:t>Say: "These reflections are personal. Name one real, recurring shortfall and look at whether your system covers the people and the organisational conditions. Then map one of your own organisation’s Key Results the way the Contribution Map does, and look at how your organisation manages those contributions through FACES."</a:t>
             </a:r>
           </a:p>
           <a:p>
@@ -962,7 +962,7 @@
           <a:p>
             <a:r>
               <a:rPr lang="en-GB" dirty="0"/>
-              <a:t>Teach the two architectures first, then the four dimensions, then how each applies to the people and to the ESRG conditions.</a:t>
+              <a:t>Teach the two architectures first, then the four dimensions, then how each applies to the people and to the organisational conditions.</a:t>
             </a:r>
           </a:p>
           <a:p>
@@ -1343,19 +1343,19 @@
           <a:p>
             <a:r>
               <a:rPr lang="en-GB" dirty="0"/>
-              <a:t>Say: "The executive team must establish whether the performance reported by individual functions is sufficient to produce the intended collective outcome. This requires attention to both operating systems."</a:t>
-            </a:r>
-          </a:p>
-          <a:p>
-            <a:r>
-              <a:rPr lang="en-GB" dirty="0"/>
-              <a:t>Human Operating System. Say: "Executives examine whether individuals and teams are delivering their agreed KPIs, OKRs and behavioural expectations. They also consider whether the required contributions are being coordinated effectively across functions."</a:t>
-            </a:r>
-          </a:p>
-          <a:p>
-            <a:r>
-              <a:rPr lang="en-GB" dirty="0"/>
-              <a:t>Organisational Operating System. Say: "Executives examine whether the relevant Environment, Systems, Resources and Governance conditions are enabling those contributions. Where organisational constraints affect delivery, the appropriate executive owners must take responsibility for resolving them."</a:t>
+              <a:t>Say: "The executive team must establish whether the performance reported by individual functions is sufficient to produce the intended collective outcome. This requires attention to people performance and organisational performance."</a:t>
+            </a:r>
+          </a:p>
+          <a:p>
+            <a:r>
+              <a:rPr lang="en-GB" dirty="0"/>
+              <a:t>People performance. Say: "Executives examine whether individuals and teams are delivering their agreed KPIs, OKRs and behavioural expectations. They also consider whether the required contributions are being coordinated effectively across functions."</a:t>
+            </a:r>
+          </a:p>
+          <a:p>
+            <a:r>
+              <a:rPr lang="en-GB" dirty="0"/>
+              <a:t>Organisational performance. Say: "Executives examine whether the relevant organisational conditions are enabling those contributions. Where organisational constraints affect delivery, the appropriate executive owners must take responsibility for resolving them."</a:t>
             </a:r>
           </a:p>
           <a:p>
@@ -1631,25 +1631,25 @@
           <a:p>
             <a:r>
               <a:rPr lang="en-GB" b="1" dirty="0"/>
-              <a:t>2. Walk through the three shifts, then the implication of each for the two operating systems.</a:t>
-            </a:r>
-          </a:p>
-          <a:p>
-            <a:r>
-              <a:rPr lang="en-GB" dirty="0"/>
-              <a:t>Shift 1 · From Annual to Continuous. Traditional orientation: Performance is formally evaluated at annual or biannual intervals. Evolving orientation: Regular check-ins, periodic reviews and timely feedback support performance throughout execution. Implication for the two operating systems: Human contributions and relevant ESRG conditions are reviewed frequently enough to identify emerging gaps and influence results.</a:t>
-            </a:r>
-          </a:p>
-          <a:p>
-            <a:r>
-              <a:rPr lang="en-GB" dirty="0"/>
-              <a:t>Shift 2 · From Rating-Centric to Development-Centric. Traditional orientation: Performance conversations concentrate heavily on ratings and historical achievement. Evolving orientation: Performance evidence informs development, capability strengthening and future improvement. Implication for the two operating systems: Individual development is considered alongside improvements to organisational processes, systems, resources and governance arrangements.</a:t>
-            </a:r>
-          </a:p>
-          <a:p>
-            <a:r>
-              <a:rPr lang="en-GB" dirty="0"/>
-              <a:t>Shift 3 · From Individual to Team Performance. Traditional orientation: Performance assessment concentrates primarily on individual achievement. Evolving orientation: Individual accountability is complemented by attention to team and cross-functional contributions. Implication for the two operating systems: Human collaboration and organisational dependencies become more visible within the performance management system.</a:t>
+              <a:t>2. Walk through the three shifts, then the implication of each for people performance and organisational performance.</a:t>
+            </a:r>
+          </a:p>
+          <a:p>
+            <a:r>
+              <a:rPr lang="en-GB" dirty="0"/>
+              <a:t>Shift 1 · From Annual to Continuous. Traditional orientation: Performance is formally evaluated at annual or biannual intervals. Evolving orientation: Regular check-ins, periodic reviews and timely feedback support performance throughout execution. Implication for people performance and organisational performance: Human contributions and relevant organisational conditions are reviewed frequently enough to identify emerging gaps and influence results.</a:t>
+            </a:r>
+          </a:p>
+          <a:p>
+            <a:r>
+              <a:rPr lang="en-GB" dirty="0"/>
+              <a:t>Shift 2 · From Rating-Centric to Development-Centric. Traditional orientation: Performance conversations concentrate heavily on ratings and historical achievement. Evolving orientation: Performance evidence informs development, capability strengthening and future improvement. Implication for people performance and organisational performance: Individual development is considered alongside improvements to organisational processes, systems, resources and governance arrangements.</a:t>
+            </a:r>
+          </a:p>
+          <a:p>
+            <a:r>
+              <a:rPr lang="en-GB" dirty="0"/>
+              <a:t>Shift 3 · From Individual to Team Performance. Traditional orientation: Performance assessment concentrates primarily on individual achievement. Evolving orientation: Individual accountability is complemented by attention to team and cross-functional contributions. Implication for people performance and organisational performance: Human collaboration and organisational dependencies become more visible within the performance management system.</a:t>
             </a:r>
           </a:p>
           <a:p>
@@ -2012,7 +2012,7 @@
           <a:p>
             <a:r>
               <a:rPr lang="en-GB" dirty="0"/>
-              <a:t>Order: both activities are group work and Capstone work. Activity 1 needs the group’s confirmed Enterprise OKRs from Unit 3, part 4.2. Activity 2 uses the business functions the group names in Activity 1.</a:t>
+              <a:t>Order: both activities are group work and Capstone work. Activity 1 needs the group’s confirmed Enterprise OKRs from Unit 3, part 5.2. Activity 2 uses the business functions the group names in Activity 1.</a:t>
             </a:r>
           </a:p>
           <a:p>
@@ -2171,25 +2171,25 @@
           <a:p>
             <a:r>
               <a:rPr lang="en-GB" dirty="0"/>
-              <a:t>HOS — Required Contribution: The work, results or behaviours expected from individuals and teams.</a:t>
-            </a:r>
-          </a:p>
-          <a:p>
-            <a:r>
-              <a:rPr lang="en-GB" dirty="0"/>
-              <a:t>HOS — Performance Measure: One or two KPIs, OKRs or observable behavioural measures that demonstrate the required contribution.</a:t>
-            </a:r>
-          </a:p>
-          <a:p>
-            <a:r>
-              <a:rPr lang="en-GB" dirty="0"/>
-              <a:t>Required ESRG Contribution: The critical organisational conditions needed to enable performance. Identify the relevant Environment, Systems, Resources or Governance requirements.</a:t>
-            </a:r>
-          </a:p>
-          <a:p>
-            <a:r>
-              <a:rPr lang="en-GB" dirty="0"/>
-              <a:t>ESRG — Measure or Evidence: A measure or evidence showing whether the required organisational conditions are available and functioning effectively.</a:t>
+              <a:t>People Performance — Required Contribution: The work, results or behaviours expected from individuals and teams.</a:t>
+            </a:r>
+          </a:p>
+          <a:p>
+            <a:r>
+              <a:rPr lang="en-GB" dirty="0"/>
+              <a:t>People Performance — Performance Measure: One or two KPIs, OKRs or observable behavioural measures that demonstrate the required contribution.</a:t>
+            </a:r>
+          </a:p>
+          <a:p>
+            <a:r>
+              <a:rPr lang="en-GB" dirty="0"/>
+              <a:t>Required Organisational Condition: The critical organisational conditions needed to enable performance. Identify the relevant Environment, Systems, Resources or Governance requirements.</a:t>
+            </a:r>
+          </a:p>
+          <a:p>
+            <a:r>
+              <a:rPr lang="en-GB" dirty="0"/>
+              <a:t>Organisational Conditions — Measure or Evidence: A measure or evidence showing whether the required organisational conditions are available and functioning effectively.</a:t>
             </a:r>
           </a:p>
           <a:p>
@@ -2228,7 +2228,7 @@
           <a:p>
             <a:r>
               <a:rPr lang="en-GB" dirty="0"/>
-              <a:t>2. Human performance expectations are clearly distinguished from organisational enabling conditions.</a:t>
+              <a:t>2. People performance expectations are clearly distinguished from organisational enabling conditions.</a:t>
             </a:r>
           </a:p>
           <a:p>
@@ -2273,7 +2273,7 @@
           <a:p>
             <a:r>
               <a:rPr lang="en-GB" dirty="0"/>
-              <a:t>3. For each function, the group completes the six fields: business function, required functional contribution, Human Operating System required contribution and performance measure, required ESRG contribution and its measure or evidence.</a:t>
+              <a:t>3. For each function, the group completes the six fields: business function, required functional contribution, people performance required contribution and performance measure, required organisational condition and its measure or evidence.</a:t>
             </a:r>
           </a:p>
           <a:p>
@@ -2589,7 +2589,7 @@
           <a:p>
             <a:r>
               <a:rPr lang="en-GB" dirty="0"/>
-              <a:t>- 1 · Awareness: Performance measurement answers what happened; performance management decides what to do about it. Enterprise performance comes from two operating systems: the Human Operating System (results against KPIs and OKRs, and behaviours) and the Organisational Operating System (Environment, Systems, Resources and Governance, ESRG). The S2R® Contribution Map™ connects an enterprise Key Result to the contribution each function, its people and the organisation must make. FACES names the five functions that manage those contributions across both systems.</a:t>
+              <a:t>- 1 · Awareness: Performance measurement answers what happened; performance management decides what to do about it. Enterprise performance comes from people performance (results against KPIs and OKRs, and behaviours) and organisational performance (the organisational conditions: environment, systems, resources and governance). The S2R® Contribution Map™ connects an enterprise Key Result to the contribution each function, its people and the organisation must make. FACES names the five functions that manage those contributions across both systems.</a:t>
             </a:r>
           </a:p>
           <a:p>
@@ -2607,7 +2607,7 @@
           <a:p>
             <a:r>
               <a:rPr lang="en-GB" dirty="0"/>
-              <a:t>- 4 · Integration: The worked example mapped one enterprise Key Result across Customer Service, IT, Operations and Workforce Planning: each function’s contribution, what its people must deliver and the ESRG conditions that enable them, each with a measure or evidence. FACES then showed how those contributions are managed in practice.</a:t>
+              <a:t>- 4 · Integration: The worked example mapped one enterprise Key Result across Customer Service, IT, Operations and Workforce Planning: each function’s contribution, what its people must deliver and the organisational conditions that enable them, each with a measure or evidence. FACES then showed how those contributions are managed in practice.</a:t>
             </a:r>
           </a:p>
           <a:p>
@@ -2835,7 +2835,7 @@
           <a:p>
             <a:r>
               <a:rPr lang="en-GB" dirty="0"/>
-              <a:t>C · Create Measurement Transparency: What evidence will make both human performance and organisational constraints visible? The template asks: How will human performance and ESRG effectiveness be made visible?</a:t>
+              <a:t>C · Create Measurement Transparency: What evidence will make both people performance and organisational constraints visible? The template asks: How will people performance and the effectiveness of the organisational conditions be made visible?</a:t>
             </a:r>
           </a:p>
           <a:p>
@@ -3046,7 +3046,7 @@
           <a:p>
             <a:r>
               <a:rPr lang="en-GB" dirty="0"/>
-              <a:t>Section 1 · Awareness: measurement and management, the two operating systems, the S2R® Contribution Map™ and FACES.</a:t>
+              <a:t>Section 1 · Awareness: measurement and management, people performance and organisational performance, the S2R® Contribution Map™ and FACES.</a:t>
             </a:r>
           </a:p>
           <a:p>
@@ -3657,13 +3657,13 @@
           <a:p>
             <a:r>
               <a:rPr lang="en-GB" dirty="0"/>
-              <a:t>Say: "It establishes a clear line of sight between the organisation’s strategic intent and the contributions required across its two operating systems: the Human Operating System, the results and behaviours individuals and teams must deliver; and the Organisational Operating System, the Environment, Systems, Resources and Governance (ESRG) necessary to enable those contributions."</a:t>
-            </a:r>
-          </a:p>
-          <a:p>
-            <a:r>
-              <a:rPr lang="en-GB" dirty="0"/>
-              <a:t>Say: "The map identifies the relationships and dependencies between functions, making visible how their combined contributions support enterprise results. Where appropriate, it also establishes measurable performance commitments or evidence that the required organisational conditions are in place."</a:t>
+              <a:t>Say: "It establishes a clear line of sight between the organisation’s strategic intent and the contributions required across people performance and organisational performance: people performance, the results and behaviours individuals and teams must deliver; and organisational performance, the organisational conditions (environment, systems, resources and governance) necessary to enable those contributions."</a:t>
+            </a:r>
+          </a:p>
+          <a:p>
+            <a:r>
+              <a:rPr lang="en-GB" dirty="0"/>
+              <a:t>Say: "The map identifies the relationships and dependencies between functions, making visible how their combined contributions support enterprise results. Where appropriate, it also establishes measurable performance commitments or evidence that the required organisational conditions support delivery."</a:t>
             </a:r>
           </a:p>
           <a:p>
@@ -3729,13 +3729,13 @@
           <a:p>
             <a:r>
               <a:rPr lang="en-GB" dirty="0"/>
-              <a:t>Step 3 · Human and organisational contributions: what is required to deliver each functional contribution? For each function, identify the results and behaviours required from individuals and teams, together with measurable performance commitments wherever practical; and the specific ESRG conditions necessary to enable delivery, together with appropriate performance measures or evidence that those conditions are established and functioning.</a:t>
-            </a:r>
-          </a:p>
-          <a:p>
-            <a:r>
-              <a:rPr lang="en-GB" dirty="0"/>
-              <a:t>Only the ESRG elements relevant to the required contribution are included. Not every ESRG requirement needs a numerical metric.</a:t>
+              <a:t>Step 3 · Human and organisational contributions: what is required to deliver each functional contribution? For each function, identify the results and behaviours required from individuals and teams, together with measurable performance commitments wherever practical; and the specific organisational conditions necessary to enable delivery, together with appropriate performance measures or evidence that those conditions are established and functioning.</a:t>
+            </a:r>
+          </a:p>
+          <a:p>
+            <a:r>
+              <a:rPr lang="en-GB" dirty="0"/>
+              <a:t>Only the organisational conditions relevant to the required contribution are included. Not every organisational condition needs a numerical metric.</a:t>
             </a:r>
           </a:p>
           <a:p>
@@ -3844,7 +3844,7 @@
           <a:p>
             <a:r>
               <a:rPr lang="en-GB" b="1" dirty="0"/>
-              <a:t>1.3 — HOW THE CONTRIBUTION MAP CONNECTS TO THE TWO OPERATING SYSTEMS</a:t>
+              <a:t>1.3 — HOW THE CONTRIBUTION MAP CONNECTS PEOPLE PERFORMANCE AND ORGANISATIONAL PERFORMANCE</a:t>
             </a:r>
           </a:p>
           <a:p>
@@ -3868,19 +3868,19 @@
           <a:p>
             <a:r>
               <a:rPr lang="en-GB" dirty="0"/>
-              <a:t>Say: "The S2R® Contribution Map™ integrates the two operating systems into the design of enterprise performance. For every required functional contribution, the map identifies two interconnected dimensions."</a:t>
-            </a:r>
-          </a:p>
-          <a:p>
-            <a:r>
-              <a:rPr lang="en-GB" dirty="0"/>
-              <a:t>Human Performance: what must people deliver? The map establishes the expected results and behaviours of individuals and teams, supported by measurable performance commitments wherever practical.</a:t>
-            </a:r>
-          </a:p>
-          <a:p>
-            <a:r>
-              <a:rPr lang="en-GB" dirty="0"/>
-              <a:t>Organisational Performance: what must the organisation enable? The map identifies the specific Environment, Systems, Resources and Governance (ESRG) requirements necessary for people to deliver their contributions. These requirements may be expressed through numerical performance standards or other evidence of organisational readiness and effectiveness.</a:t>
+              <a:t>Say: "The S2R® Contribution Map™ integrates people performance and organisational performance into the design of enterprise performance. For every required functional contribution, the map identifies two interconnected dimensions."</a:t>
+            </a:r>
+          </a:p>
+          <a:p>
+            <a:r>
+              <a:rPr lang="en-GB" dirty="0"/>
+              <a:t>People Performance: what must people deliver? The map establishes the expected results and behaviours of individuals and teams, supported by measurable performance commitments wherever practical.</a:t>
+            </a:r>
+          </a:p>
+          <a:p>
+            <a:r>
+              <a:rPr lang="en-GB" dirty="0"/>
+              <a:t>Organisational Performance: what must the organisation enable? The map identifies the specific organisational conditions necessary for people to deliver their contributions. These requirements may be expressed through numerical performance standards or other evidence of organisational readiness and effectiveness.</a:t>
             </a:r>
           </a:p>
           <a:p>
@@ -3922,7 +3922,7 @@
           <a:p>
             <a:r>
               <a:rPr lang="en-GB" dirty="0"/>
-              <a:t>Say: "The next challenge is to ensure that these commitments are consistently delivered and that performance gaps trigger appropriate management action. The FACES Framework establishes the five management functions required to achieve this across the Human and Organisational Operating Systems."</a:t>
+              <a:t>Say: "The next challenge is to ensure that these commitments are consistently delivered and that performance gaps trigger appropriate management action. The FACES Framework establishes the five management functions required to achieve this across people performance and organisational performance."</a:t>
             </a:r>
           </a:p>
           <a:p>
@@ -4037,7 +4037,7 @@
           <a:p>
             <a:r>
               <a:rPr lang="en-GB" b="1" dirty="0"/>
-              <a:t>1. Take each function across both columns, the people first, then the ESRG conditions.</a:t>
+              <a:t>1. Take each function across both columns, the people first, then the organisational conditions.</a:t>
             </a:r>
           </a:p>
           <a:p>
@@ -4052,13 +4052,13 @@
           <a:p>
             <a:r>
               <a:rPr lang="en-GB" dirty="0"/>
-              <a:t>Human performance. Say: "Establish a culture of individual and team performance ownership. Employees understand their targets, take responsibility for commitments and demonstrate expected behaviours. Leaders reinforce performance through regular feedback, recognition of dependable contributors and consistent responses to underperformance. Achieving results through behaviours that undermine colleagues, customers or organisational values is not acceptable performance."</a:t>
-            </a:r>
-          </a:p>
-          <a:p>
-            <a:r>
-              <a:rPr lang="en-GB" dirty="0"/>
-              <a:t>Organisational performance. Say: "Establish organisational responsibility for enabling results. Leaders must demonstrate the same commitment to maintaining effective operating conditions that they expect employees to demonstrate towards their targets. Recurring system failures, inadequate resources or governance delays cannot be continually tolerated while employees are held accountable for missed results. A results culture requires leaders to address ESRG constraints that repeatedly undermine delivery."</a:t>
+              <a:t>People performance. Say: "Establish a culture of individual and team performance ownership. Employees understand their targets, take responsibility for commitments and demonstrate expected behaviours. Leaders reinforce performance through regular feedback, recognition of dependable contributors and consistent responses to underperformance. Achieving results through behaviours that undermine colleagues, customers or organisational values is not acceptable performance."</a:t>
+            </a:r>
+          </a:p>
+          <a:p>
+            <a:r>
+              <a:rPr lang="en-GB" dirty="0"/>
+              <a:t>Organisational performance. Say: "Establish organisational responsibility for enabling results. Leaders must demonstrate the same commitment to maintaining effective operating conditions that they expect employees to demonstrate towards their targets. Recurring system failures, inadequate resources or governance delays cannot be continually tolerated while employees are held accountable for missed results. A results culture requires leaders to address constraints in the organisational conditions that repeatedly undermine delivery."</a:t>
             </a:r>
           </a:p>
           <a:p>
@@ -4073,13 +4073,13 @@
           <a:p>
             <a:r>
               <a:rPr lang="en-GB" dirty="0"/>
-              <a:t>Human performance. Say: "Connect individual and team performance to enterprise strategic outcomes. Strategic priorities must translate into meaningful KPIs, OKRs and behavioural expectations. Employees should understand how their work contributes to broader organisational results. Alignment also includes collaboration where successful delivery depends on contributions across departments."</a:t>
-            </a:r>
-          </a:p>
-          <a:p>
-            <a:r>
-              <a:rPr lang="en-GB" dirty="0"/>
-              <a:t>Organisational performance. Say: "Align ESRG with enterprise strategic requirements. The working environment, systems, resources and governance arrangements must be configured to support the results the organisation intends to achieve. For example, a strategic commitment to faster customer service must be supported by efficient workflows, sufficient capacity and timely decision-making. Targets become difficult to achieve when organisational capability is misaligned with strategic ambition."</a:t>
+              <a:t>People performance. Say: "Connect individual and team performance to enterprise strategic outcomes. Strategic priorities must translate into meaningful KPIs, OKRs and behavioural expectations. Employees should understand how their work contributes to broader organisational results. Alignment also includes collaboration where successful delivery depends on contributions across departments."</a:t>
+            </a:r>
+          </a:p>
+          <a:p>
+            <a:r>
+              <a:rPr lang="en-GB" dirty="0"/>
+              <a:t>Organisational performance. Say: "Align the organisational conditions with enterprise strategic requirements. The working environment, systems, resources and governance arrangements must be configured to support the results the organisation intends to achieve. For example, a strategic commitment to faster customer service must be supported by efficient workflows, sufficient capacity and timely decision-making. Targets become difficult to achieve when organisational capability is misaligned with strategic ambition."</a:t>
             </a:r>
           </a:p>
           <a:p>
@@ -4094,13 +4094,13 @@
           <a:p>
             <a:r>
               <a:rPr lang="en-GB" dirty="0"/>
-              <a:t>Human performance. Say: "Make performance expectations and assessment criteria clear and credible. Employees must understand their KPIs, targets, weightings, behavioural standards and rating criteria. Performance assessments should rest on observable evidence. Transparency allows employees to understand their progress and builds confidence in the fairness of performance evaluations."</a:t>
-            </a:r>
-          </a:p>
-          <a:p>
-            <a:r>
-              <a:rPr lang="en-GB" dirty="0"/>
-              <a:t>Organisational performance. Say: "Make organisational performance conditions measurable and visible. Leaders need evidence of whether ESRG is supporting or constraining delivery. This includes system availability, process efficiency, capacity against demand, cross-functional coordination and decision turnaround times. A missed departmental target reveals a performance gap; ESRG evidence helps establish why that gap exists and where intervention is required."</a:t>
+              <a:t>People performance. Say: "Make performance expectations and assessment criteria clear and credible. Employees must understand their KPIs, targets, weightings, behavioural standards and rating criteria. Performance assessments should rest on observable evidence. Transparency allows employees to understand their progress and builds confidence in the fairness of performance evaluations."</a:t>
+            </a:r>
+          </a:p>
+          <a:p>
+            <a:r>
+              <a:rPr lang="en-GB" dirty="0"/>
+              <a:t>Organisational performance. Say: "Make organisational performance conditions measurable and visible. Leaders need evidence of whether the organisational conditions are supporting or constraining delivery. This includes system availability, process efficiency, capacity against demand, cross-functional coordination and decision turnaround times. A missed departmental target reveals a performance gap; evidence on the organisational conditions helps establish why that gap exists and where intervention is required."</a:t>
             </a:r>
           </a:p>
           <a:p>
@@ -4115,13 +4115,13 @@
           <a:p>
             <a:r>
               <a:rPr lang="en-GB" dirty="0"/>
-              <a:t>Human performance. Say: "Clarify responsibility for individual contributions and collective results. Individuals remain accountable for their KPIs, OKRs and behaviours. Managers are accountable for setting expectations, providing feedback and addressing performance concerns. Where results require teamwork, each person’s contribution and responsibilities must be clear. Shared accountability should strengthen ownership without making responsibility ambiguous."</a:t>
-            </a:r>
-          </a:p>
-          <a:p>
-            <a:r>
-              <a:rPr lang="en-GB" dirty="0"/>
-              <a:t>Organisational performance. Say: "Assign accountability for organisational enablement and constraint resolution. Responsibility for ESRG must sit with the appropriate owners. Operations may own process efficiency, IT may own system reliability, resource owners may own capacity, and executives may own governance decisions. Where one function’s performance depends on another, the dependency, accountable owner and escalation arrangements must be explicit. This forms part of the foundation for the S2R® Contribution Map™."</a:t>
+              <a:t>People performance. Say: "Clarify responsibility for individual contributions and collective results. Individuals remain accountable for their KPIs, OKRs and behaviours. Managers are accountable for setting expectations, providing feedback and addressing performance concerns. Where results require teamwork, each person’s contribution and responsibilities must be clear. Shared accountability should strengthen ownership without making responsibility ambiguous."</a:t>
+            </a:r>
+          </a:p>
+          <a:p>
+            <a:r>
+              <a:rPr lang="en-GB" dirty="0"/>
+              <a:t>Organisational performance. Say: "Assign accountability for organisational enablement and constraint resolution. Responsibility for each organisational condition must sit with the appropriate leader. Operations may own process efficiency, IT may own system reliability, resource owners may own capacity, and executives may own governance decisions. Where one function’s performance depends on another, the dependency, accountable owner and escalation arrangements must be explicit. This forms part of the foundation for the S2R® Contribution Map™."</a:t>
             </a:r>
           </a:p>
           <a:p>
@@ -4136,13 +4136,13 @@
           <a:p>
             <a:r>
               <a:rPr lang="en-GB" dirty="0"/>
-              <a:t>Human performance. Say: "Use performance evidence to strengthen individual and team capability. Reviews should identify development needs linked to actual performance requirements. These may include technical skills, planning, decision-making, leadership, collaboration or behavioural improvement. Development actions should have clear objectives and follow-up reviews to determine whether performance has improved."</a:t>
-            </a:r>
-          </a:p>
-          <a:p>
-            <a:r>
-              <a:rPr lang="en-GB" dirty="0"/>
-              <a:t>Organisational performance. Say: "Use performance evidence to strengthen organisational operating capability. Recurring ESRG constraints should trigger improvements to workflows, technologies, resource allocation, operating conditions or governance arrangements. For example, repeated approval delays may require redesigned decision rights, while persistent capacity shortages may require resource reallocation. Organisational improvement must be monitored to establish whether the intervention strengthens delivery."</a:t>
+              <a:t>People performance. Say: "Use performance evidence to strengthen individual and team capability. Reviews should identify development needs linked to actual performance requirements. These may include technical skills, planning, decision-making, leadership, collaboration or behavioural improvement. Development actions should have clear objectives and follow-up reviews to determine whether performance has improved."</a:t>
+            </a:r>
+          </a:p>
+          <a:p>
+            <a:r>
+              <a:rPr lang="en-GB" dirty="0"/>
+              <a:t>Organisational performance. Say: "Use performance evidence to strengthen organisational operating capability. Recurring constraints in the organisational conditions should trigger improvements to workflows, technologies, resource allocation, operating conditions or governance arrangements. For example, repeated approval delays may require redesigned decision rights, while persistent capacity shortages may require resource reallocation. Organisational improvement must be monitored to establish whether the intervention strengthens delivery."</a:t>
             </a:r>
           </a:p>
           <a:p>
@@ -4305,7 +4305,7 @@
           <a:p>
             <a:r>
               <a:rPr lang="en-GB" dirty="0"/>
-              <a:t>Draw attention to the distinction between human performance accountability and organisational enablement accountability.</a:t>
+              <a:t>Draw attention to the distinction between people performance accountability and organisational enablement accountability.</a:t>
             </a:r>
           </a:p>
           <a:p>
@@ -4335,7 +4335,7 @@
           <a:p>
             <a:r>
               <a:rPr lang="en-GB" dirty="0"/>
-              <a:t>Participants write a personal reflection at the foot of part 1.4 (Learning Portfolio): For the Key Result you chose in part 1.3: which FACES function is weakest in the way your organisation manages these contributions today, for the people and for the ESRG conditions? Which one management arrangement would strengthen it?</a:t>
+              <a:t>Participants write a personal reflection at the foot of part 1.4 (Learning Portfolio): For the Key Result you chose in part 1.3: which FACES function is weakest in the way your organisation manages these contributions today, for the people and for the organisational conditions? Which one management arrangement would strengthen it?</a:t>
             </a:r>
           </a:p>
         </p:txBody>
@@ -4441,13 +4441,13 @@
           <a:p>
             <a:r>
               <a:rPr lang="en-GB" dirty="0"/>
-              <a:t>Say: "The four bridges work together to sustain the connection between strategy and results. Each addresses a particular risk that can weaken execution across the Human and Organisational Operating Systems."</a:t>
-            </a:r>
-          </a:p>
-          <a:p>
-            <a:r>
-              <a:rPr lang="en-GB" dirty="0"/>
-              <a:t>Take the bridges one at a time through the table: why each matters, what it sustains for the people, what it sustains for the ESRG conditions, and what happens when it weakens.</a:t>
+              <a:t>Say: "The four bridges work together to sustain the connection between strategy and results. Each addresses a particular risk that can weaken execution across people performance and organisational performance."</a:t>
+            </a:r>
+          </a:p>
+          <a:p>
+            <a:r>
+              <a:rPr lang="en-GB" dirty="0"/>
+              <a:t>Take the bridges one at a time through the table: why each matters, what it sustains for the people, what it sustains for the organisational conditions, and what happens when it weakens.</a:t>
             </a:r>
           </a:p>
           <a:p>
@@ -4477,13 +4477,13 @@
           <a:p>
             <a:r>
               <a:rPr lang="en-GB" dirty="0"/>
-              <a:t>Human Operating System: Maintains the line of sight between enterprise objectives and individual or team expectations. Employees understand how their contributions support the intended result, including where delivery depends on other functions.</a:t>
-            </a:r>
-          </a:p>
-          <a:p>
-            <a:r>
-              <a:rPr lang="en-GB" dirty="0"/>
-              <a:t>Organisational Operating System (ESRG): Maintains alignment between strategic requirements and the organisational conditions needed to support them. Systems, resources, workflows and decision arrangements must remain appropriate to the demands of execution.</a:t>
+              <a:t>People performance: Maintains the line of sight between enterprise objectives and individual or team expectations. Employees understand how their contributions support the intended result, including where delivery depends on other functions.</a:t>
+            </a:r>
+          </a:p>
+          <a:p>
+            <a:r>
+              <a:rPr lang="en-GB" dirty="0"/>
+              <a:t>Organisational performance: Maintains alignment between strategic requirements and the organisational conditions needed to support them. Systems, resources, workflows and decision arrangements must remain appropriate to the demands of execution.</a:t>
             </a:r>
           </a:p>
           <a:p>
@@ -4510,19 +4510,19 @@
           <a:p>
             <a:r>
               <a:rPr lang="en-GB" dirty="0"/>
-              <a:t>Human Operating System: Establishes clear expectations for results, performance standards, behaviours and evidence of achievement. Employees and managers have a credible basis for evaluating contribution.</a:t>
-            </a:r>
-          </a:p>
-          <a:p>
-            <a:r>
-              <a:rPr lang="en-GB" dirty="0"/>
-              <a:t>Organisational Operating System (ESRG): Establishes how effective organisational enablement will be recognised. Relevant ESRG conditions are assessed through appropriate measures or qualitative evidence of their effectiveness.</a:t>
-            </a:r>
-          </a:p>
-          <a:p>
-            <a:r>
-              <a:rPr lang="en-GB" dirty="0"/>
-              <a:t>What happens when the bridge weakens: Different functions interpret success differently. Human performance may be rated positively while organisational constraints remain unresolved, creating a misleading picture of execution readiness and achievement.</a:t>
+              <a:t>People performance: Establishes clear expectations for results, performance standards, behaviours and evidence of achievement. Employees and managers have a credible basis for evaluating contribution.</a:t>
+            </a:r>
+          </a:p>
+          <a:p>
+            <a:r>
+              <a:rPr lang="en-GB" dirty="0"/>
+              <a:t>Organisational performance: Establishes how effective organisational enablement will be recognised. Relevant organisational conditions are assessed through appropriate measures or qualitative evidence of their effectiveness.</a:t>
+            </a:r>
+          </a:p>
+          <a:p>
+            <a:r>
+              <a:rPr lang="en-GB" dirty="0"/>
+              <a:t>What happens when the bridge weakens: Different functions interpret success differently. People performance may be rated positively while organisational constraints remain unresolved, creating a misleading picture of execution readiness and achievement.</a:t>
             </a:r>
           </a:p>
           <a:p>
@@ -4543,13 +4543,13 @@
           <a:p>
             <a:r>
               <a:rPr lang="en-GB" dirty="0"/>
-              <a:t>Human Operating System: Provides regular visibility of individual and team progress, emerging performance gaps and development needs. Review frequency reflects the nature of the contribution and its effect on results.</a:t>
-            </a:r>
-          </a:p>
-          <a:p>
-            <a:r>
-              <a:rPr lang="en-GB" dirty="0"/>
-              <a:t>Organisational Operating System (ESRG): Provides visibility of changing organisational conditions, such as system reliability, staffing capacity, process efficiency and decision delays. Monitoring frequency reflects the nature and significance of each condition.</a:t>
+              <a:t>People performance: Provides regular visibility of individual and team progress, emerging performance gaps and development needs. Review frequency reflects the nature of the contribution and its effect on results.</a:t>
+            </a:r>
+          </a:p>
+          <a:p>
+            <a:r>
+              <a:rPr lang="en-GB" dirty="0"/>
+              <a:t>Organisational performance: Provides visibility of changing organisational conditions, such as system reliability, staffing capacity, process efficiency and decision delays. Monitoring frequency reflects the nature and significance of each condition.</a:t>
             </a:r>
           </a:p>
           <a:p>
@@ -4576,13 +4576,13 @@
           <a:p>
             <a:r>
               <a:rPr lang="en-GB" dirty="0"/>
-              <a:t>Human Operating System: Enables evidence-based conversations about contribution, achievement, behaviour, performance gaps and improvement. Employees and managers establish appropriate responses and follow-through.</a:t>
-            </a:r>
-          </a:p>
-          <a:p>
-            <a:r>
-              <a:rPr lang="en-GB" dirty="0"/>
-              <a:t>Organisational Operating System (ESRG): Enables leaders to examine ESRG constraints, determine their effect on delivery and assign decisions or interventions to the appropriate organisational owners. Cross-functional dependencies are addressed collectively.</a:t>
+              <a:t>People performance: Enables evidence-based conversations about contribution, achievement, behaviour, performance gaps and improvement. Employees and managers establish appropriate responses and follow-through.</a:t>
+            </a:r>
+          </a:p>
+          <a:p>
+            <a:r>
+              <a:rPr lang="en-GB" dirty="0"/>
+              <a:t>Organisational performance: Enables leaders to examine constraints in the organisational conditions, determine their effect on delivery and assign decisions or interventions to the appropriate leaders. Cross-functional dependencies are addressed collectively.</a:t>
             </a:r>
           </a:p>
           <a:p>
@@ -4685,7 +4685,7 @@
           <a:p>
             <a:r>
               <a:rPr lang="en-GB" b="1" dirty="0"/>
-              <a:t>2.2.2 — ACCOUNTABILITY ACROSS THE TWO OPERATING SYSTEMS</a:t>
+              <a:t>2.2.2 — ACCOUNTABILITY FOR PEOPLE PERFORMANCE AND ORGANISATIONAL PERFORMANCE</a:t>
             </a:r>
           </a:p>
           <a:p>
@@ -4715,13 +4715,13 @@
           <a:p>
             <a:r>
               <a:rPr lang="en-GB" dirty="0"/>
-              <a:t>Human Operating System. Say: "A compliance-driven approach tends to emphasise whether employees have met prescribed KPIs, OKRs and behavioural standards. A commitment-driven approach maintains these expectations while strengthening employees’ understanding of their contribution, ownership of results and participation in performance improvement."</a:t>
-            </a:r>
-          </a:p>
-          <a:p>
-            <a:r>
-              <a:rPr lang="en-GB" dirty="0"/>
-              <a:t>Organisational Operating System. Say: "A compliance-driven approach may establish requirements for systems, resources, processes and governance, but concentrate primarily on whether prescribed arrangements have been followed. A commitment-driven approach also examines whether those arrangements are effective in supporting the intended results and whether emerging constraints are being addressed."</a:t>
+              <a:t>People performance. Say: "A compliance-driven approach tends to emphasise whether employees have met prescribed KPIs, OKRs and behavioural standards. A commitment-driven approach maintains these expectations while strengthening employees’ understanding of their contribution, ownership of results and participation in performance improvement."</a:t>
+            </a:r>
+          </a:p>
+          <a:p>
+            <a:r>
+              <a:rPr lang="en-GB" dirty="0"/>
+              <a:t>Organisational performance. Say: "A compliance-driven approach may establish requirements for systems, resources, processes and governance, but concentrate primarily on whether prescribed arrangements have been followed. A commitment-driven approach also examines whether those arrangements are effective in supporting the intended results and whether emerging constraints are being addressed."</a:t>
             </a:r>
           </a:p>
           <a:p>
@@ -4986,7 +4986,7 @@
           <a:p>
             <a:r>
               <a:rPr lang="en-GB" dirty="0"/>
-              <a:t>Enterprise integration requirement: Interpret human performance evidence alongside relevant ESRG conditions. Establish whether workforce capability and organisational arrangements support the results expected from people.</a:t>
+              <a:t>Enterprise integration requirement: Interpret people performance evidence alongside relevant organisational conditions. Establish whether workforce capability and organisational arrangements support the results expected from people.</a:t>
             </a:r>
           </a:p>
           <a:p>
@@ -5451,7 +5451,7 @@
           <a:p>
             <a:r>
               <a:rPr lang="en-GB" dirty="0"/>
-              <a:t>Say: "This section sets the foundations: what performance management is, the two operating systems behind enterprise performance, the S2R® Contribution Map™ that connects them to an enterprise result, and FACES, the five functions that manage them."</a:t>
+              <a:t>Say: "This section sets the foundations: what performance management is, people performance and organisational performance behind enterprise performance, the S2R® Contribution Map™ that connects them to an enterprise result, and FACES, the five functions that manage them."</a:t>
             </a:r>
           </a:p>
         </p:txBody>
@@ -5604,7 +5604,7 @@
           <a:p>
             <a:r>
               <a:rPr lang="en-GB" dirty="0"/>
-              <a:t>Use Customer Service to demonstrate the distinction between the functional contribution, human performance and organisational enablement. Emphasise that the enterprise target covers all customer enquiries, while the employee resolution measure covers enquiries within employees’ control. Then examine the remaining functions, highlighting how their contributions support the same enterprise result.</a:t>
+              <a:t>Use Customer Service to demonstrate the distinction between the functional contribution, people performance and organisational enablement. Emphasise that the enterprise target covers all customer enquiries, while the employee resolution measure covers enquiries within employees’ control. Then examine the remaining functions, highlighting how their contributions support the same enterprise result.</a:t>
             </a:r>
           </a:p>
           <a:p>
@@ -5625,25 +5625,25 @@
           <a:p>
             <a:r>
               <a:rPr lang="en-GB" dirty="0"/>
-              <a:t>Human Operating System, required contribution: Employees resolve assigned enquiries, follow up on outstanding cases and escalate delays requiring support from other functions.</a:t>
-            </a:r>
-          </a:p>
-          <a:p>
-            <a:r>
-              <a:rPr lang="en-GB" dirty="0"/>
-              <a:t>HOS performance metric: Resolution: ≥90% of enquiries within employees’ control resolved within 48 hours. Follow-through: ≥95% of outstanding enquiries followed up within the agreed period.</a:t>
-            </a:r>
-          </a:p>
-          <a:p>
-            <a:r>
-              <a:rPr lang="en-GB" dirty="0"/>
-              <a:t>Required ESRG contribution: Systems: An enquiry management system that records ownership, progress and resolution times. Governance: Clear escalation authority for enquiries requiring decisions outside Customer Service.</a:t>
-            </a:r>
-          </a:p>
-          <a:p>
-            <a:r>
-              <a:rPr lang="en-GB" dirty="0"/>
-              <a:t>ESRG measure or evidence of readiness: Systems: Enquiry records provide complete timestamps and assigned ownership. Governance: Documented escalation routes and named decision owners.</a:t>
+              <a:t>People performance, required contribution: Employees resolve assigned enquiries, follow up on outstanding cases and escalate delays requiring support from other functions.</a:t>
+            </a:r>
+          </a:p>
+          <a:p>
+            <a:r>
+              <a:rPr lang="en-GB" dirty="0"/>
+              <a:t>People performance metric: Resolution: ≥90% of enquiries within employees’ control resolved within 48 hours. Follow-through: ≥95% of outstanding enquiries followed up within the agreed period.</a:t>
+            </a:r>
+          </a:p>
+          <a:p>
+            <a:r>
+              <a:rPr lang="en-GB" dirty="0"/>
+              <a:t>Required organisational condition: Systems: An enquiry management system that records ownership, progress and resolution times. Governance: Clear escalation authority for enquiries requiring decisions outside Customer Service.</a:t>
+            </a:r>
+          </a:p>
+          <a:p>
+            <a:r>
+              <a:rPr lang="en-GB" dirty="0"/>
+              <a:t>Organisational conditions, measure or evidence of readiness: Systems: Enquiry records provide complete timestamps and assigned ownership. Governance: Documented escalation routes and named decision owners.</a:t>
             </a:r>
           </a:p>
           <a:p>
@@ -5664,25 +5664,25 @@
           <a:p>
             <a:r>
               <a:rPr lang="en-GB" dirty="0"/>
-              <a:t>Human Operating System, required contribution: IT employees monitor system performance, respond to incidents and restore disrupted services.</a:t>
-            </a:r>
-          </a:p>
-          <a:p>
-            <a:r>
-              <a:rPr lang="en-GB" dirty="0"/>
-              <a:t>HOS performance metric: Incident resolution: ≥95% of critical incidents resolved within two hours. Communication: ≥95% of confirmed critical incidents communicated to affected departments within 15 minutes.</a:t>
-            </a:r>
-          </a:p>
-          <a:p>
-            <a:r>
-              <a:rPr lang="en-GB" dirty="0"/>
-              <a:t>Required ESRG contribution: Systems: Reliable infrastructure and monitoring capability to maintain system availability. Resources: Sufficient technical support coverage during service hours.</a:t>
-            </a:r>
-          </a:p>
-          <a:p>
-            <a:r>
-              <a:rPr lang="en-GB" dirty="0"/>
-              <a:t>ESRG measure or evidence of readiness: Systems: ≥99% customer management system availability during service hours. Resources: Approved technical support roster covering required service hours.</a:t>
+              <a:t>People performance, required contribution: IT employees monitor system performance, respond to incidents and restore disrupted services.</a:t>
+            </a:r>
+          </a:p>
+          <a:p>
+            <a:r>
+              <a:rPr lang="en-GB" dirty="0"/>
+              <a:t>People performance metric: Incident resolution: ≥95% of critical incidents resolved within two hours. Communication: ≥95% of confirmed critical incidents communicated to affected departments within 15 minutes.</a:t>
+            </a:r>
+          </a:p>
+          <a:p>
+            <a:r>
+              <a:rPr lang="en-GB" dirty="0"/>
+              <a:t>Required organisational condition: Systems: Reliable infrastructure and monitoring capability to maintain system availability. Resources: Sufficient technical support coverage during service hours.</a:t>
+            </a:r>
+          </a:p>
+          <a:p>
+            <a:r>
+              <a:rPr lang="en-GB" dirty="0"/>
+              <a:t>Organisational conditions, measure or evidence of readiness: Systems: ≥99% customer management system availability during service hours. Resources: Approved technical support roster covering required service hours.</a:t>
             </a:r>
           </a:p>
           <a:p>
@@ -5703,25 +5703,25 @@
           <a:p>
             <a:r>
               <a:rPr lang="en-GB" dirty="0"/>
-              <a:t>Human Operating System, required contribution: Employees process assigned requests accurately and escalate exceptions that could delay customer resolution.</a:t>
-            </a:r>
-          </a:p>
-          <a:p>
-            <a:r>
-              <a:rPr lang="en-GB" dirty="0"/>
-              <a:t>HOS performance metric: Turnaround: ≥95% of assigned requests completed within eight working hours. Accuracy: ≥98% processing accuracy.</a:t>
-            </a:r>
-          </a:p>
-          <a:p>
-            <a:r>
-              <a:rPr lang="en-GB" dirty="0"/>
-              <a:t>Required ESRG contribution: Governance: Approval authority must be assigned at the appropriate level to prevent avoidable delays. Systems: Processing workflows must support timely handovers between Operations and Customer Service.</a:t>
-            </a:r>
-          </a:p>
-          <a:p>
-            <a:r>
-              <a:rPr lang="en-GB" dirty="0"/>
-              <a:t>ESRG measure or evidence of readiness: Governance: Documented approval limits and designated decision owners. Systems: ≥95% of internal processing requests completed within the agreed turnaround time.</a:t>
+              <a:t>People performance, required contribution: Employees process assigned requests accurately and escalate exceptions that could delay customer resolution.</a:t>
+            </a:r>
+          </a:p>
+          <a:p>
+            <a:r>
+              <a:rPr lang="en-GB" dirty="0"/>
+              <a:t>People performance metric: Turnaround: ≥95% of assigned requests completed within eight working hours. Accuracy: ≥98% processing accuracy.</a:t>
+            </a:r>
+          </a:p>
+          <a:p>
+            <a:r>
+              <a:rPr lang="en-GB" dirty="0"/>
+              <a:t>Required organisational condition: Governance: Approval authority must be assigned at the appropriate level to prevent avoidable delays. Systems: Processing workflows must support timely handovers between Operations and Customer Service.</a:t>
+            </a:r>
+          </a:p>
+          <a:p>
+            <a:r>
+              <a:rPr lang="en-GB" dirty="0"/>
+              <a:t>Organisational conditions, measure or evidence of readiness: Governance: Documented approval limits and designated decision owners. Systems: ≥95% of internal processing requests completed within the agreed turnaround time.</a:t>
             </a:r>
           </a:p>
           <a:p>
@@ -5742,25 +5742,25 @@
           <a:p>
             <a:r>
               <a:rPr lang="en-GB" dirty="0"/>
-              <a:t>Human Operating System, required contribution: Workforce Planning employees forecast staffing requirements, prepare schedules and coordinate responses to identified capacity gaps.</a:t>
-            </a:r>
-          </a:p>
-          <a:p>
-            <a:r>
-              <a:rPr lang="en-GB" dirty="0"/>
-              <a:t>HOS performance metric: Planning: 100% of staffing schedules completed before the agreed deadline. Responsiveness: ≥95% of identified staffing gaps addressed within the agreed response period.</a:t>
-            </a:r>
-          </a:p>
-          <a:p>
-            <a:r>
-              <a:rPr lang="en-GB" dirty="0"/>
-              <a:t>Required ESRG contribution: Resources: Sufficient qualified staff available to meet forecast customer enquiry volumes. Governance: Authority to approve staffing adjustments when demand exceeds available capacity.</a:t>
-            </a:r>
-          </a:p>
-          <a:p>
-            <a:r>
-              <a:rPr lang="en-GB" dirty="0"/>
-              <a:t>ESRG measure or evidence of readiness: Resources: ≥95% staffing coverage against demand-based requirements. Governance: Agreed staffing adjustment authority and escalation arrangements.</a:t>
+              <a:t>People performance, required contribution: Workforce Planning employees forecast staffing requirements, prepare schedules and coordinate responses to identified capacity gaps.</a:t>
+            </a:r>
+          </a:p>
+          <a:p>
+            <a:r>
+              <a:rPr lang="en-GB" dirty="0"/>
+              <a:t>People performance metric: Planning: 100% of staffing schedules completed before the agreed deadline. Responsiveness: ≥95% of identified staffing gaps addressed within the agreed response period.</a:t>
+            </a:r>
+          </a:p>
+          <a:p>
+            <a:r>
+              <a:rPr lang="en-GB" dirty="0"/>
+              <a:t>Required organisational condition: Resources: Sufficient qualified staff available to meet forecast customer enquiry volumes. Governance: Authority to approve staffing adjustments when demand exceeds available capacity.</a:t>
+            </a:r>
+          </a:p>
+          <a:p>
+            <a:r>
+              <a:rPr lang="en-GB" dirty="0"/>
+              <a:t>Organisational conditions, measure or evidence of readiness: Resources: ≥95% staffing coverage against demand-based requirements. Governance: Agreed staffing adjustment authority and escalation arrangements.</a:t>
             </a:r>
           </a:p>
           <a:p>
@@ -5917,13 +5917,13 @@
           <a:p>
             <a:r>
               <a:rPr lang="en-GB" dirty="0"/>
-              <a:t>2 · Human Operating System: what must individuals and teams deliver? The map identifies the results and behaviours required from people, supported by measurable performance expectations wherever practical.</a:t>
-            </a:r>
-          </a:p>
-          <a:p>
-            <a:r>
-              <a:rPr lang="en-GB" dirty="0"/>
-              <a:t>3 · Organisational Operating System: what conditions must the organisation provide? The map identifies the relevant ESRG requirements necessary to enable the human contribution.</a:t>
+              <a:t>2 · People performance: what must individuals and teams deliver? The map identifies the results and behaviours required from people, supported by measurable performance expectations wherever practical.</a:t>
+            </a:r>
+          </a:p>
+          <a:p>
+            <a:r>
+              <a:rPr lang="en-GB" dirty="0"/>
+              <a:t>3 · Organisational performance: what conditions must the organisation provide? The map identifies the relevant organisational conditions necessary to enable the human contribution.</a:t>
             </a:r>
           </a:p>
           <a:p>
@@ -5932,13 +5932,13 @@
           <a:p>
             <a:r>
               <a:rPr lang="en-GB" b="1" dirty="0"/>
-              <a:t>2. Close on the ESRG measures.</a:t>
-            </a:r>
-          </a:p>
-          <a:p>
-            <a:r>
-              <a:rPr lang="en-GB" dirty="0"/>
-              <a:t>Say: "Only the ESRG elements that materially affect delivery are included. Some require numerical performance measures, such as system availability or staffing coverage. Others require evidence that an arrangement or capability exists and is functioning, such as documented approval authority or established escalation procedures."</a:t>
+              <a:t>2. Close on the measures for the organisational conditions.</a:t>
+            </a:r>
+          </a:p>
+          <a:p>
+            <a:r>
+              <a:rPr lang="en-GB" dirty="0"/>
+              <a:t>Say: "Only the organisational conditions that materially affect delivery are included. Some require numerical performance measures, such as system availability or staffing coverage. Others require evidence that an arrangement or capability exists and is functioning, such as documented approval authority or established escalation procedures."</a:t>
             </a:r>
           </a:p>
         </p:txBody>
@@ -6044,7 +6044,7 @@
           <a:p>
             <a:r>
               <a:rPr lang="en-GB" dirty="0"/>
-              <a:t>Say: "The Contribution Map™ has established the contributions required from Customer Service, IT, Operations and Workforce Planning, including the expected human performance and the organisational conditions necessary to enable delivery. The following example demonstrates how each FACES function is achieved in practice across the four business functions."</a:t>
+              <a:t>Say: "The Contribution Map™ has established the contributions required from Customer Service, IT, Operations and Workforce Planning, including the expected people performance and the organisational conditions necessary to enable delivery. The following example demonstrates how each FACES function is achieved in practice across the four business functions."</a:t>
             </a:r>
           </a:p>
           <a:p>
@@ -6756,7 +6756,7 @@
           <a:p>
             <a:r>
               <a:rPr lang="en-GB" dirty="0"/>
-              <a:t>Say: "Each function applies to both operating systems. Human Performance: what individuals and teams deliver through their KPIs, OKRs and demonstrated behaviours. Organisational Performance: how effectively the organisation’s Environment, Systems, Resources and Governance (ESRG) enable the achievement of intended results."</a:t>
+              <a:t>Say: "Each function applies to people performance and organisational performance. People Performance: what individuals and teams deliver through their KPIs, OKRs and demonstrated behaviours. Organisational Performance: how effectively the organisational conditions enable the achievement of intended results."</a:t>
             </a:r>
           </a:p>
           <a:p>
@@ -6777,7 +6777,7 @@
           <a:p>
             <a:r>
               <a:rPr lang="en-GB" dirty="0"/>
-              <a:t>The next slide sets out each function for the people and for the ESRG conditions.</a:t>
+              <a:t>The next slide sets out each function for the people and for the organisational conditions.</a:t>
             </a:r>
           </a:p>
         </p:txBody>
@@ -7859,7 +7859,7 @@
                 <a:ea typeface="Cambria" pitchFamily="34" charset="-122"/>
                 <a:cs typeface="Cambria" pitchFamily="34" charset="-120"/>
               </a:rPr>
-              <a:t>Step 3 · People and ESRG</a:t>
+              <a:t>Step 3 · People and organisational conditions</a:t>
             </a:r>
             <a:endParaRPr lang="en-US" sz="2600" dirty="0"/>
           </a:p>
@@ -8092,7 +8092,7 @@
                 <a:ea typeface="Cambria" pitchFamily="34" charset="-122"/>
                 <a:cs typeface="Cambria" pitchFamily="34" charset="-120"/>
               </a:rPr>
-              <a:t>Human Performance</a:t>
+              <a:t>People Performance</a:t>
             </a:r>
             <a:endParaRPr lang="en-US" sz="2800" dirty="0"/>
           </a:p>
@@ -8406,7 +8406,7 @@
                 <a:ea typeface="Calibri" pitchFamily="34" charset="-122"/>
                 <a:cs typeface="Calibri" pitchFamily="34" charset="-120"/>
               </a:rPr>
-              <a:t>ESRG requirements</a:t>
+              <a:t>Organisational conditions</a:t>
             </a:r>
             <a:endParaRPr lang="en-US" sz="2400" dirty="0"/>
           </a:p>
@@ -9167,7 +9167,7 @@
                 <a:ea typeface="Cambria" pitchFamily="34" charset="-122"/>
                 <a:cs typeface="Cambria" pitchFamily="34" charset="-120"/>
               </a:rPr>
-              <a:t>1.4 · FACES across the two operating systems</a:t>
+              <a:t>1.4 · FACES for people and organisational performance</a:t>
             </a:r>
             <a:endParaRPr lang="en-US" sz="3600" dirty="0"/>
           </a:p>
@@ -9296,7 +9296,7 @@
                 <a:ea typeface="Cambria" pitchFamily="34" charset="-122"/>
                 <a:cs typeface="Cambria" pitchFamily="34" charset="-120"/>
               </a:rPr>
-              <a:t>Human performance</a:t>
+              <a:t>People performance</a:t>
             </a:r>
             <a:endParaRPr lang="en-US" sz="2800" dirty="0"/>
           </a:p>
@@ -9630,7 +9630,7 @@
                 <a:ea typeface="Calibri" pitchFamily="34" charset="-122"/>
                 <a:cs typeface="Calibri" pitchFamily="34" charset="-120"/>
               </a:rPr>
-              <a:t>ESRG</a:t>
+              <a:t>Organisational conditions</a:t>
             </a:r>
             <a:endParaRPr lang="en-US" sz="2400" dirty="0"/>
           </a:p>
@@ -9694,7 +9694,7 @@
                 <a:ea typeface="Calibri" pitchFamily="34" charset="-122"/>
                 <a:cs typeface="Calibri" pitchFamily="34" charset="-120"/>
               </a:rPr>
-              <a:t>A · ESRG fit to strategy</a:t>
+              <a:t>A · Conditions fit to strategy</a:t>
             </a:r>
             <a:endParaRPr lang="en-US" sz="2400" dirty="0"/>
           </a:p>
@@ -9715,7 +9715,7 @@
                 <a:ea typeface="Calibri" pitchFamily="34" charset="-122"/>
                 <a:cs typeface="Calibri" pitchFamily="34" charset="-120"/>
               </a:rPr>
-              <a:t>C · ESRG made visible</a:t>
+              <a:t>C · Conditions made visible</a:t>
             </a:r>
             <a:endParaRPr lang="en-US" sz="2400" dirty="0"/>
           </a:p>
@@ -9736,7 +9736,7 @@
                 <a:ea typeface="Calibri" pitchFamily="34" charset="-122"/>
                 <a:cs typeface="Calibri" pitchFamily="34" charset="-120"/>
               </a:rPr>
-              <a:t>E · Named ESRG owners</a:t>
+              <a:t>E · Named leaders for the conditions</a:t>
             </a:r>
             <a:endParaRPr lang="en-US" sz="2400" dirty="0"/>
           </a:p>
@@ -10432,14 +10432,14 @@
       </p:sp>
       <p:pic>
         <p:nvPicPr>
-          <p:cNvPr id="3" name="Reflection 1.2" descr="ref_1.2.png"/>
+          <p:cNvPr id="9" name="Reflection 1.2" descr="image.png"/>
           <p:cNvPicPr>
             <a:picLocks noChangeAspect="1"/>
           </p:cNvPicPr>
           <p:nvPr/>
         </p:nvPicPr>
         <p:blipFill>
-          <a:blip r:embed="rId4"/>
+          <a:blip r:embed="rId7"/>
           <a:stretch>
             <a:fillRect/>
           </a:stretch>
@@ -10447,7 +10447,7 @@
         <p:spPr>
           <a:xfrm>
             <a:off x="1691640" y="1463040"/>
-            <a:ext cx="10035396" cy="1408981"/>
+            <a:ext cx="10035396" cy="1452113"/>
           </a:xfrm>
           <a:prstGeom prst="rect">
             <a:avLst/>
@@ -10462,7 +10462,7 @@
         </p:nvSpPr>
         <p:spPr>
           <a:xfrm>
-            <a:off x="548640" y="1733190"/>
+            <a:off x="548640" y="1754756"/>
             <a:ext cx="868680" cy="868680"/>
           </a:xfrm>
           <a:prstGeom prst="ellipse">
@@ -10497,22 +10497,22 @@
       </p:sp>
       <p:pic>
         <p:nvPicPr>
-          <p:cNvPr id="5" name="Reflection 1.3" descr="ref_1.3.png"/>
+          <p:cNvPr id="10" name="Reflection 1.3" descr="image.png"/>
           <p:cNvPicPr>
             <a:picLocks noChangeAspect="1"/>
           </p:cNvPicPr>
           <p:nvPr/>
         </p:nvPicPr>
         <p:blipFill>
-          <a:blip r:embed="rId5"/>
+          <a:blip r:embed="rId8"/>
           <a:stretch>
             <a:fillRect/>
           </a:stretch>
         </p:blipFill>
         <p:spPr>
           <a:xfrm>
-            <a:off x="1691640" y="3146341"/>
-            <a:ext cx="10035396" cy="1754038"/>
+            <a:off x="1691640" y="3189473"/>
+            <a:ext cx="10035396" cy="1797169"/>
           </a:xfrm>
           <a:prstGeom prst="rect">
             <a:avLst/>
@@ -10527,7 +10527,7 @@
         </p:nvSpPr>
         <p:spPr>
           <a:xfrm>
-            <a:off x="548640" y="3589019"/>
+            <a:off x="548640" y="3653717"/>
             <a:ext cx="868680" cy="868680"/>
           </a:xfrm>
           <a:prstGeom prst="ellipse">
@@ -10562,22 +10562,22 @@
       </p:sp>
       <p:pic>
         <p:nvPicPr>
-          <p:cNvPr id="7" name="Reflection 1.4" descr="ref_1.4.png"/>
+          <p:cNvPr id="11" name="Reflection 1.4" descr="image.png"/>
           <p:cNvPicPr>
             <a:picLocks noChangeAspect="1"/>
           </p:cNvPicPr>
           <p:nvPr/>
         </p:nvPicPr>
         <p:blipFill>
-          <a:blip r:embed="rId6"/>
+          <a:blip r:embed="rId9"/>
           <a:stretch>
             <a:fillRect/>
           </a:stretch>
         </p:blipFill>
         <p:spPr>
           <a:xfrm>
-            <a:off x="1691640" y="5174698"/>
-            <a:ext cx="10035396" cy="1408981"/>
+            <a:off x="1691640" y="5260962"/>
+            <a:ext cx="10035396" cy="1452113"/>
           </a:xfrm>
           <a:prstGeom prst="rect">
             <a:avLst/>
@@ -10592,7 +10592,7 @@
         </p:nvSpPr>
         <p:spPr>
           <a:xfrm>
-            <a:off x="548640" y="5444848"/>
+            <a:off x="548640" y="5552678"/>
             <a:ext cx="868680" cy="868680"/>
           </a:xfrm>
           <a:prstGeom prst="ellipse">
@@ -13901,7 +13901,7 @@
                 <a:ea typeface="Cambria" pitchFamily="34" charset="-122"/>
                 <a:cs typeface="Cambria" pitchFamily="34" charset="-120"/>
               </a:rPr>
-              <a:t>2.2 · Accountability across the two operating systems</a:t>
+              <a:t>2.2 · Accountability for people and organisational performance</a:t>
             </a:r>
             <a:endParaRPr lang="en-US" sz="3600" dirty="0"/>
           </a:p>
@@ -14030,7 +14030,7 @@
                 <a:ea typeface="Cambria" pitchFamily="34" charset="-122"/>
                 <a:cs typeface="Cambria" pitchFamily="34" charset="-120"/>
               </a:rPr>
-              <a:t>Human Operating System</a:t>
+              <a:t>People performance</a:t>
             </a:r>
             <a:endParaRPr lang="en-US" sz="2800" dirty="0"/>
           </a:p>
@@ -14262,7 +14262,7 @@
                 <a:ea typeface="Cambria" pitchFamily="34" charset="-122"/>
                 <a:cs typeface="Cambria" pitchFamily="34" charset="-120"/>
               </a:rPr>
-              <a:t>Organisational Operating System</a:t>
+              <a:t>Organisational performance</a:t>
             </a:r>
             <a:endParaRPr lang="en-US" sz="2800" dirty="0"/>
           </a:p>
@@ -18073,7 +18073,7 @@
                 <a:ea typeface="Cambria" pitchFamily="34" charset="-122"/>
                 <a:cs typeface="Cambria" pitchFamily="34" charset="-120"/>
               </a:rPr>
-              <a:t>2 · People (HOS)</a:t>
+              <a:t>2 · People performance</a:t>
             </a:r>
             <a:endParaRPr lang="en-US" sz="2600" dirty="0"/>
           </a:p>
@@ -18241,7 +18241,7 @@
                 <a:ea typeface="Cambria" pitchFamily="34" charset="-122"/>
                 <a:cs typeface="Cambria" pitchFamily="34" charset="-120"/>
               </a:rPr>
-              <a:t>3 · Organisation (ESRG)</a:t>
+              <a:t>3 · Organisational performance</a:t>
             </a:r>
             <a:endParaRPr lang="en-US" sz="2600" dirty="0"/>
           </a:p>
@@ -20471,7 +20471,7 @@
                 <a:ea typeface="Calibri" pitchFamily="34" charset="-122"/>
                 <a:cs typeface="Calibri" pitchFamily="34" charset="-120"/>
               </a:rPr>
-              <a:t>Contribution, people and ESRG, each with a measure.</a:t>
+              <a:t>Contribution, people and organisational conditions, each with a measure.</a:t>
             </a:r>
             <a:endParaRPr lang="en-US" sz="2400" dirty="0"/>
           </a:p>

--- a/Unit decks/Unit 06 - Performance Management Setup.pptx
+++ b/Unit decks/Unit 06 - Performance Management Setup.pptx
@@ -644,13 +644,13 @@
           <a:p>
             <a:r>
               <a:rPr lang="en-GB" dirty="0"/>
-              <a:t>1. Determine the disciplines that keep strategy connected to performance throughout delivery.</a:t>
-            </a:r>
-          </a:p>
-          <a:p>
-            <a:r>
-              <a:rPr lang="en-GB" dirty="0"/>
-              <a:t>2. Assess the compliance and commitment characteristics of a performance management system.</a:t>
+              <a:t>1. Establish management disciplines that sustain the connection between strategy and performance.</a:t>
+            </a:r>
+          </a:p>
+          <a:p>
+            <a:r>
+              <a:rPr lang="en-GB" dirty="0"/>
+              <a:t>2. Evaluate whether performance practices build genuine commitment or merely compliance.</a:t>
             </a:r>
           </a:p>
           <a:p>
@@ -1142,13 +1142,13 @@
           <a:p>
             <a:r>
               <a:rPr lang="en-GB" dirty="0"/>
-              <a:t>1. Diagnose executive performance blind spots that affect enterprise results.</a:t>
-            </a:r>
-          </a:p>
-          <a:p>
-            <a:r>
-              <a:rPr lang="en-GB" dirty="0"/>
-              <a:t>2. Assess where current performance management practice sits on the shift to continuous, development-centred and team-based performance.</a:t>
+              <a:t>1. Diagnose executive performance blind spots and determine corrective responses.</a:t>
+            </a:r>
+          </a:p>
+          <a:p>
+            <a:r>
+              <a:rPr lang="en-GB" dirty="0"/>
+              <a:t>2. Redesign performance practices towards continuous, developmental and team-based management.</a:t>
             </a:r>
           </a:p>
           <a:p>
@@ -1484,25 +1484,25 @@
           <a:p>
             <a:r>
               <a:rPr lang="en-GB" dirty="0"/>
-              <a:t>1. Evaluate whether organisational performance arrangements support the achievement of strategic priorities.</a:t>
-            </a:r>
-          </a:p>
-          <a:p>
-            <a:r>
-              <a:rPr lang="en-GB" dirty="0"/>
-              <a:t>2. Define clear relationships between enterprise outcomes, leadership accountability and performance evidence.</a:t>
-            </a:r>
-          </a:p>
-          <a:p>
-            <a:r>
-              <a:rPr lang="en-GB" dirty="0"/>
-              <a:t>3. Exercise consistent executive judgement on performance status and its strategic significance.</a:t>
-            </a:r>
-          </a:p>
-          <a:p>
-            <a:r>
-              <a:rPr lang="en-GB" dirty="0"/>
-              <a:t>4. Interpret performance insight in ways that strengthen accountability, decision quality and organisational responsiveness.</a:t>
+              <a:t>1. Evaluate and improve performance management arrangements against strategic priorities.</a:t>
+            </a:r>
+          </a:p>
+          <a:p>
+            <a:r>
+              <a:rPr lang="en-GB" dirty="0"/>
+              <a:t>2. Integrate enterprise results, leadership accountability and performance evidence into a coherent management system.</a:t>
+            </a:r>
+          </a:p>
+          <a:p>
+            <a:r>
+              <a:rPr lang="en-GB" dirty="0"/>
+              <a:t>3. Apply consistent executive judgement to performance status and its strategic implications.</a:t>
+            </a:r>
+          </a:p>
+          <a:p>
+            <a:r>
+              <a:rPr lang="en-GB" dirty="0"/>
+              <a:t>4. Use performance insight to improve accountability, decisions and organisational responsiveness.</a:t>
             </a:r>
           </a:p>
           <a:p>
@@ -1832,13 +1832,13 @@
           <a:p>
             <a:r>
               <a:rPr lang="en-GB" dirty="0"/>
-              <a:t>1. Map enterprise performance requirements across functional, human and organisational contributions.</a:t>
-            </a:r>
-          </a:p>
-          <a:p>
-            <a:r>
-              <a:rPr lang="en-GB" dirty="0"/>
-              <a:t>2. Determine how those contributions are managed across business functions towards an enterprise result.</a:t>
+              <a:t>1. Map the functional, human and organisational contributions required for enterprise results.</a:t>
+            </a:r>
+          </a:p>
+          <a:p>
+            <a:r>
+              <a:rPr lang="en-GB" dirty="0"/>
+              <a:t>2. Coordinate cross-functional contributions and enabling conditions towards shared results.</a:t>
             </a:r>
           </a:p>
           <a:p>
@@ -1976,13 +1976,13 @@
           <a:p>
             <a:r>
               <a:rPr lang="en-GB" dirty="0"/>
-              <a:t>1. Design the functional, human and organisational contributions an enterprise Key Result requires.</a:t>
-            </a:r>
-          </a:p>
-          <a:p>
-            <a:r>
-              <a:rPr lang="en-GB" dirty="0"/>
-              <a:t>2. Establish how those contributions will be managed across business functions.</a:t>
+              <a:t>1. Design the contribution arrangements required to deliver a chosen enterprise Key Result.</a:t>
+            </a:r>
+          </a:p>
+          <a:p>
+            <a:r>
+              <a:rPr lang="en-GB" dirty="0"/>
+              <a:t>2. Establish shared management accountability for contributions across functions.</a:t>
             </a:r>
           </a:p>
           <a:p>
@@ -5421,13 +5421,13 @@
           <a:p>
             <a:r>
               <a:rPr lang="en-GB" dirty="0"/>
-              <a:t>1. Distinguish performance measurement from the management system that converts evidence into decisions and action.</a:t>
-            </a:r>
-          </a:p>
-          <a:p>
-            <a:r>
-              <a:rPr lang="en-GB" dirty="0"/>
-              <a:t>2. Manage human contribution and organisational operating conditions together as they combine to produce enterprise results.</a:t>
+              <a:t>1. Convert performance evidence into accountable decisions and follow-through.</a:t>
+            </a:r>
+          </a:p>
+          <a:p>
+            <a:r>
+              <a:rPr lang="en-GB" dirty="0"/>
+              <a:t>2. Manage human contributions and organisational conditions as interdependent drivers of results.</a:t>
             </a:r>
           </a:p>
           <a:p>
@@ -10942,7 +10942,7 @@
                 <a:ea typeface="Calibri" pitchFamily="34" charset="-122"/>
                 <a:cs typeface="Calibri" pitchFamily="34" charset="-120"/>
               </a:rPr>
-              <a:t>Determine the disciplines that keep strategy connected to performance throughout delivery.</a:t>
+              <a:t>Establish management disciplines that sustain the connection between strategy and performance.</a:t>
             </a:r>
             <a:endParaRPr lang="en-US" sz="2400" dirty="0"/>
           </a:p>
@@ -11037,7 +11037,7 @@
                 <a:ea typeface="Calibri" pitchFamily="34" charset="-122"/>
                 <a:cs typeface="Calibri" pitchFamily="34" charset="-120"/>
               </a:rPr>
-              <a:t>Assess the compliance and commitment characteristics of a performance management system.</a:t>
+              <a:t>Evaluate whether performance practices build genuine commitment or merely compliance.</a:t>
             </a:r>
             <a:endParaRPr lang="en-US" sz="2400" dirty="0"/>
           </a:p>
@@ -13551,7 +13551,7 @@
                 <a:ea typeface="Calibri" pitchFamily="34" charset="-122"/>
                 <a:cs typeface="Calibri" pitchFamily="34" charset="-120"/>
               </a:rPr>
-              <a:t>Evaluate whether organisational performance arrangements support the achievement of strategic priorities.</a:t>
+              <a:t>Evaluate and improve performance management arrangements against strategic priorities.</a:t>
             </a:r>
             <a:endParaRPr lang="en-US" sz="2400" dirty="0"/>
           </a:p>
@@ -13646,7 +13646,7 @@
                 <a:ea typeface="Calibri" pitchFamily="34" charset="-122"/>
                 <a:cs typeface="Calibri" pitchFamily="34" charset="-120"/>
               </a:rPr>
-              <a:t>Define clear relationships between enterprise outcomes, leadership accountability and performance evidence.</a:t>
+              <a:t>Integrate enterprise results, leadership accountability and performance evidence into a coherent management system.</a:t>
             </a:r>
             <a:endParaRPr lang="en-US" sz="2400" dirty="0"/>
           </a:p>
@@ -13741,7 +13741,7 @@
                 <a:ea typeface="Calibri" pitchFamily="34" charset="-122"/>
                 <a:cs typeface="Calibri" pitchFamily="34" charset="-120"/>
               </a:rPr>
-              <a:t>Exercise consistent executive judgement on performance status and its strategic significance.</a:t>
+              <a:t>Apply consistent executive judgement to performance status and its strategic implications.</a:t>
             </a:r>
             <a:endParaRPr lang="en-US" sz="2400" dirty="0"/>
           </a:p>
@@ -13836,7 +13836,7 @@
                 <a:ea typeface="Calibri" pitchFamily="34" charset="-122"/>
                 <a:cs typeface="Calibri" pitchFamily="34" charset="-120"/>
               </a:rPr>
-              <a:t>Interpret performance insight in ways that strengthen accountability, decision quality and organisational responsiveness.</a:t>
+              <a:t>Use performance insight to improve accountability, decisions and organisational responsiveness.</a:t>
             </a:r>
             <a:endParaRPr lang="en-US" sz="2400" dirty="0"/>
           </a:p>
@@ -14688,7 +14688,7 @@
                 <a:ea typeface="Calibri" pitchFamily="34" charset="-122"/>
                 <a:cs typeface="Calibri" pitchFamily="34" charset="-120"/>
               </a:rPr>
-              <a:t>Diagnose executive performance blind spots that affect enterprise results.</a:t>
+              <a:t>Diagnose executive performance blind spots and determine corrective responses.</a:t>
             </a:r>
             <a:endParaRPr lang="en-US" sz="2400" dirty="0"/>
           </a:p>
@@ -14783,7 +14783,7 @@
                 <a:ea typeface="Calibri" pitchFamily="34" charset="-122"/>
                 <a:cs typeface="Calibri" pitchFamily="34" charset="-120"/>
               </a:rPr>
-              <a:t>Assess where current performance management practice sits on the shift to continuous, development-centred and team-based performance.</a:t>
+              <a:t>Redesign performance practices towards continuous, developmental and team-based management.</a:t>
             </a:r>
             <a:endParaRPr lang="en-US" sz="2400" dirty="0"/>
           </a:p>
@@ -17054,7 +17054,7 @@
                 <a:ea typeface="Calibri" pitchFamily="34" charset="-122"/>
                 <a:cs typeface="Calibri" pitchFamily="34" charset="-120"/>
               </a:rPr>
-              <a:t>Map enterprise performance requirements across functional, human and organisational contributions.</a:t>
+              <a:t>Map the functional, human and organisational contributions required for enterprise results.</a:t>
             </a:r>
             <a:endParaRPr lang="en-US" sz="2400" dirty="0"/>
           </a:p>
@@ -17149,7 +17149,7 @@
                 <a:ea typeface="Calibri" pitchFamily="34" charset="-122"/>
                 <a:cs typeface="Calibri" pitchFamily="34" charset="-120"/>
               </a:rPr>
-              <a:t>Determine how those contributions are managed across business functions towards an enterprise result.</a:t>
+              <a:t>Coordinate cross-functional contributions and enabling conditions towards shared results.</a:t>
             </a:r>
             <a:endParaRPr lang="en-US" sz="2400" dirty="0"/>
           </a:p>
@@ -19800,7 +19800,7 @@
                 <a:ea typeface="Calibri" pitchFamily="34" charset="-122"/>
                 <a:cs typeface="Calibri" pitchFamily="34" charset="-120"/>
               </a:rPr>
-              <a:t>Design the functional, human and organisational contributions an enterprise Key Result requires.</a:t>
+              <a:t>Design the contribution arrangements required to deliver a chosen enterprise Key Result.</a:t>
             </a:r>
             <a:endParaRPr lang="en-US" sz="2400" dirty="0"/>
           </a:p>
@@ -19895,7 +19895,7 @@
                 <a:ea typeface="Calibri" pitchFamily="34" charset="-122"/>
                 <a:cs typeface="Calibri" pitchFamily="34" charset="-120"/>
               </a:rPr>
-              <a:t>Establish how those contributions will be managed across business functions.</a:t>
+              <a:t>Establish shared management accountability for contributions across functions.</a:t>
             </a:r>
             <a:endParaRPr lang="en-US" sz="2400" dirty="0"/>
           </a:p>
@@ -21668,7 +21668,7 @@
                 <a:ea typeface="Calibri" pitchFamily="34" charset="-122"/>
                 <a:cs typeface="Calibri" pitchFamily="34" charset="-120"/>
               </a:rPr>
-              <a:t>Distinguish performance measurement from the management system that converts evidence into decisions and action.</a:t>
+              <a:t>Convert performance evidence into accountable decisions and follow-through.</a:t>
             </a:r>
             <a:endParaRPr lang="en-US" sz="2400" dirty="0"/>
           </a:p>
@@ -21763,7 +21763,7 @@
                 <a:ea typeface="Calibri" pitchFamily="34" charset="-122"/>
                 <a:cs typeface="Calibri" pitchFamily="34" charset="-120"/>
               </a:rPr>
-              <a:t>Manage human contribution and organisational operating conditions together as they combine to produce enterprise results.</a:t>
+              <a:t>Manage human contributions and organisational conditions as interdependent drivers of results.</a:t>
             </a:r>
             <a:endParaRPr lang="en-US" sz="2400" dirty="0"/>
           </a:p>

--- a/Unit decks/Unit 06 - Performance Management Setup.pptx
+++ b/Unit decks/Unit 06 - Performance Management Setup.pptx
@@ -2018,7 +2018,7 @@
           <a:p>
             <a:r>
               <a:rPr lang="en-GB" dirty="0"/>
-              <a:t>How to guide the work: brief each activity from the worked example in Section 4, then let the groups work through the steps on their own pages. One member acts as scribe; every member types the agreed entries into their own page.</a:t>
+              <a:t>How to guide the work: brief each activity from the worked example in Section 4, then let the groups work through the steps on their own pages. The group chooses its scribe; the entries appear on every member’s page.</a:t>
             </a:r>
           </a:p>
         </p:txBody>
@@ -2255,7 +2255,7 @@
           <a:p>
             <a:r>
               <a:rPr lang="en-GB" dirty="0"/>
-              <a:t>Participants work as a group in Activity 1 of Section 5 of the participant file. This is Capstone work. The group agrees each entry and one member acts as scribe. Every member then types the agreed entries into their own page, in the session or after it.</a:t>
+              <a:t>Participants work as a group in Activity 1 of Section 5 of the participant file. This is Capstone work. The group chooses its scribe for this work. The scribe types what the group agrees, and the entries appear on every member’s page.</a:t>
             </a:r>
           </a:p>
           <a:p>
@@ -2901,7 +2901,7 @@
           <a:p>
             <a:r>
               <a:rPr lang="en-GB" dirty="0"/>
-              <a:t>Participants work as a group in Activity 2 of Section 5 of the participant file. This is Capstone work. The group agrees each entry and one member acts as scribe. Every member then types the agreed entries into their own page, in the session or after it.</a:t>
+              <a:t>Participants work as a group in Activity 2 of Section 5 of the participant file. This is Capstone work. The group chooses its scribe for this work. The scribe types what the group agrees, and the entries appear on every member’s page.</a:t>
             </a:r>
           </a:p>
           <a:p>
@@ -2919,7 +2919,7 @@
           <a:p>
             <a:r>
               <a:rPr lang="en-GB" dirty="0"/>
-              <a:t>3. Each participant reads the record and selects Confirm. Print gives a copy.</a:t>
+              <a:t>3. Each participant reads the record and selects Agree. Print gives a copy.</a:t>
             </a:r>
           </a:p>
           <a:p>

--- a/Unit decks/Unit 06 - Performance Management Setup.pptx
+++ b/Unit decks/Unit 06 - Performance Management Setup.pptx
@@ -40,6 +40,7 @@
     <p:sldId id="279" r:id="rId24"/>
     <p:sldId id="280" r:id="rId25"/>
     <p:sldId id="293" r:id="rId34"/>
+    <p:sldId id="309" r:id="rId35"/>
     <p:sldId id="283" r:id="rId28"/>
   </p:sldIdLst>
   <p:sldSz cx="12192000" cy="6858000"/>
@@ -1948,76 +1949,76 @@
           <a:lstStyle/>
           <a:p>
             <a:r>
-              <a:rPr lang="en-GB" b="1" dirty="0"/>
+              <a:rPr lang="en-GB"/>
               <a:t>SECTION 5 · APPLICATION — IN PRACTICE</a:t>
             </a:r>
           </a:p>
           <a:p>
             <a:r>
-              <a:rPr lang="en-GB" dirty="0"/>
+              <a:rPr lang="en-GB"/>
               <a:t>Building Your Enterprise Performance Management System</a:t>
             </a:r>
           </a:p>
           <a:p>
             <a:r>
-              <a:rPr lang="en-GB" dirty="0"/>
-              <a:t>Application · Each group builds two connected components of the Enterprise Performance Management System for the strategy in its Capstone Blueprint: the S2R® Contribution Map™ and the FACES application.</a:t>
-            </a:r>
-          </a:p>
-          <a:p>
-            <a:endParaRPr lang="en-GB" dirty="0"/>
-          </a:p>
-          <a:p>
-            <a:r>
-              <a:rPr lang="en-GB" b="1" dirty="0"/>
+              <a:rPr lang="en-GB"/>
+              <a:t>Application · Each group builds three connected components of the Enterprise Performance Management System for the strategy in its Capstone Blueprint: the S2R® Contribution Map™, the FACES application and the WARD check-up for its enterprise Key Result.</a:t>
+            </a:r>
+          </a:p>
+          <a:p>
+            <a:endParaRPr lang="en-GB"/>
+          </a:p>
+          <a:p>
+            <a:r>
+              <a:rPr lang="en-GB"/>
               <a:t>Section learning outcomes:</a:t>
             </a:r>
           </a:p>
           <a:p>
             <a:r>
-              <a:rPr lang="en-GB" dirty="0"/>
+              <a:rPr lang="en-GB"/>
               <a:t>1. Design the contribution arrangements required to deliver a chosen enterprise Key Result.</a:t>
             </a:r>
           </a:p>
           <a:p>
             <a:r>
-              <a:rPr lang="en-GB" dirty="0"/>
+              <a:rPr lang="en-GB"/>
               <a:t>2. Establish shared management accountability for contributions across functions.</a:t>
             </a:r>
           </a:p>
           <a:p>
-            <a:endParaRPr lang="en-GB" dirty="0"/>
-          </a:p>
-          <a:p>
-            <a:r>
-              <a:rPr lang="en-GB" b="1" dirty="0"/>
+            <a:endParaRPr lang="en-GB"/>
+          </a:p>
+          <a:p>
+            <a:r>
+              <a:rPr lang="en-GB"/>
               <a:t>HOW TO TEACH IT:</a:t>
             </a:r>
           </a:p>
           <a:p>
-            <a:endParaRPr lang="en-GB" dirty="0"/>
-          </a:p>
-          <a:p>
-            <a:r>
-              <a:rPr lang="en-GB" b="1" dirty="0"/>
+            <a:endParaRPr lang="en-GB"/>
+          </a:p>
+          <a:p>
+            <a:r>
+              <a:rPr lang="en-GB"/>
               <a:t>1. Frame the application.</a:t>
             </a:r>
           </a:p>
           <a:p>
             <a:r>
-              <a:rPr lang="en-GB" dirty="0"/>
-              <a:t>Say: "You have already established your capstone organisation’s strategic direction, strategic objectives and Key Results. In this application, your group uses that work to develop two connected components of your Enterprise Performance Management System: Activity 1, the S2R® Contribution Map™, and Activity 2, the FACES application."</a:t>
-            </a:r>
-          </a:p>
-          <a:p>
-            <a:r>
-              <a:rPr lang="en-GB" dirty="0"/>
-              <a:t>Order: both activities are group work and Capstone work. Activity 1 needs the group’s confirmed Enterprise OKRs from Unit 3, part 5.2. Activity 2 uses the business functions the group names in Activity 1.</a:t>
-            </a:r>
-          </a:p>
-          <a:p>
-            <a:r>
-              <a:rPr lang="en-GB" dirty="0"/>
+              <a:rPr lang="en-GB"/>
+              <a:t>Say: "You have already established your capstone organisation’s strategic direction, strategic objectives and Key Results. In this application, your group uses that work to develop three connected components of your Enterprise Performance Management System: Activity 1, the S2R® Contribution Map™, Activity 2, the FACES application, and Activity 3, the WARD check-up for your enterprise Key Result."</a:t>
+            </a:r>
+          </a:p>
+          <a:p>
+            <a:r>
+              <a:rPr lang="en-GB"/>
+              <a:t>Order: all three activities are group work and Capstone work. Activity 1 needs the group’s confirmed Enterprise OKRs from Unit 3, part 5.2. Activity 2 uses the business functions the group names in Activity 1. Activity 3 sets the WARD check-up for the Key Result chosen in Activity 1, using the conditions named in the Contribution Map.</a:t>
+            </a:r>
+          </a:p>
+          <a:p>
+            <a:r>
+              <a:rPr lang="en-GB"/>
               <a:t>How to guide the work: brief each activity from the worked example in Section 4, then let the groups work through the steps on their own pages. The group chooses its scribe; the entries appear on every member’s page.</a:t>
             </a:r>
           </a:p>
@@ -2564,130 +2565,130 @@
           <a:lstStyle/>
           <a:p>
             <a:r>
-              <a:rPr lang="en-GB" b="1" dirty="0"/>
+              <a:rPr lang="en-GB"/>
               <a:t>UNIT SUMMARY (UNIT 6 SYNTHESIS)</a:t>
             </a:r>
           </a:p>
           <a:p>
-            <a:endParaRPr lang="en-GB" dirty="0"/>
-          </a:p>
-          <a:p>
-            <a:r>
-              <a:rPr lang="en-GB" b="1" dirty="0"/>
+            <a:endParaRPr lang="en-GB"/>
+          </a:p>
+          <a:p>
+            <a:r>
+              <a:rPr lang="en-GB"/>
               <a:t>HOW TO TEACH IT:</a:t>
             </a:r>
           </a:p>
           <a:p>
-            <a:endParaRPr lang="en-GB" dirty="0"/>
-          </a:p>
-          <a:p>
-            <a:r>
-              <a:rPr lang="en-GB" b="1" dirty="0"/>
+            <a:endParaRPr lang="en-GB"/>
+          </a:p>
+          <a:p>
+            <a:r>
+              <a:rPr lang="en-GB"/>
               <a:t>1. Recap the unit, section by section.</a:t>
             </a:r>
           </a:p>
           <a:p>
             <a:r>
-              <a:rPr lang="en-GB" dirty="0"/>
+              <a:rPr lang="en-GB"/>
               <a:t>- 1 · Awareness: Performance measurement answers what happened; performance management decides what to do about it. Enterprise performance comes from people performance (results against KPIs and OKRs, and behaviours) and organisational performance (the organisational conditions: environment, systems, resources and governance). The S2R® Contribution Map™ connects an enterprise Key Result to the contribution each function, its people and the organisation must make. FACES names the five functions that manage those contributions across both systems.</a:t>
             </a:r>
           </a:p>
           <a:p>
             <a:r>
-              <a:rPr lang="en-GB" dirty="0"/>
+              <a:rPr lang="en-GB"/>
               <a:t>- 2 · Intelligence: Performance management is the execution bridge that keeps strategy connected to performance throughout delivery. Four bridges sustain it: Decomposing the Big Picture, Defining the Logic of Success, Calibrating the Rhythm and Structuring the Dialogue. Compliance-driven and commitment-driven architectures shape how accountability works for people and for the organisation when results fall short.</a:t>
             </a:r>
           </a:p>
           <a:p>
             <a:r>
-              <a:rPr lang="en-GB" dirty="0"/>
+              <a:rPr lang="en-GB"/>
               <a:t>- 3 · Extrapolating: Each executive brings a natural performance focus and a potential blind spot. Unity in Diversity integrates the ten executive performance perspectives into one view of enterprise progress. Three shifts are moving performance management from annual to continuous, from rating-centric to development-centric, and from individual to team performance.</a:t>
             </a:r>
           </a:p>
           <a:p>
             <a:r>
-              <a:rPr lang="en-GB" dirty="0"/>
+              <a:rPr lang="en-GB"/>
               <a:t>- 4 · Integration: The worked example mapped one enterprise Key Result across Customer Service, IT, Operations and Workforce Planning: each function’s contribution, what its people must deliver and the organisational conditions that enable them, each with a measure or evidence. FACES then showed how those contributions are managed in practice.</a:t>
             </a:r>
           </a:p>
           <a:p>
             <a:r>
-              <a:rPr lang="en-GB" dirty="0"/>
-              <a:t>- 5 · Application: Each group built an S2R® Contribution Map™ for one of its own enterprise Key Results and applied FACES to manage each function’s contribution. The confirmed record feeds the team’s Capstone Blueprint.</a:t>
-            </a:r>
-          </a:p>
-          <a:p>
-            <a:endParaRPr lang="en-GB" dirty="0"/>
-          </a:p>
-          <a:p>
-            <a:r>
-              <a:rPr lang="en-GB" b="1" dirty="0"/>
+              <a:rPr lang="en-GB"/>
+              <a:t>- 5 · Application: Each group built an S2R® Contribution Map™ for one of its own enterprise Key Results, applied FACES to manage each function’s contribution and set the WARD check-up for the Key Result. The confirmed record feeds the team’s Capstone Blueprint.</a:t>
+            </a:r>
+          </a:p>
+          <a:p>
+            <a:endParaRPr lang="en-GB"/>
+          </a:p>
+          <a:p>
+            <a:r>
+              <a:rPr lang="en-GB"/>
               <a:t>2. Ask the closing question on the slide.</a:t>
             </a:r>
           </a:p>
           <a:p>
             <a:r>
-              <a:rPr lang="en-GB" dirty="0"/>
+              <a:rPr lang="en-GB"/>
               <a:t>Ask: "Which contribution in your group’s map was hardest to agree, and what does that tell you about the performance management system in your own organisation?" Take an answer from each group.</a:t>
             </a:r>
           </a:p>
           <a:p>
-            <a:endParaRPr lang="en-GB" dirty="0"/>
-          </a:p>
-          <a:p>
-            <a:r>
-              <a:rPr lang="en-GB" b="1" dirty="0"/>
+            <a:endParaRPr lang="en-GB"/>
+          </a:p>
+          <a:p>
+            <a:r>
+              <a:rPr lang="en-GB"/>
               <a:t>3. Close the unit.</a:t>
             </a:r>
           </a:p>
           <a:p>
             <a:r>
-              <a:rPr lang="en-GB" dirty="0"/>
+              <a:rPr lang="en-GB"/>
               <a:t>Say: "A performance management system that only measures has not yet become a management system. The moment measurement becomes the basis for a decision, a conversation, and an accountable intervention — that is the moment execution begins."</a:t>
             </a:r>
           </a:p>
           <a:p>
-            <a:endParaRPr lang="en-GB" dirty="0"/>
-          </a:p>
-          <a:p>
-            <a:r>
-              <a:rPr lang="en-GB" b="1" dirty="0"/>
+            <a:endParaRPr lang="en-GB"/>
+          </a:p>
+          <a:p>
+            <a:r>
+              <a:rPr lang="en-GB"/>
               <a:t>4. Say what happens on the portal.</a:t>
             </a:r>
           </a:p>
           <a:p>
             <a:r>
-              <a:rPr lang="en-GB" dirty="0"/>
+              <a:rPr lang="en-GB"/>
               <a:t>Say: "You now complete the unit on the portal: your four personal reflections and your group’s record in Section 5. When your page is complete, you submit the unit."</a:t>
             </a:r>
           </a:p>
           <a:p>
-            <a:endParaRPr lang="en-GB" dirty="0"/>
-          </a:p>
-          <a:p>
-            <a:r>
-              <a:rPr lang="en-GB" b="1" dirty="0"/>
+            <a:endParaRPr lang="en-GB"/>
+          </a:p>
+          <a:p>
+            <a:r>
+              <a:rPr lang="en-GB"/>
               <a:t>ON THE PORTAL, AFTER THE TEACHING:</a:t>
             </a:r>
           </a:p>
           <a:p>
             <a:r>
-              <a:rPr lang="en-GB" dirty="0"/>
+              <a:rPr lang="en-GB"/>
               <a:t>Participants complete every part of the participant file and submit the unit to the facilitator from the end of Section 5.</a:t>
             </a:r>
           </a:p>
           <a:p>
-            <a:endParaRPr lang="en-GB" dirty="0"/>
-          </a:p>
-          <a:p>
-            <a:r>
-              <a:rPr lang="en-GB" b="1" dirty="0"/>
+            <a:endParaRPr lang="en-GB"/>
+          </a:p>
+          <a:p>
+            <a:r>
+              <a:rPr lang="en-GB"/>
               <a:t>AFTER THE SESSION:</a:t>
             </a:r>
           </a:p>
           <a:p>
             <a:r>
-              <a:rPr lang="en-GB" dirty="0"/>
+              <a:rPr lang="en-GB"/>
               <a:t>Each submission reaches you in the facilitator dashboard. The personal reflections go to each participant’s Learning Portfolio; the group’s confirmed record feeds the team’s Capstone Blueprint.</a:t>
             </a:r>
           </a:p>
@@ -2774,173 +2775,441 @@
           <a:lstStyle/>
           <a:p>
             <a:r>
-              <a:rPr lang="en-GB" b="1" dirty="0"/>
+              <a:rPr lang="en-GB"/>
               <a:t>5.2 — ACTIVITY 2: APPLY FACES TO YOUR CONTRIBUTION MAP™ (CAPSTONE WORK)</a:t>
             </a:r>
           </a:p>
           <a:p>
-            <a:endParaRPr lang="en-GB" dirty="0"/>
-          </a:p>
-          <a:p>
-            <a:r>
-              <a:rPr lang="en-GB" b="1" dirty="0"/>
+            <a:endParaRPr lang="en-GB"/>
+          </a:p>
+          <a:p>
+            <a:r>
+              <a:rPr lang="en-GB"/>
               <a:t>HOW TO TEACH IT:</a:t>
             </a:r>
           </a:p>
           <a:p>
-            <a:endParaRPr lang="en-GB" dirty="0"/>
-          </a:p>
-          <a:p>
-            <a:r>
-              <a:rPr lang="en-GB" b="1" dirty="0"/>
+            <a:endParaRPr lang="en-GB"/>
+          </a:p>
+          <a:p>
+            <a:r>
+              <a:rPr lang="en-GB"/>
               <a:t>1. Brief the activity.</a:t>
             </a:r>
           </a:p>
           <a:p>
             <a:r>
-              <a:rPr lang="en-GB" dirty="0"/>
+              <a:rPr lang="en-GB"/>
               <a:t>Briefing: each group applies FACES to the contributions it mapped in Activity 1. For each business function it describes one practical management arrangement for each FACES function. Point the groups to the application questions and to the worked example in part 4.2.</a:t>
             </a:r>
           </a:p>
           <a:p>
-            <a:endParaRPr lang="en-GB" dirty="0"/>
-          </a:p>
-          <a:p>
-            <a:r>
-              <a:rPr lang="en-GB" dirty="0"/>
+            <a:endParaRPr lang="en-GB"/>
+          </a:p>
+          <a:p>
+            <a:r>
+              <a:rPr lang="en-GB"/>
               <a:t>The group has established the contributions required to achieve its enterprise Key Result. It now applies FACES to determine how these contributions will be managed. The business functions named in Activity 1 are shown in the FACES template on each participant’s page.</a:t>
             </a:r>
           </a:p>
           <a:p>
-            <a:endParaRPr lang="en-GB" dirty="0"/>
-          </a:p>
-          <a:p>
-            <a:r>
-              <a:rPr lang="en-GB" b="1" dirty="0"/>
+            <a:endParaRPr lang="en-GB"/>
+          </a:p>
+          <a:p>
+            <a:r>
+              <a:rPr lang="en-GB"/>
               <a:t>2. Step 3 · Teach the application question for each function.</a:t>
             </a:r>
           </a:p>
           <a:p>
             <a:r>
-              <a:rPr lang="en-GB" dirty="0"/>
+              <a:rPr lang="en-GB"/>
               <a:t>F · Foster a Results Culture: What routine or leadership practice will reinforce ownership of performance commitments and delivery obstacles? The template asks: How will employees and leaders demonstrate ownership of results?</a:t>
             </a:r>
           </a:p>
           <a:p>
             <a:r>
-              <a:rPr lang="en-GB" dirty="0"/>
+              <a:rPr lang="en-GB"/>
               <a:t>A · Align Performance: How will the function’s performance expectations and enabling conditions remain connected to the enterprise Key Result? The template asks: How will human contributions and organisational conditions remain aligned with the enterprise Key Result?</a:t>
             </a:r>
           </a:p>
           <a:p>
             <a:r>
-              <a:rPr lang="en-GB" dirty="0"/>
+              <a:rPr lang="en-GB"/>
               <a:t>C · Create Measurement Transparency: What evidence will make both people performance and organisational constraints visible? The template asks: How will people performance and the effectiveness of the organisational conditions be made visible?</a:t>
             </a:r>
           </a:p>
           <a:p>
             <a:r>
-              <a:rPr lang="en-GB" dirty="0"/>
+              <a:rPr lang="en-GB"/>
               <a:t>E · Embed Shared Accountability: Who will own performance commitments, enabling conditions and decisions required to address performance gaps? The template asks: Who will be responsible for contributions, enabling conditions and corrective decisions?</a:t>
             </a:r>
           </a:p>
           <a:p>
             <a:r>
-              <a:rPr lang="en-GB" dirty="0"/>
+              <a:rPr lang="en-GB"/>
               <a:t>S · Support Continuous Development: How will performance findings be used to strengthen employee capability and organisational effectiveness? The template asks: How will performance findings lead to improvements in human capability and organisational conditions?</a:t>
             </a:r>
           </a:p>
           <a:p>
-            <a:endParaRPr lang="en-GB" dirty="0"/>
-          </a:p>
-          <a:p>
-            <a:r>
-              <a:rPr lang="en-GB" b="1" dirty="0"/>
+            <a:endParaRPr lang="en-GB"/>
+          </a:p>
+          <a:p>
+            <a:r>
+              <a:rPr lang="en-GB"/>
               <a:t>3. Read the completion check.</a:t>
             </a:r>
           </a:p>
           <a:p>
             <a:r>
-              <a:rPr lang="en-GB" dirty="0"/>
+              <a:rPr lang="en-GB"/>
               <a:t>Before confirming, the group checks that:</a:t>
             </a:r>
           </a:p>
           <a:p>
             <a:r>
-              <a:rPr lang="en-GB" dirty="0"/>
+              <a:rPr lang="en-GB"/>
               <a:t>1. All five FACES functions have been addressed for each business function.</a:t>
             </a:r>
           </a:p>
           <a:p>
             <a:r>
-              <a:rPr lang="en-GB" dirty="0"/>
+              <a:rPr lang="en-GB"/>
               <a:t>2. Your responses describe practical management arrangements.</a:t>
             </a:r>
           </a:p>
           <a:p>
             <a:r>
-              <a:rPr lang="en-GB" dirty="0"/>
+              <a:rPr lang="en-GB"/>
               <a:t>3. Your FACES application uses the contributions and performance requirements established in Activity 1.</a:t>
             </a:r>
           </a:p>
           <a:p>
             <a:r>
-              <a:rPr lang="en-GB" dirty="0"/>
+              <a:rPr lang="en-GB"/>
               <a:t>Say: "The S2R® Contribution Map™ establishes the contributions required to achieve an enterprise result. FACES establishes how those contributions will be managed across the organisation. Together, they connect enterprise strategy to functional performance, human contribution, organisational enablement and collective accountability."</a:t>
             </a:r>
           </a:p>
           <a:p>
-            <a:endParaRPr lang="en-GB" dirty="0"/>
-          </a:p>
-          <a:p>
-            <a:r>
-              <a:rPr lang="en-GB" b="1" dirty="0"/>
+            <a:endParaRPr lang="en-GB"/>
+          </a:p>
+          <a:p>
+            <a:r>
+              <a:rPr lang="en-GB"/>
               <a:t>ON THE PORTAL, AFTER THE TEACHING:</a:t>
             </a:r>
           </a:p>
           <a:p>
             <a:r>
-              <a:rPr lang="en-GB" dirty="0"/>
+              <a:rPr lang="en-GB"/>
               <a:t>Participants work as a group in Activity 2 of Section 5 of the participant file. This is Capstone work. The group chooses its scribe for this work. The scribe types what the group agrees, and the entries appear on every member’s page.</a:t>
             </a:r>
           </a:p>
           <a:p>
             <a:r>
-              <a:rPr lang="en-GB" dirty="0"/>
+              <a:rPr lang="en-GB"/>
               <a:t>1. For each business function named in Activity 1, the group describes one practical management arrangement for each of the five FACES functions.</a:t>
             </a:r>
           </a:p>
           <a:p>
             <a:r>
-              <a:rPr lang="en-GB" dirty="0"/>
-              <a:t>2. The group reads the completion check.</a:t>
-            </a:r>
-          </a:p>
-          <a:p>
-            <a:r>
-              <a:rPr lang="en-GB" dirty="0"/>
-              <a:t>3. Each participant reads the record and selects Agree. Print gives a copy.</a:t>
-            </a:r>
-          </a:p>
-          <a:p>
-            <a:r>
-              <a:rPr lang="en-GB" dirty="0"/>
-              <a:t>The confirmed record feeds the team’s Capstone Blueprint.</a:t>
-            </a:r>
-          </a:p>
-          <a:p>
-            <a:endParaRPr lang="en-GB" dirty="0"/>
-          </a:p>
-          <a:p>
-            <a:r>
-              <a:rPr lang="en-GB" b="1" dirty="0"/>
+              <a:rPr lang="en-GB"/>
+              <a:t>2. The group reads the completion check, then goes to Activity 3.</a:t>
+            </a:r>
+          </a:p>
+        </p:txBody>
+      </p:sp>
+      <p:sp>
+        <p:nvSpPr>
+          <p:cNvPr id="4" name="Slide Number Placeholder 3"/>
+          <p:cNvSpPr>
+            <a:spLocks noGrp="1"/>
+          </p:cNvSpPr>
+          <p:nvPr>
+            <p:ph type="sldNum" sz="quarter" idx="10"/>
+          </p:nvPr>
+        </p:nvSpPr>
+        <p:spPr/>
+        <p:txBody>
+          <a:bodyPr/>
+          <a:lstStyle/>
+          <a:p>
+            <a:fld id="{F7021451-1387-4CA6-816F-3879F97B5CBC}" type="slidenum">
+              <a:rPr lang="en-US"/>
+              <a:t>7</a:t>
+            </a:fld>
+            <a:endParaRPr lang="en-US"/>
+          </a:p>
+        </p:txBody>
+      </p:sp>
+    </p:spTree>
+  </p:cSld>
+  <p:clrMapOvr>
+    <a:masterClrMapping/>
+  </p:clrMapOvr>
+</p:notes>
+</file>
+
+<file path=ppt/notesSlides/notesSlide29.xml><?xml version="1.0" encoding="utf-8"?>
+<p:notes xmlns:a="http://schemas.openxmlformats.org/drawingml/2006/main" xmlns:p="http://schemas.openxmlformats.org/presentationml/2006/main" xmlns:r="http://schemas.openxmlformats.org/officeDocument/2006/relationships">
+  <p:cSld>
+    <p:spTree>
+      <p:nvGrpSpPr>
+        <p:cNvPr id="1" name=""/>
+        <p:cNvGrpSpPr/>
+        <p:nvPr/>
+      </p:nvGrpSpPr>
+      <p:grpSpPr>
+        <a:xfrm>
+          <a:off x="0" y="0"/>
+          <a:ext cx="0" cy="0"/>
+          <a:chOff x="0" y="0"/>
+          <a:chExt cx="0" cy="0"/>
+        </a:xfrm>
+      </p:grpSpPr>
+      <p:sp>
+        <p:nvSpPr>
+          <p:cNvPr id="2" name="Slide Image Placeholder 1"/>
+          <p:cNvSpPr>
+            <a:spLocks noGrp="1" noRot="1" noChangeAspect="1"/>
+          </p:cNvSpPr>
+          <p:nvPr>
+            <p:ph type="sldImg"/>
+          </p:nvPr>
+        </p:nvSpPr>
+        <p:spPr/>
+      </p:sp>
+      <p:sp>
+        <p:nvSpPr>
+          <p:cNvPr id="3" name="Notes Placeholder 2"/>
+          <p:cNvSpPr>
+            <a:spLocks noGrp="1"/>
+          </p:cNvSpPr>
+          <p:nvPr>
+            <p:ph type="body" idx="1"/>
+          </p:nvPr>
+        </p:nvSpPr>
+        <p:spPr/>
+        <p:txBody>
+          <a:bodyPr/>
+          <a:lstStyle/>
+          <a:p>
+            <a:r>
+              <a:rPr lang="en-GB"/>
+              <a:t>5.3 — ACTIVITY 3: WARD · YOUR KEY RESULT’S VITAL CHECK-UP (CAPSTONE WORK)</a:t>
+            </a:r>
+          </a:p>
+          <a:p>
+            <a:endParaRPr lang="en-GB"/>
+          </a:p>
+          <a:p>
+            <a:r>
+              <a:rPr lang="en-GB"/>
+              <a:t>HOW TO TEACH IT:</a:t>
+            </a:r>
+          </a:p>
+          <a:p>
+            <a:endParaRPr lang="en-GB"/>
+          </a:p>
+          <a:p>
+            <a:r>
+              <a:rPr lang="en-GB"/>
+              <a:t>1. Open with the check-up.</a:t>
+            </a:r>
+          </a:p>
+          <a:p>
+            <a:r>
+              <a:rPr lang="en-GB"/>
+              <a:t>Say: "Every Key Result your group set in Unit 3 has a baseline, a target and a deadline. Performance management must set out in advance when a Key Result will be checked and which result raises a red flag. Corrective action then starts early, while the gap is still small enough to close. WARD is the vital check-up that sets these points for your Key Result."</a:t>
+            </a:r>
+          </a:p>
+          <a:p>
+            <a:endParaRPr lang="en-GB"/>
+          </a:p>
+          <a:p>
+            <a:r>
+              <a:rPr lang="en-GB"/>
+              <a:t>2. Teach the four letters.</a:t>
+            </a:r>
+          </a:p>
+          <a:p>
+            <a:r>
+              <a:rPr lang="en-GB"/>
+              <a:t>W · Waypoints: The dates on which the Key Result is checked, and the level it must have reached by each.</a:t>
+            </a:r>
+          </a:p>
+          <a:p>
+            <a:r>
+              <a:rPr lang="en-GB"/>
+              <a:t>A · Alert: How far off a waypoint the result can be before it raises a red flag.</a:t>
+            </a:r>
+          </a:p>
+          <a:p>
+            <a:r>
+              <a:rPr lang="en-GB"/>
+              <a:t>R · Recovery: The corrective action that follows a red flag, for the individuals and for the organisational conditions.</a:t>
+            </a:r>
+          </a:p>
+          <a:p>
+            <a:r>
+              <a:rPr lang="en-GB"/>
+              <a:t>D · Decider: The executive who decides on the recovery and sees it through.</a:t>
+            </a:r>
+          </a:p>
+          <a:p>
+            <a:endParaRPr lang="en-GB"/>
+          </a:p>
+          <a:p>
+            <a:r>
+              <a:rPr lang="en-GB"/>
+              <a:t>3. Take the worked example through WARD.</a:t>
+            </a:r>
+          </a:p>
+          <a:p>
+            <a:r>
+              <a:rPr lang="en-GB"/>
+              <a:t>Enterprise Key Result from part 4.1: Increase customer enquiries resolved within 48 hours from 65% to 90% by year-end.</a:t>
+            </a:r>
+          </a:p>
+          <a:p>
+            <a:r>
+              <a:rPr lang="en-GB"/>
+              <a:t>W · Waypoints: 72% by the end of March, 80% by the end of June and 85% by the end of September, on the way to 90% at year-end.</a:t>
+            </a:r>
+          </a:p>
+          <a:p>
+            <a:r>
+              <a:rPr lang="en-GB"/>
+              <a:t>A · Alert: More than three percentage points below a waypoint at a monthly review.</a:t>
+            </a:r>
+          </a:p>
+          <a:p>
+            <a:r>
+              <a:rPr lang="en-GB"/>
+              <a:t>R · Recovery · individuals: Team leaders review every open enquiry with its owner each morning, and agents with repeated follow-through gaps are coached.</a:t>
+            </a:r>
+          </a:p>
+          <a:p>
+            <a:r>
+              <a:rPr lang="en-GB"/>
+              <a:t>R · Recovery · organisational conditions: The owner of the condition named in the Contribution Map restores it: IT for system availability, Workforce Planning for staffing coverage, Operations for approval delays.</a:t>
+            </a:r>
+          </a:p>
+          <a:p>
+            <a:r>
+              <a:rPr lang="en-GB"/>
+              <a:t>D · Decider: The Customer Service Executive.</a:t>
+            </a:r>
+          </a:p>
+          <a:p>
+            <a:r>
+              <a:rPr lang="en-GB"/>
+              <a:t>Ask: "At the end of June the result is 74%. What happens on Monday morning, and who decides?"</a:t>
+            </a:r>
+          </a:p>
+          <a:p>
+            <a:r>
+              <a:rPr lang="en-GB"/>
+              <a:t>Guide the groups to see that the waypoint, the alert and the recovery answer the question before the review takes place.</a:t>
+            </a:r>
+          </a:p>
+          <a:p>
+            <a:endParaRPr lang="en-GB"/>
+          </a:p>
+          <a:p>
+            <a:r>
+              <a:rPr lang="en-GB"/>
+              <a:t>4. Read the completion check.</a:t>
+            </a:r>
+          </a:p>
+          <a:p>
+            <a:r>
+              <a:rPr lang="en-GB"/>
+              <a:t>1. Each waypoint has a date and a level, and the waypoints lead to the target by the deadline.</a:t>
+            </a:r>
+          </a:p>
+          <a:p>
+            <a:r>
+              <a:rPr lang="en-GB"/>
+              <a:t>2. The alert is specific enough that every member reads the same result the same way.</a:t>
+            </a:r>
+          </a:p>
+          <a:p>
+            <a:r>
+              <a:rPr lang="en-GB"/>
+              <a:t>3. The recovery covers the individuals and the organisational conditions named in the Contribution Map.</a:t>
+            </a:r>
+          </a:p>
+          <a:p>
+            <a:r>
+              <a:rPr lang="en-GB"/>
+              <a:t>4. One executive is named as the decider.</a:t>
+            </a:r>
+          </a:p>
+          <a:p>
+            <a:r>
+              <a:rPr lang="en-GB"/>
+              <a:t>Say: "In Unit 8 your group tests its WARD: the alert fires, and you run the recovery."</a:t>
+            </a:r>
+          </a:p>
+          <a:p>
+            <a:endParaRPr lang="en-GB"/>
+          </a:p>
+          <a:p>
+            <a:r>
+              <a:rPr lang="en-GB"/>
+              <a:t>ON THE PORTAL, AFTER THE TEACHING:</a:t>
+            </a:r>
+          </a:p>
+          <a:p>
+            <a:r>
+              <a:rPr lang="en-GB"/>
+              <a:t>Participants work as a group in Activity 3 of Section 5 of the participant file. This is Capstone work. The group chooses its scribe for this work. The scribe types what the group agrees, and the entries appear on every member’s page.</a:t>
+            </a:r>
+          </a:p>
+          <a:p>
+            <a:r>
+              <a:rPr lang="en-GB"/>
+              <a:t>1. The group sets two or three waypoints for its enterprise Key Result: a date and a level for each.</a:t>
+            </a:r>
+          </a:p>
+          <a:p>
+            <a:r>
+              <a:rPr lang="en-GB"/>
+              <a:t>2. The group sets the alert, the recovery for the individuals and for the organisational conditions, and the decider.</a:t>
+            </a:r>
+          </a:p>
+          <a:p>
+            <a:r>
+              <a:rPr lang="en-GB"/>
+              <a:t>3. The group reads the completion check.</a:t>
+            </a:r>
+          </a:p>
+          <a:p>
+            <a:r>
+              <a:rPr lang="en-GB"/>
+              <a:t>4. Each participant reads the record and selects Agree. Print gives a copy.</a:t>
+            </a:r>
+          </a:p>
+          <a:p>
+            <a:r>
+              <a:rPr lang="en-GB"/>
+              <a:t>The agreed record feeds the team’s Capstone Blueprint.</a:t>
+            </a:r>
+          </a:p>
+          <a:p>
+            <a:endParaRPr lang="en-GB"/>
+          </a:p>
+          <a:p>
+            <a:r>
+              <a:rPr lang="en-GB"/>
               <a:t>AFTER THE SESSION:</a:t>
             </a:r>
           </a:p>
           <a:p>
             <a:r>
-              <a:rPr lang="en-GB" dirty="0"/>
-              <a:t>The record reaches you with each participant’s submission, under the heading of Section 5. The confirmed record feeds the Unit 6 boxes of the team’s Capstone Blueprint: the Contribution Map and the FACES application.</a:t>
+              <a:rPr lang="en-GB"/>
+              <a:t>The record reaches you with each participant’s submission, under the heading of Section 5. The agreed record feeds the Unit 6 boxes of the team’s Capstone Blueprint: the Contribution Map in 6A, the FACES application in 6B and the WARD check-up in 6C.</a:t>
             </a:r>
           </a:p>
         </p:txBody>
@@ -21154,6 +21423,495 @@
 </file>
 
 <file path=ppt/slides/slide33.xml><?xml version="1.0" encoding="utf-8"?>
+<p:sld xmlns:a="http://schemas.openxmlformats.org/drawingml/2006/main" xmlns:p="http://schemas.openxmlformats.org/presentationml/2006/main" xmlns:r="http://schemas.openxmlformats.org/officeDocument/2006/relationships">
+  <p:cSld>
+    <p:bg>
+      <p:bgPr>
+        <a:solidFill>
+          <a:srgbClr val="FFFFFF"/>
+        </a:solidFill>
+        <a:effectLst/>
+      </p:bgPr>
+    </p:bg>
+    <p:spTree>
+      <p:nvGrpSpPr>
+        <p:cNvPr id="1" name=""/>
+        <p:cNvGrpSpPr/>
+        <p:nvPr/>
+      </p:nvGrpSpPr>
+      <p:grpSpPr/>
+      <p:sp>
+        <p:nvSpPr>
+          <p:cNvPr id="2" name="Text 0"/>
+          <p:cNvSpPr txBox="1"/>
+          <p:nvPr/>
+        </p:nvSpPr>
+        <p:spPr>
+          <a:xfrm>
+            <a:off x="548640" y="411480"/>
+            <a:ext cx="11064240" cy="868680"/>
+          </a:xfrm>
+          <a:prstGeom prst="rect">
+            <a:avLst/>
+          </a:prstGeom>
+          <a:noFill/>
+          <a:ln/>
+        </p:spPr>
+        <p:txBody>
+          <a:bodyPr wrap="square" lIns="0" tIns="0" rIns="0" bIns="0" rtlCol="0" anchor="ctr"/>
+          <a:lstStyle/>
+          <a:p>
+            <a:pPr marL="0" indent="0">
+              <a:buNone/>
+            </a:pPr>
+            <a:r>
+              <a:rPr lang="en-US" sz="3600" b="1" dirty="0">
+                <a:solidFill>
+                  <a:srgbClr val="1A5C2C"/>
+                </a:solidFill>
+                <a:latin typeface="Cambria" pitchFamily="34" charset="0"/>
+                <a:ea typeface="Cambria" pitchFamily="34" charset="-122"/>
+                <a:cs typeface="Cambria" pitchFamily="34" charset="-120"/>
+              </a:rPr>
+              <a:t>5.3 · Activity 3: WARD check-up</a:t>
+            </a:r>
+            <a:endParaRPr lang="en-US" sz="3600" dirty="0"/>
+          </a:p>
+        </p:txBody>
+      </p:sp>
+      <p:sp>
+        <p:nvSpPr>
+          <p:cNvPr id="3" name="Shape 1"/>
+          <p:cNvSpPr/>
+          <p:nvPr/>
+        </p:nvSpPr>
+        <p:spPr>
+          <a:xfrm>
+            <a:off x="548640" y="1677924"/>
+            <a:ext cx="640080" cy="640080"/>
+          </a:xfrm>
+          <a:prstGeom prst="ellipse">
+            <a:avLst/>
+          </a:prstGeom>
+          <a:solidFill>
+            <a:srgbClr val="1A5C2C"/>
+          </a:solidFill>
+          <a:ln w="12700">
+            <a:solidFill>
+              <a:srgbClr val="1A5C2C"/>
+            </a:solidFill>
+            <a:prstDash val="solid"/>
+          </a:ln>
+        </p:spPr>
+        <p:txBody>
+          <a:bodyPr/>
+          <a:lstStyle/>
+          <a:p>
+            <a:endParaRPr lang="en-ZA"/>
+          </a:p>
+        </p:txBody>
+      </p:sp>
+      <p:pic>
+        <p:nvPicPr>
+          <p:cNvPr id="4" name="Image 0" descr="preencoded.png"/>
+          <p:cNvPicPr>
+            <a:picLocks noChangeAspect="1"/>
+          </p:cNvPicPr>
+          <p:nvPr/>
+        </p:nvPicPr>
+        <p:blipFill>
+          <a:blip r:embed="rId8"/>
+          <a:stretch>
+            <a:fillRect/>
+          </a:stretch>
+        </p:blipFill>
+        <p:spPr>
+          <a:xfrm>
+            <a:off x="708660" y="1837944"/>
+            <a:ext cx="320040" cy="320040"/>
+          </a:xfrm>
+          <a:prstGeom prst="rect">
+            <a:avLst/>
+          </a:prstGeom>
+        </p:spPr>
+      </p:pic>
+      <p:sp>
+        <p:nvSpPr>
+          <p:cNvPr id="5" name="Text 2"/>
+          <p:cNvSpPr txBox="1"/>
+          <p:nvPr/>
+        </p:nvSpPr>
+        <p:spPr>
+          <a:xfrm>
+            <a:off x="1508760" y="1508760"/>
+            <a:ext cx="10131552" cy="978408"/>
+          </a:xfrm>
+          <a:prstGeom prst="rect">
+            <a:avLst/>
+          </a:prstGeom>
+          <a:noFill/>
+          <a:ln/>
+        </p:spPr>
+        <p:txBody>
+          <a:bodyPr wrap="square" lIns="0" tIns="0" rIns="0" bIns="0" rtlCol="0" anchor="ctr"/>
+          <a:lstStyle/>
+          <a:p>
+            <a:pPr marL="0" indent="0">
+              <a:buNone/>
+            </a:pPr>
+            <a:r>
+              <a:rPr lang="en-US" sz="2600" b="1" dirty="0">
+                <a:solidFill>
+                  <a:srgbClr val="1A5C2C"/>
+                </a:solidFill>
+                <a:latin typeface="Cambria" pitchFamily="34" charset="0"/>
+                <a:ea typeface="Cambria" pitchFamily="34" charset="-122"/>
+                <a:cs typeface="Cambria" pitchFamily="34" charset="-120"/>
+              </a:rPr>
+              <a:t>W  </a:t>
+            </a:r>
+            <a:r>
+              <a:rPr lang="en-US" sz="2600" dirty="0">
+                <a:solidFill>
+                  <a:srgbClr val="1F2A22"/>
+                </a:solidFill>
+                <a:latin typeface="Calibri" pitchFamily="34" charset="0"/>
+                <a:ea typeface="Calibri" pitchFamily="34" charset="-122"/>
+                <a:cs typeface="Calibri" pitchFamily="34" charset="-120"/>
+              </a:rPr>
+              <a:t>Waypoints: when the Key Result is checked</a:t>
+            </a:r>
+            <a:endParaRPr lang="en-US" sz="2600" dirty="0"/>
+          </a:p>
+        </p:txBody>
+      </p:sp>
+      <p:sp>
+        <p:nvSpPr>
+          <p:cNvPr id="6" name="Shape 3"/>
+          <p:cNvSpPr/>
+          <p:nvPr/>
+        </p:nvSpPr>
+        <p:spPr>
+          <a:xfrm>
+            <a:off x="548640" y="2656332"/>
+            <a:ext cx="640080" cy="640080"/>
+          </a:xfrm>
+          <a:prstGeom prst="ellipse">
+            <a:avLst/>
+          </a:prstGeom>
+          <a:solidFill>
+            <a:srgbClr val="1A5C2C"/>
+          </a:solidFill>
+          <a:ln w="12700">
+            <a:solidFill>
+              <a:srgbClr val="1A5C2C"/>
+            </a:solidFill>
+            <a:prstDash val="solid"/>
+          </a:ln>
+        </p:spPr>
+        <p:txBody>
+          <a:bodyPr/>
+          <a:lstStyle/>
+          <a:p>
+            <a:endParaRPr lang="en-ZA"/>
+          </a:p>
+        </p:txBody>
+      </p:sp>
+      <p:pic>
+        <p:nvPicPr>
+          <p:cNvPr id="7" name="Image 1" descr="preencoded.png"/>
+          <p:cNvPicPr>
+            <a:picLocks noChangeAspect="1"/>
+          </p:cNvPicPr>
+          <p:nvPr/>
+        </p:nvPicPr>
+        <p:blipFill>
+          <a:blip r:embed="rId9"/>
+          <a:stretch>
+            <a:fillRect/>
+          </a:stretch>
+        </p:blipFill>
+        <p:spPr>
+          <a:xfrm>
+            <a:off x="708660" y="2816352"/>
+            <a:ext cx="320040" cy="320040"/>
+          </a:xfrm>
+          <a:prstGeom prst="rect">
+            <a:avLst/>
+          </a:prstGeom>
+        </p:spPr>
+      </p:pic>
+      <p:sp>
+        <p:nvSpPr>
+          <p:cNvPr id="8" name="Text 4"/>
+          <p:cNvSpPr txBox="1"/>
+          <p:nvPr/>
+        </p:nvSpPr>
+        <p:spPr>
+          <a:xfrm>
+            <a:off x="1508760" y="2487168"/>
+            <a:ext cx="10131552" cy="978408"/>
+          </a:xfrm>
+          <a:prstGeom prst="rect">
+            <a:avLst/>
+          </a:prstGeom>
+          <a:noFill/>
+          <a:ln/>
+        </p:spPr>
+        <p:txBody>
+          <a:bodyPr wrap="square" lIns="0" tIns="0" rIns="0" bIns="0" rtlCol="0" anchor="ctr"/>
+          <a:lstStyle/>
+          <a:p>
+            <a:pPr marL="0" indent="0">
+              <a:buNone/>
+            </a:pPr>
+            <a:r>
+              <a:rPr lang="en-US" sz="2600" b="1" dirty="0">
+                <a:solidFill>
+                  <a:srgbClr val="1A5C2C"/>
+                </a:solidFill>
+                <a:latin typeface="Cambria" pitchFamily="34" charset="0"/>
+                <a:ea typeface="Cambria" pitchFamily="34" charset="-122"/>
+                <a:cs typeface="Cambria" pitchFamily="34" charset="-120"/>
+              </a:rPr>
+              <a:t>A  </a:t>
+            </a:r>
+            <a:r>
+              <a:rPr lang="en-US" sz="2600" dirty="0">
+                <a:solidFill>
+                  <a:srgbClr val="1F2A22"/>
+                </a:solidFill>
+                <a:latin typeface="Calibri" pitchFamily="34" charset="0"/>
+                <a:ea typeface="Calibri" pitchFamily="34" charset="-122"/>
+                <a:cs typeface="Calibri" pitchFamily="34" charset="-120"/>
+              </a:rPr>
+              <a:t>Alert: how far off raises a red flag</a:t>
+            </a:r>
+            <a:endParaRPr lang="en-US" sz="2600" dirty="0"/>
+          </a:p>
+        </p:txBody>
+      </p:sp>
+      <p:sp>
+        <p:nvSpPr>
+          <p:cNvPr id="9" name="Shape 5"/>
+          <p:cNvSpPr/>
+          <p:nvPr/>
+        </p:nvSpPr>
+        <p:spPr>
+          <a:xfrm>
+            <a:off x="548640" y="3634740"/>
+            <a:ext cx="640080" cy="640080"/>
+          </a:xfrm>
+          <a:prstGeom prst="ellipse">
+            <a:avLst/>
+          </a:prstGeom>
+          <a:solidFill>
+            <a:srgbClr val="1A5C2C"/>
+          </a:solidFill>
+          <a:ln w="12700">
+            <a:solidFill>
+              <a:srgbClr val="1A5C2C"/>
+            </a:solidFill>
+            <a:prstDash val="solid"/>
+          </a:ln>
+        </p:spPr>
+        <p:txBody>
+          <a:bodyPr/>
+          <a:lstStyle/>
+          <a:p>
+            <a:endParaRPr lang="en-ZA"/>
+          </a:p>
+        </p:txBody>
+      </p:sp>
+      <p:pic>
+        <p:nvPicPr>
+          <p:cNvPr id="10" name="Image 2" descr="preencoded.png"/>
+          <p:cNvPicPr>
+            <a:picLocks noChangeAspect="1"/>
+          </p:cNvPicPr>
+          <p:nvPr/>
+        </p:nvPicPr>
+        <p:blipFill>
+          <a:blip r:embed="rId10"/>
+          <a:stretch>
+            <a:fillRect/>
+          </a:stretch>
+        </p:blipFill>
+        <p:spPr>
+          <a:xfrm>
+            <a:off x="708660" y="3794760"/>
+            <a:ext cx="320040" cy="320040"/>
+          </a:xfrm>
+          <a:prstGeom prst="rect">
+            <a:avLst/>
+          </a:prstGeom>
+        </p:spPr>
+      </p:pic>
+      <p:sp>
+        <p:nvSpPr>
+          <p:cNvPr id="11" name="Text 6"/>
+          <p:cNvSpPr txBox="1"/>
+          <p:nvPr/>
+        </p:nvSpPr>
+        <p:spPr>
+          <a:xfrm>
+            <a:off x="1508760" y="3465576"/>
+            <a:ext cx="10131552" cy="978408"/>
+          </a:xfrm>
+          <a:prstGeom prst="rect">
+            <a:avLst/>
+          </a:prstGeom>
+          <a:noFill/>
+          <a:ln/>
+        </p:spPr>
+        <p:txBody>
+          <a:bodyPr wrap="square" lIns="0" tIns="0" rIns="0" bIns="0" rtlCol="0" anchor="ctr"/>
+          <a:lstStyle/>
+          <a:p>
+            <a:pPr marL="0" indent="0">
+              <a:buNone/>
+            </a:pPr>
+            <a:r>
+              <a:rPr lang="en-US" sz="2600" b="1" dirty="0">
+                <a:solidFill>
+                  <a:srgbClr val="1A5C2C"/>
+                </a:solidFill>
+                <a:latin typeface="Cambria" pitchFamily="34" charset="0"/>
+                <a:ea typeface="Cambria" pitchFamily="34" charset="-122"/>
+                <a:cs typeface="Cambria" pitchFamily="34" charset="-120"/>
+              </a:rPr>
+              <a:t>R  </a:t>
+            </a:r>
+            <a:r>
+              <a:rPr lang="en-US" sz="2600" dirty="0">
+                <a:solidFill>
+                  <a:srgbClr val="1F2A22"/>
+                </a:solidFill>
+                <a:latin typeface="Calibri" pitchFamily="34" charset="0"/>
+                <a:ea typeface="Calibri" pitchFamily="34" charset="-122"/>
+                <a:cs typeface="Calibri" pitchFamily="34" charset="-120"/>
+              </a:rPr>
+              <a:t>Recovery: for individuals and conditions</a:t>
+            </a:r>
+            <a:endParaRPr lang="en-US" sz="2600" dirty="0"/>
+          </a:p>
+        </p:txBody>
+      </p:sp>
+      <p:sp>
+        <p:nvSpPr>
+          <p:cNvPr id="12" name="Shape 7"/>
+          <p:cNvSpPr/>
+          <p:nvPr/>
+        </p:nvSpPr>
+        <p:spPr>
+          <a:xfrm>
+            <a:off x="548640" y="4613148"/>
+            <a:ext cx="640080" cy="640080"/>
+          </a:xfrm>
+          <a:prstGeom prst="ellipse">
+            <a:avLst/>
+          </a:prstGeom>
+          <a:solidFill>
+            <a:srgbClr val="1A5C2C"/>
+          </a:solidFill>
+          <a:ln w="12700">
+            <a:solidFill>
+              <a:srgbClr val="1A5C2C"/>
+            </a:solidFill>
+            <a:prstDash val="solid"/>
+          </a:ln>
+        </p:spPr>
+        <p:txBody>
+          <a:bodyPr/>
+          <a:lstStyle/>
+          <a:p>
+            <a:endParaRPr lang="en-ZA"/>
+          </a:p>
+        </p:txBody>
+      </p:sp>
+      <p:pic>
+        <p:nvPicPr>
+          <p:cNvPr id="13" name="Image 3" descr="preencoded.png"/>
+          <p:cNvPicPr>
+            <a:picLocks noChangeAspect="1"/>
+          </p:cNvPicPr>
+          <p:nvPr/>
+        </p:nvPicPr>
+        <p:blipFill>
+          <a:blip r:embed="rId4"/>
+          <a:stretch>
+            <a:fillRect/>
+          </a:stretch>
+        </p:blipFill>
+        <p:spPr>
+          <a:xfrm>
+            <a:off x="708660" y="4773168"/>
+            <a:ext cx="320040" cy="320040"/>
+          </a:xfrm>
+          <a:prstGeom prst="rect">
+            <a:avLst/>
+          </a:prstGeom>
+        </p:spPr>
+      </p:pic>
+      <p:sp>
+        <p:nvSpPr>
+          <p:cNvPr id="14" name="Text 8"/>
+          <p:cNvSpPr txBox="1"/>
+          <p:nvPr/>
+        </p:nvSpPr>
+        <p:spPr>
+          <a:xfrm>
+            <a:off x="1508760" y="4443984"/>
+            <a:ext cx="10131552" cy="978408"/>
+          </a:xfrm>
+          <a:prstGeom prst="rect">
+            <a:avLst/>
+          </a:prstGeom>
+          <a:noFill/>
+          <a:ln/>
+        </p:spPr>
+        <p:txBody>
+          <a:bodyPr wrap="square" lIns="0" tIns="0" rIns="0" bIns="0" rtlCol="0" anchor="ctr"/>
+          <a:lstStyle/>
+          <a:p>
+            <a:pPr marL="0" indent="0">
+              <a:buNone/>
+            </a:pPr>
+            <a:r>
+              <a:rPr lang="en-US" sz="2600" b="1" dirty="0">
+                <a:solidFill>
+                  <a:srgbClr val="1A5C2C"/>
+                </a:solidFill>
+                <a:latin typeface="Cambria" pitchFamily="34" charset="0"/>
+                <a:ea typeface="Cambria" pitchFamily="34" charset="-122"/>
+                <a:cs typeface="Cambria" pitchFamily="34" charset="-120"/>
+              </a:rPr>
+              <a:t>D  </a:t>
+            </a:r>
+            <a:r>
+              <a:rPr lang="en-US" sz="2600" dirty="0">
+                <a:solidFill>
+                  <a:srgbClr val="1F2A22"/>
+                </a:solidFill>
+                <a:latin typeface="Calibri" pitchFamily="34" charset="0"/>
+                <a:ea typeface="Calibri" pitchFamily="34" charset="-122"/>
+                <a:cs typeface="Calibri" pitchFamily="34" charset="-120"/>
+              </a:rPr>
+              <a:t>Decider: who decides and acts</a:t>
+            </a:r>
+            <a:endParaRPr lang="en-US" sz="2600" dirty="0"/>
+          </a:p>
+        </p:txBody>
+      </p:sp>
+    </p:spTree>
+  </p:cSld>
+  <p:clrMapOvr>
+    <a:masterClrMapping/>
+  </p:clrMapOvr>
+</p:sld>
+</file>
+
+<file path=ppt/slides/slide34.xml><?xml version="1.0" encoding="utf-8"?>
 <p:sld xmlns:a="http://schemas.openxmlformats.org/drawingml/2006/main" xmlns:r="http://schemas.openxmlformats.org/officeDocument/2006/relationships" xmlns:p="http://schemas.openxmlformats.org/presentationml/2006/main">
   <p:cSld name="Slide 28">
     <p:bg>

--- a/Unit decks/Unit 06 - Performance Management Setup.pptx
+++ b/Unit decks/Unit 06 - Performance Management Setup.pptx
@@ -1962,7 +1962,7 @@
           <a:p>
             <a:r>
               <a:rPr lang="en-GB"/>
-              <a:t>Application · Each group builds three connected components of the Enterprise Performance Management System for the strategy in its Capstone Blueprint: the S2R® Contribution Map™, the FACES application and the WARD check-up for its enterprise Key Result.</a:t>
+              <a:t>Application · Each group builds three connected components of the Enterprise Performance Management System for the strategy in its Capstone S2R Blueprint: the S2R® Contribution Map™, the FACES application and the WARD check-up for its enterprise Key Result.</a:t>
             </a:r>
           </a:p>
           <a:p>
@@ -2614,7 +2614,7 @@
           <a:p>
             <a:r>
               <a:rPr lang="en-GB"/>
-              <a:t>- 5 · Application: Each group built an S2R® Contribution Map™ for one of its own enterprise Key Results, applied FACES to manage each function’s contribution and set the WARD check-up for the Key Result. The confirmed record feeds the team’s Capstone Blueprint.</a:t>
+              <a:t>- 5 · Application: Each group built an S2R® Contribution Map™ for one of its own enterprise Key Results, applied FACES to manage each function’s contribution and set the WARD check-up for the Key Result. The confirmed record feeds the team’s Capstone S2R Blueprint.</a:t>
             </a:r>
           </a:p>
           <a:p>
@@ -2689,7 +2689,7 @@
           <a:p>
             <a:r>
               <a:rPr lang="en-GB"/>
-              <a:t>Each submission reaches you in the facilitator dashboard. The personal reflections go to each participant’s Learning Portfolio; the group’s confirmed record feeds the team’s Capstone Blueprint.</a:t>
+              <a:t>Each submission reaches you in the facilitator dashboard. The personal reflections go to each participant’s Learning Portfolio; the group’s confirmed record feeds the team’s Capstone S2R Blueprint.</a:t>
             </a:r>
           </a:p>
         </p:txBody>
@@ -3194,7 +3194,7 @@
           <a:p>
             <a:r>
               <a:rPr lang="en-GB"/>
-              <a:t>The agreed record feeds the team’s Capstone Blueprint.</a:t>
+              <a:t>The agreed record feeds the team’s Capstone S2R Blueprint.</a:t>
             </a:r>
           </a:p>
           <a:p>
@@ -3209,7 +3209,7 @@
           <a:p>
             <a:r>
               <a:rPr lang="en-GB"/>
-              <a:t>The record reaches you with each participant’s submission, under the heading of Section 5. The agreed record feeds the Unit 6 boxes of the team’s Capstone Blueprint: the Contribution Map in 6A, the FACES application in 6B and the WARD check-up in 6C.</a:t>
+              <a:t>The record reaches you with each participant’s submission, under the heading of Section 5. The agreed record feeds the Unit 6 boxes of the team’s Capstone S2R Blueprint: the Contribution Map in 6A, the FACES application in 6B and the WARD check-up in 6C.</a:t>
             </a:r>
           </a:p>
         </p:txBody>

--- a/Unit decks/Unit 06 - Performance Management Setup.pptx
+++ b/Unit decks/Unit 06 - Performance Management Setup.pptx
@@ -315,7 +315,7 @@
           <a:lstStyle/>
           <a:p>
             <a:r>
-              <a:rPr lang="en-GB" b="1" dirty="0"/>
+              <a:rPr lang="en-GB" dirty="0" b="1"/>
               <a:t>UNIT 6 · PERFORMANCE MANAGEMENT SETUP</a:t>
             </a:r>
           </a:p>
@@ -325,61 +325,101 @@
               <a:t>Module 3 · Influence · Unit 6</a:t>
             </a:r>
           </a:p>
-          <a:p>
-            <a:endParaRPr lang="en-GB" dirty="0"/>
-          </a:p>
-          <a:p>
-            <a:r>
-              <a:rPr lang="en-GB" b="1" dirty="0"/>
+          <a:p/>
+          <a:p>
+            <a:r>
+              <a:rPr lang="en-GB" dirty="0" b="1"/>
               <a:t>HOW TO USE THIS SLIDE:</a:t>
             </a:r>
           </a:p>
-          <a:p>
-            <a:endParaRPr lang="en-GB" dirty="0"/>
-          </a:p>
-          <a:p>
-            <a:r>
-              <a:rPr lang="en-GB" b="1" dirty="0"/>
-              <a:t>1. Open the unit with its intent.</a:t>
-            </a:r>
-          </a:p>
-          <a:p>
-            <a:r>
-              <a:rPr lang="en-GB" dirty="0"/>
-              <a:t>Unit 6 sets up enterprise performance management on two operating systems: people performance, what people deliver (the Human Operating System), and organisational performance, what the organisation enables through its organisational conditions (the Organisational Operating System).</a:t>
-            </a:r>
-          </a:p>
-          <a:p>
-            <a:r>
-              <a:rPr lang="en-GB" dirty="0"/>
-              <a:t>Participants learn the S2R® Contribution Map™, which connects an enterprise Key Result to the contributions of business functions, people and organisational conditions, and FACES, the five functions through which those contributions are managed. In Section 5 each group builds both for its own Capstone strategy.</a:t>
-            </a:r>
-          </a:p>
-          <a:p>
-            <a:endParaRPr lang="en-GB" dirty="0"/>
-          </a:p>
-          <a:p>
-            <a:r>
-              <a:rPr lang="en-GB" b="1" dirty="0"/>
-              <a:t>2. Set the tone.</a:t>
-            </a:r>
-          </a:p>
-          <a:p>
-            <a:r>
-              <a:rPr lang="en-GB" dirty="0"/>
-              <a:t>Avoid: turning the Contribution Map or FACES into a compliance checklist. They are design and management tools.</a:t>
-            </a:r>
-          </a:p>
-          <a:p>
-            <a:r>
-              <a:rPr lang="en-GB" dirty="0"/>
-              <a:t>Keep in view: a missed target is evidence of a performance gap; it does not establish its cause.</a:t>
-            </a:r>
-          </a:p>
-          <a:p>
-            <a:r>
-              <a:rPr lang="en-GB" dirty="0"/>
-              <a:t>Probe leaders who equate "we have a scorecard" with "we have a PM system": "What happens after you look at the scorecard? What changes? Who decides what?"</a:t>
+          <a:p/>
+          <a:p>
+            <a:r>
+              <a:rPr lang="en-GB" dirty="0" b="1"/>
+              <a:t>1. Place the unit in Module 3.</a:t>
+            </a:r>
+          </a:p>
+          <a:p>
+            <a:r>
+              <a:rPr lang="en-GB" dirty="0"/>
+              <a:t>Say: "This unit sits in Module 3, Influence. Influence mobilises the people and performance systems through which strategy is carried into execution. Unit 5 aligned hearts and minds behind the strategy. Unit 6 builds the performance architecture that connects enterprise results to the contribution of people and the conditions the organisation provides. Unit 7 then turns that architecture into owned expectations, Unit 8 into review discipline and Unit 9 into the flow of execution."</a:t>
+            </a:r>
+          </a:p>
+          <a:p/>
+          <a:p>
+            <a:r>
+              <a:rPr lang="en-GB" dirty="0" b="1"/>
+              <a:t>2. State the unit intent.</a:t>
+            </a:r>
+          </a:p>
+          <a:p>
+            <a:r>
+              <a:rPr lang="en-GB" dirty="0"/>
+              <a:t>Say: "Unit 6 sets up enterprise performance management on two operating systems. People performance is what people deliver: the Human Operating System. Organisational performance is what the organisation enables through its organisational conditions: the Organisational Operating System. You learn the S2R® Contribution Map™, which connects an enterprise Key Result to the contributions of business functions, people and organisational conditions, and FACES, the five functions through which those contributions are managed."</a:t>
+            </a:r>
+          </a:p>
+          <a:p/>
+          <a:p>
+            <a:r>
+              <a:rPr lang="en-GB" dirty="0" b="1"/>
+              <a:t>3. Say what the unit produces.</a:t>
+            </a:r>
+          </a:p>
+          <a:p>
+            <a:r>
+              <a:rPr lang="en-GB" dirty="0"/>
+              <a:t>Say: "Each of you writes four personal reflections, in parts 1.2, 1.3, 1.4 and 3.2. They go into your Learning Portfolio. In Section 5 your group builds three connected components of its Enterprise Performance Management System for the strategy in your Capstone S2R® Blueprint: the Contribution Map, the FACES application and the WARD check-up for one enterprise Key Result."</a:t>
+            </a:r>
+          </a:p>
+          <a:p/>
+          <a:p>
+            <a:r>
+              <a:rPr lang="en-GB" dirty="0" b="1"/>
+              <a:t>4. Say how the unit runs.</a:t>
+            </a:r>
+          </a:p>
+          <a:p>
+            <a:r>
+              <a:rPr lang="en-GB" dirty="0"/>
+              <a:t>Teach the whole unit from this deck first, from Section 1 to the Unit Summary. Participants then complete their own page on the portal, in the session or after it.</a:t>
+            </a:r>
+          </a:p>
+          <a:p>
+            <a:r>
+              <a:rPr lang="en-GB" dirty="0"/>
+              <a:t>All three Section 5 activities are group work and Capstone work. Each group needs the Objectives and Key Results it confirmed in Unit 3, part 5.2. The group chooses its scribe; the scribe types what the group agrees, the entries appear on every member’s page, and each member then selects Agree.</a:t>
+            </a:r>
+          </a:p>
+          <a:p/>
+          <a:p>
+            <a:r>
+              <a:rPr lang="en-GB" dirty="0" b="1"/>
+              <a:t>5. Bridge to the outcomes.</a:t>
+            </a:r>
+          </a:p>
+          <a:p>
+            <a:r>
+              <a:rPr lang="en-GB" dirty="0"/>
+              <a:t>Say: "Here is what you will be able to do by the end of the unit."</a:t>
+            </a:r>
+          </a:p>
+          <a:p/>
+          <a:p>
+            <a:r>
+              <a:rPr lang="en-GB" dirty="0" b="1"/>
+              <a:t>WHERE THE OUTPUTS GO:</a:t>
+            </a:r>
+          </a:p>
+          <a:p>
+            <a:r>
+              <a:rPr lang="en-GB" dirty="0"/>
+              <a:t>The personal reflections go into each participant’s Learning Portfolio.</a:t>
+            </a:r>
+          </a:p>
+          <a:p>
+            <a:r>
+              <a:rPr lang="en-GB" dirty="0"/>
+              <a:t>The group’s agreed record feeds boxes 6A, 6B and 6C of the team’s Capstone S2R® Blueprint: the Contribution Map in 6A, the FACES application in 6B and the WARD check-up in 6C.</a:t>
             </a:r>
           </a:p>
         </p:txBody>
@@ -465,25 +505,21 @@
           <a:lstStyle/>
           <a:p>
             <a:r>
-              <a:rPr lang="en-GB" b="1" dirty="0"/>
+              <a:rPr lang="en-GB" dirty="0" b="1"/>
               <a:t>SECTION 1 REFLECTIONS</a:t>
             </a:r>
           </a:p>
-          <a:p>
-            <a:endParaRPr lang="en-GB" dirty="0"/>
-          </a:p>
-          <a:p>
-            <a:r>
-              <a:rPr lang="en-GB" b="1" dirty="0"/>
+          <a:p/>
+          <a:p>
+            <a:r>
+              <a:rPr lang="en-GB" dirty="0" b="1"/>
               <a:t>HOW TO USE THIS SLIDE:</a:t>
             </a:r>
           </a:p>
-          <a:p>
-            <a:endParaRPr lang="en-GB" dirty="0"/>
-          </a:p>
-          <a:p>
-            <a:r>
-              <a:rPr lang="en-GB" b="1" dirty="0"/>
+          <a:p/>
+          <a:p>
+            <a:r>
+              <a:rPr lang="en-GB" dirty="0" b="1"/>
               <a:t>1. Show the slide and read the three prompts aloud.</a:t>
             </a:r>
           </a:p>
@@ -505,12 +541,10 @@
               <a:t>1.4 Reflection — FACES in Your Organisation: "For the Key Result you chose in part 1.3: which FACES function is weakest in the way your organisation manages these contributions today, for the people and for the organisational conditions? Which one management arrangement would strengthen it?"</a:t>
             </a:r>
           </a:p>
-          <a:p>
-            <a:endParaRPr lang="en-GB" dirty="0"/>
-          </a:p>
-          <a:p>
-            <a:r>
-              <a:rPr lang="en-GB" b="1" dirty="0"/>
+          <a:p/>
+          <a:p>
+            <a:r>
+              <a:rPr lang="en-GB" dirty="0" b="1"/>
               <a:t>2. Say what the reflections are for.</a:t>
             </a:r>
           </a:p>
@@ -520,27 +554,23 @@
               <a:t>Say: "These reflections are personal. Name one real, recurring shortfall and look at whether your system covers the people and the organisational conditions. Then map one of your own organisation’s Key Results the way the Contribution Map does, and look at how your organisation manages those contributions through FACES."</a:t>
             </a:r>
           </a:p>
-          <a:p>
-            <a:endParaRPr lang="en-GB" dirty="0"/>
-          </a:p>
-          <a:p>
-            <a:r>
-              <a:rPr lang="en-GB" b="1" dirty="0"/>
-              <a:t>3. Bridge to Section 2.</a:t>
-            </a:r>
-          </a:p>
-          <a:p>
-            <a:r>
-              <a:rPr lang="en-GB" dirty="0"/>
-              <a:t>Say: "You now know what must be managed. Section 2 shows how performance management keeps strategy connected to performance throughout delivery."</a:t>
-            </a:r>
-          </a:p>
-          <a:p>
-            <a:endParaRPr lang="en-GB" dirty="0"/>
-          </a:p>
-          <a:p>
-            <a:r>
-              <a:rPr lang="en-GB" b="1" dirty="0"/>
+          <a:p/>
+          <a:p>
+            <a:r>
+              <a:rPr lang="en-GB" dirty="0" b="1"/>
+              <a:t>3. Close Section 1 and bridge to Section 2.</a:t>
+            </a:r>
+          </a:p>
+          <a:p>
+            <a:r>
+              <a:rPr lang="en-GB" dirty="0"/>
+              <a:t>Say: "Performance management connects enterprise results to the contributions of people and the conditions the organisation provides. Section 2 examines why performance management is the bridge between strategy and execution."</a:t>
+            </a:r>
+          </a:p>
+          <a:p/>
+          <a:p>
+            <a:r>
+              <a:rPr lang="en-GB" dirty="0" b="1"/>
               <a:t>ON THE PORTAL, AFTER THE TEACHING:</a:t>
             </a:r>
           </a:p>
@@ -617,7 +647,7 @@
           <a:lstStyle/>
           <a:p>
             <a:r>
-              <a:rPr lang="en-GB" b="1" dirty="0"/>
+              <a:rPr lang="en-GB" dirty="0" b="1"/>
               <a:t>SECTION 2 · INTELLIGENCE — WHY</a:t>
             </a:r>
           </a:p>
@@ -627,19 +657,36 @@
               <a:t>Performance Management as the Execution Bridge</a:t>
             </a:r>
           </a:p>
-          <a:p>
-            <a:r>
-              <a:rPr lang="en-GB" dirty="0"/>
-              <a:t>Understanding why enterprise performance depends on connecting strategic outcomes, human contributions and organisational operating capability through an integrated management system.</a:t>
-            </a:r>
-          </a:p>
-          <a:p>
-            <a:endParaRPr lang="en-GB" dirty="0"/>
-          </a:p>
-          <a:p>
-            <a:r>
-              <a:rPr lang="en-GB" b="1" dirty="0"/>
-              <a:t>Section learning outcomes:</a:t>
+          <a:p/>
+          <a:p>
+            <a:r>
+              <a:rPr lang="en-GB" dirty="0" b="1"/>
+              <a:t>HOW THIS SECTION RUNS:</a:t>
+            </a:r>
+          </a:p>
+          <a:p>
+            <a:r>
+              <a:rPr lang="en-GB" dirty="0"/>
+              <a:t>1. 2.1: performance management as the execution bridge. The four bridges, then how they work together (two slides).</a:t>
+            </a:r>
+          </a:p>
+          <a:p>
+            <a:r>
+              <a:rPr lang="en-GB" dirty="0"/>
+              <a:t>2. 2.2: compliance and commitment architecture. The four dimensions, then accountability for people performance and organisational performance (two slides).</a:t>
+            </a:r>
+          </a:p>
+          <a:p>
+            <a:r>
+              <a:rPr lang="en-GB" dirty="0"/>
+              <a:t>Section 2 carries no personal reflection. The section closes on the 2.2 slide and bridges to Section 3.</a:t>
+            </a:r>
+          </a:p>
+          <a:p/>
+          <a:p>
+            <a:r>
+              <a:rPr lang="en-GB" dirty="0" b="1"/>
+              <a:t>SECTION LEARNING OUTCOMES:</a:t>
             </a:r>
           </a:p>
           <a:p>
@@ -654,28 +701,50 @@
               <a:t>2. Evaluate whether performance practices build genuine commitment or merely compliance.</a:t>
             </a:r>
           </a:p>
-          <a:p>
-            <a:endParaRPr lang="en-GB" dirty="0"/>
-          </a:p>
-          <a:p>
-            <a:r>
-              <a:rPr lang="en-GB" b="1" dirty="0"/>
-              <a:t>HOW TO TEACH IT:</a:t>
-            </a:r>
-          </a:p>
-          <a:p>
-            <a:endParaRPr lang="en-GB" dirty="0"/>
-          </a:p>
-          <a:p>
-            <a:r>
-              <a:rPr lang="en-GB" b="1" dirty="0"/>
-              <a:t>1. Frame the section.</a:t>
-            </a:r>
-          </a:p>
-          <a:p>
-            <a:r>
-              <a:rPr lang="en-GB" dirty="0"/>
-              <a:t>Say: "Section 1 set out what must be managed. Section 2 explains why performance management is the bridge that keeps strategy connected to performance throughout delivery, and how the architecture you choose shapes accountability."</a:t>
+          <a:p/>
+          <a:p>
+            <a:r>
+              <a:rPr lang="en-GB" dirty="0" b="1"/>
+              <a:t>HOW TO OPEN THE SECTION:</a:t>
+            </a:r>
+          </a:p>
+          <a:p/>
+          <a:p>
+            <a:r>
+              <a:rPr lang="en-GB" dirty="0" b="1"/>
+              <a:t>1. Link to Section 1.</a:t>
+            </a:r>
+          </a:p>
+          <a:p>
+            <a:r>
+              <a:rPr lang="en-GB" dirty="0"/>
+              <a:t>Say: "Section 1 set out what performance management must manage. The S2R® Contribution Map™ establishes the contributions an enterprise result requires, and FACES the five functions through which they are managed."</a:t>
+            </a:r>
+          </a:p>
+          <a:p/>
+          <a:p>
+            <a:r>
+              <a:rPr lang="en-GB" dirty="0" b="1"/>
+              <a:t>2. Name the question of this section.</a:t>
+            </a:r>
+          </a:p>
+          <a:p>
+            <a:r>
+              <a:rPr lang="en-GB" dirty="0"/>
+              <a:t>Say: "Section 2 explains why enterprise performance depends on connecting strategic outcomes, human contributions and organisational operating capability through an integrated management system. Strategy is delivered over time, and the connection between intent and delivery weakens unless something sustains it."</a:t>
+            </a:r>
+          </a:p>
+          <a:p/>
+          <a:p>
+            <a:r>
+              <a:rPr lang="en-GB" dirty="0" b="1"/>
+              <a:t>3. Bridge to 2.1.</a:t>
+            </a:r>
+          </a:p>
+          <a:p>
+            <a:r>
+              <a:rPr lang="en-GB" dirty="0"/>
+              <a:t>Say: "Performance management is that bridge. We look first at the four disciplines that hold it up."</a:t>
             </a:r>
           </a:p>
         </p:txBody>
@@ -1115,7 +1184,7 @@
           <a:lstStyle/>
           <a:p>
             <a:r>
-              <a:rPr lang="en-GB" b="1" dirty="0"/>
+              <a:rPr lang="en-GB" dirty="0" b="1"/>
               <a:t>SECTION 3 · EXTRAPOLATING — WHERE</a:t>
             </a:r>
           </a:p>
@@ -1125,19 +1194,36 @@
               <a:t>Executive Performance Integration and the Evolution of Performance Management</a:t>
             </a:r>
           </a:p>
-          <a:p>
-            <a:r>
-              <a:rPr lang="en-GB" dirty="0"/>
-              <a:t>Where does enterprise performance management become vulnerable? How executive performance perspectives and the evolution of performance management practice shape what leaders see and how they respond.</a:t>
-            </a:r>
-          </a:p>
-          <a:p>
-            <a:endParaRPr lang="en-GB" dirty="0"/>
-          </a:p>
-          <a:p>
-            <a:r>
-              <a:rPr lang="en-GB" b="1" dirty="0"/>
-              <a:t>Section learning outcomes:</a:t>
+          <a:p/>
+          <a:p>
+            <a:r>
+              <a:rPr lang="en-GB" dirty="0" b="1"/>
+              <a:t>HOW THIS SECTION RUNS:</a:t>
+            </a:r>
+          </a:p>
+          <a:p>
+            <a:r>
+              <a:rPr lang="en-GB" dirty="0"/>
+              <a:t>1. 3.1: Unity in Diversity. Executive performance perspectives and functional bias, then the ten executive performance hot zones (two slides).</a:t>
+            </a:r>
+          </a:p>
+          <a:p>
+            <a:r>
+              <a:rPr lang="en-GB" dirty="0"/>
+              <a:t>2. 3.2: the continuous performance management shift, through three shifts in practice.</a:t>
+            </a:r>
+          </a:p>
+          <a:p>
+            <a:r>
+              <a:rPr lang="en-GB" dirty="0"/>
+              <a:t>3. The Section 3 Reflections slide: the reflection participants write after the teaching.</a:t>
+            </a:r>
+          </a:p>
+          <a:p/>
+          <a:p>
+            <a:r>
+              <a:rPr lang="en-GB" dirty="0" b="1"/>
+              <a:t>SECTION LEARNING OUTCOMES:</a:t>
             </a:r>
           </a:p>
           <a:p>
@@ -1152,22 +1238,18 @@
               <a:t>2. Redesign performance practices towards continuous, developmental and team-based management.</a:t>
             </a:r>
           </a:p>
-          <a:p>
-            <a:endParaRPr lang="en-GB" dirty="0"/>
-          </a:p>
-          <a:p>
-            <a:r>
-              <a:rPr lang="en-GB" b="1" dirty="0"/>
-              <a:t>HOW TO TEACH IT:</a:t>
-            </a:r>
-          </a:p>
-          <a:p>
-            <a:endParaRPr lang="en-GB" dirty="0"/>
-          </a:p>
-          <a:p>
-            <a:r>
-              <a:rPr lang="en-GB" b="1" dirty="0"/>
-              <a:t>1. Frame the section.</a:t>
+          <a:p/>
+          <a:p>
+            <a:r>
+              <a:rPr lang="en-GB" dirty="0" b="1"/>
+              <a:t>HOW TO OPEN THE SECTION:</a:t>
+            </a:r>
+          </a:p>
+          <a:p/>
+          <a:p>
+            <a:r>
+              <a:rPr lang="en-GB" dirty="0" b="1"/>
+              <a:t>1. Link to Section 2.</a:t>
             </a:r>
           </a:p>
           <a:p>
@@ -1176,10 +1258,30 @@
               <a:t>Say: "Section 2 established the four execution bridges that sustain the connection between strategy and results. It also examined how compliance-driven and commitment-driven approaches influence accountability, performance behaviour and management responses."</a:t>
             </a:r>
           </a:p>
-          <a:p>
-            <a:r>
-              <a:rPr lang="en-GB" dirty="0"/>
-              <a:t>Say: "Section 3 examines where enterprise performance management becomes vulnerable, through two areas: Unity in Diversity, how executive performance perspectives influence what leaders notice, prioritise and interpret; and the Continuous Performance Management Shift, how performance management practices are evolving to strengthen timely feedback, development and collective performance."</a:t>
+          <a:p/>
+          <a:p>
+            <a:r>
+              <a:rPr lang="en-GB" dirty="0" b="1"/>
+              <a:t>2. Name the two areas of the section.</a:t>
+            </a:r>
+          </a:p>
+          <a:p>
+            <a:r>
+              <a:rPr lang="en-GB" dirty="0"/>
+              <a:t>Say: "Section 3 examines where enterprise performance management becomes vulnerable, through two areas. Unity in Diversity: how executive performance perspectives influence what leaders notice, prioritise and interpret. The Continuous Performance Management Shift: how performance management practices are evolving to strengthen timely feedback, development and collective performance."</a:t>
+            </a:r>
+          </a:p>
+          <a:p/>
+          <a:p>
+            <a:r>
+              <a:rPr lang="en-GB" dirty="0" b="1"/>
+              <a:t>3. Bridge to 3.1.</a:t>
+            </a:r>
+          </a:p>
+          <a:p>
+            <a:r>
+              <a:rPr lang="en-GB" dirty="0"/>
+              <a:t>Say: "We begin with the executive team itself, and the different ways each executive reads performance."</a:t>
             </a:r>
           </a:p>
         </p:txBody>
@@ -1460,26 +1562,22 @@
           <a:lstStyle/>
           <a:p>
             <a:r>
-              <a:rPr lang="en-GB" b="1" dirty="0"/>
-              <a:t>KEY LEARNING OUTCOMES (identical in the participant and facilitator files)</a:t>
-            </a:r>
-          </a:p>
-          <a:p>
-            <a:endParaRPr lang="en-GB" dirty="0"/>
-          </a:p>
-          <a:p>
-            <a:r>
-              <a:rPr lang="en-GB" b="1" dirty="0"/>
+              <a:rPr lang="en-GB" dirty="0" b="1"/>
+              <a:t>KEY LEARNING OUTCOMES</a:t>
+            </a:r>
+          </a:p>
+          <a:p/>
+          <a:p>
+            <a:r>
+              <a:rPr lang="en-GB" dirty="0" b="1"/>
               <a:t>HOW TO USE THIS SLIDE:</a:t>
             </a:r>
           </a:p>
-          <a:p>
-            <a:endParaRPr lang="en-GB" dirty="0"/>
-          </a:p>
-          <a:p>
-            <a:r>
-              <a:rPr lang="en-GB" b="1" dirty="0"/>
-              <a:t>1. Read the four outcomes.</a:t>
+          <a:p/>
+          <a:p>
+            <a:r>
+              <a:rPr lang="en-GB" dirty="0" b="1"/>
+              <a:t>1. Read the four outcomes aloud.</a:t>
             </a:r>
           </a:p>
           <a:p>
@@ -1506,13 +1604,55 @@
               <a:t>4. Use performance insight to improve accountability, decisions and organisational responsiveness.</a:t>
             </a:r>
           </a:p>
-          <a:p>
-            <a:endParaRPr lang="en-GB" dirty="0"/>
-          </a:p>
-          <a:p>
-            <a:r>
-              <a:rPr lang="en-GB" dirty="0"/>
-              <a:t>Each section slide carries that section’s learning outcomes.</a:t>
+          <a:p/>
+          <a:p>
+            <a:r>
+              <a:rPr lang="en-GB" dirty="0" b="1"/>
+              <a:t>2. Say where the unit builds each one.</a:t>
+            </a:r>
+          </a:p>
+          <a:p>
+            <a:r>
+              <a:rPr lang="en-GB" dirty="0"/>
+              <a:t>Outcome 1 is built in Section 1, where measurement is separated from management, and in 3.2, where you place your own organisation on the three shifts in performance management practice.</a:t>
+            </a:r>
+          </a:p>
+          <a:p>
+            <a:r>
+              <a:rPr lang="en-GB" dirty="0"/>
+              <a:t>Outcome 2 is built in 1.3 and 4.1 with the S2R® Contribution Map™, and produced in Activity 1 of Section 5, where your group maps one of its own enterprise Key Results.</a:t>
+            </a:r>
+          </a:p>
+          <a:p>
+            <a:r>
+              <a:rPr lang="en-GB" dirty="0"/>
+              <a:t>Outcome 3 is built in Section 3, where the ten executive performance perspectives come together into one view of enterprise progress, and produced in Activity 3, where your group sets the waypoints, the alert and the decider for its Key Result.</a:t>
+            </a:r>
+          </a:p>
+          <a:p>
+            <a:r>
+              <a:rPr lang="en-GB" dirty="0"/>
+              <a:t>Outcome 4 is built in 1.4 and 4.2 with FACES and in 2.1 with the four execution bridges, and produced in Activity 2, where your group applies FACES to its own map.</a:t>
+            </a:r>
+          </a:p>
+          <a:p/>
+          <a:p>
+            <a:r>
+              <a:rPr lang="en-GB" dirty="0" b="1"/>
+              <a:t>3. Connect the outcomes to the module.</a:t>
+            </a:r>
+          </a:p>
+          <a:p>
+            <a:r>
+              <a:rPr lang="en-GB" dirty="0"/>
+              <a:t>Say: "These outcomes carry the second outcome of Module 3: establishing performance arrangements that connect enterprise results to owned individual contributions and enabling organisational conditions."</a:t>
+            </a:r>
+          </a:p>
+          <a:p/>
+          <a:p>
+            <a:r>
+              <a:rPr lang="en-GB" dirty="0"/>
+              <a:t>Each section slide carries that section’s two learning outcomes.</a:t>
             </a:r>
           </a:p>
         </p:txBody>
@@ -1805,7 +1945,7 @@
           <a:lstStyle/>
           <a:p>
             <a:r>
-              <a:rPr lang="en-GB" b="1" dirty="0"/>
+              <a:rPr lang="en-GB" dirty="0" b="1"/>
               <a:t>SECTION 4 · INTEGRATION — COLLECTIVE</a:t>
             </a:r>
           </a:p>
@@ -1815,19 +1955,36 @@
               <a:t>Integration of Human and Organisational Performance</a:t>
             </a:r>
           </a:p>
-          <a:p>
-            <a:r>
-              <a:rPr lang="en-GB" dirty="0"/>
-              <a:t>One worked example brings the unit together: the contributions an enterprise Key Result requires, mapped across four functions, and how FACES manages them.</a:t>
-            </a:r>
-          </a:p>
-          <a:p>
-            <a:endParaRPr lang="en-GB" dirty="0"/>
-          </a:p>
-          <a:p>
-            <a:r>
-              <a:rPr lang="en-GB" b="1" dirty="0"/>
-              <a:t>Section learning outcomes:</a:t>
+          <a:p/>
+          <a:p>
+            <a:r>
+              <a:rPr lang="en-GB" dirty="0" b="1"/>
+              <a:t>HOW THIS SECTION RUNS:</a:t>
+            </a:r>
+          </a:p>
+          <a:p>
+            <a:r>
+              <a:rPr lang="en-GB" dirty="0"/>
+              <a:t>1. 4.1: the worked example. The S2R® Contribution Map™ for one enterprise Key Result across Customer Service, IT, Operations and Workforce Planning, then how to interpret the map (two slides).</a:t>
+            </a:r>
+          </a:p>
+          <a:p>
+            <a:r>
+              <a:rPr lang="en-GB" dirty="0"/>
+              <a:t>2. 4.2: managing the same contributions through FACES across the four functions.</a:t>
+            </a:r>
+          </a:p>
+          <a:p>
+            <a:r>
+              <a:rPr lang="en-GB" dirty="0"/>
+              <a:t>Section 4 carries no personal reflection. The worked example is the model each group follows in Section 5.</a:t>
+            </a:r>
+          </a:p>
+          <a:p/>
+          <a:p>
+            <a:r>
+              <a:rPr lang="en-GB" dirty="0" b="1"/>
+              <a:t>SECTION LEARNING OUTCOMES:</a:t>
             </a:r>
           </a:p>
           <a:p>
@@ -1842,28 +1999,63 @@
               <a:t>2. Coordinate cross-functional contributions and enabling conditions towards shared results.</a:t>
             </a:r>
           </a:p>
-          <a:p>
-            <a:endParaRPr lang="en-GB" dirty="0"/>
-          </a:p>
-          <a:p>
-            <a:r>
-              <a:rPr lang="en-GB" b="1" dirty="0"/>
-              <a:t>HOW TO TEACH IT:</a:t>
-            </a:r>
-          </a:p>
-          <a:p>
-            <a:endParaRPr lang="en-GB" dirty="0"/>
-          </a:p>
-          <a:p>
-            <a:r>
-              <a:rPr lang="en-GB" b="1" dirty="0"/>
-              <a:t>1. Frame the section.</a:t>
-            </a:r>
-          </a:p>
-          <a:p>
-            <a:r>
-              <a:rPr lang="en-GB" dirty="0"/>
-              <a:t>Say: "The previous sections established the foundations of enterprise performance management, the disciplines that sustain execution and the importance of integrating executive performance perspectives. We now bring these concepts together through a worked example."</a:t>
+          <a:p/>
+          <a:p>
+            <a:r>
+              <a:rPr lang="en-GB" dirty="0" b="1"/>
+              <a:t>HOW TO OPEN THE SECTION:</a:t>
+            </a:r>
+          </a:p>
+          <a:p/>
+          <a:p>
+            <a:r>
+              <a:rPr lang="en-GB" dirty="0" b="1"/>
+              <a:t>1. Link the three sections before it.</a:t>
+            </a:r>
+          </a:p>
+          <a:p>
+            <a:r>
+              <a:rPr lang="en-GB" dirty="0"/>
+              <a:t>Say: "The previous sections established the foundations of enterprise performance management, the disciplines that sustain execution and the importance of integrating executive performance perspectives. We now bring these concepts together through one worked example."</a:t>
+            </a:r>
+          </a:p>
+          <a:p/>
+          <a:p>
+            <a:r>
+              <a:rPr lang="en-GB" dirty="0" b="1"/>
+              <a:t>2. Name the example.</a:t>
+            </a:r>
+          </a:p>
+          <a:p>
+            <a:r>
+              <a:rPr lang="en-GB" dirty="0"/>
+              <a:t>Say: "The enterprise objective is to deliver a reliable and responsive customer service experience. The Key Result is to increase customer enquiries resolved within 48 hours from 65% to 90% by year-end. You met this department in 1.2 and 1.4. Now we map and manage every contribution it depends on."</a:t>
+            </a:r>
+          </a:p>
+          <a:p/>
+          <a:p>
+            <a:r>
+              <a:rPr lang="en-GB" dirty="0" b="1"/>
+              <a:t>3. Say why the example matters.</a:t>
+            </a:r>
+          </a:p>
+          <a:p>
+            <a:r>
+              <a:rPr lang="en-GB" dirty="0"/>
+              <a:t>Say: "In Section 5 your group builds the same three things for its own strategy. Read the example as the model you will follow."</a:t>
+            </a:r>
+          </a:p>
+          <a:p/>
+          <a:p>
+            <a:r>
+              <a:rPr lang="en-GB" dirty="0" b="1"/>
+              <a:t>4. Bridge to 4.1.</a:t>
+            </a:r>
+          </a:p>
+          <a:p>
+            <a:r>
+              <a:rPr lang="en-GB" dirty="0"/>
+              <a:t>Say: "We start with the Contribution Map."</a:t>
             </a:r>
           </a:p>
         </p:txBody>
@@ -1949,77 +2141,136 @@
           <a:lstStyle/>
           <a:p>
             <a:r>
-              <a:rPr lang="en-GB"/>
+              <a:rPr lang="en-GB" dirty="0" b="1"/>
               <a:t>SECTION 5 · APPLICATION — IN PRACTICE</a:t>
             </a:r>
           </a:p>
           <a:p>
             <a:r>
-              <a:rPr lang="en-GB"/>
+              <a:rPr lang="en-GB" dirty="0"/>
               <a:t>Building Your Enterprise Performance Management System</a:t>
             </a:r>
           </a:p>
-          <a:p>
-            <a:r>
-              <a:rPr lang="en-GB"/>
-              <a:t>Application · Each group builds three connected components of the Enterprise Performance Management System for the strategy in its Capstone S2R Blueprint: the S2R® Contribution Map™, the FACES application and the WARD check-up for its enterprise Key Result.</a:t>
-            </a:r>
-          </a:p>
-          <a:p>
-            <a:endParaRPr lang="en-GB"/>
-          </a:p>
-          <a:p>
-            <a:r>
-              <a:rPr lang="en-GB"/>
-              <a:t>Section learning outcomes:</a:t>
-            </a:r>
-          </a:p>
-          <a:p>
-            <a:r>
-              <a:rPr lang="en-GB"/>
+          <a:p/>
+          <a:p>
+            <a:r>
+              <a:rPr lang="en-GB" dirty="0" b="1"/>
+              <a:t>HOW THIS SECTION RUNS:</a:t>
+            </a:r>
+          </a:p>
+          <a:p>
+            <a:r>
+              <a:rPr lang="en-GB" dirty="0"/>
+              <a:t>1. 5.1 · Activity 1: the S2R® Contribution Map™. Each group selects one enterprise Key Result from the Objectives and Key Results it confirmed in Unit 3, part 5.2, names three or four business functions and completes six fields for each.</a:t>
+            </a:r>
+          </a:p>
+          <a:p>
+            <a:r>
+              <a:rPr lang="en-GB" dirty="0"/>
+              <a:t>2. 5.2 · Activity 2: the FACES application. For each business function named in Activity 1, the group describes one practical management arrangement for each FACES function.</a:t>
+            </a:r>
+          </a:p>
+          <a:p>
+            <a:r>
+              <a:rPr lang="en-GB" dirty="0"/>
+              <a:t>3. 5.3 · Activity 3: the WARD check-up. The group sets the waypoints, the alert, the recovery and the decider for the Key Result chosen in Activity 1, using the conditions named in its Contribution Map.</a:t>
+            </a:r>
+          </a:p>
+          <a:p>
+            <a:r>
+              <a:rPr lang="en-GB" dirty="0"/>
+              <a:t>All three activities are group work and Capstone work. Brief each activity from the worked example in Section 4. The groups then work through the steps on their own pages.</a:t>
+            </a:r>
+          </a:p>
+          <a:p/>
+          <a:p>
+            <a:r>
+              <a:rPr lang="en-GB" dirty="0" b="1"/>
+              <a:t>SECTION LEARNING OUTCOMES:</a:t>
+            </a:r>
+          </a:p>
+          <a:p>
+            <a:r>
+              <a:rPr lang="en-GB" dirty="0"/>
               <a:t>1. Design the contribution arrangements required to deliver a chosen enterprise Key Result.</a:t>
             </a:r>
           </a:p>
           <a:p>
             <a:r>
-              <a:rPr lang="en-GB"/>
+              <a:rPr lang="en-GB" dirty="0"/>
               <a:t>2. Establish shared management accountability for contributions across functions.</a:t>
             </a:r>
           </a:p>
-          <a:p>
-            <a:endParaRPr lang="en-GB"/>
-          </a:p>
-          <a:p>
-            <a:r>
-              <a:rPr lang="en-GB"/>
-              <a:t>HOW TO TEACH IT:</a:t>
-            </a:r>
-          </a:p>
-          <a:p>
-            <a:endParaRPr lang="en-GB"/>
-          </a:p>
-          <a:p>
-            <a:r>
-              <a:rPr lang="en-GB"/>
+          <a:p/>
+          <a:p>
+            <a:r>
+              <a:rPr lang="en-GB" dirty="0" b="1"/>
+              <a:t>HOW TO OPEN THE SECTION:</a:t>
+            </a:r>
+          </a:p>
+          <a:p/>
+          <a:p>
+            <a:r>
+              <a:rPr lang="en-GB" dirty="0" b="1"/>
               <a:t>1. Frame the application.</a:t>
             </a:r>
           </a:p>
           <a:p>
             <a:r>
-              <a:rPr lang="en-GB"/>
-              <a:t>Say: "You have already established your capstone organisation’s strategic direction, strategic objectives and Key Results. In this application, your group uses that work to develop three connected components of your Enterprise Performance Management System: Activity 1, the S2R® Contribution Map™, Activity 2, the FACES application, and Activity 3, the WARD check-up for your enterprise Key Result."</a:t>
-            </a:r>
-          </a:p>
-          <a:p>
-            <a:r>
-              <a:rPr lang="en-GB"/>
-              <a:t>Order: all three activities are group work and Capstone work. Activity 1 needs the group’s confirmed Enterprise OKRs from Unit 3, part 5.2. Activity 2 uses the business functions the group names in Activity 1. Activity 3 sets the WARD check-up for the Key Result chosen in Activity 1, using the conditions named in the Contribution Map.</a:t>
-            </a:r>
-          </a:p>
-          <a:p>
-            <a:r>
-              <a:rPr lang="en-GB"/>
-              <a:t>How to guide the work: brief each activity from the worked example in Section 4, then let the groups work through the steps on their own pages. The group chooses its scribe; the entries appear on every member’s page.</a:t>
+              <a:rPr lang="en-GB" dirty="0"/>
+              <a:t>Say: "Your group has already established its capstone organisation’s strategic direction, strategic objectives and Key Results. In this application you use that work to develop three connected components of your Enterprise Performance Management System: Activity 1, the S2R® Contribution Map™; Activity 2, the FACES application; and Activity 3, the WARD check-up for your enterprise Key Result."</a:t>
+            </a:r>
+          </a:p>
+          <a:p/>
+          <a:p>
+            <a:r>
+              <a:rPr lang="en-GB" dirty="0" b="1"/>
+              <a:t>2. Say how the activities connect.</a:t>
+            </a:r>
+          </a:p>
+          <a:p>
+            <a:r>
+              <a:rPr lang="en-GB" dirty="0"/>
+              <a:t>Say: "Each activity builds on the one before it. Activity 2 uses the business functions you name in Activity 1. Activity 3 sets the check-up for the Key Result you choose in Activity 1, and its recovery uses the organisational conditions you name in your map."</a:t>
+            </a:r>
+          </a:p>
+          <a:p/>
+          <a:p>
+            <a:r>
+              <a:rPr lang="en-GB" dirty="0" b="1"/>
+              <a:t>3. Say how the group works.</a:t>
+            </a:r>
+          </a:p>
+          <a:p>
+            <a:r>
+              <a:rPr lang="en-GB" dirty="0"/>
+              <a:t>Say: "This is group work. Your group chooses its scribe for this work. The scribe types what the group agrees, and the entries appear on every member’s page. When the record is complete, each member reads it and selects Agree."</a:t>
+            </a:r>
+          </a:p>
+          <a:p/>
+          <a:p>
+            <a:r>
+              <a:rPr lang="en-GB" dirty="0" b="1"/>
+              <a:t>4. Say where the work goes.</a:t>
+            </a:r>
+          </a:p>
+          <a:p>
+            <a:r>
+              <a:rPr lang="en-GB" dirty="0"/>
+              <a:t>Say: "This is Capstone work. Your group’s agreed record feeds boxes 6A, 6B and 6C of your Capstone S2R® Blueprint."</a:t>
+            </a:r>
+          </a:p>
+          <a:p/>
+          <a:p>
+            <a:r>
+              <a:rPr lang="en-GB" dirty="0" b="1"/>
+              <a:t>5. Bridge to Activity 1.</a:t>
+            </a:r>
+          </a:p>
+          <a:p>
+            <a:r>
+              <a:rPr lang="en-GB" dirty="0"/>
+              <a:t>Say: "We start with the Contribution Map for one of your own Key Results."</a:t>
             </a:r>
           </a:p>
         </p:txBody>
@@ -2366,25 +2617,21 @@
           <a:lstStyle/>
           <a:p>
             <a:r>
-              <a:rPr lang="en-GB" b="1" dirty="0"/>
+              <a:rPr lang="en-GB" dirty="0" b="1"/>
               <a:t>1.2 — TWO OPERATING SYSTEMS BEHIND ENTERPRISE PERFORMANCE (Understanding what people deliver and what the organisation enables)</a:t>
             </a:r>
           </a:p>
-          <a:p>
-            <a:endParaRPr lang="en-GB" dirty="0"/>
-          </a:p>
-          <a:p>
-            <a:r>
-              <a:rPr lang="en-GB" b="1" dirty="0"/>
+          <a:p/>
+          <a:p>
+            <a:r>
+              <a:rPr lang="en-GB" dirty="0" b="1"/>
               <a:t>HOW TO TEACH IT:</a:t>
             </a:r>
           </a:p>
-          <a:p>
-            <a:endParaRPr lang="en-GB" dirty="0"/>
-          </a:p>
-          <a:p>
-            <a:r>
-              <a:rPr lang="en-GB" b="1" dirty="0"/>
+          <a:p/>
+          <a:p>
+            <a:r>
+              <a:rPr lang="en-GB" dirty="0" b="1"/>
               <a:t>1. Open with the question.</a:t>
             </a:r>
           </a:p>
@@ -2394,12 +2641,10 @@
               <a:t>Begin by asking participants: "When an employee or department misses a performance target, how does your organisation determine whether the problem is with individual performance or the conditions under which the work is performed?" Take two or three answers in the chat.</a:t>
             </a:r>
           </a:p>
-          <a:p>
-            <a:endParaRPr lang="en-GB" dirty="0"/>
-          </a:p>
-          <a:p>
-            <a:r>
-              <a:rPr lang="en-GB" b="1" dirty="0"/>
+          <a:p/>
+          <a:p>
+            <a:r>
+              <a:rPr lang="en-GB" dirty="0" b="1"/>
               <a:t>2. Teach why there are two systems.</a:t>
             </a:r>
           </a:p>
@@ -2421,12 +2666,10 @@
               <a:t>Say: "This distinction is fundamental to Enterprise Performance Management (EPM). A complete performance management system must evaluate what people contribute and whether the organisation provides the conditions necessary for those contributions to produce the intended results. We refer to these as two interconnected operating systems."</a:t>
             </a:r>
           </a:p>
-          <a:p>
-            <a:endParaRPr lang="en-GB" dirty="0"/>
-          </a:p>
-          <a:p>
-            <a:r>
-              <a:rPr lang="en-GB" b="1" dirty="0"/>
+          <a:p/>
+          <a:p>
+            <a:r>
+              <a:rPr lang="en-GB" dirty="0" b="1"/>
               <a:t>3. Teach the Human Operating System (left card).</a:t>
             </a:r>
           </a:p>
@@ -2466,12 +2709,10 @@
               <a:t>The Human Operating System answers: "Are individuals and teams delivering their expected results and demonstrating the behaviours required for sustained organisational performance?"</a:t>
             </a:r>
           </a:p>
-          <a:p>
-            <a:endParaRPr lang="en-GB" dirty="0"/>
-          </a:p>
-          <a:p>
-            <a:r>
-              <a:rPr lang="en-GB" b="1" dirty="0"/>
+          <a:p/>
+          <a:p>
+            <a:r>
+              <a:rPr lang="en-GB" dirty="0" b="1"/>
               <a:t>4. Introduce the Organisational Operating System (right card).</a:t>
             </a:r>
           </a:p>
@@ -2484,7 +2725,13 @@
           <a:p>
             <a:r>
               <a:rPr lang="en-GB" dirty="0"/>
-              <a:t>Say: "Within S2R®, these conditions are examined through ESRG: Environment, Systems, Resources and Governance. ESRG provides the structure for evaluating whether the organisation has the operating capability necessary to support its strategic ambition." The next slide takes the four elements one at a time.</a:t>
+              <a:t>Say: "Within S2R®, these conditions are examined through ESRG: Environment, Systems, Resources and Governance, each with three components. ESRG provides the structure for evaluating whether the organisation has the operating capability necessary to support its strategic ambition."</a:t>
+            </a:r>
+          </a:p>
+          <a:p>
+            <a:r>
+              <a:rPr lang="en-GB" dirty="0"/>
+              <a:t>The next slide takes the four domains one at a time.</a:t>
             </a:r>
           </a:p>
         </p:txBody>
@@ -2565,131 +2812,123 @@
           <a:lstStyle/>
           <a:p>
             <a:r>
-              <a:rPr lang="en-GB"/>
+              <a:rPr lang="en-GB" dirty="0"/>
               <a:t>UNIT SUMMARY (UNIT 6 SYNTHESIS)</a:t>
             </a:r>
           </a:p>
-          <a:p>
-            <a:endParaRPr lang="en-GB"/>
-          </a:p>
-          <a:p>
-            <a:r>
-              <a:rPr lang="en-GB"/>
+          <a:p/>
+          <a:p>
+            <a:r>
+              <a:rPr lang="en-GB" dirty="0"/>
               <a:t>HOW TO TEACH IT:</a:t>
             </a:r>
           </a:p>
-          <a:p>
-            <a:endParaRPr lang="en-GB"/>
-          </a:p>
-          <a:p>
-            <a:r>
-              <a:rPr lang="en-GB"/>
+          <a:p/>
+          <a:p>
+            <a:r>
+              <a:rPr lang="en-GB" dirty="0"/>
               <a:t>1. Recap the unit, section by section.</a:t>
             </a:r>
           </a:p>
           <a:p>
             <a:r>
-              <a:rPr lang="en-GB"/>
+              <a:rPr lang="en-GB" dirty="0"/>
               <a:t>- 1 · Awareness: Performance measurement answers what happened; performance management decides what to do about it. Enterprise performance comes from people performance (results against KPIs and OKRs, and behaviours) and organisational performance (the organisational conditions: environment, systems, resources and governance). The S2R® Contribution Map™ connects an enterprise Key Result to the contribution each function, its people and the organisation must make. FACES names the five functions that manage those contributions across both systems.</a:t>
             </a:r>
           </a:p>
           <a:p>
             <a:r>
-              <a:rPr lang="en-GB"/>
+              <a:rPr lang="en-GB" dirty="0"/>
               <a:t>- 2 · Intelligence: Performance management is the execution bridge that keeps strategy connected to performance throughout delivery. Four bridges sustain it: Decomposing the Big Picture, Defining the Logic of Success, Calibrating the Rhythm and Structuring the Dialogue. Compliance-driven and commitment-driven architectures shape how accountability works for people and for the organisation when results fall short.</a:t>
             </a:r>
           </a:p>
           <a:p>
             <a:r>
-              <a:rPr lang="en-GB"/>
+              <a:rPr lang="en-GB" dirty="0"/>
               <a:t>- 3 · Extrapolating: Each executive brings a natural performance focus and a potential blind spot. Unity in Diversity integrates the ten executive performance perspectives into one view of enterprise progress. Three shifts are moving performance management from annual to continuous, from rating-centric to development-centric, and from individual to team performance.</a:t>
             </a:r>
           </a:p>
           <a:p>
             <a:r>
-              <a:rPr lang="en-GB"/>
+              <a:rPr lang="en-GB" dirty="0"/>
               <a:t>- 4 · Integration: The worked example mapped one enterprise Key Result across Customer Service, IT, Operations and Workforce Planning: each function’s contribution, what its people must deliver and the organisational conditions that enable them, each with a measure or evidence. FACES then showed how those contributions are managed in practice.</a:t>
             </a:r>
           </a:p>
           <a:p>
             <a:r>
-              <a:rPr lang="en-GB"/>
-              <a:t>- 5 · Application: Each group built an S2R® Contribution Map™ for one of its own enterprise Key Results, applied FACES to manage each function’s contribution and set the WARD check-up for the Key Result. The confirmed record feeds the team’s Capstone S2R Blueprint.</a:t>
-            </a:r>
-          </a:p>
-          <a:p>
-            <a:endParaRPr lang="en-GB"/>
-          </a:p>
-          <a:p>
-            <a:r>
-              <a:rPr lang="en-GB"/>
+              <a:rPr lang="en-GB" dirty="0"/>
+              <a:t>- 5 · Application: Each group built an S2R® Contribution Map™ for one of its own enterprise Key Results, applied FACES to manage each function’s contribution and set the WARD check-up for the Key Result. The confirmed record feeds the team’s Capstone S2R® Blueprint.</a:t>
+            </a:r>
+          </a:p>
+          <a:p/>
+          <a:p>
+            <a:r>
+              <a:rPr lang="en-GB" dirty="0"/>
               <a:t>2. Ask the closing question on the slide.</a:t>
             </a:r>
           </a:p>
           <a:p>
             <a:r>
-              <a:rPr lang="en-GB"/>
+              <a:rPr lang="en-GB" dirty="0"/>
               <a:t>Ask: "Which contribution in your group’s map was hardest to agree, and what does that tell you about the performance management system in your own organisation?" Take an answer from each group.</a:t>
             </a:r>
           </a:p>
-          <a:p>
-            <a:endParaRPr lang="en-GB"/>
-          </a:p>
-          <a:p>
-            <a:r>
-              <a:rPr lang="en-GB"/>
+          <a:p/>
+          <a:p>
+            <a:r>
+              <a:rPr lang="en-GB" dirty="0" b="1"/>
               <a:t>3. Close the unit.</a:t>
             </a:r>
           </a:p>
           <a:p>
             <a:r>
-              <a:rPr lang="en-GB"/>
-              <a:t>Say: "A performance management system that only measures has not yet become a management system. The moment measurement becomes the basis for a decision, a conversation, and an accountable intervention — that is the moment execution begins."</a:t>
-            </a:r>
-          </a:p>
-          <a:p>
-            <a:endParaRPr lang="en-GB"/>
-          </a:p>
-          <a:p>
-            <a:r>
-              <a:rPr lang="en-GB"/>
-              <a:t>4. Say what happens on the portal.</a:t>
-            </a:r>
-          </a:p>
-          <a:p>
-            <a:r>
-              <a:rPr lang="en-GB"/>
-              <a:t>Say: "You now complete the unit on the portal: your four personal reflections and your group’s record in Section 5. When your page is complete, you submit the unit."</a:t>
-            </a:r>
-          </a:p>
-          <a:p>
-            <a:endParaRPr lang="en-GB"/>
-          </a:p>
-          <a:p>
-            <a:r>
-              <a:rPr lang="en-GB"/>
+              <a:rPr lang="en-GB" dirty="0"/>
+              <a:t>Say: "A performance management system becomes a management system when measurement becomes the basis for a decision, a conversation and an accountable intervention. Execution begins at that moment."</a:t>
+            </a:r>
+          </a:p>
+          <a:p>
+            <a:r>
+              <a:rPr lang="en-GB" dirty="0"/>
+              <a:t>Say: "Each group’s Enterprise Performance Management System now links one Key Result to its contributions, their management and its vital check-up."</a:t>
+            </a:r>
+          </a:p>
+          <a:p/>
+          <a:p>
+            <a:r>
+              <a:rPr lang="en-GB" dirty="0" b="1"/>
+              <a:t>4. Bridge to Unit 7.</a:t>
+            </a:r>
+          </a:p>
+          <a:p>
+            <a:r>
+              <a:rPr lang="en-GB" dirty="0"/>
+              <a:t>Say: "Unit 7 turns the contributions on your group’s Contribution Map into expectations their owners commit to."</a:t>
+            </a:r>
+          </a:p>
+          <a:p/>
+          <a:p>
+            <a:r>
+              <a:rPr lang="en-GB" dirty="0"/>
               <a:t>ON THE PORTAL, AFTER THE TEACHING:</a:t>
             </a:r>
           </a:p>
           <a:p>
             <a:r>
-              <a:rPr lang="en-GB"/>
-              <a:t>Participants complete every part of the participant file and submit the unit to the facilitator from the end of Section 5.</a:t>
-            </a:r>
-          </a:p>
-          <a:p>
-            <a:endParaRPr lang="en-GB"/>
-          </a:p>
-          <a:p>
-            <a:r>
-              <a:rPr lang="en-GB"/>
+              <a:rPr lang="en-GB" dirty="0"/>
+              <a:t>Participants complete every part of the participant file: the four personal reflections and the group’s record in Section 5. When the page is complete, each participant submits the unit to the facilitator from the end of Section 5.</a:t>
+            </a:r>
+          </a:p>
+          <a:p/>
+          <a:p>
+            <a:r>
+              <a:rPr lang="en-GB" dirty="0"/>
               <a:t>AFTER THE SESSION:</a:t>
             </a:r>
           </a:p>
           <a:p>
             <a:r>
-              <a:rPr lang="en-GB"/>
-              <a:t>Each submission reaches you in the facilitator dashboard. The personal reflections go to each participant’s Learning Portfolio; the group’s confirmed record feeds the team’s Capstone S2R Blueprint.</a:t>
+              <a:rPr lang="en-GB" dirty="0"/>
+              <a:t>Each submission reaches you in the facilitator dashboard. The personal reflections go to each participant’s Learning Portfolio; the group’s agreed record feeds the team’s Capstone S2R® Blueprint.</a:t>
             </a:r>
           </a:p>
         </p:txBody>
@@ -2995,221 +3234,207 @@
           <a:lstStyle/>
           <a:p>
             <a:r>
-              <a:rPr lang="en-GB"/>
+              <a:rPr lang="en-GB" dirty="0"/>
               <a:t>5.3 — ACTIVITY 3: WARD · YOUR KEY RESULT’S VITAL CHECK-UP (CAPSTONE WORK)</a:t>
             </a:r>
           </a:p>
-          <a:p>
-            <a:endParaRPr lang="en-GB"/>
-          </a:p>
-          <a:p>
-            <a:r>
-              <a:rPr lang="en-GB"/>
+          <a:p/>
+          <a:p>
+            <a:r>
+              <a:rPr lang="en-GB" dirty="0"/>
               <a:t>HOW TO TEACH IT:</a:t>
             </a:r>
           </a:p>
-          <a:p>
-            <a:endParaRPr lang="en-GB"/>
-          </a:p>
-          <a:p>
-            <a:r>
-              <a:rPr lang="en-GB"/>
+          <a:p/>
+          <a:p>
+            <a:r>
+              <a:rPr lang="en-GB" dirty="0"/>
               <a:t>1. Open with the check-up.</a:t>
             </a:r>
           </a:p>
           <a:p>
             <a:r>
-              <a:rPr lang="en-GB"/>
+              <a:rPr lang="en-GB" dirty="0"/>
               <a:t>Say: "Every Key Result your group set in Unit 3 has a baseline, a target and a deadline. Performance management must set out in advance when a Key Result will be checked and which result raises a red flag. Corrective action then starts early, while the gap is still small enough to close. WARD is the vital check-up that sets these points for your Key Result."</a:t>
             </a:r>
           </a:p>
-          <a:p>
-            <a:endParaRPr lang="en-GB"/>
-          </a:p>
-          <a:p>
-            <a:r>
-              <a:rPr lang="en-GB"/>
+          <a:p/>
+          <a:p>
+            <a:r>
+              <a:rPr lang="en-GB" dirty="0"/>
               <a:t>2. Teach the four letters.</a:t>
             </a:r>
           </a:p>
           <a:p>
             <a:r>
-              <a:rPr lang="en-GB"/>
+              <a:rPr lang="en-GB" dirty="0"/>
               <a:t>W · Waypoints: The dates on which the Key Result is checked, and the level it must have reached by each.</a:t>
             </a:r>
           </a:p>
           <a:p>
             <a:r>
-              <a:rPr lang="en-GB"/>
+              <a:rPr lang="en-GB" dirty="0"/>
               <a:t>A · Alert: How far off a waypoint the result can be before it raises a red flag.</a:t>
             </a:r>
           </a:p>
           <a:p>
             <a:r>
-              <a:rPr lang="en-GB"/>
+              <a:rPr lang="en-GB" dirty="0"/>
               <a:t>R · Recovery: The corrective action that follows a red flag, for the individuals and for the organisational conditions.</a:t>
             </a:r>
           </a:p>
           <a:p>
             <a:r>
-              <a:rPr lang="en-GB"/>
+              <a:rPr lang="en-GB" dirty="0"/>
               <a:t>D · Decider: The executive who decides on the recovery and sees it through.</a:t>
             </a:r>
           </a:p>
-          <a:p>
-            <a:endParaRPr lang="en-GB"/>
-          </a:p>
-          <a:p>
-            <a:r>
-              <a:rPr lang="en-GB"/>
+          <a:p/>
+          <a:p>
+            <a:r>
+              <a:rPr lang="en-GB" dirty="0"/>
               <a:t>3. Take the worked example through WARD.</a:t>
             </a:r>
           </a:p>
           <a:p>
             <a:r>
-              <a:rPr lang="en-GB"/>
+              <a:rPr lang="en-GB" dirty="0"/>
               <a:t>Enterprise Key Result from part 4.1: Increase customer enquiries resolved within 48 hours from 65% to 90% by year-end.</a:t>
             </a:r>
           </a:p>
           <a:p>
             <a:r>
-              <a:rPr lang="en-GB"/>
+              <a:rPr lang="en-GB" dirty="0"/>
               <a:t>W · Waypoints: 72% by the end of March, 80% by the end of June and 85% by the end of September, on the way to 90% at year-end.</a:t>
             </a:r>
           </a:p>
           <a:p>
             <a:r>
-              <a:rPr lang="en-GB"/>
+              <a:rPr lang="en-GB" dirty="0"/>
               <a:t>A · Alert: More than three percentage points below a waypoint at a monthly review.</a:t>
             </a:r>
           </a:p>
           <a:p>
             <a:r>
-              <a:rPr lang="en-GB"/>
+              <a:rPr lang="en-GB" dirty="0"/>
               <a:t>R · Recovery · individuals: Team leaders review every open enquiry with its owner each morning, and agents with repeated follow-through gaps are coached.</a:t>
             </a:r>
           </a:p>
           <a:p>
             <a:r>
-              <a:rPr lang="en-GB"/>
+              <a:rPr lang="en-GB" dirty="0"/>
               <a:t>R · Recovery · organisational conditions: The owner of the condition named in the Contribution Map restores it: IT for system availability, Workforce Planning for staffing coverage, Operations for approval delays.</a:t>
             </a:r>
           </a:p>
           <a:p>
             <a:r>
-              <a:rPr lang="en-GB"/>
+              <a:rPr lang="en-GB" dirty="0"/>
               <a:t>D · Decider: The Customer Service Executive.</a:t>
             </a:r>
           </a:p>
           <a:p>
             <a:r>
-              <a:rPr lang="en-GB"/>
+              <a:rPr lang="en-GB" dirty="0"/>
               <a:t>Ask: "At the end of June the result is 74%. What happens on Monday morning, and who decides?"</a:t>
             </a:r>
           </a:p>
           <a:p>
             <a:r>
-              <a:rPr lang="en-GB"/>
+              <a:rPr lang="en-GB" dirty="0"/>
               <a:t>Guide the groups to see that the waypoint, the alert and the recovery answer the question before the review takes place.</a:t>
             </a:r>
           </a:p>
-          <a:p>
-            <a:endParaRPr lang="en-GB"/>
-          </a:p>
-          <a:p>
-            <a:r>
-              <a:rPr lang="en-GB"/>
+          <a:p/>
+          <a:p>
+            <a:r>
+              <a:rPr lang="en-GB" dirty="0"/>
               <a:t>4. Read the completion check.</a:t>
             </a:r>
           </a:p>
           <a:p>
             <a:r>
-              <a:rPr lang="en-GB"/>
+              <a:rPr lang="en-GB" dirty="0"/>
               <a:t>1. Each waypoint has a date and a level, and the waypoints lead to the target by the deadline.</a:t>
             </a:r>
           </a:p>
           <a:p>
             <a:r>
-              <a:rPr lang="en-GB"/>
+              <a:rPr lang="en-GB" dirty="0"/>
               <a:t>2. The alert is specific enough that every member reads the same result the same way.</a:t>
             </a:r>
           </a:p>
           <a:p>
             <a:r>
-              <a:rPr lang="en-GB"/>
+              <a:rPr lang="en-GB" dirty="0"/>
               <a:t>3. The recovery covers the individuals and the organisational conditions named in the Contribution Map.</a:t>
             </a:r>
           </a:p>
           <a:p>
             <a:r>
-              <a:rPr lang="en-GB"/>
+              <a:rPr lang="en-GB" dirty="0"/>
               <a:t>4. One executive is named as the decider.</a:t>
             </a:r>
           </a:p>
           <a:p>
             <a:r>
-              <a:rPr lang="en-GB"/>
+              <a:rPr lang="en-GB" dirty="0"/>
               <a:t>Say: "In Unit 8 your group tests its WARD: the alert fires, and you run the recovery."</a:t>
             </a:r>
           </a:p>
-          <a:p>
-            <a:endParaRPr lang="en-GB"/>
-          </a:p>
-          <a:p>
-            <a:r>
-              <a:rPr lang="en-GB"/>
+          <a:p/>
+          <a:p>
+            <a:r>
+              <a:rPr lang="en-GB" dirty="0"/>
               <a:t>ON THE PORTAL, AFTER THE TEACHING:</a:t>
             </a:r>
           </a:p>
           <a:p>
             <a:r>
-              <a:rPr lang="en-GB"/>
+              <a:rPr lang="en-GB" dirty="0"/>
               <a:t>Participants work as a group in Activity 3 of Section 5 of the participant file. This is Capstone work. The group chooses its scribe for this work. The scribe types what the group agrees, and the entries appear on every member’s page.</a:t>
             </a:r>
           </a:p>
           <a:p>
             <a:r>
-              <a:rPr lang="en-GB"/>
+              <a:rPr lang="en-GB" dirty="0"/>
               <a:t>1. The group sets two or three waypoints for its enterprise Key Result: a date and a level for each.</a:t>
             </a:r>
           </a:p>
           <a:p>
             <a:r>
-              <a:rPr lang="en-GB"/>
+              <a:rPr lang="en-GB" dirty="0"/>
               <a:t>2. The group sets the alert, the recovery for the individuals and for the organisational conditions, and the decider.</a:t>
             </a:r>
           </a:p>
           <a:p>
             <a:r>
-              <a:rPr lang="en-GB"/>
+              <a:rPr lang="en-GB" dirty="0"/>
               <a:t>3. The group reads the completion check.</a:t>
             </a:r>
           </a:p>
           <a:p>
             <a:r>
-              <a:rPr lang="en-GB"/>
+              <a:rPr lang="en-GB" dirty="0"/>
               <a:t>4. Each participant reads the record and selects Agree. Print gives a copy.</a:t>
             </a:r>
           </a:p>
           <a:p>
             <a:r>
-              <a:rPr lang="en-GB"/>
-              <a:t>The agreed record feeds the team’s Capstone S2R Blueprint.</a:t>
-            </a:r>
-          </a:p>
-          <a:p>
-            <a:endParaRPr lang="en-GB"/>
-          </a:p>
-          <a:p>
-            <a:r>
-              <a:rPr lang="en-GB"/>
-              <a:t>AFTER THE SESSION:</a:t>
-            </a:r>
-          </a:p>
-          <a:p>
-            <a:r>
-              <a:rPr lang="en-GB"/>
-              <a:t>The record reaches you with each participant’s submission, under the heading of Section 5. The agreed record feeds the Unit 6 boxes of the team’s Capstone S2R Blueprint: the Contribution Map in 6A, the FACES application in 6B and the WARD check-up in 6C.</a:t>
+              <a:rPr lang="en-GB" dirty="0"/>
+              <a:t>The agreed record feeds the team’s Capstone S2R® Blueprint.</a:t>
+            </a:r>
+          </a:p>
+          <a:p/>
+          <a:p>
+            <a:r>
+              <a:rPr lang="en-GB" dirty="0" b="1"/>
+              <a:t>WHERE THE RECORD GOES:</a:t>
+            </a:r>
+          </a:p>
+          <a:p>
+            <a:r>
+              <a:rPr lang="en-GB" dirty="0"/>
+              <a:t>The agreed record feeds the Unit 6 boxes of the team’s Capstone S2R® Blueprint: the Contribution Map in 6A, the FACES application in 6B and the WARD check-up in 6C. The external panel assesses the Blueprint.</a:t>
             </a:r>
           </a:p>
         </p:txBody>
@@ -3290,83 +3515,78 @@
           <a:lstStyle/>
           <a:p>
             <a:r>
-              <a:rPr lang="en-GB" b="1" dirty="0"/>
+              <a:rPr lang="en-GB" dirty="0" b="1"/>
               <a:t>THE UNIT JOURNEY</a:t>
             </a:r>
           </a:p>
-          <a:p>
-            <a:endParaRPr lang="en-GB" dirty="0"/>
-          </a:p>
-          <a:p>
-            <a:r>
-              <a:rPr lang="en-GB" b="1" dirty="0"/>
+          <a:p/>
+          <a:p>
+            <a:r>
+              <a:rPr lang="en-GB" dirty="0" b="1"/>
               <a:t>HOW TO USE THIS SLIDE:</a:t>
             </a:r>
           </a:p>
-          <a:p>
-            <a:endParaRPr lang="en-GB" dirty="0"/>
-          </a:p>
-          <a:p>
-            <a:r>
-              <a:rPr lang="en-GB" b="1" dirty="0"/>
-              <a:t>1. Walk the five sections.</a:t>
-            </a:r>
-          </a:p>
-          <a:p>
-            <a:r>
-              <a:rPr lang="en-GB" dirty="0"/>
-              <a:t>Section 1 · Awareness: measurement and management, people performance and organisational performance, the S2R® Contribution Map™ and FACES.</a:t>
-            </a:r>
-          </a:p>
-          <a:p>
-            <a:r>
-              <a:rPr lang="en-GB" dirty="0"/>
-              <a:t>Section 2 · Intelligence: performance management as the execution bridge, and compliance and commitment architecture.</a:t>
-            </a:r>
-          </a:p>
-          <a:p>
-            <a:r>
-              <a:rPr lang="en-GB" dirty="0"/>
-              <a:t>Section 3 · Extrapolating: executive performance perspectives and the continuous performance management shift.</a:t>
-            </a:r>
-          </a:p>
-          <a:p>
-            <a:r>
-              <a:rPr lang="en-GB" dirty="0"/>
-              <a:t>Section 4 · Integration: one worked example that maps the contributions to an enterprise Key Result and manages them through FACES.</a:t>
-            </a:r>
-          </a:p>
-          <a:p>
-            <a:r>
-              <a:rPr lang="en-GB" dirty="0"/>
-              <a:t>Section 5 · Application: each group builds its own Contribution Map and FACES application, as Capstone work.</a:t>
-            </a:r>
-          </a:p>
-          <a:p>
-            <a:endParaRPr lang="en-GB" dirty="0"/>
-          </a:p>
-          <a:p>
-            <a:r>
-              <a:rPr lang="en-GB" b="1" dirty="0"/>
-              <a:t>2. Name the questions the unit keeps asking.</a:t>
-            </a:r>
-          </a:p>
-          <a:p>
-            <a:r>
-              <a:rPr lang="en-GB" dirty="0"/>
-              <a:t>"If your organisation stopped producing its performance reports tomorrow, which decisions would leaders no longer be able to make?"</a:t>
-            </a:r>
-          </a:p>
-          <a:p>
-            <a:r>
-              <a:rPr lang="en-GB" dirty="0"/>
-              <a:t>"When a target is missed, how do you distinguish an individual contribution problem from an organisational delivery problem?"</a:t>
-            </a:r>
-          </a:p>
-          <a:p>
-            <a:r>
-              <a:rPr lang="en-GB" dirty="0"/>
-              <a:t>"If employees are meeting their performance commitments but system outages continue to delay customer resolution, who must take responsibility for the performance gap?"</a:t>
+          <a:p/>
+          <a:p>
+            <a:r>
+              <a:rPr lang="en-GB" dirty="0" b="1"/>
+              <a:t>1. Walk the five sections, one sentence each.</a:t>
+            </a:r>
+          </a:p>
+          <a:p>
+            <a:r>
+              <a:rPr lang="en-GB" dirty="0"/>
+              <a:t>Section 1 · Awareness — What: what performance management must manage. The contribution of people and the conditions the organisation provides, connected to enterprise results through the S2R® Contribution Map™ and managed through FACES.</a:t>
+            </a:r>
+          </a:p>
+          <a:p>
+            <a:r>
+              <a:rPr lang="en-GB" dirty="0"/>
+              <a:t>Section 2 · Intelligence — Why: why enterprise performance depends on connecting strategic outcomes, human contributions and organisational operating capability. The four execution bridges, and compliance and commitment architecture.</a:t>
+            </a:r>
+          </a:p>
+          <a:p>
+            <a:r>
+              <a:rPr lang="en-GB" dirty="0"/>
+              <a:t>Section 3 · Extrapolating — Where: where enterprise performance management becomes vulnerable. How executive performance perspectives and the evolution of performance management practice shape what leaders see and how they respond.</a:t>
+            </a:r>
+          </a:p>
+          <a:p>
+            <a:r>
+              <a:rPr lang="en-GB" dirty="0"/>
+              <a:t>Section 4 · Integration — Collective: one worked example brings the unit together. The contributions an enterprise Key Result requires, mapped across four functions, and how FACES manages them.</a:t>
+            </a:r>
+          </a:p>
+          <a:p>
+            <a:r>
+              <a:rPr lang="en-GB" dirty="0"/>
+              <a:t>Section 5 · Application — In Practice: each group builds three connected components of its Enterprise Performance Management System for the strategy in its Capstone S2R® Blueprint: the Contribution Map, the FACES application and the WARD check-up for its enterprise Key Result.</a:t>
+            </a:r>
+          </a:p>
+          <a:p/>
+          <a:p>
+            <a:r>
+              <a:rPr lang="en-GB" dirty="0" b="1"/>
+              <a:t>2. Say how the sections connect.</a:t>
+            </a:r>
+          </a:p>
+          <a:p>
+            <a:r>
+              <a:rPr lang="en-GB" dirty="0"/>
+              <a:t>Say: "Sections 1 to 4 build the thinking, and one example runs through all of them: a customer service department that must raise enquiries resolved within 48 hours from 65% to 90% by year-end. Section 5 is where your group applies the same thinking to its own strategy."</a:t>
+            </a:r>
+          </a:p>
+          <a:p/>
+          <a:p>
+            <a:r>
+              <a:rPr lang="en-GB" dirty="0" b="1"/>
+              <a:t>3. Bridge to Section 1.</a:t>
+            </a:r>
+          </a:p>
+          <a:p>
+            <a:r>
+              <a:rPr lang="en-GB" dirty="0"/>
+              <a:t>Say: "We start with what performance management must manage."</a:t>
             </a:r>
           </a:p>
         </p:txBody>
@@ -3452,95 +3672,122 @@
           <a:lstStyle/>
           <a:p>
             <a:r>
-              <a:rPr lang="en-GB" b="1" dirty="0"/>
+              <a:rPr lang="en-GB" dirty="0" b="1"/>
               <a:t>1.2 — THE ORGANISATIONAL OPERATING SYSTEM · ESRG</a:t>
             </a:r>
           </a:p>
-          <a:p>
-            <a:endParaRPr lang="en-GB" dirty="0"/>
-          </a:p>
-          <a:p>
-            <a:r>
-              <a:rPr lang="en-GB" b="1" dirty="0"/>
+          <a:p/>
+          <a:p>
+            <a:r>
+              <a:rPr lang="en-GB" dirty="0" b="1"/>
               <a:t>HOW TO TEACH IT:</a:t>
             </a:r>
           </a:p>
-          <a:p>
-            <a:endParaRPr lang="en-GB" dirty="0"/>
-          </a:p>
-          <a:p>
-            <a:r>
-              <a:rPr lang="en-GB" b="1" dirty="0"/>
-              <a:t>1. Teach the four elements, one row at a time.</a:t>
-            </a:r>
-          </a:p>
-          <a:p>
-            <a:r>
-              <a:rPr lang="en-GB" dirty="0"/>
-              <a:t>E · Environment. Say: "The conditions within which people and organisational processes operate. These include the working environment, organisational climate, cross-functional relationships and external operating conditions that influence delivery."</a:t>
-            </a:r>
-          </a:p>
-          <a:p>
-            <a:r>
-              <a:rPr lang="en-GB" dirty="0"/>
-              <a:t>Example: a customer service team may have clear targets, but persistent conflict between departments prevents timely resolution of customer enquiries.</a:t>
-            </a:r>
-          </a:p>
-          <a:p>
-            <a:r>
-              <a:rPr lang="en-GB" dirty="0"/>
-              <a:t>Performance management consideration: Are the operating conditions supporting or obstructing the achievement of expected results?</a:t>
-            </a:r>
-          </a:p>
-          <a:p>
-            <a:endParaRPr lang="en-GB" dirty="0"/>
-          </a:p>
-          <a:p>
-            <a:r>
-              <a:rPr lang="en-GB" dirty="0"/>
-              <a:t>S · Systems. Say: "The processes, workflows, technologies and operating mechanisms through which work is performed. Systems determine how efficiently and reliably the organisation converts effort and resources into outputs."</a:t>
-            </a:r>
-          </a:p>
-          <a:p>
-            <a:r>
-              <a:rPr lang="en-GB" dirty="0"/>
-              <a:t>Example: employees may be expected to process 100 applications daily, but an unreliable processing system limits actual throughput to 60 applications.</a:t>
-            </a:r>
-          </a:p>
-          <a:p>
-            <a:r>
-              <a:rPr lang="en-GB" dirty="0"/>
-              <a:t>Performance management consideration: Are the systems and processes capable of supporting the required performance standards?</a:t>
-            </a:r>
-          </a:p>
-          <a:p>
-            <a:endParaRPr lang="en-GB" dirty="0"/>
-          </a:p>
-          <a:p>
-            <a:r>
-              <a:rPr lang="en-GB" dirty="0"/>
-              <a:t>R · Resources. Say: "The people, skills, capacity, funding, equipment, information and other resources required to deliver results. Resource adequacy must be evaluated against the level of performance the organisation expects."</a:t>
-            </a:r>
-          </a:p>
-          <a:p>
-            <a:r>
-              <a:rPr lang="en-GB" dirty="0"/>
-              <a:t>Example: a department may be required to double its service output while operating with the same capacity and equipment.</a:t>
-            </a:r>
-          </a:p>
-          <a:p>
-            <a:r>
-              <a:rPr lang="en-GB" dirty="0"/>
-              <a:t>Performance management consideration: Does the organisation have sufficient and appropriately deployed resources to achieve its targets?</a:t>
-            </a:r>
-          </a:p>
-          <a:p>
-            <a:endParaRPr lang="en-GB" dirty="0"/>
-          </a:p>
-          <a:p>
-            <a:r>
-              <a:rPr lang="en-GB" dirty="0"/>
-              <a:t>G · Governance. Say: "The decision rights, accountability arrangements, policies, controls and escalation mechanisms that guide organisational execution. Governance determines whether decisions can be made at the appropriate level and whether constraints can be resolved in time."</a:t>
+          <a:p/>
+          <a:p>
+            <a:r>
+              <a:rPr lang="en-GB" dirty="0" b="1"/>
+              <a:t>1. Frame the four domains.</a:t>
+            </a:r>
+          </a:p>
+          <a:p>
+            <a:r>
+              <a:rPr lang="en-GB" dirty="0"/>
+              <a:t>Say: "Within S2R®, the organisational conditions are examined through ESRG: Environment, Systems, Resources and Governance. Each domain has three components. ESRG gives the structure for evaluating whether the organisation has the operating capability its strategic ambition requires."</a:t>
+            </a:r>
+          </a:p>
+          <a:p>
+            <a:r>
+              <a:rPr lang="en-GB" dirty="0"/>
+              <a:t>Say: "The capacity, capability and behaviour of people sit in the Human Operating System. ESRG covers what the organisation provides for them."</a:t>
+            </a:r>
+          </a:p>
+          <a:p/>
+          <a:p>
+            <a:r>
+              <a:rPr lang="en-GB" dirty="0" b="1"/>
+              <a:t>2. Teach Environment · FIT.</a:t>
+            </a:r>
+          </a:p>
+          <a:p>
+            <a:r>
+              <a:rPr lang="en-GB" dirty="0"/>
+              <a:t>Say: "Environment covers Facilities, Infrastructure and Technology: the physical and technological setting in which the work takes place. Facilities suited to the planned activity, infrastructure that reliably carries operational demand, and technology that is available and fit for the required work."</a:t>
+            </a:r>
+          </a:p>
+          <a:p>
+            <a:r>
+              <a:rPr lang="en-GB" dirty="0"/>
+              <a:t>Example: a customer service team has clear targets, but repeated outages of the customer management system leave enquiries unresolved.</a:t>
+            </a:r>
+          </a:p>
+          <a:p>
+            <a:r>
+              <a:rPr lang="en-GB" dirty="0"/>
+              <a:t>Say: "The performance management question is: are the facilities, infrastructure and technology supporting or obstructing the achievement of expected results?"</a:t>
+            </a:r>
+          </a:p>
+          <a:p/>
+          <a:p>
+            <a:r>
+              <a:rPr lang="en-GB" dirty="0" b="1"/>
+              <a:t>3. Teach Systems · SIP.</a:t>
+            </a:r>
+          </a:p>
+          <a:p>
+            <a:r>
+              <a:rPr lang="en-GB" dirty="0"/>
+              <a:t>Say: "Systems covers Standardisation, Integration and Process Efficiency: how work is defined, connected and performed across the organisation. Processes clearly defined and consistently applied, handovers that connect across functions, and process design that delivers the required output without unnecessary steps, delay or duplication."</a:t>
+            </a:r>
+          </a:p>
+          <a:p>
+            <a:r>
+              <a:rPr lang="en-GB" dirty="0"/>
+              <a:t>Example: employees may be expected to process 100 applications daily, but disconnected handovers between departments limit actual throughput to 60 applications.</a:t>
+            </a:r>
+          </a:p>
+          <a:p>
+            <a:r>
+              <a:rPr lang="en-GB" dirty="0"/>
+              <a:t>Say: "The question is: are the systems and processes capable of supporting the required performance standards?"</a:t>
+            </a:r>
+          </a:p>
+          <a:p/>
+          <a:p>
+            <a:r>
+              <a:rPr lang="en-GB" dirty="0" b="1"/>
+              <a:t>4. Teach Resources · AIR.</a:t>
+            </a:r>
+          </a:p>
+          <a:p>
+            <a:r>
+              <a:rPr lang="en-GB" dirty="0"/>
+              <a:t>Say: "Resources covers Asset Availability, Investment and Resource Utilisation: the productive assets and funding required to deliver results, and how productively they are deployed against priorities. Resource adequacy must be evaluated against the level of performance the organisation expects."</a:t>
+            </a:r>
+          </a:p>
+          <a:p>
+            <a:r>
+              <a:rPr lang="en-GB" dirty="0"/>
+              <a:t>Example: a department may be required to double its service output with the same equipment and no additional budget.</a:t>
+            </a:r>
+          </a:p>
+          <a:p>
+            <a:r>
+              <a:rPr lang="en-GB" dirty="0"/>
+              <a:t>Say: "The question is: does the organisation have sufficient and appropriately deployed assets and funding to achieve its targets?"</a:t>
+            </a:r>
+          </a:p>
+          <a:p/>
+          <a:p>
+            <a:r>
+              <a:rPr lang="en-GB" dirty="0" b="1"/>
+              <a:t>5. Teach Governance · PAR.</a:t>
+            </a:r>
+          </a:p>
+          <a:p>
+            <a:r>
+              <a:rPr lang="en-GB" dirty="0"/>
+              <a:t>Say: "Governance covers Policies and Procedures, Authority and Risk Management: the arrangements that guide organisational execution. Governance determines whether decisions can be made at the appropriate level and time, and whether risks to delivery are identified and managed."</a:t>
             </a:r>
           </a:p>
           <a:p>
@@ -3552,22 +3799,33 @@
           <a:p>
             <a:r>
               <a:rPr lang="en-GB" dirty="0"/>
-              <a:t>Performance management consideration: Do governance arrangements enable timely decisions, clear accountability and effective resolution of performance constraints?</a:t>
-            </a:r>
-          </a:p>
-          <a:p>
-            <a:endParaRPr lang="en-GB" dirty="0"/>
-          </a:p>
-          <a:p>
-            <a:r>
-              <a:rPr lang="en-GB" b="1" dirty="0"/>
-              <a:t>2. Close the slide.</a:t>
-            </a:r>
-          </a:p>
-          <a:p>
-            <a:r>
-              <a:rPr lang="en-GB" dirty="0"/>
-              <a:t>The Organisational Operating System answers: "Does the organisation have the environment, systems, resources and governance necessary to deliver its expected results consistently?"</a:t>
+              <a:t>Say: "The question is: do governance arrangements enable timely decisions, clear accountability and effective resolution of performance constraints?"</a:t>
+            </a:r>
+          </a:p>
+          <a:p/>
+          <a:p>
+            <a:r>
+              <a:rPr lang="en-GB" dirty="0" b="1"/>
+              <a:t>6. Close the slide.</a:t>
+            </a:r>
+          </a:p>
+          <a:p>
+            <a:r>
+              <a:rPr lang="en-GB" dirty="0"/>
+              <a:t>Say: "The Organisational Operating System answers one question: does the organisation have the environment, systems, resources and governance necessary to deliver its expected results consistently? Unit 10 teaches how to use ESRG to develop the organisational capability that grounds performance."</a:t>
+            </a:r>
+          </a:p>
+          <a:p/>
+          <a:p>
+            <a:r>
+              <a:rPr lang="en-GB" dirty="0" b="1"/>
+              <a:t>7. Bridge to how the two systems interact.</a:t>
+            </a:r>
+          </a:p>
+          <a:p>
+            <a:r>
+              <a:rPr lang="en-GB" dirty="0"/>
+              <a:t>Say: "We now put the two operating systems side by side on one missed target."</a:t>
             </a:r>
           </a:p>
         </p:txBody>
@@ -3648,25 +3906,21 @@
           <a:lstStyle/>
           <a:p>
             <a:r>
-              <a:rPr lang="en-GB" b="1" dirty="0"/>
+              <a:rPr lang="en-GB" dirty="0" b="1"/>
               <a:t>1.2 — HOW THE TWO OPERATING SYSTEMS INTERACT</a:t>
             </a:r>
           </a:p>
-          <a:p>
-            <a:endParaRPr lang="en-GB" dirty="0"/>
-          </a:p>
-          <a:p>
-            <a:r>
-              <a:rPr lang="en-GB" b="1" dirty="0"/>
+          <a:p/>
+          <a:p>
+            <a:r>
+              <a:rPr lang="en-GB" dirty="0" b="1"/>
               <a:t>HOW TO TEACH IT:</a:t>
             </a:r>
           </a:p>
-          <a:p>
-            <a:endParaRPr lang="en-GB" dirty="0"/>
-          </a:p>
-          <a:p>
-            <a:r>
-              <a:rPr lang="en-GB" b="1" dirty="0"/>
+          <a:p/>
+          <a:p>
+            <a:r>
+              <a:rPr lang="en-GB" dirty="0" b="1"/>
               <a:t>1. Teach the interdependence.</a:t>
             </a:r>
           </a:p>
@@ -3676,12 +3930,10 @@
               <a:t>Say: "The two systems are interdependent. Human performance measures what individuals and teams contribute. Organisational performance examines whether ESRG provides the conditions required for those contributions to produce enterprise results."</a:t>
             </a:r>
           </a:p>
-          <a:p>
-            <a:endParaRPr lang="en-GB" dirty="0"/>
-          </a:p>
-          <a:p>
-            <a:r>
-              <a:rPr lang="en-GB" b="1" dirty="0"/>
+          <a:p/>
+          <a:p>
+            <a:r>
+              <a:rPr lang="en-GB" dirty="0" b="1"/>
               <a:t>2. Use the customer service example.</a:t>
             </a:r>
           </a:p>
@@ -3700,7 +3952,7 @@
           <a:p>
             <a:r>
               <a:rPr lang="en-GB" dirty="0"/>
-              <a:t>Are employees meeting their individual resolution targets? | Environment: Are cross-functional working conditions supporting timely resolution?</a:t>
+              <a:t>Are employees meeting their individual resolution targets? | Environment: Are the facilities, infrastructure and technology the team relies on available and reliable?</a:t>
             </a:r>
           </a:p>
           <a:p>
@@ -3712,7 +3964,7 @@
           <a:p>
             <a:r>
               <a:rPr lang="en-GB" dirty="0"/>
-              <a:t>Are employees demonstrating accountability and responsiveness? | Resources: Is staffing capacity sufficient for the volume of enquiries?</a:t>
+              <a:t>Are employees demonstrating accountability and responsiveness? | Resources: Are the equipment and funding sufficient for the volume of enquiries?</a:t>
             </a:r>
           </a:p>
           <a:p>
@@ -3721,12 +3973,10 @@
               <a:t>Are team leaders meeting their supervisory commitments? | Governance: Are decisions and escalations being resolved within the required time?</a:t>
             </a:r>
           </a:p>
-          <a:p>
-            <a:endParaRPr lang="en-GB" dirty="0"/>
-          </a:p>
-          <a:p>
-            <a:r>
-              <a:rPr lang="en-GB" b="1" dirty="0"/>
+          <a:p/>
+          <a:p>
+            <a:r>
+              <a:rPr lang="en-GB" dirty="0" b="1"/>
               <a:t>3. Show the two possible findings.</a:t>
             </a:r>
           </a:p>
@@ -3745,7 +3995,7 @@
           <a:p>
             <a:r>
               <a:rPr lang="en-GB" dirty="0"/>
-              <a:t>Use the customer service example to demonstrate that a missed target is evidence of a performance gap, but does not automatically establish its cause.</a:t>
+              <a:t>Use the customer service example to demonstrate that a missed target is evidence of a performance gap, but does not by itself establish its cause.</a:t>
             </a:r>
           </a:p>
           <a:p>
@@ -3754,12 +4004,10 @@
               <a:t>Emphasise that leaders must examine both the contribution expected from people and the ESRG conditions required to enable delivery.</a:t>
             </a:r>
           </a:p>
-          <a:p>
-            <a:endParaRPr lang="en-GB" dirty="0"/>
-          </a:p>
-          <a:p>
-            <a:r>
-              <a:rPr lang="en-GB" b="1" dirty="0"/>
+          <a:p/>
+          <a:p>
+            <a:r>
+              <a:rPr lang="en-GB" dirty="0" b="1"/>
               <a:t>4. Teach the Enterprise Performance Principle.</a:t>
             </a:r>
           </a:p>
@@ -3781,12 +4029,10 @@
               <a:t>The central teaching point is that performance accountability must extend to those responsible for organisational operating conditions as well as those responsible for individual and team targets.</a:t>
             </a:r>
           </a:p>
-          <a:p>
-            <a:endParaRPr lang="en-GB" dirty="0"/>
-          </a:p>
-          <a:p>
-            <a:r>
-              <a:rPr lang="en-GB" b="1" dirty="0"/>
+          <a:p/>
+          <a:p>
+            <a:r>
+              <a:rPr lang="en-GB" dirty="0" b="1"/>
               <a:t>ON THE PORTAL, AFTER THE TEACHING:</a:t>
             </a:r>
           </a:p>
@@ -4953,25 +5199,21 @@
           <a:lstStyle/>
           <a:p>
             <a:r>
-              <a:rPr lang="en-GB" b="1" dirty="0"/>
+              <a:rPr lang="en-GB" dirty="0" b="1"/>
               <a:t>2.2.2 — ACCOUNTABILITY FOR PEOPLE PERFORMANCE AND ORGANISATIONAL PERFORMANCE</a:t>
             </a:r>
           </a:p>
-          <a:p>
-            <a:endParaRPr lang="en-GB" dirty="0"/>
-          </a:p>
-          <a:p>
-            <a:r>
-              <a:rPr lang="en-GB" b="1" dirty="0"/>
+          <a:p/>
+          <a:p>
+            <a:r>
+              <a:rPr lang="en-GB" dirty="0" b="1"/>
               <a:t>HOW TO TEACH IT:</a:t>
             </a:r>
           </a:p>
-          <a:p>
-            <a:endParaRPr lang="en-GB" dirty="0"/>
-          </a:p>
-          <a:p>
-            <a:r>
-              <a:rPr lang="en-GB" b="1" dirty="0"/>
+          <a:p/>
+          <a:p>
+            <a:r>
+              <a:rPr lang="en-GB" dirty="0" b="1"/>
               <a:t>1. Apply the distinction to both systems.</a:t>
             </a:r>
           </a:p>
@@ -4993,12 +5235,10 @@
               <a:t>Organisational performance. Say: "A compliance-driven approach may establish requirements for systems, resources, processes and governance, but concentrate primarily on whether prescribed arrangements have been followed. A commitment-driven approach also examines whether those arrangements are effective in supporting the intended results and whether emerging constraints are being addressed."</a:t>
             </a:r>
           </a:p>
-          <a:p>
-            <a:endParaRPr lang="en-GB" dirty="0"/>
-          </a:p>
-          <a:p>
-            <a:r>
-              <a:rPr lang="en-GB" b="1" dirty="0"/>
+          <a:p/>
+          <a:p>
+            <a:r>
+              <a:rPr lang="en-GB" dirty="0" b="1"/>
               <a:t>2. Show why it matters when performance falls short.</a:t>
             </a:r>
           </a:p>
@@ -5014,12 +5254,10 @@
               <a:t>Say: "Commitment strengthens accountability when employees remain responsible for their contributions and organisational leaders remain equally responsible for the enabling conditions within their authority."</a:t>
             </a:r>
           </a:p>
-          <a:p>
-            <a:endParaRPr lang="en-GB" dirty="0"/>
-          </a:p>
-          <a:p>
-            <a:r>
-              <a:rPr lang="en-GB" b="1" dirty="0"/>
+          <a:p/>
+          <a:p>
+            <a:r>
+              <a:rPr lang="en-GB" dirty="0" b="1"/>
               <a:t>3. Ask, now that the architectures are taught.</a:t>
             </a:r>
           </a:p>
@@ -5027,6 +5265,19 @@
             <a:r>
               <a:rPr lang="en-GB" dirty="0"/>
               <a:t>Ask: "When a target is missed in your organisation, which of the two architectures does the review conversation sound like?" Take two or three answers in the chat.</a:t>
+            </a:r>
+          </a:p>
+          <a:p/>
+          <a:p>
+            <a:r>
+              <a:rPr lang="en-GB" dirty="0" b="1"/>
+              <a:t>4. Close Section 2 and bridge to Section 3.</a:t>
+            </a:r>
+          </a:p>
+          <a:p>
+            <a:r>
+              <a:rPr lang="en-GB" dirty="0"/>
+              <a:t>Say: "Performance management bridges strategy and execution when it builds commitment to results. Section 3 examines where performance management becomes vulnerable across executive perspectives, and how its practice is evolving."</a:t>
             </a:r>
           </a:p>
         </p:txBody>
@@ -5522,25 +5773,21 @@
           <a:lstStyle/>
           <a:p>
             <a:r>
-              <a:rPr lang="en-GB" b="1" dirty="0"/>
+              <a:rPr lang="en-GB" dirty="0" b="1"/>
               <a:t>SECTION 3 REFLECTIONS</a:t>
             </a:r>
           </a:p>
-          <a:p>
-            <a:endParaRPr lang="en-GB" dirty="0"/>
-          </a:p>
-          <a:p>
-            <a:r>
-              <a:rPr lang="en-GB" b="1" dirty="0"/>
+          <a:p/>
+          <a:p>
+            <a:r>
+              <a:rPr lang="en-GB" dirty="0" b="1"/>
               <a:t>HOW TO USE THIS SLIDE:</a:t>
             </a:r>
           </a:p>
-          <a:p>
-            <a:endParaRPr lang="en-GB" dirty="0"/>
-          </a:p>
-          <a:p>
-            <a:r>
-              <a:rPr lang="en-GB" b="1" dirty="0"/>
+          <a:p/>
+          <a:p>
+            <a:r>
+              <a:rPr lang="en-GB" dirty="0" b="1"/>
               <a:t>1. Show the slide and read the prompt aloud.</a:t>
             </a:r>
           </a:p>
@@ -5550,42 +5797,49 @@
               <a:t>3.2 Reflection — Your Current PM System: "What is the current PM architecture of your organisation? Which PM system is currently being used?"</a:t>
             </a:r>
           </a:p>
-          <a:p>
-            <a:endParaRPr lang="en-GB" dirty="0"/>
-          </a:p>
-          <a:p>
-            <a:r>
-              <a:rPr lang="en-GB" b="1" dirty="0"/>
+          <a:p/>
+          <a:p>
+            <a:r>
+              <a:rPr lang="en-GB" dirty="0" b="1"/>
               <a:t>2. Say what the reflection is for.</a:t>
             </a:r>
           </a:p>
           <a:p>
             <a:r>
               <a:rPr lang="en-GB" dirty="0"/>
-              <a:t>Say: "Describe the architecture you actually have today, against the three shifts, and name the system your organisation uses."</a:t>
-            </a:r>
-          </a:p>
-          <a:p>
-            <a:endParaRPr lang="en-GB" dirty="0"/>
-          </a:p>
-          <a:p>
-            <a:r>
-              <a:rPr lang="en-GB" b="1" dirty="0"/>
-              <a:t>3. Bridge to Section 4.</a:t>
-            </a:r>
-          </a:p>
-          <a:p>
-            <a:r>
-              <a:rPr lang="en-GB" dirty="0"/>
-              <a:t>Say: "Section 4 brings the unit together in one worked example: the contributions an enterprise Key Result requires, and how FACES manages them."</a:t>
-            </a:r>
-          </a:p>
-          <a:p>
-            <a:endParaRPr lang="en-GB" dirty="0"/>
-          </a:p>
-          <a:p>
-            <a:r>
-              <a:rPr lang="en-GB" b="1" dirty="0"/>
+              <a:t>Say: "This reflection is personal. Describe the performance management architecture you actually have today, and name the system your organisation uses."</a:t>
+            </a:r>
+          </a:p>
+          <a:p/>
+          <a:p>
+            <a:r>
+              <a:rPr lang="en-GB" dirty="0" b="1"/>
+              <a:t>3. Set the standard.</a:t>
+            </a:r>
+          </a:p>
+          <a:p>
+            <a:r>
+              <a:rPr lang="en-GB" dirty="0"/>
+              <a:t>Say: "Read your architecture against the three shifts. How often is performance reviewed: once or twice a year, or throughout execution? Do review conversations centre on ratings, or on development and improvement? Are only individuals assessed, or are team and cross-functional contributions visible too? Then name the system or tool in use."</a:t>
+            </a:r>
+          </a:p>
+          <a:p/>
+          <a:p>
+            <a:r>
+              <a:rPr lang="en-GB" dirty="0" b="1"/>
+              <a:t>4. Close Section 3 and bridge to Section 4.</a:t>
+            </a:r>
+          </a:p>
+          <a:p>
+            <a:r>
+              <a:rPr lang="en-GB" dirty="0"/>
+              <a:t>Say: "Executive perspectives on performance converge when performance management becomes continuous, developmental and team-based. Section 4 brings the unit together in one worked example: the contributions a Key Result requires and how FACES manages them."</a:t>
+            </a:r>
+          </a:p>
+          <a:p/>
+          <a:p>
+            <a:r>
+              <a:rPr lang="en-GB" dirty="0" b="1"/>
               <a:t>ON THE PORTAL, AFTER THE TEACHING:</a:t>
             </a:r>
           </a:p>
@@ -5662,7 +5916,7 @@
           <a:lstStyle/>
           <a:p>
             <a:r>
-              <a:rPr lang="en-GB" b="1" dirty="0"/>
+              <a:rPr lang="en-GB" dirty="0" b="1"/>
               <a:t>SECTION 1 · AWARENESS — WHAT</a:t>
             </a:r>
           </a:p>
@@ -5672,19 +5926,48 @@
               <a:t>Foundations of Enterprise Performance Management System Design</a:t>
             </a:r>
           </a:p>
-          <a:p>
-            <a:r>
-              <a:rPr lang="en-GB" dirty="0"/>
-              <a:t>What performance management must manage: the contribution of people and the conditions the organisation provides, connected to enterprise results.</a:t>
-            </a:r>
-          </a:p>
-          <a:p>
-            <a:endParaRPr lang="en-GB" dirty="0"/>
-          </a:p>
-          <a:p>
-            <a:r>
-              <a:rPr lang="en-GB" b="1" dirty="0"/>
-              <a:t>Section learning outcomes:</a:t>
+          <a:p/>
+          <a:p>
+            <a:r>
+              <a:rPr lang="en-GB" dirty="0" b="1"/>
+              <a:t>HOW THIS SECTION RUNS:</a:t>
+            </a:r>
+          </a:p>
+          <a:p>
+            <a:r>
+              <a:rPr lang="en-GB" dirty="0"/>
+              <a:t>1. 1.1: measurement and management, then the design sequence (two slides).</a:t>
+            </a:r>
+          </a:p>
+          <a:p>
+            <a:r>
+              <a:rPr lang="en-GB" dirty="0"/>
+              <a:t>2. 1.2: the two operating systems behind enterprise performance: the Human Operating System, the Organisational Operating System through ESRG, and how the two interact (three slides).</a:t>
+            </a:r>
+          </a:p>
+          <a:p>
+            <a:r>
+              <a:rPr lang="en-GB" dirty="0"/>
+              <a:t>3. 1.3: the S2R® Contribution Map™ and how it connects people performance and organisational performance (two slides).</a:t>
+            </a:r>
+          </a:p>
+          <a:p>
+            <a:r>
+              <a:rPr lang="en-GB" dirty="0"/>
+              <a:t>4. 1.4: the FACES framework, FACES for people and organisational performance, and how FACES works when the enterprise result falls short (three slides).</a:t>
+            </a:r>
+          </a:p>
+          <a:p>
+            <a:r>
+              <a:rPr lang="en-GB" dirty="0"/>
+              <a:t>5. The Section 1 Reflections slide: the three reflections participants write after the teaching.</a:t>
+            </a:r>
+          </a:p>
+          <a:p/>
+          <a:p>
+            <a:r>
+              <a:rPr lang="en-GB" dirty="0" b="1"/>
+              <a:t>SECTION LEARNING OUTCOMES:</a:t>
             </a:r>
           </a:p>
           <a:p>
@@ -5699,28 +5982,50 @@
               <a:t>2. Manage human contributions and organisational conditions as interdependent drivers of results.</a:t>
             </a:r>
           </a:p>
-          <a:p>
-            <a:endParaRPr lang="en-GB" dirty="0"/>
-          </a:p>
-          <a:p>
-            <a:r>
-              <a:rPr lang="en-GB" b="1" dirty="0"/>
-              <a:t>HOW TO TEACH IT:</a:t>
-            </a:r>
-          </a:p>
-          <a:p>
-            <a:endParaRPr lang="en-GB" dirty="0"/>
-          </a:p>
-          <a:p>
-            <a:r>
-              <a:rPr lang="en-GB" b="1" dirty="0"/>
-              <a:t>1. Frame the section.</a:t>
-            </a:r>
-          </a:p>
-          <a:p>
-            <a:r>
-              <a:rPr lang="en-GB" dirty="0"/>
-              <a:t>Say: "This section sets the foundations: what performance management is, people performance and organisational performance behind enterprise performance, the S2R® Contribution Map™ that connects them to an enterprise result, and FACES, the five functions that manage them."</a:t>
+          <a:p/>
+          <a:p>
+            <a:r>
+              <a:rPr lang="en-GB" dirty="0" b="1"/>
+              <a:t>HOW TO OPEN THE SECTION:</a:t>
+            </a:r>
+          </a:p>
+          <a:p/>
+          <a:p>
+            <a:r>
+              <a:rPr lang="en-GB" dirty="0" b="1"/>
+              <a:t>1. Name the question the section answers.</a:t>
+            </a:r>
+          </a:p>
+          <a:p>
+            <a:r>
+              <a:rPr lang="en-GB" dirty="0"/>
+              <a:t>Say: "Section 1 answers one question: what must performance management manage? It must manage the contribution of people and the conditions the organisation provides, connected to enterprise results."</a:t>
+            </a:r>
+          </a:p>
+          <a:p/>
+          <a:p>
+            <a:r>
+              <a:rPr lang="en-GB" dirty="0" b="1"/>
+              <a:t>2. Say the order.</a:t>
+            </a:r>
+          </a:p>
+          <a:p>
+            <a:r>
+              <a:rPr lang="en-GB" dirty="0"/>
+              <a:t>Say: "We first separate measuring performance from managing it. We then name the two operating systems behind every result, connect them to an enterprise Key Result with the S2R® Contribution Map™, and close with FACES, the five functions that manage those contributions."</a:t>
+            </a:r>
+          </a:p>
+          <a:p/>
+          <a:p>
+            <a:r>
+              <a:rPr lang="en-GB" dirty="0" b="1"/>
+              <a:t>3. Bridge to 1.1.</a:t>
+            </a:r>
+          </a:p>
+          <a:p>
+            <a:r>
+              <a:rPr lang="en-GB" dirty="0"/>
+              <a:t>Say: "We start with the difference between measurement and management."</a:t>
             </a:r>
           </a:p>
         </p:txBody>
@@ -5806,25 +6111,21 @@
           <a:lstStyle/>
           <a:p>
             <a:r>
-              <a:rPr lang="en-GB" b="1" dirty="0"/>
+              <a:rPr lang="en-GB" dirty="0" b="1"/>
               <a:t>4.1 — MAPPING THE CONTRIBUTIONS REQUIRED FOR ENTERPRISE RESULTS (Worked example: improving customer service)</a:t>
             </a:r>
           </a:p>
-          <a:p>
-            <a:endParaRPr lang="en-GB" dirty="0"/>
-          </a:p>
-          <a:p>
-            <a:r>
-              <a:rPr lang="en-GB" b="1" dirty="0"/>
+          <a:p/>
+          <a:p>
+            <a:r>
+              <a:rPr lang="en-GB" dirty="0" b="1"/>
               <a:t>HOW TO TEACH IT:</a:t>
             </a:r>
           </a:p>
-          <a:p>
-            <a:endParaRPr lang="en-GB" dirty="0"/>
-          </a:p>
-          <a:p>
-            <a:r>
-              <a:rPr lang="en-GB" b="1" dirty="0"/>
+          <a:p/>
+          <a:p>
+            <a:r>
+              <a:rPr lang="en-GB" dirty="0" b="1"/>
               <a:t>1. Frame the worked example.</a:t>
             </a:r>
           </a:p>
@@ -5834,12 +6135,10 @@
               <a:t>Say: "The S2R® Contribution Map™ establishes the interconnected contributions required to achieve an enterprise result. It identifies what each function must deliver, the performance expected from individuals and teams, and the organisational conditions necessary to enable those contributions. The following example demonstrates how these requirements are connected across four business functions."</a:t>
             </a:r>
           </a:p>
-          <a:p>
-            <a:endParaRPr lang="en-GB" dirty="0"/>
-          </a:p>
-          <a:p>
-            <a:r>
-              <a:rPr lang="en-GB" b="1" dirty="0"/>
+          <a:p/>
+          <a:p>
+            <a:r>
+              <a:rPr lang="en-GB" dirty="0" b="1"/>
               <a:t>2. Establish the enterprise result.</a:t>
             </a:r>
           </a:p>
@@ -5861,12 +6160,10 @@
               <a:t>Ask: "Which functions must contribute to achieving this result?" Draw attention to Customer Service, IT, Operations and Workforce Planning.</a:t>
             </a:r>
           </a:p>
-          <a:p>
-            <a:endParaRPr lang="en-GB" dirty="0"/>
-          </a:p>
-          <a:p>
-            <a:r>
-              <a:rPr lang="en-GB" b="1" dirty="0"/>
+          <a:p/>
+          <a:p>
+            <a:r>
+              <a:rPr lang="en-GB" dirty="0" b="1"/>
               <a:t>3. Walk through the Contribution Map.</a:t>
             </a:r>
           </a:p>
@@ -5876,9 +6173,7 @@
               <a:t>Use Customer Service to demonstrate the distinction between the functional contribution, people performance and organisational enablement. Emphasise that the enterprise target covers all customer enquiries, while the employee resolution measure covers enquiries within employees’ control. Then examine the remaining functions, highlighting how their contributions support the same enterprise result.</a:t>
             </a:r>
           </a:p>
-          <a:p>
-            <a:endParaRPr lang="en-GB" dirty="0"/>
-          </a:p>
+          <a:p/>
           <a:p>
             <a:r>
               <a:rPr lang="en-GB" dirty="0"/>
@@ -5915,9 +6210,7 @@
               <a:t>Organisational conditions, measure or evidence of readiness: Systems: Enquiry records provide complete timestamps and assigned ownership. Governance: Documented escalation routes and named decision owners.</a:t>
             </a:r>
           </a:p>
-          <a:p>
-            <a:endParaRPr lang="en-GB" dirty="0"/>
-          </a:p>
+          <a:p/>
           <a:p>
             <a:r>
               <a:rPr lang="en-GB" dirty="0"/>
@@ -5945,18 +6238,16 @@
           <a:p>
             <a:r>
               <a:rPr lang="en-GB" dirty="0"/>
-              <a:t>Required organisational condition: Systems: Reliable infrastructure and monitoring capability to maintain system availability. Resources: Sufficient technical support coverage during service hours.</a:t>
-            </a:r>
-          </a:p>
-          <a:p>
-            <a:r>
-              <a:rPr lang="en-GB" dirty="0"/>
-              <a:t>Organisational conditions, measure or evidence of readiness: Systems: ≥99% customer management system availability during service hours. Resources: Approved technical support roster covering required service hours.</a:t>
-            </a:r>
-          </a:p>
-          <a:p>
-            <a:endParaRPr lang="en-GB" dirty="0"/>
-          </a:p>
+              <a:t>Required organisational condition: Environment: Reliable infrastructure and monitoring technology to maintain system availability. Resources: A funded technical support contract covering service hours.</a:t>
+            </a:r>
+          </a:p>
+          <a:p>
+            <a:r>
+              <a:rPr lang="en-GB" dirty="0"/>
+              <a:t>Organisational conditions, measure or evidence of readiness: Environment: ≥99% customer management system availability during service hours. Resources: Approved support contract covering required service hours.</a:t>
+            </a:r>
+          </a:p>
+          <a:p/>
           <a:p>
             <a:r>
               <a:rPr lang="en-GB" dirty="0"/>
@@ -5993,9 +6284,7 @@
               <a:t>Organisational conditions, measure or evidence of readiness: Governance: Documented approval limits and designated decision owners. Systems: ≥95% of internal processing requests completed within the agreed turnaround time.</a:t>
             </a:r>
           </a:p>
-          <a:p>
-            <a:endParaRPr lang="en-GB" dirty="0"/>
-          </a:p>
+          <a:p/>
           <a:p>
             <a:r>
               <a:rPr lang="en-GB" dirty="0"/>
@@ -6023,30 +6312,26 @@
           <a:p>
             <a:r>
               <a:rPr lang="en-GB" dirty="0"/>
-              <a:t>Required organisational condition: Resources: Sufficient qualified staff available to meet forecast customer enquiry volumes. Governance: Authority to approve staffing adjustments when demand exceeds available capacity.</a:t>
-            </a:r>
-          </a:p>
-          <a:p>
-            <a:r>
-              <a:rPr lang="en-GB" dirty="0"/>
-              <a:t>Organisational conditions, measure or evidence of readiness: Resources: ≥95% staffing coverage against demand-based requirements. Governance: Agreed staffing adjustment authority and escalation arrangements.</a:t>
-            </a:r>
-          </a:p>
-          <a:p>
-            <a:endParaRPr lang="en-GB" dirty="0"/>
-          </a:p>
+              <a:t>Required organisational condition: Resources: Funding approved for the staffing levels that forecast customer enquiry volumes require. Governance: Authority to approve staffing adjustments when demand exceeds available capacity.</a:t>
+            </a:r>
+          </a:p>
+          <a:p>
+            <a:r>
+              <a:rPr lang="en-GB" dirty="0"/>
+              <a:t>Organisational conditions, measure or evidence of readiness: Resources: ≥95% of the demand-based staffing budget approved and released. Governance: Agreed staffing adjustment authority and escalation arrangements.</a:t>
+            </a:r>
+          </a:p>
+          <a:p/>
           <a:p>
             <a:r>
               <a:rPr lang="en-GB" dirty="0"/>
               <a:t>Performance targets are illustrative. The purpose is to establish sufficient evidence to determine whether the required contribution is being delivered and whether the organisation is enabling it.</a:t>
             </a:r>
           </a:p>
-          <a:p>
-            <a:endParaRPr lang="en-GB" dirty="0"/>
-          </a:p>
-          <a:p>
-            <a:r>
-              <a:rPr lang="en-GB" b="1" dirty="0"/>
+          <a:p/>
+          <a:p>
+            <a:r>
+              <a:rPr lang="en-GB" dirty="0" b="1"/>
               <a:t>4. Examine the measures.</a:t>
             </a:r>
           </a:p>
@@ -6056,12 +6341,10 @@
               <a:t>Ask: "Why do we measure both employee incident-response performance and system availability in IT?" Guide participants to recognise that employees may fulfil their responsibilities while the underlying organisational capability remains inadequate.</a:t>
             </a:r>
           </a:p>
-          <a:p>
-            <a:endParaRPr lang="en-GB" dirty="0"/>
-          </a:p>
-          <a:p>
-            <a:r>
-              <a:rPr lang="en-GB" b="1" dirty="0"/>
+          <a:p/>
+          <a:p>
+            <a:r>
+              <a:rPr lang="en-GB" dirty="0" b="1"/>
               <a:t>5. Consolidate the learning.</a:t>
             </a:r>
           </a:p>
@@ -6069,6 +6352,19 @@
             <a:r>
               <a:rPr lang="en-GB" dirty="0"/>
               <a:t>Say: "The Contribution Map gives us an integrated view of what must be delivered and enabled across the organisation. It establishes the performance requirements against which contributions can be assessed."</a:t>
+            </a:r>
+          </a:p>
+          <a:p/>
+          <a:p>
+            <a:r>
+              <a:rPr lang="en-GB" dirty="0" b="1"/>
+              <a:t>6. Bridge to interpreting the map.</a:t>
+            </a:r>
+          </a:p>
+          <a:p>
+            <a:r>
+              <a:rPr lang="en-GB" dirty="0"/>
+              <a:t>Say: "Read across any one function and the same three elements repeat. The next slide names them."</a:t>
             </a:r>
           </a:p>
         </p:txBody>
@@ -6149,25 +6445,21 @@
           <a:lstStyle/>
           <a:p>
             <a:r>
-              <a:rPr lang="en-GB" b="1" dirty="0"/>
+              <a:rPr lang="en-GB" dirty="0" b="1"/>
               <a:t>4.1.2 — INTERPRETING THE CONTRIBUTION MAP</a:t>
             </a:r>
           </a:p>
-          <a:p>
-            <a:endParaRPr lang="en-GB" dirty="0"/>
-          </a:p>
-          <a:p>
-            <a:r>
-              <a:rPr lang="en-GB" b="1" dirty="0"/>
+          <a:p/>
+          <a:p>
+            <a:r>
+              <a:rPr lang="en-GB" dirty="0" b="1"/>
               <a:t>HOW TO TEACH IT:</a:t>
             </a:r>
           </a:p>
-          <a:p>
-            <a:endParaRPr lang="en-GB" dirty="0"/>
-          </a:p>
-          <a:p>
-            <a:r>
-              <a:rPr lang="en-GB" b="1" dirty="0"/>
+          <a:p/>
+          <a:p>
+            <a:r>
+              <a:rPr lang="en-GB" dirty="0" b="1"/>
               <a:t>1. Teach the three elements, one card at a time.</a:t>
             </a:r>
           </a:p>
@@ -6195,12 +6487,10 @@
               <a:t>3 · Organisational performance: what conditions must the organisation provide? The map identifies the relevant organisational conditions necessary to enable the human contribution.</a:t>
             </a:r>
           </a:p>
-          <a:p>
-            <a:endParaRPr lang="en-GB" dirty="0"/>
-          </a:p>
-          <a:p>
-            <a:r>
-              <a:rPr lang="en-GB" b="1" dirty="0"/>
+          <a:p/>
+          <a:p>
+            <a:r>
+              <a:rPr lang="en-GB" dirty="0" b="1"/>
               <a:t>2. Close on the measures for the organisational conditions.</a:t>
             </a:r>
           </a:p>
@@ -6208,6 +6498,19 @@
             <a:r>
               <a:rPr lang="en-GB" dirty="0"/>
               <a:t>Say: "Only the organisational conditions that materially affect delivery are included. Some require numerical performance measures, such as system availability or staffing coverage. Others require evidence that an arrangement or capability exists and is functioning, such as documented approval authority or established escalation procedures."</a:t>
+            </a:r>
+          </a:p>
+          <a:p/>
+          <a:p>
+            <a:r>
+              <a:rPr lang="en-GB" dirty="0" b="1"/>
+              <a:t>3. Bridge to 4.2.</a:t>
+            </a:r>
+          </a:p>
+          <a:p>
+            <a:r>
+              <a:rPr lang="en-GB" dirty="0"/>
+              <a:t>Say: "The map sets out what must be delivered and what must be enabled. FACES sets out how those contributions are managed."</a:t>
             </a:r>
           </a:p>
         </p:txBody>
@@ -6288,25 +6591,21 @@
           <a:lstStyle/>
           <a:p>
             <a:r>
-              <a:rPr lang="en-GB" b="1" dirty="0"/>
+              <a:rPr lang="en-GB" dirty="0" b="1"/>
               <a:t>4.2 — MANAGING THE CONTRIBUTIONS THROUGH FACES (Applying FACES across the four functions)</a:t>
             </a:r>
           </a:p>
-          <a:p>
-            <a:endParaRPr lang="en-GB" dirty="0"/>
-          </a:p>
-          <a:p>
-            <a:r>
-              <a:rPr lang="en-GB" b="1" dirty="0"/>
+          <a:p/>
+          <a:p>
+            <a:r>
+              <a:rPr lang="en-GB" dirty="0" b="1"/>
               <a:t>HOW TO TEACH IT:</a:t>
             </a:r>
           </a:p>
-          <a:p>
-            <a:endParaRPr lang="en-GB" dirty="0"/>
-          </a:p>
-          <a:p>
-            <a:r>
-              <a:rPr lang="en-GB" b="1" dirty="0"/>
+          <a:p/>
+          <a:p>
+            <a:r>
+              <a:rPr lang="en-GB" dirty="0" b="1"/>
               <a:t>1. Connect FACES to the Contribution Map.</a:t>
             </a:r>
           </a:p>
@@ -6328,12 +6627,10 @@
               <a:t>Say: "The next requirement is to manage these contributions consistently throughout execution. FACES provides the five management functions through which performance expectations are aligned, evidence is examined, accountability is maintained and improvement is supported."</a:t>
             </a:r>
           </a:p>
-          <a:p>
-            <a:endParaRPr lang="en-GB" dirty="0"/>
-          </a:p>
-          <a:p>
-            <a:r>
-              <a:rPr lang="en-GB" b="1" dirty="0"/>
+          <a:p/>
+          <a:p>
+            <a:r>
+              <a:rPr lang="en-GB" dirty="0" b="1"/>
               <a:t>2. Demonstrate how FACES operates across functions.</a:t>
             </a:r>
           </a:p>
@@ -6343,9 +6640,7 @@
               <a:t>Begin with Customer Service and work through the five FACES functions. Then select IT to demonstrate how the same management functions apply to different performance responsibilities. Emphasise that FACES applies to both employee contributions and organisational enabling conditions.</a:t>
             </a:r>
           </a:p>
-          <a:p>
-            <a:endParaRPr lang="en-GB" dirty="0"/>
-          </a:p>
+          <a:p/>
           <a:p>
             <a:r>
               <a:rPr lang="en-GB" dirty="0"/>
@@ -6376,9 +6671,7 @@
               <a:t>HR / Workforce Planning: Staffing gaps are discussed as performance risks requiring action. Workforce Planning and operational managers jointly examine whether available capacity can meet expected demand and raise emerging shortages before service delivery is affected.</a:t>
             </a:r>
           </a:p>
-          <a:p>
-            <a:endParaRPr lang="en-GB" dirty="0"/>
-          </a:p>
+          <a:p/>
           <a:p>
             <a:r>
               <a:rPr lang="en-GB" dirty="0"/>
@@ -6409,9 +6702,7 @@
               <a:t>HR / Workforce Planning: Staffing forecasts and schedules are based on expected enquiry volumes and the service capacity required. Staffing coverage requirements are agreed with the operational functions that depend on them.</a:t>
             </a:r>
           </a:p>
-          <a:p>
-            <a:endParaRPr lang="en-GB" dirty="0"/>
-          </a:p>
+          <a:p/>
           <a:p>
             <a:r>
               <a:rPr lang="en-GB" dirty="0"/>
@@ -6442,9 +6733,7 @@
               <a:t>HR / Workforce Planning: Staffing schedules, forecast demand and actual staffing coverage are reviewed together. The evidence shows whether scheduling commitments have been fulfilled and whether sufficient qualified employees are available.</a:t>
             </a:r>
           </a:p>
-          <a:p>
-            <a:endParaRPr lang="en-GB" dirty="0"/>
-          </a:p>
+          <a:p/>
           <a:p>
             <a:r>
               <a:rPr lang="en-GB" dirty="0"/>
@@ -6475,9 +6764,7 @@
               <a:t>HR / Workforce Planning: Workforce Planning is responsible for forecasts, schedules and coordinating staffing adjustments. Operational managers confirm their staffing requirements, while decisions on additional capacity are referred to the appropriate resource authority.</a:t>
             </a:r>
           </a:p>
-          <a:p>
-            <a:endParaRPr lang="en-GB" dirty="0"/>
-          </a:p>
+          <a:p/>
           <a:p>
             <a:r>
               <a:rPr lang="en-GB" dirty="0"/>
@@ -6508,12 +6795,10 @@
               <a:t>HR / Workforce Planning: Differences between forecast and actual demand inform improvements to workforce planning. Recurring staffing shortages lead to adjustments in scheduling, deployment or capacity arrangements, with staffing coverage used to evaluate their effectiveness.</a:t>
             </a:r>
           </a:p>
-          <a:p>
-            <a:endParaRPr lang="en-GB" dirty="0"/>
-          </a:p>
-          <a:p>
-            <a:r>
-              <a:rPr lang="en-GB" b="1" dirty="0"/>
+          <a:p/>
+          <a:p>
+            <a:r>
+              <a:rPr lang="en-GB" dirty="0" b="1"/>
               <a:t>3. Examine shared accountability.</a:t>
             </a:r>
           </a:p>
@@ -6523,12 +6808,10 @@
               <a:t>Ask: "If Customer Service employees are meeting their performance commitments but system outages continue to delay customer resolution, who must take responsibility for the performance gap?" Guide participants to distinguish employee accountability from the organisational responsibility for system reliability.</a:t>
             </a:r>
           </a:p>
-          <a:p>
-            <a:endParaRPr lang="en-GB" dirty="0"/>
-          </a:p>
-          <a:p>
-            <a:r>
-              <a:rPr lang="en-GB" b="1" dirty="0"/>
+          <a:p/>
+          <a:p>
+            <a:r>
+              <a:rPr lang="en-GB" dirty="0" b="1"/>
               <a:t>4. Connect management action to improvement.</a:t>
             </a:r>
           </a:p>
@@ -6538,12 +6821,10 @@
               <a:t>Ask: "What should happen when performance reviews repeatedly identify the same approval delays or staffing shortages?" Emphasise that performance management must lead to appropriate decisions, assigned responsibilities and follow-through.</a:t>
             </a:r>
           </a:p>
-          <a:p>
-            <a:endParaRPr lang="en-GB" dirty="0"/>
-          </a:p>
-          <a:p>
-            <a:r>
-              <a:rPr lang="en-GB" b="1" dirty="0"/>
+          <a:p/>
+          <a:p>
+            <a:r>
+              <a:rPr lang="en-GB" dirty="0" b="1"/>
               <a:t>5. Interpret the worked example (the five rows on the slide).</a:t>
             </a:r>
           </a:p>
@@ -6589,12 +6870,10 @@
               <a:t>Say: "Together, these disciplines ensure that the contributions established in the S2R® Contribution Map™ are actively managed towards the enterprise result."</a:t>
             </a:r>
           </a:p>
-          <a:p>
-            <a:endParaRPr lang="en-GB" dirty="0"/>
-          </a:p>
-          <a:p>
-            <a:r>
-              <a:rPr lang="en-GB" b="1" dirty="0"/>
+          <a:p/>
+          <a:p>
+            <a:r>
+              <a:rPr lang="en-GB" dirty="0" b="1"/>
               <a:t>6. Consolidate the learning.</a:t>
             </a:r>
           </a:p>
@@ -6602,6 +6881,19 @@
             <a:r>
               <a:rPr lang="en-GB" dirty="0"/>
               <a:t>Say: "The Contribution Map establishes the contributions, performance measures and enabling conditions required for enterprise results. FACES establishes the management disciplines through which those contributions are aligned, evaluated, acted upon and continuously strengthened."</a:t>
+            </a:r>
+          </a:p>
+          <a:p/>
+          <a:p>
+            <a:r>
+              <a:rPr lang="en-GB" dirty="0" b="1"/>
+              <a:t>7. Close Section 4 and bridge to Section 5.</a:t>
+            </a:r>
+          </a:p>
+          <a:p>
+            <a:r>
+              <a:rPr lang="en-GB" dirty="0"/>
+              <a:t>Say: "One Key Result shows how mapped contributions and FACES together make people and organisational performance manageable. Your group now builds its own Contribution Map, applies FACES to it and sets the WARD check-up for its Key Result."</a:t>
             </a:r>
           </a:p>
         </p:txBody>
@@ -8104,7 +8396,7 @@
         <p:spPr>
           <a:xfrm>
             <a:off x="8354568" y="2514600"/>
-            <a:ext cx="3057144" cy="923544"/>
+            <a:ext cx="3057144" cy="1325880"/>
           </a:xfrm>
           <a:prstGeom prst="rect">
             <a:avLst/>
@@ -8569,7 +8861,7 @@
         <p:spPr>
           <a:xfrm>
             <a:off x="7434072" y="1691640"/>
-            <a:ext cx="4069080" cy="502920"/>
+            <a:ext cx="4069080" cy="868680"/>
           </a:xfrm>
           <a:prstGeom prst="rect">
             <a:avLst/>
@@ -8608,7 +8900,7 @@
         <p:spPr>
           <a:xfrm>
             <a:off x="7434072" y="2606040"/>
-            <a:ext cx="4069080" cy="457200"/>
+            <a:ext cx="4069080" cy="777240"/>
           </a:xfrm>
           <a:prstGeom prst="rect">
             <a:avLst/>
@@ -9428,7 +9720,7 @@
               <a:buNone/>
             </a:pPr>
             <a:r>
-              <a:rPr lang="en-US" sz="3600" b="1" dirty="0">
+              <a:rPr lang="en-US" sz="3400" b="1" dirty="0">
                 <a:solidFill>
                   <a:srgbClr val="1A5C2C"/>
                 </a:solidFill>
@@ -9836,7 +10128,7 @@
         <p:spPr>
           <a:xfrm>
             <a:off x="7434072" y="1691640"/>
-            <a:ext cx="4069080" cy="502920"/>
+            <a:ext cx="4069080" cy="868680"/>
           </a:xfrm>
           <a:prstGeom prst="rect">
             <a:avLst/>
@@ -11370,7 +11662,7 @@
               <a:buNone/>
             </a:pPr>
             <a:r>
-              <a:rPr lang="en-US" sz="3600" b="1" dirty="0">
+              <a:rPr lang="en-US" sz="3400" b="1" dirty="0">
                 <a:solidFill>
                   <a:srgbClr val="1A5C2C"/>
                 </a:solidFill>
@@ -12459,7 +12751,7 @@
         <p:spPr>
           <a:xfrm>
             <a:off x="548640" y="1504094"/>
-            <a:ext cx="2095500" cy="266700"/>
+            <a:ext cx="2095500" cy="457200"/>
           </a:xfrm>
           <a:prstGeom prst="rect">
             <a:avLst/>
@@ -12519,7 +12811,7 @@
         <p:spPr>
           <a:xfrm>
             <a:off x="2891790" y="1504094"/>
-            <a:ext cx="4381500" cy="266700"/>
+            <a:ext cx="4381500" cy="457200"/>
           </a:xfrm>
           <a:prstGeom prst="rect">
             <a:avLst/>
@@ -12579,7 +12871,7 @@
         <p:spPr>
           <a:xfrm>
             <a:off x="7520940" y="1504094"/>
-            <a:ext cx="4381500" cy="266700"/>
+            <a:ext cx="4381500" cy="457200"/>
           </a:xfrm>
           <a:prstGeom prst="rect">
             <a:avLst/>
@@ -12686,7 +12978,7 @@
         <p:spPr>
           <a:xfrm>
             <a:off x="548639" y="2194559"/>
-            <a:ext cx="2719999" cy="777240"/>
+            <a:ext cx="2514600" cy="777240"/>
           </a:xfrm>
           <a:prstGeom prst="rect">
             <a:avLst/>
@@ -12989,7 +13281,7 @@
         <p:spPr>
           <a:xfrm>
             <a:off x="548639" y="3154680"/>
-            <a:ext cx="2719999" cy="777240"/>
+            <a:ext cx="2514600" cy="777240"/>
           </a:xfrm>
           <a:prstGeom prst="rect">
             <a:avLst/>
@@ -13218,7 +13510,7 @@
         <p:spPr>
           <a:xfrm>
             <a:off x="548639" y="4114800"/>
-            <a:ext cx="2719999" cy="777240"/>
+            <a:ext cx="2514600" cy="777240"/>
           </a:xfrm>
           <a:prstGeom prst="rect">
             <a:avLst/>
@@ -13447,7 +13739,7 @@
         <p:spPr>
           <a:xfrm>
             <a:off x="548639" y="5074920"/>
-            <a:ext cx="2719999" cy="777240"/>
+            <a:ext cx="2514600" cy="777240"/>
           </a:xfrm>
           <a:prstGeom prst="rect">
             <a:avLst/>
@@ -14162,7 +14454,7 @@
               <a:buNone/>
             </a:pPr>
             <a:r>
-              <a:rPr lang="en-US" sz="3600" b="1" dirty="0">
+              <a:rPr lang="en-US" sz="2800" b="1" dirty="0">
                 <a:solidFill>
                   <a:srgbClr val="1A5C2C"/>
                 </a:solidFill>
@@ -14507,7 +14799,7 @@
         <p:spPr>
           <a:xfrm>
             <a:off x="7434072" y="1691640"/>
-            <a:ext cx="4069080" cy="502920"/>
+            <a:ext cx="4069080" cy="868680"/>
           </a:xfrm>
           <a:prstGeom prst="rect">
             <a:avLst/>
@@ -20870,7 +21162,7 @@
               <a:buNone/>
             </a:pPr>
             <a:r>
-              <a:rPr lang="en-US" sz="3600" b="1" dirty="0">
+              <a:rPr lang="en-US" sz="3400" b="1" dirty="0">
                 <a:solidFill>
                   <a:srgbClr val="1A5C2C"/>
                 </a:solidFill>
@@ -23838,7 +24130,7 @@
         <p:spPr>
           <a:xfrm>
             <a:off x="1737360" y="1691640"/>
-            <a:ext cx="4069080" cy="502920"/>
+            <a:ext cx="4069080" cy="868680"/>
           </a:xfrm>
           <a:prstGeom prst="rect">
             <a:avLst/>
@@ -23876,7 +24168,7 @@
         </p:nvSpPr>
         <p:spPr>
           <a:xfrm>
-            <a:off x="1737360" y="2194560"/>
+            <a:off x="1737360" y="2606040"/>
             <a:ext cx="4069080" cy="457200"/>
           </a:xfrm>
           <a:prstGeom prst="rect">
@@ -23915,8 +24207,8 @@
         </p:nvSpPr>
         <p:spPr>
           <a:xfrm>
-            <a:off x="868680" y="2834640"/>
-            <a:ext cx="4846320" cy="2514600"/>
+            <a:off x="868680" y="3538728"/>
+            <a:ext cx="4846320" cy="1810512"/>
           </a:xfrm>
           <a:prstGeom prst="rect">
             <a:avLst/>
@@ -24070,7 +24362,7 @@
         <p:spPr>
           <a:xfrm>
             <a:off x="7434072" y="1691640"/>
-            <a:ext cx="4069080" cy="502920"/>
+            <a:ext cx="4069080" cy="868680"/>
           </a:xfrm>
           <a:prstGeom prst="rect">
             <a:avLst/>
@@ -24441,7 +24733,7 @@
                 <a:ea typeface="Calibri" pitchFamily="34" charset="-122"/>
                 <a:cs typeface="Calibri" pitchFamily="34" charset="-120"/>
               </a:rPr>
-              <a:t>Environment: the conditions people work in</a:t>
+              <a:t>Environment · FIT: facilities, infrastructure, technology</a:t>
             </a:r>
             <a:endParaRPr lang="en-US" sz="2600" dirty="0"/>
           </a:p>
@@ -24547,7 +24839,7 @@
                 <a:ea typeface="Calibri" pitchFamily="34" charset="-122"/>
                 <a:cs typeface="Calibri" pitchFamily="34" charset="-120"/>
               </a:rPr>
-              <a:t>Systems: processes, workflows, technology</a:t>
+              <a:t>Systems · SIP: standardisation, integration, process efficiency</a:t>
             </a:r>
             <a:endParaRPr lang="en-US" sz="2600" dirty="0"/>
           </a:p>
@@ -24653,7 +24945,7 @@
                 <a:ea typeface="Calibri" pitchFamily="34" charset="-122"/>
                 <a:cs typeface="Calibri" pitchFamily="34" charset="-120"/>
               </a:rPr>
-              <a:t>Resources: people, skills, capacity, funding</a:t>
+              <a:t>Resources · AIR: asset availability, investment, resource utilisation</a:t>
             </a:r>
             <a:endParaRPr lang="en-US" sz="2600" dirty="0"/>
           </a:p>
@@ -24759,7 +25051,7 @@
                 <a:ea typeface="Calibri" pitchFamily="34" charset="-122"/>
                 <a:cs typeface="Calibri" pitchFamily="34" charset="-120"/>
               </a:rPr>
-              <a:t>Governance: decision rights, escalation</a:t>
+              <a:t>Governance · PAR: policies and procedures, authority, risk management</a:t>
             </a:r>
             <a:endParaRPr lang="en-US" sz="2600" dirty="0"/>
           </a:p>
@@ -24929,7 +25221,7 @@
         <p:spPr>
           <a:xfrm>
             <a:off x="1737360" y="1691640"/>
-            <a:ext cx="4069080" cy="502920"/>
+            <a:ext cx="4069080" cy="868680"/>
           </a:xfrm>
           <a:prstGeom prst="rect">
             <a:avLst/>
@@ -24967,7 +25259,7 @@
         </p:nvSpPr>
         <p:spPr>
           <a:xfrm>
-            <a:off x="1737360" y="2194560"/>
+            <a:off x="1737360" y="2606040"/>
             <a:ext cx="4069080" cy="457200"/>
           </a:xfrm>
           <a:prstGeom prst="rect">
@@ -25006,8 +25298,8 @@
         </p:nvSpPr>
         <p:spPr>
           <a:xfrm>
-            <a:off x="868680" y="2834640"/>
-            <a:ext cx="4846320" cy="3429000"/>
+            <a:off x="868680" y="3246120"/>
+            <a:ext cx="4846320" cy="3017520"/>
           </a:xfrm>
           <a:prstGeom prst="rect">
             <a:avLst/>
@@ -25241,7 +25533,7 @@
         </p:nvSpPr>
         <p:spPr>
           <a:xfrm>
-            <a:off x="7434072" y="2194560"/>
+            <a:off x="7434072" y="2606040"/>
             <a:ext cx="4069080" cy="457200"/>
           </a:xfrm>
           <a:prstGeom prst="rect">
@@ -25280,8 +25572,8 @@
         </p:nvSpPr>
         <p:spPr>
           <a:xfrm>
-            <a:off x="6565392" y="2834640"/>
-            <a:ext cx="4846320" cy="3429000"/>
+            <a:off x="6565392" y="3246120"/>
+            <a:ext cx="4846320" cy="3017520"/>
           </a:xfrm>
           <a:prstGeom prst="rect">
             <a:avLst/>
@@ -25309,7 +25601,7 @@
                 <a:ea typeface="Calibri" pitchFamily="34" charset="-122"/>
                 <a:cs typeface="Calibri" pitchFamily="34" charset="-120"/>
               </a:rPr>
-              <a:t>Working conditions support it?</a:t>
+              <a:t>Facilities and technology reliable?</a:t>
             </a:r>
             <a:endParaRPr lang="en-US" sz="2400" dirty="0"/>
           </a:p>
@@ -25351,7 +25643,7 @@
                 <a:ea typeface="Calibri" pitchFamily="34" charset="-122"/>
                 <a:cs typeface="Calibri" pitchFamily="34" charset="-120"/>
               </a:rPr>
-              <a:t>Capacity sufficient?</a:t>
+              <a:t>Equipment and funding sufficient?</a:t>
             </a:r>
             <a:endParaRPr lang="en-US" sz="2400" dirty="0"/>
           </a:p>

--- a/Unit decks/Unit 06 - Performance Management Setup.pptx
+++ b/Unit decks/Unit 06 - Performance Management Setup.pptx
@@ -368,7 +368,7 @@
           <a:p>
             <a:r>
               <a:rPr lang="en-GB" dirty="0"/>
-              <a:t>Say: "Each of you writes four personal reflections, in parts 1.2, 1.3, 1.4 and 3.2. They go into your Learning Portfolio. In Section 5 your group builds three connected components of its Enterprise Performance Management System for the strategy in your Capstone S2R® Blueprint: the Contribution Map, the FACES application and the WARD check-up for one enterprise Key Result."</a:t>
+              <a:t>Say: "Each of you writes four personal reflections, in parts 1.2, 1.3, 1.4 and 3.2. They go into your Learning Portfolio. In Section 5 your group builds four connected components of its Enterprise Performance Management System for the strategy in your Capstone S2R® Blueprint: the Contribution Map, the FACES application, the CEO Performance Scorecard and the WARD check-up for one enterprise Key Result."</a:t>
             </a:r>
           </a:p>
           <a:p/>
@@ -419,7 +419,7 @@
           <a:p>
             <a:r>
               <a:rPr lang="en-GB" dirty="0"/>
-              <a:t>The group’s agreed record feeds boxes 6A, 6B and 6C of the team’s Capstone S2R® Blueprint: the Contribution Map in 6A, the FACES application in 6B and the WARD check-up in 6C.</a:t>
+              <a:t>The group’s agreed record feeds boxes 6A to 6D of the team’s Capstone S2R® Blueprint: the Contribution Map in 6A, the FACES application in 6B, the CEO Performance Scorecard in 6C and the WARD check-up in 6D.</a:t>
             </a:r>
           </a:p>
         </p:txBody>
@@ -1626,7 +1626,7 @@
           <a:p>
             <a:r>
               <a:rPr lang="en-GB" dirty="0"/>
-              <a:t>Outcome 3 is built in Section 3, where the ten executive performance perspectives come together into one view of enterprise progress, and produced in Activity 3, where your group sets the waypoints, the alert and the decider for its Key Result.</a:t>
+              <a:t>Outcome 3 is built in Section 3, where the ten executive performance perspectives come together into one view of enterprise progress, and produced in Activity 4, where your group sets the waypoints, the alert and the decider for its Key Result.</a:t>
             </a:r>
           </a:p>
           <a:p>
@@ -2173,13 +2173,19 @@
           <a:p>
             <a:r>
               <a:rPr lang="en-GB" dirty="0"/>
-              <a:t>3. 5.3 · Activity 3: the WARD check-up. The group sets the waypoints, the alert, the recovery and the decider for the Key Result chosen in Activity 1, using the conditions named in its Contribution Map.</a:t>
-            </a:r>
-          </a:p>
-          <a:p>
-            <a:r>
-              <a:rPr lang="en-GB" dirty="0"/>
-              <a:t>All three activities are group work and Capstone work. Brief each activity from the worked example in Section 4. The groups then work through the steps on their own pages.</a:t>
+              <a:t>3. 5.3 · Activity 3: the CEO Performance Scorecard. The group sets the Strategy, Operational and Behavioural measures on which its CEO is assessed, and the weight of each, using part 2.3.</a:t>
+            </a:r>
+          </a:p>
+          <a:p>
+            <a:r>
+              <a:rPr lang="en-GB" dirty="0"/>
+              <a:t>4. 5.4 · Activity 4: the WARD check-up. The group sets the waypoints, the alert, the recovery and the decider for the Key Result chosen in Activity 1, using the conditions named in its Contribution Map.</a:t>
+            </a:r>
+          </a:p>
+          <a:p>
+            <a:r>
+              <a:rPr lang="en-GB" dirty="0"/>
+              <a:t>All four activities are group work and Capstone work. Brief each activity from the worked example in Section 4. The groups then work through the steps on their own pages.</a:t>
             </a:r>
           </a:p>
           <a:p/>
@@ -2218,7 +2224,7 @@
           <a:p>
             <a:r>
               <a:rPr lang="en-GB" dirty="0"/>
-              <a:t>Say: "Your group has already established its capstone organisation’s strategic direction, strategic objectives and Key Results. In this application you use that work to develop three connected components of your Enterprise Performance Management System: Activity 1, the S2R® Contribution Map™; Activity 2, the FACES application; and Activity 3, the WARD check-up for your enterprise Key Result."</a:t>
+              <a:t>Say: "Your group has already established its capstone organisation’s strategic direction, strategic objectives and Key Results. In this application you use that work to develop four connected components of your Enterprise Performance Management System: Activity 1, the S2R® Contribution Map™; Activity 2, the FACES application; Activity 3, the CEO Performance Scorecard; and Activity 4, the WARD check-up for your enterprise Key Result."</a:t>
             </a:r>
           </a:p>
           <a:p/>
@@ -2231,7 +2237,7 @@
           <a:p>
             <a:r>
               <a:rPr lang="en-GB" dirty="0"/>
-              <a:t>Say: "Each activity builds on the one before it. Activity 2 uses the business functions you name in Activity 1. Activity 3 sets the check-up for the Key Result you choose in Activity 1, and its recovery uses the organisational conditions you name in your map."</a:t>
+              <a:t>Say: "Each activity builds on the one before it. Activity 2 uses the business functions you name in Activity 1. Activity 3 builds the CEO Performance Scorecard from that Key Result. Activity 4 sets the check-up for the Key Result you choose in Activity 1, and its recovery uses the organisational conditions you name in your map."</a:t>
             </a:r>
           </a:p>
           <a:p/>
@@ -2257,7 +2263,7 @@
           <a:p>
             <a:r>
               <a:rPr lang="en-GB" dirty="0"/>
-              <a:t>Say: "This is Capstone work. Your group’s agreed record feeds boxes 6A, 6B and 6C of your Capstone S2R® Blueprint."</a:t>
+              <a:t>Say: "This is Capstone work. Your group’s agreed record feeds boxes 6A to 6D of your Capstone S2R® Blueprint."</a:t>
             </a:r>
           </a:p>
           <a:p/>
@@ -3235,7 +3241,7 @@
           <a:p>
             <a:r>
               <a:rPr lang="en-GB" dirty="0"/>
-              <a:t>5.3 — ACTIVITY 3: WARD · YOUR KEY RESULT’S VITAL CHECK-UP (CAPSTONE WORK)</a:t>
+              <a:t>5.4 — ACTIVITY 4: WARD · YOUR KEY RESULT’S VITAL CHECK-UP (CAPSTONE WORK)</a:t>
             </a:r>
           </a:p>
           <a:p/>
@@ -3391,7 +3397,7 @@
           <a:p>
             <a:r>
               <a:rPr lang="en-GB" dirty="0"/>
-              <a:t>Participants work as a group in Activity 3 of Section 5 of the participant file. This is Capstone work. The group chooses its scribe for this work. The scribe types what the group agrees, and the entries appear on every member’s page.</a:t>
+              <a:t>Participants work as a group in Activity 4 of Section 5 of the participant file. This is Capstone work. The group chooses its scribe for this work. The scribe types what the group agrees, and the entries appear on every member’s page.</a:t>
             </a:r>
           </a:p>
           <a:p>
@@ -3416,6 +3422,12 @@
             <a:r>
               <a:rPr lang="en-GB" dirty="0"/>
               <a:t>4. Each participant reads the record and selects Agree. Print gives a copy.</a:t>
+            </a:r>
+          </a:p>
+          <a:p>
+            <a:r>
+              <a:rPr lang="en-GB" dirty="0"/>
+              <a:t>Close the group work with Our Position. Say: "When your record is complete, write as a group a short summary statement of your team's position from this unit, in the unit's own terms. Every member agrees it with the rest of the record. It closes this unit's section of your Capstone S2R Blueprint and guides the assessors through your work."</a:t>
             </a:r>
           </a:p>
           <a:p>
@@ -3434,7 +3446,7 @@
           <a:p>
             <a:r>
               <a:rPr lang="en-GB" dirty="0"/>
-              <a:t>The agreed record feeds the Unit 6 boxes of the team’s Capstone S2R® Blueprint: the Contribution Map in 6A, the FACES application in 6B and the WARD check-up in 6C. The external panel assesses the Blueprint.</a:t>
+              <a:t>The agreed record feeds the Unit 6 boxes of the team’s Capstone S2R® Blueprint: the Contribution Map in 6A, the FACES application in 6B, the CEO Performance Scorecard in 6C and the WARD check-up in 6D. The external panel assesses the Blueprint.</a:t>
             </a:r>
           </a:p>
         </p:txBody>
@@ -3560,7 +3572,7 @@
           <a:p>
             <a:r>
               <a:rPr lang="en-GB" dirty="0"/>
-              <a:t>Section 5 · Application — In Practice: each group builds three connected components of its Enterprise Performance Management System for the strategy in its Capstone S2R® Blueprint: the Contribution Map, the FACES application and the WARD check-up for its enterprise Key Result.</a:t>
+              <a:t>Section 5 · Application — In Practice: each group builds four connected components of its Enterprise Performance Management System for the strategy in its Capstone S2R® Blueprint: the Contribution Map, the FACES application, the CEO Performance Scorecard and the WARD check-up for its enterprise Key Result.</a:t>
             </a:r>
           </a:p>
           <a:p/>
@@ -21765,7 +21777,7 @@
                 <a:ea typeface="Cambria" pitchFamily="34" charset="-122"/>
                 <a:cs typeface="Cambria" pitchFamily="34" charset="-120"/>
               </a:rPr>
-              <a:t>5.3 · Activity 3: WARD check-up</a:t>
+              <a:t>5.4 · Activity 4: WARD check-up</a:t>
             </a:r>
             <a:endParaRPr lang="en-US" sz="3600" dirty="0"/>
           </a:p>

--- a/Unit decks/Unit 06 - Performance Management Setup.pptx
+++ b/Unit decks/Unit 06 - Performance Management Setup.pptx
@@ -28,6 +28,8 @@
     <p:sldId id="302" r:id="rId42"/>
     <p:sldId id="267" r:id="rId15"/>
     <p:sldId id="303" r:id="rId43"/>
+    <p:sldId id="310" r:id="rId26"/>
+    <p:sldId id="311" r:id="rId23"/>
     <p:sldId id="270" r:id="rId18"/>
     <p:sldId id="271" r:id="rId19"/>
     <p:sldId id="304" r:id="rId44"/>
@@ -40,6 +42,7 @@
     <p:sldId id="279" r:id="rId24"/>
     <p:sldId id="280" r:id="rId25"/>
     <p:sldId id="293" r:id="rId34"/>
+    <p:sldId id="312" r:id="rId20"/>
     <p:sldId id="309" r:id="rId35"/>
     <p:sldId id="283" r:id="rId28"/>
   </p:sldIdLst>
@@ -673,13 +676,14 @@
           <a:p>
             <a:r>
               <a:rPr lang="en-GB" dirty="0"/>
-              <a:t>2. 2.2: compliance and commitment architecture. The four dimensions, then accountability for people performance and organisational performance (two slides).</a:t>
-            </a:r>
-          </a:p>
-          <a:p>
-            <a:r>
-              <a:rPr lang="en-GB" dirty="0"/>
-              <a:t>Section 2 carries no personal reflection. The section closes on the 2.2 slide and bridges to Section 3.</a:t>
+              <a:t>2. 2.2: compliance and commitment architecture. The four dimensions, then accountability for people performance and organisational performance (two slides).
+3. 2.3: performance scorecard development. The three categories, then how a scorecard is developed (two slides).</a:t>
+            </a:r>
+          </a:p>
+          <a:p>
+            <a:r>
+              <a:rPr lang="en-GB" dirty="0"/>
+              <a:t>Section 2 carries no personal reflection. The section closes on the 2.3b slide and bridges to Section 3.</a:t>
             </a:r>
           </a:p>
           <a:p/>
@@ -1255,7 +1259,7 @@
           <a:p>
             <a:r>
               <a:rPr lang="en-GB" dirty="0"/>
-              <a:t>Say: "Section 2 established the four execution bridges that sustain the connection between strategy and results. It also examined how compliance-driven and commitment-driven approaches influence accountability, performance behaviour and management responses."</a:t>
+              <a:t>Say: "Section 2 established the four execution bridges that sustain the connection between strategy and results. It also examined how compliance-driven and commitment-driven approaches influence accountability, performance behaviour and management responses, and how a performance scorecard carries the connection to the individual."</a:t>
             </a:r>
           </a:p>
           <a:p/>
@@ -1517,6 +1521,278 @@
 </p:notes>
 </file>
 
+<file path=ppt/notesSlides/notesSlide19.xml><?xml version="1.0" encoding="utf-8"?>
+<p:notes xmlns:a="http://schemas.openxmlformats.org/drawingml/2006/main" xmlns:p="http://schemas.openxmlformats.org/presentationml/2006/main" xmlns:r="http://schemas.openxmlformats.org/officeDocument/2006/relationships">
+  <p:cSld>
+    <p:spTree>
+      <p:nvGrpSpPr>
+        <p:cNvPr id="1" name=""/>
+        <p:cNvGrpSpPr/>
+        <p:nvPr/>
+      </p:nvGrpSpPr>
+      <p:grpSpPr>
+        <a:xfrm>
+          <a:off x="0" y="0"/>
+          <a:ext cx="0" cy="0"/>
+          <a:chOff x="0" y="0"/>
+          <a:chExt cx="0" cy="0"/>
+        </a:xfrm>
+      </p:grpSpPr>
+      <p:sp>
+        <p:nvSpPr>
+          <p:cNvPr id="2" name="Slide Image Placeholder 1"/>
+          <p:cNvSpPr>
+            <a:spLocks noGrp="1" noRot="1" noChangeAspect="1"/>
+          </p:cNvSpPr>
+          <p:nvPr>
+            <p:ph type="sldImg"/>
+          </p:nvPr>
+        </p:nvSpPr>
+        <p:spPr/>
+      </p:sp>
+      <p:sp>
+        <p:nvSpPr>
+          <p:cNvPr id="3" name="Notes Placeholder 2"/>
+          <p:cNvSpPr>
+            <a:spLocks noGrp="1"/>
+          </p:cNvSpPr>
+          <p:nvPr>
+            <p:ph type="body" idx="1"/>
+          </p:nvPr>
+        </p:nvSpPr>
+        <p:spPr/>
+        <p:txBody>
+          <a:bodyPr/>
+          <a:lstStyle/>
+          <a:p>
+            <a:r>
+              <a:rPr b="1"/>
+              <a:t>5.3 — ACTIVITY 3: DESIGN THE CEO PERFORMANCE SCORECARD (CAPSTONE WORK)</a:t>
+            </a:r>
+          </a:p>
+          <a:p>
+            <a:r>
+              <a:t/>
+            </a:r>
+          </a:p>
+          <a:p>
+            <a:r>
+              <a:rPr b="1"/>
+              <a:t>HOW TO TEACH IT:</a:t>
+            </a:r>
+          </a:p>
+          <a:p>
+            <a:r>
+              <a:t/>
+            </a:r>
+          </a:p>
+          <a:p>
+            <a:r>
+              <a:rPr b="1"/>
+              <a:t>1. Open from part 2.3.</a:t>
+            </a:r>
+          </a:p>
+          <a:p>
+            <a:r>
+              <a:t>Say: "In part 2.3 we set out the three categories of a performance scorecard and their typical weighting: Strategy 30–50% at senior levels, Operational 30–50% and Behavioural 20–40%. At executive level, the leader is measured on the cumulative outcome that the team's activities produce."</a:t>
+            </a:r>
+          </a:p>
+          <a:p>
+            <a:r>
+              <a:t/>
+            </a:r>
+          </a:p>
+          <a:p>
+            <a:r>
+              <a:rPr b="1"/>
+              <a:t>2. Brief the activity.</a:t>
+            </a:r>
+          </a:p>
+          <a:p>
+            <a:r>
+              <a:t>Say: "Your group designs one scorecard, for your CEO. The Strategy measures start from the enterprise Key Result you chose in Activity 1, and you can add a second Key Result from your Unit 3 OKRs. Then name the Operational KPIs and the Behavioural measures, and weight the three categories so that the weights add up to 100%."</a:t>
+            </a:r>
+          </a:p>
+          <a:p>
+            <a:r>
+              <a:t/>
+            </a:r>
+          </a:p>
+          <a:p>
+            <a:r>
+              <a:rPr b="1"/>
+              <a:t>3. Walk through the template.</a:t>
+            </a:r>
+          </a:p>
+          <a:p>
+            <a:r>
+              <a:t>Say: "The template on your page shows the enterprise Key Result from Activity 1. You complete five fields."</a:t>
+            </a:r>
+          </a:p>
+          <a:p>
+            <a:r>
+              <a:t>Strategy · Key Result 1: what the CEO is measured on for the enterprise Key Result from Activity 1, and its weight.</a:t>
+            </a:r>
+          </a:p>
+          <a:p>
+            <a:r>
+              <a:t>Strategy · Key Result 2 (optional): what the CEO is measured on for a second Key Result from your Unit 3 OKRs, and its weight.</a:t>
+            </a:r>
+          </a:p>
+          <a:p>
+            <a:r>
+              <a:t>Operational: the operational KPIs the CEO is measured on, with their targets, and their weight.</a:t>
+            </a:r>
+          </a:p>
+          <a:p>
+            <a:r>
+              <a:t>Behavioural: the values and leadership behaviours the CEO is measured on, how they are assessed, and their weight.</a:t>
+            </a:r>
+          </a:p>
+          <a:p>
+            <a:r>
+              <a:t>Total weight: the weights add up to 100%.</a:t>
+            </a:r>
+          </a:p>
+          <a:p>
+            <a:r>
+              <a:t/>
+            </a:r>
+          </a:p>
+          <a:p>
+            <a:r>
+              <a:rPr b="1"/>
+              <a:t>4. Ask the weighting question.</a:t>
+            </a:r>
+          </a:p>
+          <a:p>
+            <a:r>
+              <a:t>Ask: "Does the Strategy weight reflect that the CEO is measured on the cumulative outcome the team's activities produce?"</a:t>
+            </a:r>
+          </a:p>
+          <a:p>
+            <a:r>
+              <a:t/>
+            </a:r>
+          </a:p>
+          <a:p>
+            <a:r>
+              <a:rPr b="1"/>
+              <a:t>5. Read the completion check.</a:t>
+            </a:r>
+          </a:p>
+          <a:p>
+            <a:r>
+              <a:t>Say: "Before you confirm, check four things."</a:t>
+            </a:r>
+          </a:p>
+          <a:p>
+            <a:r>
+              <a:rPr b="1"/>
+              <a:t>1. The Strategy measures come from your enterprise Key Results.</a:t>
+            </a:r>
+          </a:p>
+          <a:p>
+            <a:r>
+              <a:rPr b="1"/>
+              <a:t>2. Each category has a weight, and the weights add up to 100%.</a:t>
+            </a:r>
+          </a:p>
+          <a:p>
+            <a:r>
+              <a:rPr b="1"/>
+              <a:t>3. The weighting reflects the CEO's level and influence on the strategy.</a:t>
+            </a:r>
+          </a:p>
+          <a:p>
+            <a:r>
+              <a:rPr b="1"/>
+              <a:t>4. The Behavioural measures state how they are assessed.</a:t>
+            </a:r>
+          </a:p>
+          <a:p>
+            <a:r>
+              <a:t/>
+            </a:r>
+          </a:p>
+          <a:p>
+            <a:r>
+              <a:rPr b="1"/>
+              <a:t>6. Bridge to Activity 4.</a:t>
+            </a:r>
+          </a:p>
+          <a:p>
+            <a:r>
+              <a:t>Say: "With the CEO's measures set, Activity 4 sets the vital check-up for the Key Result itself."</a:t>
+            </a:r>
+          </a:p>
+          <a:p>
+            <a:r>
+              <a:t/>
+            </a:r>
+          </a:p>
+          <a:p>
+            <a:r>
+              <a:rPr b="1"/>
+              <a:t>ON THE PORTAL, AFTER THE TEACHING:</a:t>
+            </a:r>
+          </a:p>
+          <a:p>
+            <a:r>
+              <a:t>Participants work as a group in Activity 3 of Section 5 of the participant file. This is Capstone work. The group chooses its scribe for this work. The scribe types what the group agrees, and the entries appear on every member's page.</a:t>
+            </a:r>
+          </a:p>
+          <a:p>
+            <a:r>
+              <a:rPr b="1"/>
+              <a:t>1. The group sets the Strategy measures and their weight.</a:t>
+            </a:r>
+          </a:p>
+          <a:p>
+            <a:r>
+              <a:rPr b="1"/>
+              <a:t>2. The group sets the Operational and Behavioural measures and their weights.</a:t>
+            </a:r>
+          </a:p>
+          <a:p>
+            <a:r>
+              <a:rPr b="1"/>
+              <a:t>3. The group checks that the weights add up to 100%, then goes to Activity 4.</a:t>
+            </a:r>
+          </a:p>
+        </p:txBody>
+      </p:sp>
+      <p:sp>
+        <p:nvSpPr>
+          <p:cNvPr id="4" name="Slide Number Placeholder 3"/>
+          <p:cNvSpPr>
+            <a:spLocks noGrp="1"/>
+          </p:cNvSpPr>
+          <p:nvPr>
+            <p:ph type="sldNum" sz="quarter" idx="10"/>
+          </p:nvPr>
+        </p:nvSpPr>
+        <p:spPr/>
+        <p:txBody>
+          <a:bodyPr/>
+          <a:lstStyle/>
+          <a:p>
+            <a:fld id="{F7021451-1387-4CA6-816F-3879F97B5CBC}" type="slidenum">
+              <a:rPr lang="en-US"/>
+              <a:t>7</a:t>
+            </a:fld>
+            <a:endParaRPr lang="en-US"/>
+          </a:p>
+        </p:txBody>
+      </p:sp>
+    </p:spTree>
+  </p:cSld>
+  <p:clrMapOvr>
+    <a:masterClrMapping/>
+  </p:clrMapOvr>
+</p:notes>
+</file>
+
 <file path=ppt/notesSlides/notesSlide2.xml><?xml version="1.0" encoding="utf-8"?>
 <p:notes xmlns:a="http://schemas.openxmlformats.org/drawingml/2006/main" xmlns:r="http://schemas.openxmlformats.org/officeDocument/2006/relationships" xmlns:p="http://schemas.openxmlformats.org/presentationml/2006/main">
   <p:cSld>
@@ -2096,6 +2372,211 @@
 </p:notes>
 </file>
 
+<file path=ppt/notesSlides/notesSlide22.xml><?xml version="1.0" encoding="utf-8"?>
+<p:notes xmlns:a="http://schemas.openxmlformats.org/drawingml/2006/main" xmlns:p="http://schemas.openxmlformats.org/presentationml/2006/main" xmlns:r="http://schemas.openxmlformats.org/officeDocument/2006/relationships">
+  <p:cSld>
+    <p:spTree>
+      <p:nvGrpSpPr>
+        <p:cNvPr id="1" name=""/>
+        <p:cNvGrpSpPr/>
+        <p:nvPr/>
+      </p:nvGrpSpPr>
+      <p:grpSpPr>
+        <a:xfrm>
+          <a:off x="0" y="0"/>
+          <a:ext cx="0" cy="0"/>
+          <a:chOff x="0" y="0"/>
+          <a:chExt cx="0" cy="0"/>
+        </a:xfrm>
+      </p:grpSpPr>
+      <p:sp>
+        <p:nvSpPr>
+          <p:cNvPr id="2" name="Slide Image Placeholder 1"/>
+          <p:cNvSpPr>
+            <a:spLocks noGrp="1" noRot="1" noChangeAspect="1"/>
+          </p:cNvSpPr>
+          <p:nvPr>
+            <p:ph type="sldImg"/>
+          </p:nvPr>
+        </p:nvSpPr>
+        <p:spPr/>
+      </p:sp>
+      <p:sp>
+        <p:nvSpPr>
+          <p:cNvPr id="3" name="Notes Placeholder 2"/>
+          <p:cNvSpPr>
+            <a:spLocks noGrp="1"/>
+          </p:cNvSpPr>
+          <p:nvPr>
+            <p:ph type="body" idx="1"/>
+          </p:nvPr>
+        </p:nvSpPr>
+        <p:spPr/>
+        <p:txBody>
+          <a:bodyPr/>
+          <a:lstStyle/>
+          <a:p>
+            <a:r>
+              <a:rPr b="1"/>
+              <a:t>2.3.1 — DEVELOPING A PERFORMANCE SCORECARD</a:t>
+            </a:r>
+          </a:p>
+          <a:p>
+            <a:r>
+              <a:t/>
+            </a:r>
+          </a:p>
+          <a:p>
+            <a:r>
+              <a:rPr b="1"/>
+              <a:t>HOW TO TEACH IT:</a:t>
+            </a:r>
+          </a:p>
+          <a:p>
+            <a:r>
+              <a:t/>
+            </a:r>
+          </a:p>
+          <a:p>
+            <a:r>
+              <a:rPr b="1"/>
+              <a:t>1. Start from the enterprise Key Results.</a:t>
+            </a:r>
+          </a:p>
+          <a:p>
+            <a:r>
+              <a:t>Say: "The Strategy measures come from the Key Results the role contributes to, as set out in the S2R® Contribution Map™."</a:t>
+            </a:r>
+          </a:p>
+          <a:p>
+            <a:r>
+              <a:t/>
+            </a:r>
+          </a:p>
+          <a:p>
+            <a:r>
+              <a:rPr b="1"/>
+              <a:t>2. Add the Operational KPIs.</a:t>
+            </a:r>
+          </a:p>
+          <a:p>
+            <a:r>
+              <a:t>Say: "Name the KPIs that show whether the role's function performs at the standard the strategy requires."</a:t>
+            </a:r>
+          </a:p>
+          <a:p>
+            <a:r>
+              <a:t/>
+            </a:r>
+          </a:p>
+          <a:p>
+            <a:r>
+              <a:rPr b="1"/>
+              <a:t>3. Add the Behavioural measures.</a:t>
+            </a:r>
+          </a:p>
+          <a:p>
+            <a:r>
+              <a:t>Say: "Name the values and leadership behaviours expected of the role, and how they will be assessed."</a:t>
+            </a:r>
+          </a:p>
+          <a:p>
+            <a:r>
+              <a:t/>
+            </a:r>
+          </a:p>
+          <a:p>
+            <a:r>
+              <a:rPr b="1"/>
+              <a:t>4. Weight the three categories.</a:t>
+            </a:r>
+          </a:p>
+          <a:p>
+            <a:r>
+              <a:t>Say: "Set the weight of each category to reflect the role's level and its influence on the strategy. The weights add up to 100%."</a:t>
+            </a:r>
+          </a:p>
+          <a:p>
+            <a:r>
+              <a:t/>
+            </a:r>
+          </a:p>
+          <a:p>
+            <a:r>
+              <a:rPr b="1"/>
+              <a:t>5. Make it transparent.</a:t>
+            </a:r>
+          </a:p>
+          <a:p>
+            <a:r>
+              <a:t>Say: "The role holder understands the KPIs, targets, weightings, behavioural standards and rating criteria on which performance will be assessed."</a:t>
+            </a:r>
+          </a:p>
+          <a:p>
+            <a:r>
+              <a:t/>
+            </a:r>
+          </a:p>
+          <a:p>
+            <a:r>
+              <a:rPr b="1"/>
+              <a:t>6. Show how the weighting changes with the role's level.</a:t>
+            </a:r>
+          </a:p>
+          <a:p>
+            <a:r>
+              <a:t>Say: "At executive level, the leader is measured on the cumulative outcome that the team's activities produce. The scorecard of a CEO therefore carries a higher Strategy weight than the scorecard of a frontline role. In Section 5, Activity 3, your group designs one scorecard, for its CEO."</a:t>
+            </a:r>
+          </a:p>
+          <a:p>
+            <a:r>
+              <a:t/>
+            </a:r>
+          </a:p>
+          <a:p>
+            <a:r>
+              <a:rPr b="1"/>
+              <a:t>7. Close Section 2 and bridge to Section 3.</a:t>
+            </a:r>
+          </a:p>
+          <a:p>
+            <a:r>
+              <a:t>Say: "Performance management bridges strategy and execution when it builds commitment to results, and the scorecard carries that commitment to each role. Section 3 examines where performance management becomes vulnerable across executive perspectives, and how its practice is evolving."</a:t>
+            </a:r>
+          </a:p>
+        </p:txBody>
+      </p:sp>
+      <p:sp>
+        <p:nvSpPr>
+          <p:cNvPr id="4" name="Slide Number Placeholder 3"/>
+          <p:cNvSpPr>
+            <a:spLocks noGrp="1"/>
+          </p:cNvSpPr>
+          <p:nvPr>
+            <p:ph type="sldNum" sz="quarter" idx="10"/>
+          </p:nvPr>
+        </p:nvSpPr>
+        <p:spPr/>
+        <p:txBody>
+          <a:bodyPr/>
+          <a:lstStyle/>
+          <a:p>
+            <a:fld id="{F7021451-1387-4CA6-816F-3879F97B5CBC}" type="slidenum">
+              <a:rPr lang="en-US"/>
+              <a:t>7</a:t>
+            </a:fld>
+            <a:endParaRPr lang="en-US"/>
+          </a:p>
+        </p:txBody>
+      </p:sp>
+    </p:spTree>
+  </p:cSld>
+  <p:clrMapOvr>
+    <a:masterClrMapping/>
+  </p:clrMapOvr>
+</p:notes>
+</file>
+
 <file path=ppt/notesSlides/notesSlide23.xml><?xml version="1.0" encoding="utf-8"?>
 <p:notes xmlns:a="http://schemas.openxmlformats.org/drawingml/2006/main" xmlns:r="http://schemas.openxmlformats.org/officeDocument/2006/relationships" xmlns:p="http://schemas.openxmlformats.org/presentationml/2006/main">
   <p:cSld>
@@ -2578,6 +3059,221 @@
 </p:notes>
 </file>
 
+<file path=ppt/notesSlides/notesSlide25.xml><?xml version="1.0" encoding="utf-8"?>
+<p:notes xmlns:a="http://schemas.openxmlformats.org/drawingml/2006/main" xmlns:p="http://schemas.openxmlformats.org/presentationml/2006/main" xmlns:r="http://schemas.openxmlformats.org/officeDocument/2006/relationships">
+  <p:cSld>
+    <p:spTree>
+      <p:nvGrpSpPr>
+        <p:cNvPr id="1" name=""/>
+        <p:cNvGrpSpPr/>
+        <p:nvPr/>
+      </p:nvGrpSpPr>
+      <p:grpSpPr>
+        <a:xfrm>
+          <a:off x="0" y="0"/>
+          <a:ext cx="0" cy="0"/>
+          <a:chOff x="0" y="0"/>
+          <a:chExt cx="0" cy="0"/>
+        </a:xfrm>
+      </p:grpSpPr>
+      <p:sp>
+        <p:nvSpPr>
+          <p:cNvPr id="2" name="Slide Image Placeholder 1"/>
+          <p:cNvSpPr>
+            <a:spLocks noGrp="1" noRot="1" noChangeAspect="1"/>
+          </p:cNvSpPr>
+          <p:nvPr>
+            <p:ph type="sldImg"/>
+          </p:nvPr>
+        </p:nvSpPr>
+        <p:spPr/>
+      </p:sp>
+      <p:sp>
+        <p:nvSpPr>
+          <p:cNvPr id="3" name="Notes Placeholder 2"/>
+          <p:cNvSpPr>
+            <a:spLocks noGrp="1"/>
+          </p:cNvSpPr>
+          <p:nvPr>
+            <p:ph type="body" idx="1"/>
+          </p:nvPr>
+        </p:nvSpPr>
+        <p:spPr/>
+        <p:txBody>
+          <a:bodyPr/>
+          <a:lstStyle/>
+          <a:p>
+            <a:r>
+              <a:rPr b="1"/>
+              <a:t>2.3 — PERFORMANCE SCORECARD DEVELOPMENT: THE THREE CATEGORIES</a:t>
+            </a:r>
+          </a:p>
+          <a:p>
+            <a:r>
+              <a:t/>
+            </a:r>
+          </a:p>
+          <a:p>
+            <a:r>
+              <a:rPr b="1"/>
+              <a:t>HOW TO TEACH IT:</a:t>
+            </a:r>
+          </a:p>
+          <a:p>
+            <a:r>
+              <a:t/>
+            </a:r>
+          </a:p>
+          <a:p>
+            <a:r>
+              <a:rPr b="1"/>
+              <a:t>1. Link to the execution bridges.</a:t>
+            </a:r>
+          </a:p>
+          <a:p>
+            <a:r>
+              <a:t>Say: "The execution bridges carry enterprise results to the people who deliver them. The performance scorecard is where that connection reaches the individual: it states the measures on which a role's performance is assessed and the weight each carries."</a:t>
+            </a:r>
+          </a:p>
+          <a:p>
+            <a:r>
+              <a:t/>
+            </a:r>
+          </a:p>
+          <a:p>
+            <a:r>
+              <a:rPr b="1"/>
+              <a:t>2. Name the three categories.</a:t>
+            </a:r>
+          </a:p>
+          <a:p>
+            <a:r>
+              <a:t>Say: "A well-designed scorecard tracks performance in three categories: Strategy, Operational and Behavioural. Each gives a different angle on whether the organisation is progressing towards its strategic intent."</a:t>
+            </a:r>
+          </a:p>
+          <a:p>
+            <a:r>
+              <a:t/>
+            </a:r>
+          </a:p>
+          <a:p>
+            <a:r>
+              <a:rPr b="1"/>
+              <a:t>3. Teach Strategy.</a:t>
+            </a:r>
+          </a:p>
+          <a:p>
+            <a:r>
+              <a:t>Say: "Strategy measures are the strategic OKRs directly connected to the organisation's multi-year strategy. They ask: are we making progress on what matters most for where we are going? They typically carry 30–50% of the scorecard at senior levels, and less for frontline roles. They are reviewed quarterly, with executive visibility."</a:t>
+            </a:r>
+          </a:p>
+          <a:p>
+            <a:r>
+              <a:t/>
+            </a:r>
+          </a:p>
+          <a:p>
+            <a:r>
+              <a:rPr b="1"/>
+              <a:t>4. Teach Operational.</a:t>
+            </a:r>
+          </a:p>
+          <a:p>
+            <a:r>
+              <a:t>Say: "Operational measures are the departmental KPIs that track the operational engine: efficiency, output, quality and service delivery. They ask: are operations performing at the standard required to sustain the strategy? They carry 30–50% across most role levels, highest for frontline and specialist roles. They are reviewed monthly or fortnightly."</a:t>
+            </a:r>
+          </a:p>
+          <a:p>
+            <a:r>
+              <a:t/>
+            </a:r>
+          </a:p>
+          <a:p>
+            <a:r>
+              <a:rPr b="1"/>
+              <a:t>5. Teach Behavioural.</a:t>
+            </a:r>
+          </a:p>
+          <a:p>
+            <a:r>
+              <a:t>Say: "Behavioural measures cover how individuals demonstrate the organisation's values and leadership behaviours, assessed through 360° feedback and peer observation. They ask: how are our results being achieved? They carry 20–40% across role levels, higher for leadership and customer-facing roles. They are reviewed bi-annually, through structured 360° feedback."</a:t>
+            </a:r>
+          </a:p>
+          <a:p>
+            <a:r>
+              <a:t>Point to the bar on the slide. Say: "How results are achieved matters as much as what results are achieved."</a:t>
+            </a:r>
+          </a:p>
+          <a:p>
+            <a:r>
+              <a:t/>
+            </a:r>
+          </a:p>
+          <a:p>
+            <a:r>
+              <a:rPr b="1"/>
+              <a:t>6. Ask, now that the three categories are taught.</a:t>
+            </a:r>
+          </a:p>
+          <a:p>
+            <a:r>
+              <a:t>Ask: "If your CEO's scorecard were published tomorrow, what share of it would be Strategy, Operational and Behavioural, and does that reflect the role?"</a:t>
+            </a:r>
+          </a:p>
+          <a:p>
+            <a:r>
+              <a:t>Take two or three answers.</a:t>
+            </a:r>
+          </a:p>
+          <a:p>
+            <a:r>
+              <a:t/>
+            </a:r>
+          </a:p>
+          <a:p>
+            <a:r>
+              <a:rPr b="1"/>
+              <a:t>7. Bridge to 2.3.1.</a:t>
+            </a:r>
+          </a:p>
+          <a:p>
+            <a:r>
+              <a:t>Say: "Next, how a scorecard is put together for a role."</a:t>
+            </a:r>
+          </a:p>
+        </p:txBody>
+      </p:sp>
+      <p:sp>
+        <p:nvSpPr>
+          <p:cNvPr id="4" name="Slide Number Placeholder 3"/>
+          <p:cNvSpPr>
+            <a:spLocks noGrp="1"/>
+          </p:cNvSpPr>
+          <p:nvPr>
+            <p:ph type="sldNum" sz="quarter" idx="10"/>
+          </p:nvPr>
+        </p:nvSpPr>
+        <p:spPr/>
+        <p:txBody>
+          <a:bodyPr/>
+          <a:lstStyle/>
+          <a:p>
+            <a:fld id="{F7021451-1387-4CA6-816F-3879F97B5CBC}" type="slidenum">
+              <a:rPr lang="en-US"/>
+              <a:t>24</a:t>
+            </a:fld>
+            <a:endParaRPr lang="en-US"/>
+          </a:p>
+        </p:txBody>
+      </p:sp>
+    </p:spTree>
+  </p:cSld>
+  <p:clrMapOvr>
+    <a:masterClrMapping/>
+  </p:clrMapOvr>
+</p:notes>
+</file>
+
 <file path=ppt/notesSlides/notesSlide26.xml><?xml version="1.0" encoding="utf-8"?>
 <p:notes xmlns:a="http://schemas.openxmlformats.org/drawingml/2006/main" xmlns:p="http://schemas.openxmlformats.org/presentationml/2006/main" xmlns:r="http://schemas.openxmlformats.org/officeDocument/2006/relationships">
   <p:cSld>
@@ -3554,7 +4250,7 @@
           <a:p>
             <a:r>
               <a:rPr lang="en-GB" dirty="0"/>
-              <a:t>Section 2 · Intelligence — Why: why enterprise performance depends on connecting strategic outcomes, human contributions and organisational operating capability. The four execution bridges, and compliance and commitment architecture.</a:t>
+              <a:t>Section 2 · Intelligence — Why: why enterprise performance depends on connecting strategic outcomes, human contributions and organisational operating capability. The four execution bridges, compliance and commitment architecture, and the performance scorecard that carries it to the individual.</a:t>
             </a:r>
           </a:p>
           <a:p>
@@ -5283,13 +5979,13 @@
           <a:p>
             <a:r>
               <a:rPr lang="en-GB" dirty="0" b="1"/>
-              <a:t>4. Close Section 2 and bridge to Section 3.</a:t>
-            </a:r>
-          </a:p>
-          <a:p>
-            <a:r>
-              <a:rPr lang="en-GB" dirty="0"/>
-              <a:t>Say: "Performance management bridges strategy and execution when it builds commitment to results. Section 3 examines where performance management becomes vulnerable across executive perspectives, and how its practice is evolving."</a:t>
+              <a:t>4. Bridge to 2.3.</a:t>
+            </a:r>
+          </a:p>
+          <a:p>
+            <a:r>
+              <a:rPr lang="en-GB" dirty="0"/>
+              <a:t>Say: "Commitment needs measures each person can see. The performance scorecard is where the connection between enterprise results and the people who deliver them reaches the individual."</a:t>
             </a:r>
           </a:p>
         </p:txBody>
@@ -14953,6 +15649,1227 @@
 </file>
 
 <file path=ppt/slides/slide21.xml><?xml version="1.0" encoding="utf-8"?>
+<p:sld xmlns:a="http://schemas.openxmlformats.org/drawingml/2006/main" xmlns:p="http://schemas.openxmlformats.org/presentationml/2006/main" xmlns:r="http://schemas.openxmlformats.org/officeDocument/2006/relationships">
+  <p:cSld>
+    <p:spTree>
+      <p:nvGrpSpPr>
+        <p:cNvPr id="1" name=""/>
+        <p:cNvGrpSpPr/>
+        <p:nvPr/>
+      </p:nvGrpSpPr>
+      <p:grpSpPr/>
+      <p:sp>
+        <p:nvSpPr>
+          <p:cNvPr id="2" name="Text 0"/>
+          <p:cNvSpPr txBox="1"/>
+          <p:nvPr/>
+        </p:nvSpPr>
+        <p:spPr>
+          <a:xfrm>
+            <a:off x="548640" y="411480"/>
+            <a:ext cx="11064240" cy="868680"/>
+          </a:xfrm>
+          <a:prstGeom prst="rect">
+            <a:avLst/>
+          </a:prstGeom>
+          <a:noFill/>
+          <a:ln/>
+        </p:spPr>
+        <p:txBody>
+          <a:bodyPr wrap="square" lIns="0" tIns="0" rIns="0" bIns="0" rtlCol="0" anchor="ctr"/>
+          <a:lstStyle/>
+          <a:p>
+            <a:pPr marL="0" indent="0">
+              <a:buNone/>
+            </a:pPr>
+            <a:r>
+              <a:rPr lang="en-US" sz="3600" b="1" dirty="0">
+                <a:solidFill>
+                  <a:srgbClr val="1A5C2C"/>
+                </a:solidFill>
+                <a:latin typeface="Cambria" pitchFamily="34" charset="0"/>
+                <a:ea typeface="Cambria" pitchFamily="34" charset="-122"/>
+                <a:cs typeface="Cambria" pitchFamily="34" charset="-120"/>
+              </a:rPr>
+              <a:t>2.3a · Performance scorecard: three categories</a:t>
+            </a:r>
+            <a:endParaRPr lang="en-US" sz="3600" dirty="0"/>
+          </a:p>
+        </p:txBody>
+      </p:sp>
+      <p:sp>
+        <p:nvSpPr>
+          <p:cNvPr id="3" name="Shape 1"/>
+          <p:cNvSpPr/>
+          <p:nvPr/>
+        </p:nvSpPr>
+        <p:spPr>
+          <a:xfrm>
+            <a:off x="548640" y="1508760"/>
+            <a:ext cx="3514344" cy="3931920"/>
+          </a:xfrm>
+          <a:prstGeom prst="roundRect">
+            <a:avLst>
+              <a:gd name="adj" fmla="val 2602"/>
+            </a:avLst>
+          </a:prstGeom>
+          <a:solidFill>
+            <a:srgbClr val="EEF4EF"/>
+          </a:solidFill>
+          <a:ln w="12700">
+            <a:solidFill>
+              <a:srgbClr val="EEF4EF"/>
+            </a:solidFill>
+            <a:prstDash val="solid"/>
+          </a:ln>
+        </p:spPr>
+        <p:txBody>
+          <a:bodyPr/>
+          <a:lstStyle/>
+          <a:p>
+            <a:endParaRPr lang="en-ZA"/>
+          </a:p>
+        </p:txBody>
+      </p:sp>
+      <p:sp>
+        <p:nvSpPr>
+          <p:cNvPr id="4" name="Shape 2"/>
+          <p:cNvSpPr/>
+          <p:nvPr/>
+        </p:nvSpPr>
+        <p:spPr>
+          <a:xfrm>
+            <a:off x="777240" y="1737360"/>
+            <a:ext cx="640080" cy="640080"/>
+          </a:xfrm>
+          <a:prstGeom prst="ellipse">
+            <a:avLst/>
+          </a:prstGeom>
+          <a:solidFill>
+            <a:srgbClr val="1A5C2C"/>
+          </a:solidFill>
+          <a:ln w="12700">
+            <a:solidFill>
+              <a:srgbClr val="1A5C2C"/>
+            </a:solidFill>
+            <a:prstDash val="solid"/>
+          </a:ln>
+        </p:spPr>
+        <p:txBody>
+          <a:bodyPr/>
+          <a:lstStyle/>
+          <a:p>
+            <a:endParaRPr lang="en-ZA"/>
+          </a:p>
+        </p:txBody>
+      </p:sp>
+      <p:pic>
+        <p:nvPicPr>
+          <p:cNvPr id="5" name="Image 0" descr="preencoded.png"/>
+          <p:cNvPicPr>
+            <a:picLocks noChangeAspect="1"/>
+          </p:cNvPicPr>
+          <p:nvPr/>
+        </p:nvPicPr>
+        <p:blipFill>
+          <a:blip r:embed="rId2"/>
+          <a:stretch>
+            <a:fillRect/>
+          </a:stretch>
+        </p:blipFill>
+        <p:spPr>
+          <a:xfrm>
+            <a:off x="937260" y="1897380"/>
+            <a:ext cx="320040" cy="320040"/>
+          </a:xfrm>
+          <a:prstGeom prst="rect">
+            <a:avLst/>
+          </a:prstGeom>
+        </p:spPr>
+      </p:pic>
+      <p:sp>
+        <p:nvSpPr>
+          <p:cNvPr id="6" name="Text 3"/>
+          <p:cNvSpPr txBox="1"/>
+          <p:nvPr/>
+        </p:nvSpPr>
+        <p:spPr>
+          <a:xfrm>
+            <a:off x="777240" y="2514600"/>
+            <a:ext cx="3057144" cy="507492"/>
+          </a:xfrm>
+          <a:prstGeom prst="rect">
+            <a:avLst/>
+          </a:prstGeom>
+          <a:noFill/>
+          <a:ln/>
+        </p:spPr>
+        <p:txBody>
+          <a:bodyPr wrap="square" lIns="0" tIns="0" rIns="0" bIns="0" rtlCol="0" anchor="t"/>
+          <a:lstStyle/>
+          <a:p>
+            <a:pPr marL="0" indent="0">
+              <a:buNone/>
+            </a:pPr>
+            <a:r>
+              <a:rPr lang="en-US" sz="2600" b="1" dirty="0">
+                <a:solidFill>
+                  <a:srgbClr val="1A5C2C"/>
+                </a:solidFill>
+                <a:latin typeface="Cambria" pitchFamily="34" charset="0"/>
+                <a:ea typeface="Cambria" pitchFamily="34" charset="-122"/>
+                <a:cs typeface="Cambria" pitchFamily="34" charset="-120"/>
+              </a:rPr>
+              <a:t>Strategy</a:t>
+            </a:r>
+            <a:endParaRPr lang="en-US" sz="2600" dirty="0"/>
+          </a:p>
+        </p:txBody>
+      </p:sp>
+      <p:sp>
+        <p:nvSpPr>
+          <p:cNvPr id="7" name="Text 4"/>
+          <p:cNvSpPr txBox="1"/>
+          <p:nvPr/>
+        </p:nvSpPr>
+        <p:spPr>
+          <a:xfrm>
+            <a:off x="777240" y="3159252"/>
+            <a:ext cx="3057144" cy="2144268"/>
+          </a:xfrm>
+          <a:prstGeom prst="rect">
+            <a:avLst/>
+          </a:prstGeom>
+          <a:noFill/>
+          <a:ln/>
+        </p:spPr>
+        <p:txBody>
+          <a:bodyPr wrap="square" lIns="0" tIns="0" rIns="0" bIns="0" rtlCol="0" anchor="t"/>
+          <a:lstStyle/>
+          <a:p>
+            <a:pPr marL="0" indent="0">
+              <a:buNone/>
+            </a:pPr>
+            <a:r>
+              <a:rPr lang="en-US" sz="2400" dirty="0">
+                <a:solidFill>
+                  <a:srgbClr val="1F2A22"/>
+                </a:solidFill>
+                <a:latin typeface="Calibri" pitchFamily="34" charset="0"/>
+                <a:ea typeface="Calibri" pitchFamily="34" charset="-122"/>
+                <a:cs typeface="Calibri" pitchFamily="34" charset="-120"/>
+              </a:rPr>
+              <a:t>OKRs: progress on the multi-year strategy. 30–50% at senior levels.</a:t>
+            </a:r>
+            <a:endParaRPr lang="en-US" sz="2400" dirty="0"/>
+          </a:p>
+        </p:txBody>
+      </p:sp>
+      <p:sp>
+        <p:nvSpPr>
+          <p:cNvPr id="8" name="Shape 5"/>
+          <p:cNvSpPr/>
+          <p:nvPr/>
+        </p:nvSpPr>
+        <p:spPr>
+          <a:xfrm>
+            <a:off x="4337304" y="1508760"/>
+            <a:ext cx="3514344" cy="3931920"/>
+          </a:xfrm>
+          <a:prstGeom prst="roundRect">
+            <a:avLst>
+              <a:gd name="adj" fmla="val 2602"/>
+            </a:avLst>
+          </a:prstGeom>
+          <a:solidFill>
+            <a:srgbClr val="EEF4EF"/>
+          </a:solidFill>
+          <a:ln w="12700">
+            <a:solidFill>
+              <a:srgbClr val="EEF4EF"/>
+            </a:solidFill>
+            <a:prstDash val="solid"/>
+          </a:ln>
+        </p:spPr>
+        <p:txBody>
+          <a:bodyPr/>
+          <a:lstStyle/>
+          <a:p>
+            <a:endParaRPr lang="en-ZA"/>
+          </a:p>
+        </p:txBody>
+      </p:sp>
+      <p:sp>
+        <p:nvSpPr>
+          <p:cNvPr id="9" name="Shape 6"/>
+          <p:cNvSpPr/>
+          <p:nvPr/>
+        </p:nvSpPr>
+        <p:spPr>
+          <a:xfrm>
+            <a:off x="4565904" y="1737360"/>
+            <a:ext cx="640080" cy="640080"/>
+          </a:xfrm>
+          <a:prstGeom prst="ellipse">
+            <a:avLst/>
+          </a:prstGeom>
+          <a:solidFill>
+            <a:srgbClr val="1A5C2C"/>
+          </a:solidFill>
+          <a:ln w="12700">
+            <a:solidFill>
+              <a:srgbClr val="1A5C2C"/>
+            </a:solidFill>
+            <a:prstDash val="solid"/>
+          </a:ln>
+        </p:spPr>
+        <p:txBody>
+          <a:bodyPr/>
+          <a:lstStyle/>
+          <a:p>
+            <a:endParaRPr lang="en-ZA"/>
+          </a:p>
+        </p:txBody>
+      </p:sp>
+      <p:pic>
+        <p:nvPicPr>
+          <p:cNvPr id="10" name="Image 1" descr="preencoded.png"/>
+          <p:cNvPicPr>
+            <a:picLocks noChangeAspect="1"/>
+          </p:cNvPicPr>
+          <p:nvPr/>
+        </p:nvPicPr>
+        <p:blipFill>
+          <a:blip r:embed="rId3"/>
+          <a:stretch>
+            <a:fillRect/>
+          </a:stretch>
+        </p:blipFill>
+        <p:spPr>
+          <a:xfrm>
+            <a:off x="4725924" y="1897380"/>
+            <a:ext cx="320040" cy="320040"/>
+          </a:xfrm>
+          <a:prstGeom prst="rect">
+            <a:avLst/>
+          </a:prstGeom>
+        </p:spPr>
+      </p:pic>
+      <p:sp>
+        <p:nvSpPr>
+          <p:cNvPr id="11" name="Text 7"/>
+          <p:cNvSpPr txBox="1"/>
+          <p:nvPr/>
+        </p:nvSpPr>
+        <p:spPr>
+          <a:xfrm>
+            <a:off x="4565904" y="2514600"/>
+            <a:ext cx="3057144" cy="507492"/>
+          </a:xfrm>
+          <a:prstGeom prst="rect">
+            <a:avLst/>
+          </a:prstGeom>
+          <a:noFill/>
+          <a:ln/>
+        </p:spPr>
+        <p:txBody>
+          <a:bodyPr wrap="square" lIns="0" tIns="0" rIns="0" bIns="0" rtlCol="0" anchor="t"/>
+          <a:lstStyle/>
+          <a:p>
+            <a:pPr marL="0" indent="0">
+              <a:buNone/>
+            </a:pPr>
+            <a:r>
+              <a:rPr lang="en-US" sz="2600" b="1" dirty="0">
+                <a:solidFill>
+                  <a:srgbClr val="1A5C2C"/>
+                </a:solidFill>
+                <a:latin typeface="Cambria" pitchFamily="34" charset="0"/>
+                <a:ea typeface="Cambria" pitchFamily="34" charset="-122"/>
+                <a:cs typeface="Cambria" pitchFamily="34" charset="-120"/>
+              </a:rPr>
+              <a:t>Operational</a:t>
+            </a:r>
+            <a:endParaRPr lang="en-US" sz="2600" dirty="0"/>
+          </a:p>
+        </p:txBody>
+      </p:sp>
+      <p:sp>
+        <p:nvSpPr>
+          <p:cNvPr id="12" name="Text 8"/>
+          <p:cNvSpPr txBox="1"/>
+          <p:nvPr/>
+        </p:nvSpPr>
+        <p:spPr>
+          <a:xfrm>
+            <a:off x="4565904" y="3159252"/>
+            <a:ext cx="3057144" cy="2144268"/>
+          </a:xfrm>
+          <a:prstGeom prst="rect">
+            <a:avLst/>
+          </a:prstGeom>
+          <a:noFill/>
+          <a:ln/>
+        </p:spPr>
+        <p:txBody>
+          <a:bodyPr wrap="square" lIns="0" tIns="0" rIns="0" bIns="0" rtlCol="0" anchor="t"/>
+          <a:lstStyle/>
+          <a:p>
+            <a:pPr marL="0" indent="0">
+              <a:buNone/>
+            </a:pPr>
+            <a:r>
+              <a:rPr lang="en-US" sz="2400" dirty="0">
+                <a:solidFill>
+                  <a:srgbClr val="1F2A22"/>
+                </a:solidFill>
+                <a:latin typeface="Calibri" pitchFamily="34" charset="0"/>
+                <a:ea typeface="Calibri" pitchFamily="34" charset="-122"/>
+                <a:cs typeface="Calibri" pitchFamily="34" charset="-120"/>
+              </a:rPr>
+              <a:t>KPIs: the operational engine at standard. 30–50% at most levels.</a:t>
+            </a:r>
+            <a:endParaRPr lang="en-US" sz="2400" dirty="0"/>
+          </a:p>
+        </p:txBody>
+      </p:sp>
+      <p:sp>
+        <p:nvSpPr>
+          <p:cNvPr id="13" name="Shape 9"/>
+          <p:cNvSpPr/>
+          <p:nvPr/>
+        </p:nvSpPr>
+        <p:spPr>
+          <a:xfrm>
+            <a:off x="8125968" y="1508760"/>
+            <a:ext cx="3514344" cy="3931920"/>
+          </a:xfrm>
+          <a:prstGeom prst="roundRect">
+            <a:avLst>
+              <a:gd name="adj" fmla="val 2602"/>
+            </a:avLst>
+          </a:prstGeom>
+          <a:solidFill>
+            <a:srgbClr val="EEF4EF"/>
+          </a:solidFill>
+          <a:ln w="12700">
+            <a:solidFill>
+              <a:srgbClr val="EEF4EF"/>
+            </a:solidFill>
+            <a:prstDash val="solid"/>
+          </a:ln>
+        </p:spPr>
+        <p:txBody>
+          <a:bodyPr/>
+          <a:lstStyle/>
+          <a:p>
+            <a:endParaRPr lang="en-ZA"/>
+          </a:p>
+        </p:txBody>
+      </p:sp>
+      <p:sp>
+        <p:nvSpPr>
+          <p:cNvPr id="14" name="Shape 10"/>
+          <p:cNvSpPr/>
+          <p:nvPr/>
+        </p:nvSpPr>
+        <p:spPr>
+          <a:xfrm>
+            <a:off x="8354568" y="1737360"/>
+            <a:ext cx="640080" cy="640080"/>
+          </a:xfrm>
+          <a:prstGeom prst="ellipse">
+            <a:avLst/>
+          </a:prstGeom>
+          <a:solidFill>
+            <a:srgbClr val="1A5C2C"/>
+          </a:solidFill>
+          <a:ln w="12700">
+            <a:solidFill>
+              <a:srgbClr val="1A5C2C"/>
+            </a:solidFill>
+            <a:prstDash val="solid"/>
+          </a:ln>
+        </p:spPr>
+        <p:txBody>
+          <a:bodyPr/>
+          <a:lstStyle/>
+          <a:p>
+            <a:endParaRPr lang="en-ZA"/>
+          </a:p>
+        </p:txBody>
+      </p:sp>
+      <p:pic>
+        <p:nvPicPr>
+          <p:cNvPr id="15" name="Image 2" descr="preencoded.png"/>
+          <p:cNvPicPr>
+            <a:picLocks noChangeAspect="1"/>
+          </p:cNvPicPr>
+          <p:nvPr/>
+        </p:nvPicPr>
+        <p:blipFill>
+          <a:blip r:embed="rId4"/>
+          <a:stretch>
+            <a:fillRect/>
+          </a:stretch>
+        </p:blipFill>
+        <p:spPr>
+          <a:xfrm>
+            <a:off x="8514588" y="1897380"/>
+            <a:ext cx="320040" cy="320040"/>
+          </a:xfrm>
+          <a:prstGeom prst="rect">
+            <a:avLst/>
+          </a:prstGeom>
+        </p:spPr>
+      </p:pic>
+      <p:sp>
+        <p:nvSpPr>
+          <p:cNvPr id="16" name="Text 11"/>
+          <p:cNvSpPr txBox="1"/>
+          <p:nvPr/>
+        </p:nvSpPr>
+        <p:spPr>
+          <a:xfrm>
+            <a:off x="8354568" y="2514600"/>
+            <a:ext cx="3057144" cy="507492"/>
+          </a:xfrm>
+          <a:prstGeom prst="rect">
+            <a:avLst/>
+          </a:prstGeom>
+          <a:noFill/>
+          <a:ln/>
+        </p:spPr>
+        <p:txBody>
+          <a:bodyPr wrap="square" lIns="0" tIns="0" rIns="0" bIns="0" rtlCol="0" anchor="t"/>
+          <a:lstStyle/>
+          <a:p>
+            <a:pPr marL="0" indent="0">
+              <a:buNone/>
+            </a:pPr>
+            <a:r>
+              <a:rPr lang="en-US" sz="2600" b="1" dirty="0">
+                <a:solidFill>
+                  <a:srgbClr val="1A5C2C"/>
+                </a:solidFill>
+                <a:latin typeface="Cambria" pitchFamily="34" charset="0"/>
+                <a:ea typeface="Cambria" pitchFamily="34" charset="-122"/>
+                <a:cs typeface="Cambria" pitchFamily="34" charset="-120"/>
+              </a:rPr>
+              <a:t>Behavioural</a:t>
+            </a:r>
+            <a:endParaRPr lang="en-US" sz="2600" dirty="0"/>
+          </a:p>
+        </p:txBody>
+      </p:sp>
+      <p:sp>
+        <p:nvSpPr>
+          <p:cNvPr id="17" name="Text 12"/>
+          <p:cNvSpPr txBox="1"/>
+          <p:nvPr/>
+        </p:nvSpPr>
+        <p:spPr>
+          <a:xfrm>
+            <a:off x="8354568" y="3159252"/>
+            <a:ext cx="3057144" cy="2144268"/>
+          </a:xfrm>
+          <a:prstGeom prst="rect">
+            <a:avLst/>
+          </a:prstGeom>
+          <a:noFill/>
+          <a:ln/>
+        </p:spPr>
+        <p:txBody>
+          <a:bodyPr wrap="square" lIns="0" tIns="0" rIns="0" bIns="0" rtlCol="0" anchor="t"/>
+          <a:lstStyle/>
+          <a:p>
+            <a:pPr marL="0" indent="0">
+              <a:buNone/>
+            </a:pPr>
+            <a:r>
+              <a:rPr lang="en-US" sz="2400" dirty="0">
+                <a:solidFill>
+                  <a:srgbClr val="1F2A22"/>
+                </a:solidFill>
+                <a:latin typeface="Calibri" pitchFamily="34" charset="0"/>
+                <a:ea typeface="Calibri" pitchFamily="34" charset="-122"/>
+                <a:cs typeface="Calibri" pitchFamily="34" charset="-120"/>
+              </a:rPr>
+              <a:t>Values and behaviours: how results are achieved. 20–40%.</a:t>
+            </a:r>
+            <a:endParaRPr lang="en-US" sz="2400" dirty="0"/>
+          </a:p>
+        </p:txBody>
+      </p:sp>
+      <p:sp>
+        <p:nvSpPr>
+          <p:cNvPr id="18" name="Shape 13"/>
+          <p:cNvSpPr/>
+          <p:nvPr/>
+        </p:nvSpPr>
+        <p:spPr>
+          <a:xfrm>
+            <a:off x="548640" y="5623560"/>
+            <a:ext cx="11091672" cy="777240"/>
+          </a:xfrm>
+          <a:prstGeom prst="roundRect">
+            <a:avLst>
+              <a:gd name="adj" fmla="val 11765"/>
+            </a:avLst>
+          </a:prstGeom>
+          <a:solidFill>
+            <a:srgbClr val="0F3B1C"/>
+          </a:solidFill>
+          <a:ln w="12700">
+            <a:solidFill>
+              <a:srgbClr val="0F3B1C"/>
+            </a:solidFill>
+            <a:prstDash val="solid"/>
+          </a:ln>
+        </p:spPr>
+        <p:txBody>
+          <a:bodyPr/>
+          <a:lstStyle/>
+          <a:p>
+            <a:endParaRPr lang="en-ZA"/>
+          </a:p>
+        </p:txBody>
+      </p:sp>
+      <p:sp>
+        <p:nvSpPr>
+          <p:cNvPr id="19" name="Text 14"/>
+          <p:cNvSpPr txBox="1"/>
+          <p:nvPr/>
+        </p:nvSpPr>
+        <p:spPr>
+          <a:xfrm>
+            <a:off x="822960" y="5623560"/>
+            <a:ext cx="10607040" cy="777240"/>
+          </a:xfrm>
+          <a:prstGeom prst="rect">
+            <a:avLst/>
+          </a:prstGeom>
+          <a:noFill/>
+          <a:ln/>
+        </p:spPr>
+        <p:txBody>
+          <a:bodyPr wrap="square" lIns="0" tIns="0" rIns="0" bIns="0" rtlCol="0" anchor="ctr"/>
+          <a:lstStyle/>
+          <a:p>
+            <a:pPr marL="0" indent="0">
+              <a:buNone/>
+            </a:pPr>
+            <a:r>
+              <a:rPr lang="en-US" sz="2400" i="1" dirty="0">
+                <a:solidFill>
+                  <a:srgbClr val="FFFFFF"/>
+                </a:solidFill>
+                <a:latin typeface="Calibri" pitchFamily="34" charset="0"/>
+                <a:ea typeface="Calibri" pitchFamily="34" charset="-122"/>
+                <a:cs typeface="Calibri" pitchFamily="34" charset="-120"/>
+              </a:rPr>
+              <a:t>How results are achieved matters as much as what results are achieved.</a:t>
+            </a:r>
+            <a:endParaRPr lang="en-US" sz="2400" dirty="0"/>
+          </a:p>
+        </p:txBody>
+      </p:sp>
+    </p:spTree>
+  </p:cSld>
+  <p:clrMapOvr>
+    <a:masterClrMapping/>
+  </p:clrMapOvr>
+</p:sld>
+</file>
+
+<file path=ppt/slides/slide22.xml><?xml version="1.0" encoding="utf-8"?>
+<p:sld xmlns:a="http://schemas.openxmlformats.org/drawingml/2006/main" xmlns:p="http://schemas.openxmlformats.org/presentationml/2006/main" xmlns:r="http://schemas.openxmlformats.org/officeDocument/2006/relationships">
+  <p:cSld>
+    <p:spTree>
+      <p:nvGrpSpPr>
+        <p:cNvPr id="1" name=""/>
+        <p:cNvGrpSpPr/>
+        <p:nvPr/>
+      </p:nvGrpSpPr>
+      <p:grpSpPr/>
+      <p:sp>
+        <p:nvSpPr>
+          <p:cNvPr id="2" name="Text 0"/>
+          <p:cNvSpPr txBox="1"/>
+          <p:nvPr/>
+        </p:nvSpPr>
+        <p:spPr>
+          <a:xfrm>
+            <a:off x="548640" y="411480"/>
+            <a:ext cx="11064240" cy="868680"/>
+          </a:xfrm>
+          <a:prstGeom prst="rect">
+            <a:avLst/>
+          </a:prstGeom>
+          <a:noFill/>
+          <a:ln/>
+        </p:spPr>
+        <p:txBody>
+          <a:bodyPr wrap="square" lIns="0" tIns="0" rIns="0" bIns="0" rtlCol="0" anchor="ctr"/>
+          <a:lstStyle/>
+          <a:p>
+            <a:pPr marL="0" indent="0">
+              <a:buNone/>
+            </a:pPr>
+            <a:r>
+              <a:rPr lang="en-US" sz="3400" b="1" dirty="0">
+                <a:solidFill>
+                  <a:srgbClr val="1A5C2C"/>
+                </a:solidFill>
+                <a:latin typeface="Cambria" pitchFamily="34" charset="0"/>
+                <a:ea typeface="Cambria" pitchFamily="34" charset="-122"/>
+                <a:cs typeface="Cambria" pitchFamily="34" charset="-120"/>
+              </a:rPr>
+              <a:t>2.3b · Developing a performance scorecard</a:t>
+            </a:r>
+            <a:endParaRPr lang="en-US" sz="3600" dirty="0"/>
+          </a:p>
+        </p:txBody>
+      </p:sp>
+      <p:sp>
+        <p:nvSpPr>
+          <p:cNvPr id="3" name="Shape 1"/>
+          <p:cNvSpPr/>
+          <p:nvPr/>
+        </p:nvSpPr>
+        <p:spPr>
+          <a:xfrm>
+            <a:off x="548640" y="1677924"/>
+            <a:ext cx="640080" cy="640080"/>
+          </a:xfrm>
+          <a:prstGeom prst="ellipse">
+            <a:avLst/>
+          </a:prstGeom>
+          <a:solidFill>
+            <a:srgbClr val="1A5C2C"/>
+          </a:solidFill>
+          <a:ln w="12700">
+            <a:solidFill>
+              <a:srgbClr val="1A5C2C"/>
+            </a:solidFill>
+            <a:prstDash val="solid"/>
+          </a:ln>
+        </p:spPr>
+        <p:txBody>
+          <a:bodyPr/>
+          <a:lstStyle/>
+          <a:p>
+            <a:endParaRPr lang="en-ZA"/>
+          </a:p>
+        </p:txBody>
+      </p:sp>
+      <p:pic>
+        <p:nvPicPr>
+          <p:cNvPr id="4" name="Image 0" descr="preencoded.png"/>
+          <p:cNvPicPr>
+            <a:picLocks noChangeAspect="1"/>
+          </p:cNvPicPr>
+          <p:nvPr/>
+        </p:nvPicPr>
+        <p:blipFill>
+          <a:blip r:embed="rId2"/>
+          <a:stretch>
+            <a:fillRect/>
+          </a:stretch>
+        </p:blipFill>
+        <p:spPr>
+          <a:xfrm>
+            <a:off x="708660" y="1837944"/>
+            <a:ext cx="320040" cy="320040"/>
+          </a:xfrm>
+          <a:prstGeom prst="rect">
+            <a:avLst/>
+          </a:prstGeom>
+        </p:spPr>
+      </p:pic>
+      <p:sp>
+        <p:nvSpPr>
+          <p:cNvPr id="5" name="Text 2"/>
+          <p:cNvSpPr txBox="1"/>
+          <p:nvPr/>
+        </p:nvSpPr>
+        <p:spPr>
+          <a:xfrm>
+            <a:off x="1508760" y="1508760"/>
+            <a:ext cx="10131552" cy="978408"/>
+          </a:xfrm>
+          <a:prstGeom prst="rect">
+            <a:avLst/>
+          </a:prstGeom>
+          <a:noFill/>
+          <a:ln/>
+        </p:spPr>
+        <p:txBody>
+          <a:bodyPr wrap="square" lIns="0" tIns="0" rIns="0" bIns="0" rtlCol="0" anchor="ctr"/>
+          <a:lstStyle/>
+          <a:p>
+            <a:pPr marL="0" indent="0">
+              <a:buNone/>
+            </a:pPr>
+            <a:r>
+              <a:rPr lang="en-US" sz="2600" b="1" dirty="0">
+                <a:solidFill>
+                  <a:srgbClr val="1A5C2C"/>
+                </a:solidFill>
+                <a:latin typeface="Cambria" pitchFamily="34" charset="0"/>
+                <a:ea typeface="Cambria" pitchFamily="34" charset="-122"/>
+                <a:cs typeface="Cambria" pitchFamily="34" charset="-120"/>
+              </a:rPr>
+              <a:t>1  </a:t>
+            </a:r>
+            <a:r>
+              <a:rPr lang="en-US" sz="2600" dirty="0">
+                <a:solidFill>
+                  <a:srgbClr val="1F2A22"/>
+                </a:solidFill>
+                <a:latin typeface="Calibri" pitchFamily="34" charset="0"/>
+                <a:ea typeface="Calibri" pitchFamily="34" charset="-122"/>
+                <a:cs typeface="Calibri" pitchFamily="34" charset="-120"/>
+              </a:rPr>
+              <a:t>Start from the enterprise Key Results</a:t>
+            </a:r>
+            <a:endParaRPr lang="en-US" sz="2600" dirty="0"/>
+          </a:p>
+        </p:txBody>
+      </p:sp>
+      <p:sp>
+        <p:nvSpPr>
+          <p:cNvPr id="6" name="Shape 3"/>
+          <p:cNvSpPr/>
+          <p:nvPr/>
+        </p:nvSpPr>
+        <p:spPr>
+          <a:xfrm>
+            <a:off x="548640" y="2656332"/>
+            <a:ext cx="640080" cy="640080"/>
+          </a:xfrm>
+          <a:prstGeom prst="ellipse">
+            <a:avLst/>
+          </a:prstGeom>
+          <a:solidFill>
+            <a:srgbClr val="1A5C2C"/>
+          </a:solidFill>
+          <a:ln w="12700">
+            <a:solidFill>
+              <a:srgbClr val="1A5C2C"/>
+            </a:solidFill>
+            <a:prstDash val="solid"/>
+          </a:ln>
+        </p:spPr>
+        <p:txBody>
+          <a:bodyPr/>
+          <a:lstStyle/>
+          <a:p>
+            <a:endParaRPr lang="en-ZA"/>
+          </a:p>
+        </p:txBody>
+      </p:sp>
+      <p:pic>
+        <p:nvPicPr>
+          <p:cNvPr id="7" name="Image 1" descr="preencoded.png"/>
+          <p:cNvPicPr>
+            <a:picLocks noChangeAspect="1"/>
+          </p:cNvPicPr>
+          <p:nvPr/>
+        </p:nvPicPr>
+        <p:blipFill>
+          <a:blip r:embed="rId6"/>
+          <a:stretch>
+            <a:fillRect/>
+          </a:stretch>
+        </p:blipFill>
+        <p:spPr>
+          <a:xfrm>
+            <a:off x="708660" y="2816352"/>
+            <a:ext cx="320040" cy="320040"/>
+          </a:xfrm>
+          <a:prstGeom prst="rect">
+            <a:avLst/>
+          </a:prstGeom>
+        </p:spPr>
+      </p:pic>
+      <p:sp>
+        <p:nvSpPr>
+          <p:cNvPr id="8" name="Text 4"/>
+          <p:cNvSpPr txBox="1"/>
+          <p:nvPr/>
+        </p:nvSpPr>
+        <p:spPr>
+          <a:xfrm>
+            <a:off x="1508760" y="2487168"/>
+            <a:ext cx="10131552" cy="978408"/>
+          </a:xfrm>
+          <a:prstGeom prst="rect">
+            <a:avLst/>
+          </a:prstGeom>
+          <a:noFill/>
+          <a:ln/>
+        </p:spPr>
+        <p:txBody>
+          <a:bodyPr wrap="square" lIns="0" tIns="0" rIns="0" bIns="0" rtlCol="0" anchor="ctr"/>
+          <a:lstStyle/>
+          <a:p>
+            <a:pPr marL="0" indent="0">
+              <a:buNone/>
+            </a:pPr>
+            <a:r>
+              <a:rPr lang="en-US" sz="2600" b="1" dirty="0">
+                <a:solidFill>
+                  <a:srgbClr val="1A5C2C"/>
+                </a:solidFill>
+                <a:latin typeface="Cambria" pitchFamily="34" charset="0"/>
+                <a:ea typeface="Cambria" pitchFamily="34" charset="-122"/>
+                <a:cs typeface="Cambria" pitchFamily="34" charset="-120"/>
+              </a:rPr>
+              <a:t>2  </a:t>
+            </a:r>
+            <a:r>
+              <a:rPr lang="en-US" sz="2600" dirty="0">
+                <a:solidFill>
+                  <a:srgbClr val="1F2A22"/>
+                </a:solidFill>
+                <a:latin typeface="Calibri" pitchFamily="34" charset="0"/>
+                <a:ea typeface="Calibri" pitchFamily="34" charset="-122"/>
+                <a:cs typeface="Calibri" pitchFamily="34" charset="-120"/>
+              </a:rPr>
+              <a:t>Add the Operational KPIs</a:t>
+            </a:r>
+            <a:endParaRPr lang="en-US" sz="2600" dirty="0"/>
+          </a:p>
+        </p:txBody>
+      </p:sp>
+      <p:sp>
+        <p:nvSpPr>
+          <p:cNvPr id="9" name="Shape 5"/>
+          <p:cNvSpPr/>
+          <p:nvPr/>
+        </p:nvSpPr>
+        <p:spPr>
+          <a:xfrm>
+            <a:off x="548640" y="3634740"/>
+            <a:ext cx="640080" cy="640080"/>
+          </a:xfrm>
+          <a:prstGeom prst="ellipse">
+            <a:avLst/>
+          </a:prstGeom>
+          <a:solidFill>
+            <a:srgbClr val="1A5C2C"/>
+          </a:solidFill>
+          <a:ln w="12700">
+            <a:solidFill>
+              <a:srgbClr val="1A5C2C"/>
+            </a:solidFill>
+            <a:prstDash val="solid"/>
+          </a:ln>
+        </p:spPr>
+        <p:txBody>
+          <a:bodyPr/>
+          <a:lstStyle/>
+          <a:p>
+            <a:endParaRPr lang="en-ZA"/>
+          </a:p>
+        </p:txBody>
+      </p:sp>
+      <p:pic>
+        <p:nvPicPr>
+          <p:cNvPr id="10" name="Image 2" descr="preencoded.png"/>
+          <p:cNvPicPr>
+            <a:picLocks noChangeAspect="1"/>
+          </p:cNvPicPr>
+          <p:nvPr/>
+        </p:nvPicPr>
+        <p:blipFill>
+          <a:blip r:embed="rId5"/>
+          <a:stretch>
+            <a:fillRect/>
+          </a:stretch>
+        </p:blipFill>
+        <p:spPr>
+          <a:xfrm>
+            <a:off x="708660" y="3794760"/>
+            <a:ext cx="320040" cy="320040"/>
+          </a:xfrm>
+          <a:prstGeom prst="rect">
+            <a:avLst/>
+          </a:prstGeom>
+        </p:spPr>
+      </p:pic>
+      <p:sp>
+        <p:nvSpPr>
+          <p:cNvPr id="11" name="Text 6"/>
+          <p:cNvSpPr txBox="1"/>
+          <p:nvPr/>
+        </p:nvSpPr>
+        <p:spPr>
+          <a:xfrm>
+            <a:off x="1508760" y="3465576"/>
+            <a:ext cx="10131552" cy="978408"/>
+          </a:xfrm>
+          <a:prstGeom prst="rect">
+            <a:avLst/>
+          </a:prstGeom>
+          <a:noFill/>
+          <a:ln/>
+        </p:spPr>
+        <p:txBody>
+          <a:bodyPr wrap="square" lIns="0" tIns="0" rIns="0" bIns="0" rtlCol="0" anchor="ctr"/>
+          <a:lstStyle/>
+          <a:p>
+            <a:pPr marL="0" indent="0">
+              <a:buNone/>
+            </a:pPr>
+            <a:r>
+              <a:rPr lang="en-US" sz="2600" b="1" dirty="0">
+                <a:solidFill>
+                  <a:srgbClr val="1A5C2C"/>
+                </a:solidFill>
+                <a:latin typeface="Cambria" pitchFamily="34" charset="0"/>
+                <a:ea typeface="Cambria" pitchFamily="34" charset="-122"/>
+                <a:cs typeface="Cambria" pitchFamily="34" charset="-120"/>
+              </a:rPr>
+              <a:t>3  </a:t>
+            </a:r>
+            <a:r>
+              <a:rPr lang="en-US" sz="2600" dirty="0">
+                <a:solidFill>
+                  <a:srgbClr val="1F2A22"/>
+                </a:solidFill>
+                <a:latin typeface="Calibri" pitchFamily="34" charset="0"/>
+                <a:ea typeface="Calibri" pitchFamily="34" charset="-122"/>
+                <a:cs typeface="Calibri" pitchFamily="34" charset="-120"/>
+              </a:rPr>
+              <a:t>Add the Behavioural measures</a:t>
+            </a:r>
+            <a:endParaRPr lang="en-US" sz="2600" dirty="0"/>
+          </a:p>
+        </p:txBody>
+      </p:sp>
+      <p:sp>
+        <p:nvSpPr>
+          <p:cNvPr id="12" name="Shape 7"/>
+          <p:cNvSpPr/>
+          <p:nvPr/>
+        </p:nvSpPr>
+        <p:spPr>
+          <a:xfrm>
+            <a:off x="548640" y="4613148"/>
+            <a:ext cx="640080" cy="640080"/>
+          </a:xfrm>
+          <a:prstGeom prst="ellipse">
+            <a:avLst/>
+          </a:prstGeom>
+          <a:solidFill>
+            <a:srgbClr val="1A5C2C"/>
+          </a:solidFill>
+          <a:ln w="12700">
+            <a:solidFill>
+              <a:srgbClr val="1A5C2C"/>
+            </a:solidFill>
+            <a:prstDash val="solid"/>
+          </a:ln>
+        </p:spPr>
+        <p:txBody>
+          <a:bodyPr/>
+          <a:lstStyle/>
+          <a:p>
+            <a:endParaRPr lang="en-ZA"/>
+          </a:p>
+        </p:txBody>
+      </p:sp>
+      <p:pic>
+        <p:nvPicPr>
+          <p:cNvPr id="13" name="Image 3" descr="preencoded.png"/>
+          <p:cNvPicPr>
+            <a:picLocks noChangeAspect="1"/>
+          </p:cNvPicPr>
+          <p:nvPr/>
+        </p:nvPicPr>
+        <p:blipFill>
+          <a:blip r:embed="rId4"/>
+          <a:stretch>
+            <a:fillRect/>
+          </a:stretch>
+        </p:blipFill>
+        <p:spPr>
+          <a:xfrm>
+            <a:off x="708660" y="4773168"/>
+            <a:ext cx="320040" cy="320040"/>
+          </a:xfrm>
+          <a:prstGeom prst="rect">
+            <a:avLst/>
+          </a:prstGeom>
+        </p:spPr>
+      </p:pic>
+      <p:sp>
+        <p:nvSpPr>
+          <p:cNvPr id="14" name="Text 8"/>
+          <p:cNvSpPr txBox="1"/>
+          <p:nvPr/>
+        </p:nvSpPr>
+        <p:spPr>
+          <a:xfrm>
+            <a:off x="1508760" y="4443984"/>
+            <a:ext cx="10131552" cy="978408"/>
+          </a:xfrm>
+          <a:prstGeom prst="rect">
+            <a:avLst/>
+          </a:prstGeom>
+          <a:noFill/>
+          <a:ln/>
+        </p:spPr>
+        <p:txBody>
+          <a:bodyPr wrap="square" lIns="0" tIns="0" rIns="0" bIns="0" rtlCol="0" anchor="ctr"/>
+          <a:lstStyle/>
+          <a:p>
+            <a:pPr marL="0" indent="0">
+              <a:buNone/>
+            </a:pPr>
+            <a:r>
+              <a:rPr lang="en-US" sz="2600" b="1" dirty="0">
+                <a:solidFill>
+                  <a:srgbClr val="1A5C2C"/>
+                </a:solidFill>
+                <a:latin typeface="Cambria" pitchFamily="34" charset="0"/>
+                <a:ea typeface="Cambria" pitchFamily="34" charset="-122"/>
+                <a:cs typeface="Cambria" pitchFamily="34" charset="-120"/>
+              </a:rPr>
+              <a:t>4  </a:t>
+            </a:r>
+            <a:r>
+              <a:rPr lang="en-US" sz="2600" dirty="0">
+                <a:solidFill>
+                  <a:srgbClr val="1F2A22"/>
+                </a:solidFill>
+                <a:latin typeface="Calibri" pitchFamily="34" charset="0"/>
+                <a:ea typeface="Calibri" pitchFamily="34" charset="-122"/>
+                <a:cs typeface="Calibri" pitchFamily="34" charset="-120"/>
+              </a:rPr>
+              <a:t>Weight the three categories to 100%</a:t>
+            </a:r>
+            <a:endParaRPr lang="en-US" sz="2600" dirty="0"/>
+          </a:p>
+        </p:txBody>
+      </p:sp>
+      <p:sp>
+        <p:nvSpPr>
+          <p:cNvPr id="15" name="Shape 9"/>
+          <p:cNvSpPr/>
+          <p:nvPr/>
+        </p:nvSpPr>
+        <p:spPr>
+          <a:xfrm>
+            <a:off x="548640" y="5591556"/>
+            <a:ext cx="640080" cy="640080"/>
+          </a:xfrm>
+          <a:prstGeom prst="ellipse">
+            <a:avLst/>
+          </a:prstGeom>
+          <a:solidFill>
+            <a:srgbClr val="1A5C2C"/>
+          </a:solidFill>
+          <a:ln w="12700">
+            <a:solidFill>
+              <a:srgbClr val="1A5C2C"/>
+            </a:solidFill>
+            <a:prstDash val="solid"/>
+          </a:ln>
+        </p:spPr>
+        <p:txBody>
+          <a:bodyPr/>
+          <a:lstStyle/>
+          <a:p>
+            <a:endParaRPr lang="en-ZA"/>
+          </a:p>
+        </p:txBody>
+      </p:sp>
+      <p:pic>
+        <p:nvPicPr>
+          <p:cNvPr id="16" name="Image 4" descr="preencoded.png"/>
+          <p:cNvPicPr>
+            <a:picLocks noChangeAspect="1"/>
+          </p:cNvPicPr>
+          <p:nvPr/>
+        </p:nvPicPr>
+        <p:blipFill>
+          <a:blip r:embed="rId3"/>
+          <a:stretch>
+            <a:fillRect/>
+          </a:stretch>
+        </p:blipFill>
+        <p:spPr>
+          <a:xfrm>
+            <a:off x="708660" y="5751576"/>
+            <a:ext cx="320040" cy="320040"/>
+          </a:xfrm>
+          <a:prstGeom prst="rect">
+            <a:avLst/>
+          </a:prstGeom>
+        </p:spPr>
+      </p:pic>
+      <p:sp>
+        <p:nvSpPr>
+          <p:cNvPr id="17" name="Text 10"/>
+          <p:cNvSpPr txBox="1"/>
+          <p:nvPr/>
+        </p:nvSpPr>
+        <p:spPr>
+          <a:xfrm>
+            <a:off x="1508760" y="5422392"/>
+            <a:ext cx="10131552" cy="978408"/>
+          </a:xfrm>
+          <a:prstGeom prst="rect">
+            <a:avLst/>
+          </a:prstGeom>
+          <a:noFill/>
+          <a:ln/>
+        </p:spPr>
+        <p:txBody>
+          <a:bodyPr wrap="square" lIns="0" tIns="0" rIns="0" bIns="0" rtlCol="0" anchor="ctr"/>
+          <a:lstStyle/>
+          <a:p>
+            <a:pPr marL="0" indent="0">
+              <a:buNone/>
+            </a:pPr>
+            <a:r>
+              <a:rPr lang="en-US" sz="2600" b="1" dirty="0">
+                <a:solidFill>
+                  <a:srgbClr val="1A5C2C"/>
+                </a:solidFill>
+                <a:latin typeface="Cambria" pitchFamily="34" charset="0"/>
+                <a:ea typeface="Cambria" pitchFamily="34" charset="-122"/>
+                <a:cs typeface="Cambria" pitchFamily="34" charset="-120"/>
+              </a:rPr>
+              <a:t>5  </a:t>
+            </a:r>
+            <a:r>
+              <a:rPr lang="en-US" sz="2600" dirty="0">
+                <a:solidFill>
+                  <a:srgbClr val="1F2A22"/>
+                </a:solidFill>
+                <a:latin typeface="Calibri" pitchFamily="34" charset="0"/>
+                <a:ea typeface="Calibri" pitchFamily="34" charset="-122"/>
+                <a:cs typeface="Calibri" pitchFamily="34" charset="-120"/>
+              </a:rPr>
+              <a:t>Make it transparent to the role holder</a:t>
+            </a:r>
+            <a:endParaRPr lang="en-US" sz="2600" dirty="0"/>
+          </a:p>
+        </p:txBody>
+      </p:sp>
+    </p:spTree>
+  </p:cSld>
+  <p:clrMapOvr>
+    <a:masterClrMapping/>
+  </p:clrMapOvr>
+</p:sld>
+</file>
+
+<file path=ppt/slides/slide23.xml><?xml version="1.0" encoding="utf-8"?>
 <p:sld xmlns:a="http://schemas.openxmlformats.org/drawingml/2006/main" xmlns:r="http://schemas.openxmlformats.org/officeDocument/2006/relationships" xmlns:p="http://schemas.openxmlformats.org/presentationml/2006/main">
   <p:cSld name="Slide 15">
     <p:bg>
@@ -15370,7 +17287,7 @@
 </p:sld>
 </file>
 
-<file path=ppt/slides/slide22.xml><?xml version="1.0" encoding="utf-8"?>
+<file path=ppt/slides/slide24.xml><?xml version="1.0" encoding="utf-8"?>
 <p:sld xmlns:a="http://schemas.openxmlformats.org/drawingml/2006/main" xmlns:r="http://schemas.openxmlformats.org/officeDocument/2006/relationships" xmlns:p="http://schemas.openxmlformats.org/presentationml/2006/main">
   <p:cSld name="Slide 16">
     <p:bg>
@@ -15528,7 +17445,7 @@
 </p:sld>
 </file>
 
-<file path=ppt/slides/slide23.xml><?xml version="1.0" encoding="utf-8"?>
+<file path=ppt/slides/slide25.xml><?xml version="1.0" encoding="utf-8"?>
 <p:sld xmlns:a="http://schemas.openxmlformats.org/drawingml/2006/main" xmlns:p="http://schemas.openxmlformats.org/presentationml/2006/main" xmlns:r="http://schemas.openxmlformats.org/officeDocument/2006/relationships">
   <p:cSld>
     <p:bg>
@@ -16653,7 +18570,7 @@
 </p:sld>
 </file>
 
-<file path=ppt/slides/slide24.xml><?xml version="1.0" encoding="utf-8"?>
+<file path=ppt/slides/slide26.xml><?xml version="1.0" encoding="utf-8"?>
 <p:sld xmlns:a="http://schemas.openxmlformats.org/drawingml/2006/main" xmlns:r="http://schemas.openxmlformats.org/officeDocument/2006/relationships" xmlns:p="http://schemas.openxmlformats.org/presentationml/2006/main">
   <p:cSld name="Slide 19">
     <p:bg>
@@ -17142,587 +19059,6 @@
                 <a:cs typeface="Calibri" pitchFamily="34" charset="-120"/>
               </a:rPr>
               <a:t>From Individual to Team Performance</a:t>
-            </a:r>
-            <a:endParaRPr lang="en-US" sz="2400" dirty="0"/>
-          </a:p>
-        </p:txBody>
-      </p:sp>
-    </p:spTree>
-  </p:cSld>
-  <p:clrMapOvr>
-    <a:masterClrMapping/>
-  </p:clrMapOvr>
-</p:sld>
-</file>
-
-<file path=ppt/slides/slide25.xml><?xml version="1.0" encoding="utf-8"?>
-<p:sld xmlns:a="http://schemas.openxmlformats.org/drawingml/2006/main" xmlns:p="http://schemas.openxmlformats.org/presentationml/2006/main" xmlns:r="http://schemas.openxmlformats.org/officeDocument/2006/relationships">
-  <p:cSld>
-    <p:bg>
-      <p:bgPr>
-        <a:solidFill>
-          <a:srgbClr val="FFFFFF"/>
-        </a:solidFill>
-        <a:effectLst/>
-      </p:bgPr>
-    </p:bg>
-    <p:spTree>
-      <p:nvGrpSpPr>
-        <p:cNvPr id="1" name=""/>
-        <p:cNvGrpSpPr/>
-        <p:nvPr/>
-      </p:nvGrpSpPr>
-      <p:grpSpPr/>
-      <p:sp>
-        <p:nvSpPr>
-          <p:cNvPr id="2" name="Text 0"/>
-          <p:cNvSpPr txBox="1"/>
-          <p:nvPr/>
-        </p:nvSpPr>
-        <p:spPr>
-          <a:xfrm>
-            <a:off x="548640" y="411480"/>
-            <a:ext cx="11064240" cy="868680"/>
-          </a:xfrm>
-          <a:prstGeom prst="rect">
-            <a:avLst/>
-          </a:prstGeom>
-          <a:noFill/>
-          <a:ln/>
-        </p:spPr>
-        <p:txBody>
-          <a:bodyPr wrap="square" lIns="0" tIns="0" rIns="0" bIns="0" rtlCol="0" anchor="ctr"/>
-          <a:lstStyle/>
-          <a:p>
-            <a:pPr marL="0" marR="0" lvl="0" indent="0" algn="l" defTabSz="914400" rtl="0" eaLnBrk="1" fontAlgn="auto" latinLnBrk="0" hangingPunct="1">
-              <a:lnSpc>
-                <a:spcPct val="100000"/>
-              </a:lnSpc>
-              <a:spcBef>
-                <a:spcPts val="0"/>
-              </a:spcBef>
-              <a:spcAft>
-                <a:spcPts val="0"/>
-              </a:spcAft>
-              <a:buClrTx/>
-              <a:buSzTx/>
-              <a:buFontTx/>
-              <a:buNone/>
-              <a:tabLst/>
-              <a:defRPr/>
-            </a:pPr>
-            <a:r>
-              <a:rPr kumimoji="0" lang="en-US" sz="3600" b="1" i="0" u="none" strike="noStrike" kern="1200" cap="none" spc="0" normalizeH="0" baseline="0" noProof="0" dirty="0">
-                <a:ln>
-                  <a:noFill/>
-                </a:ln>
-                <a:solidFill>
-                  <a:srgbClr val="1A5C2C"/>
-                </a:solidFill>
-                <a:effectLst/>
-                <a:uLnTx/>
-                <a:uFillTx/>
-                <a:latin typeface="Cambria" pitchFamily="34" charset="0"/>
-                <a:ea typeface="Cambria" pitchFamily="34" charset="-122"/>
-                <a:cs typeface="Cambria" pitchFamily="34" charset="-120"/>
-              </a:rPr>
-              <a:t>Section 3 Reflections</a:t>
-            </a:r>
-            <a:endParaRPr kumimoji="0" lang="en-US" sz="3600" b="0" i="0" u="none" strike="noStrike" kern="1200" cap="none" spc="0" normalizeH="0" baseline="0" noProof="0" dirty="0">
-              <a:ln>
-                <a:noFill/>
-              </a:ln>
-              <a:solidFill>
-                <a:prstClr val="black"/>
-              </a:solidFill>
-              <a:effectLst/>
-              <a:uLnTx/>
-              <a:uFillTx/>
-              <a:latin typeface="Calibri" panose="020F0502020204030204"/>
-              <a:ea typeface="+mn-ea"/>
-              <a:cs typeface="+mn-cs"/>
-            </a:endParaRPr>
-          </a:p>
-        </p:txBody>
-      </p:sp>
-      <p:pic>
-        <p:nvPicPr>
-          <p:cNvPr id="3" name="Reflection 3.2" descr="ref_3.2.png"/>
-          <p:cNvPicPr>
-            <a:picLocks noChangeAspect="1"/>
-          </p:cNvPicPr>
-          <p:nvPr/>
-        </p:nvPicPr>
-        <p:blipFill>
-          <a:blip r:embed="rId4"/>
-          <a:stretch>
-            <a:fillRect/>
-          </a:stretch>
-        </p:blipFill>
-        <p:spPr>
-          <a:xfrm>
-            <a:off x="1691640" y="1463040"/>
-            <a:ext cx="10058400" cy="1066363"/>
-          </a:xfrm>
-          <a:prstGeom prst="rect">
-            <a:avLst/>
-          </a:prstGeom>
-        </p:spPr>
-      </p:pic>
-      <p:sp>
-        <p:nvSpPr>
-          <p:cNvPr id="4" name="Part 3.2"/>
-          <p:cNvSpPr/>
-          <p:nvPr/>
-        </p:nvSpPr>
-        <p:spPr>
-          <a:xfrm>
-            <a:off x="548640" y="1561881"/>
-            <a:ext cx="868680" cy="868680"/>
-          </a:xfrm>
-          <a:prstGeom prst="ellipse">
-            <a:avLst/>
-          </a:prstGeom>
-          <a:solidFill>
-            <a:srgbClr val="C6A24C"/>
-          </a:solidFill>
-          <a:ln>
-            <a:solidFill>
-              <a:srgbClr val="C6A24C"/>
-            </a:solidFill>
-          </a:ln>
-          <a:effectLst/>
-        </p:spPr>
-        <p:txBody>
-          <a:bodyPr wrap="none" lIns="0" tIns="0" rIns="0" bIns="0" rtlCol="0" anchor="ctr"/>
-          <a:lstStyle/>
-          <a:p>
-            <a:pPr algn="ctr"/>
-            <a:r>
-              <a:rPr lang="en-GB" sz="2400" b="1">
-                <a:solidFill>
-                  <a:srgbClr val="FFFFFF"/>
-                </a:solidFill>
-                <a:latin typeface="Calibri"/>
-              </a:rPr>
-              <a:t>3.2</a:t>
-            </a:r>
-          </a:p>
-        </p:txBody>
-      </p:sp>
-    </p:spTree>
-  </p:cSld>
-  <p:clrMapOvr>
-    <a:masterClrMapping/>
-  </p:clrMapOvr>
-</p:sld>
-</file>
-
-<file path=ppt/slides/slide26.xml><?xml version="1.0" encoding="utf-8"?>
-<p:sld xmlns:a="http://schemas.openxmlformats.org/drawingml/2006/main" xmlns:r="http://schemas.openxmlformats.org/officeDocument/2006/relationships" xmlns:p="http://schemas.openxmlformats.org/presentationml/2006/main">
-  <p:cSld name="Slide 20">
-    <p:bg>
-      <p:bgPr>
-        <a:solidFill>
-          <a:srgbClr val="1A5C2C"/>
-        </a:solidFill>
-        <a:effectLst/>
-      </p:bgPr>
-    </p:bg>
-    <p:spTree>
-      <p:nvGrpSpPr>
-        <p:cNvPr id="1" name=""/>
-        <p:cNvGrpSpPr/>
-        <p:nvPr/>
-      </p:nvGrpSpPr>
-      <p:grpSpPr>
-        <a:xfrm>
-          <a:off x="0" y="0"/>
-          <a:ext cx="0" cy="0"/>
-          <a:chOff x="0" y="0"/>
-          <a:chExt cx="0" cy="0"/>
-        </a:xfrm>
-      </p:grpSpPr>
-      <p:sp>
-        <p:nvSpPr>
-          <p:cNvPr id="2" name="Text 0"/>
-          <p:cNvSpPr txBox="1"/>
-          <p:nvPr/>
-        </p:nvSpPr>
-        <p:spPr>
-          <a:xfrm>
-            <a:off x="457200" y="822960"/>
-            <a:ext cx="2103120" cy="2194560"/>
-          </a:xfrm>
-          <a:prstGeom prst="rect">
-            <a:avLst/>
-          </a:prstGeom>
-          <a:noFill/>
-          <a:ln/>
-        </p:spPr>
-        <p:txBody>
-          <a:bodyPr wrap="square" lIns="0" tIns="0" rIns="0" bIns="0" rtlCol="0" anchor="t"/>
-          <a:lstStyle/>
-          <a:p>
-            <a:pPr marL="0" indent="0">
-              <a:buNone/>
-            </a:pPr>
-            <a:r>
-              <a:rPr lang="en-US" sz="15000" b="1" dirty="0">
-                <a:solidFill>
-                  <a:srgbClr val="C6A24C"/>
-                </a:solidFill>
-                <a:latin typeface="Cambria" pitchFamily="34" charset="0"/>
-                <a:ea typeface="Cambria" pitchFamily="34" charset="-122"/>
-                <a:cs typeface="Cambria" pitchFamily="34" charset="-120"/>
-              </a:rPr>
-              <a:t>4</a:t>
-            </a:r>
-            <a:endParaRPr lang="en-US" sz="15000" dirty="0"/>
-          </a:p>
-        </p:txBody>
-      </p:sp>
-      <p:sp>
-        <p:nvSpPr>
-          <p:cNvPr id="3" name="Text 1"/>
-          <p:cNvSpPr txBox="1"/>
-          <p:nvPr/>
-        </p:nvSpPr>
-        <p:spPr>
-          <a:xfrm>
-            <a:off x="2743200" y="914400"/>
-            <a:ext cx="8229600" cy="457200"/>
-          </a:xfrm>
-          <a:prstGeom prst="rect">
-            <a:avLst/>
-          </a:prstGeom>
-          <a:noFill/>
-          <a:ln/>
-        </p:spPr>
-        <p:txBody>
-          <a:bodyPr wrap="square" lIns="0" tIns="0" rIns="0" bIns="0" rtlCol="0" anchor="t"/>
-          <a:lstStyle/>
-          <a:p>
-            <a:pPr marL="0" indent="0">
-              <a:buNone/>
-            </a:pPr>
-            <a:r>
-              <a:rPr lang="en-US" sz="2400" b="1" dirty="0">
-                <a:solidFill>
-                  <a:srgbClr val="E6D3A0"/>
-                </a:solidFill>
-                <a:latin typeface="Calibri" pitchFamily="34" charset="0"/>
-                <a:ea typeface="Calibri" pitchFamily="34" charset="-122"/>
-                <a:cs typeface="Calibri" pitchFamily="34" charset="-120"/>
-              </a:rPr>
-              <a:t>Section 4</a:t>
-            </a:r>
-            <a:endParaRPr lang="en-US" sz="2400" dirty="0"/>
-          </a:p>
-        </p:txBody>
-      </p:sp>
-      <p:sp>
-        <p:nvSpPr>
-          <p:cNvPr id="4" name="Text 2"/>
-          <p:cNvSpPr txBox="1"/>
-          <p:nvPr/>
-        </p:nvSpPr>
-        <p:spPr>
-          <a:xfrm>
-            <a:off x="2743200" y="1371600"/>
-            <a:ext cx="8961120" cy="868680"/>
-          </a:xfrm>
-          <a:prstGeom prst="rect">
-            <a:avLst/>
-          </a:prstGeom>
-          <a:noFill/>
-          <a:ln/>
-        </p:spPr>
-        <p:txBody>
-          <a:bodyPr wrap="square" lIns="0" tIns="0" rIns="0" bIns="0" rtlCol="0" anchor="t"/>
-          <a:lstStyle/>
-          <a:p>
-            <a:pPr marL="0" indent="0">
-              <a:buNone/>
-            </a:pPr>
-            <a:r>
-              <a:rPr lang="en-US" sz="4400" b="1" dirty="0">
-                <a:solidFill>
-                  <a:srgbClr val="FFFFFF"/>
-                </a:solidFill>
-                <a:latin typeface="Cambria" pitchFamily="34" charset="0"/>
-                <a:ea typeface="Cambria" pitchFamily="34" charset="-122"/>
-                <a:cs typeface="Cambria" pitchFamily="34" charset="-120"/>
-              </a:rPr>
-              <a:t>Integration — Collective</a:t>
-            </a:r>
-            <a:endParaRPr lang="en-US" sz="4400" dirty="0"/>
-          </a:p>
-        </p:txBody>
-      </p:sp>
-      <p:sp>
-        <p:nvSpPr>
-          <p:cNvPr id="5" name="Text 3"/>
-          <p:cNvSpPr txBox="1"/>
-          <p:nvPr/>
-        </p:nvSpPr>
-        <p:spPr>
-          <a:xfrm>
-            <a:off x="2743200" y="2240280"/>
-            <a:ext cx="8961120" cy="868680"/>
-          </a:xfrm>
-          <a:prstGeom prst="rect">
-            <a:avLst/>
-          </a:prstGeom>
-          <a:noFill/>
-          <a:ln/>
-        </p:spPr>
-        <p:txBody>
-          <a:bodyPr wrap="square" lIns="0" tIns="0" rIns="0" bIns="0" rtlCol="0" anchor="t"/>
-          <a:lstStyle/>
-          <a:p>
-            <a:pPr marL="0" indent="0">
-              <a:buNone/>
-            </a:pPr>
-            <a:r>
-              <a:rPr lang="en-US" sz="2600" i="1" dirty="0">
-                <a:solidFill>
-                  <a:srgbClr val="DDE8DF"/>
-                </a:solidFill>
-                <a:latin typeface="Calibri" pitchFamily="34" charset="0"/>
-                <a:ea typeface="Calibri" pitchFamily="34" charset="-122"/>
-                <a:cs typeface="Calibri" pitchFamily="34" charset="-120"/>
-              </a:rPr>
-              <a:t>Integration of Human and Organisational Performance</a:t>
-            </a:r>
-            <a:endParaRPr lang="en-US" sz="2600" dirty="0"/>
-          </a:p>
-        </p:txBody>
-      </p:sp>
-      <p:sp>
-        <p:nvSpPr>
-          <p:cNvPr id="6" name="Text 4"/>
-          <p:cNvSpPr txBox="1"/>
-          <p:nvPr/>
-        </p:nvSpPr>
-        <p:spPr>
-          <a:xfrm>
-            <a:off x="2743200" y="3246120"/>
-            <a:ext cx="8229600" cy="457200"/>
-          </a:xfrm>
-          <a:prstGeom prst="rect">
-            <a:avLst/>
-          </a:prstGeom>
-          <a:noFill/>
-          <a:ln/>
-        </p:spPr>
-        <p:txBody>
-          <a:bodyPr wrap="square" lIns="0" tIns="0" rIns="0" bIns="0" rtlCol="0" anchor="t"/>
-          <a:lstStyle/>
-          <a:p>
-            <a:pPr marL="0" indent="0">
-              <a:buNone/>
-            </a:pPr>
-            <a:r>
-              <a:rPr lang="en-US" sz="2400" b="1" dirty="0">
-                <a:solidFill>
-                  <a:srgbClr val="C6A24C"/>
-                </a:solidFill>
-                <a:latin typeface="Calibri" pitchFamily="34" charset="0"/>
-                <a:ea typeface="Calibri" pitchFamily="34" charset="-122"/>
-                <a:cs typeface="Calibri" pitchFamily="34" charset="-120"/>
-              </a:rPr>
-              <a:t>Section learning outcomes</a:t>
-            </a:r>
-            <a:endParaRPr lang="en-US" sz="2400" dirty="0"/>
-          </a:p>
-        </p:txBody>
-      </p:sp>
-      <p:sp>
-        <p:nvSpPr>
-          <p:cNvPr id="7" name="Shape 5"/>
-          <p:cNvSpPr/>
-          <p:nvPr/>
-        </p:nvSpPr>
-        <p:spPr>
-          <a:xfrm>
-            <a:off x="2743200" y="3822192"/>
-            <a:ext cx="384048" cy="384048"/>
-          </a:xfrm>
-          <a:prstGeom prst="ellipse">
-            <a:avLst/>
-          </a:prstGeom>
-          <a:solidFill>
-            <a:srgbClr val="C6A24C"/>
-          </a:solidFill>
-          <a:ln w="12700">
-            <a:solidFill>
-              <a:srgbClr val="C6A24C"/>
-            </a:solidFill>
-            <a:prstDash val="solid"/>
-          </a:ln>
-        </p:spPr>
-        <p:txBody>
-          <a:bodyPr/>
-          <a:lstStyle/>
-          <a:p>
-            <a:endParaRPr lang="en-ZA"/>
-          </a:p>
-        </p:txBody>
-      </p:sp>
-      <p:pic>
-        <p:nvPicPr>
-          <p:cNvPr id="8" name="Image 0" descr="preencoded.png"/>
-          <p:cNvPicPr>
-            <a:picLocks noChangeAspect="1"/>
-          </p:cNvPicPr>
-          <p:nvPr/>
-        </p:nvPicPr>
-        <p:blipFill>
-          <a:blip r:embed="rId3"/>
-          <a:stretch>
-            <a:fillRect/>
-          </a:stretch>
-        </p:blipFill>
-        <p:spPr>
-          <a:xfrm>
-            <a:off x="2839212" y="3918204"/>
-            <a:ext cx="192024" cy="192024"/>
-          </a:xfrm>
-          <a:prstGeom prst="rect">
-            <a:avLst/>
-          </a:prstGeom>
-        </p:spPr>
-      </p:pic>
-      <p:sp>
-        <p:nvSpPr>
-          <p:cNvPr id="9" name="Text 6"/>
-          <p:cNvSpPr txBox="1"/>
-          <p:nvPr/>
-        </p:nvSpPr>
-        <p:spPr>
-          <a:xfrm>
-            <a:off x="3291840" y="3749040"/>
-            <a:ext cx="8412480" cy="1097280"/>
-          </a:xfrm>
-          <a:prstGeom prst="rect">
-            <a:avLst/>
-          </a:prstGeom>
-          <a:noFill/>
-          <a:ln/>
-        </p:spPr>
-        <p:txBody>
-          <a:bodyPr wrap="square" lIns="0" tIns="0" rIns="0" bIns="0" rtlCol="0" anchor="t"/>
-          <a:lstStyle/>
-          <a:p>
-            <a:pPr marL="0" indent="0">
-              <a:buNone/>
-            </a:pPr>
-            <a:r>
-              <a:rPr lang="en-US" sz="2400" dirty="0">
-                <a:solidFill>
-                  <a:srgbClr val="FFFFFF"/>
-                </a:solidFill>
-                <a:latin typeface="Calibri" pitchFamily="34" charset="0"/>
-                <a:ea typeface="Calibri" pitchFamily="34" charset="-122"/>
-                <a:cs typeface="Calibri" pitchFamily="34" charset="-120"/>
-              </a:rPr>
-              <a:t>Map the functional, human and organisational contributions required for enterprise results.</a:t>
-            </a:r>
-            <a:endParaRPr lang="en-US" sz="2400" dirty="0"/>
-          </a:p>
-        </p:txBody>
-      </p:sp>
-      <p:sp>
-        <p:nvSpPr>
-          <p:cNvPr id="10" name="Shape 7"/>
-          <p:cNvSpPr/>
-          <p:nvPr/>
-        </p:nvSpPr>
-        <p:spPr>
-          <a:xfrm>
-            <a:off x="2743200" y="5010912"/>
-            <a:ext cx="384048" cy="384048"/>
-          </a:xfrm>
-          <a:prstGeom prst="ellipse">
-            <a:avLst/>
-          </a:prstGeom>
-          <a:solidFill>
-            <a:srgbClr val="C6A24C"/>
-          </a:solidFill>
-          <a:ln w="12700">
-            <a:solidFill>
-              <a:srgbClr val="C6A24C"/>
-            </a:solidFill>
-            <a:prstDash val="solid"/>
-          </a:ln>
-        </p:spPr>
-        <p:txBody>
-          <a:bodyPr/>
-          <a:lstStyle/>
-          <a:p>
-            <a:endParaRPr lang="en-ZA"/>
-          </a:p>
-        </p:txBody>
-      </p:sp>
-      <p:pic>
-        <p:nvPicPr>
-          <p:cNvPr id="11" name="Image 1" descr="preencoded.png"/>
-          <p:cNvPicPr>
-            <a:picLocks noChangeAspect="1"/>
-          </p:cNvPicPr>
-          <p:nvPr/>
-        </p:nvPicPr>
-        <p:blipFill>
-          <a:blip r:embed="rId3"/>
-          <a:stretch>
-            <a:fillRect/>
-          </a:stretch>
-        </p:blipFill>
-        <p:spPr>
-          <a:xfrm>
-            <a:off x="2839212" y="5106924"/>
-            <a:ext cx="192024" cy="192024"/>
-          </a:xfrm>
-          <a:prstGeom prst="rect">
-            <a:avLst/>
-          </a:prstGeom>
-        </p:spPr>
-      </p:pic>
-      <p:sp>
-        <p:nvSpPr>
-          <p:cNvPr id="12" name="Text 8"/>
-          <p:cNvSpPr txBox="1"/>
-          <p:nvPr/>
-        </p:nvSpPr>
-        <p:spPr>
-          <a:xfrm>
-            <a:off x="3291840" y="4937760"/>
-            <a:ext cx="8412480" cy="1097280"/>
-          </a:xfrm>
-          <a:prstGeom prst="rect">
-            <a:avLst/>
-          </a:prstGeom>
-          <a:noFill/>
-          <a:ln/>
-        </p:spPr>
-        <p:txBody>
-          <a:bodyPr wrap="square" lIns="0" tIns="0" rIns="0" bIns="0" rtlCol="0" anchor="t"/>
-          <a:lstStyle/>
-          <a:p>
-            <a:pPr marL="0" indent="0">
-              <a:buNone/>
-            </a:pPr>
-            <a:r>
-              <a:rPr lang="en-US" sz="2400" dirty="0">
-                <a:solidFill>
-                  <a:srgbClr val="FFFFFF"/>
-                </a:solidFill>
-                <a:latin typeface="Calibri" pitchFamily="34" charset="0"/>
-                <a:ea typeface="Calibri" pitchFamily="34" charset="-122"/>
-                <a:cs typeface="Calibri" pitchFamily="34" charset="-120"/>
-              </a:rPr>
-              <a:t>Coordinate cross-functional contributions and enabling conditions towards shared results.</a:t>
             </a:r>
             <a:endParaRPr lang="en-US" sz="2400" dirty="0"/>
           </a:p>
@@ -17775,271 +19111,60 @@
           <a:bodyPr wrap="square" lIns="0" tIns="0" rIns="0" bIns="0" rtlCol="0" anchor="ctr"/>
           <a:lstStyle/>
           <a:p>
-            <a:pPr marL="0" indent="0">
+            <a:pPr marL="0" marR="0" lvl="0" indent="0" algn="l" defTabSz="914400" rtl="0" eaLnBrk="1" fontAlgn="auto" latinLnBrk="0" hangingPunct="1">
+              <a:lnSpc>
+                <a:spcPct val="100000"/>
+              </a:lnSpc>
+              <a:spcBef>
+                <a:spcPts val="0"/>
+              </a:spcBef>
+              <a:spcAft>
+                <a:spcPts val="0"/>
+              </a:spcAft>
+              <a:buClrTx/>
+              <a:buSzTx/>
+              <a:buFontTx/>
               <a:buNone/>
+              <a:tabLst/>
+              <a:defRPr/>
             </a:pPr>
             <a:r>
-              <a:rPr lang="en-US" sz="3600" b="1" dirty="0">
+              <a:rPr kumimoji="0" lang="en-US" sz="3600" b="1" i="0" u="none" strike="noStrike" kern="1200" cap="none" spc="0" normalizeH="0" baseline="0" noProof="0" dirty="0">
+                <a:ln>
+                  <a:noFill/>
+                </a:ln>
                 <a:solidFill>
                   <a:srgbClr val="1A5C2C"/>
                 </a:solidFill>
+                <a:effectLst/>
+                <a:uLnTx/>
+                <a:uFillTx/>
                 <a:latin typeface="Cambria" pitchFamily="34" charset="0"/>
                 <a:ea typeface="Cambria" pitchFamily="34" charset="-122"/>
                 <a:cs typeface="Cambria" pitchFamily="34" charset="-120"/>
               </a:rPr>
-              <a:t>4.1 · Mapping the contributions: customer service</a:t>
-            </a:r>
-            <a:endParaRPr lang="en-US" sz="3600" dirty="0"/>
-          </a:p>
-        </p:txBody>
-      </p:sp>
-      <p:sp>
-        <p:nvSpPr>
-          <p:cNvPr id="3" name="Shape 1"/>
-          <p:cNvSpPr/>
-          <p:nvPr/>
-        </p:nvSpPr>
-        <p:spPr>
-          <a:xfrm>
-            <a:off x="548640" y="1677924"/>
-            <a:ext cx="640080" cy="640080"/>
-          </a:xfrm>
-          <a:prstGeom prst="ellipse">
-            <a:avLst/>
-          </a:prstGeom>
-          <a:solidFill>
-            <a:srgbClr val="1A5C2C"/>
-          </a:solidFill>
-          <a:ln w="12700">
-            <a:solidFill>
-              <a:srgbClr val="1A5C2C"/>
-            </a:solidFill>
-            <a:prstDash val="solid"/>
-          </a:ln>
-        </p:spPr>
-        <p:txBody>
-          <a:bodyPr/>
-          <a:lstStyle/>
-          <a:p>
-            <a:endParaRPr lang="en-ZA"/>
+              <a:t>Section 3 Reflections</a:t>
+            </a:r>
+            <a:endParaRPr kumimoji="0" lang="en-US" sz="3600" b="0" i="0" u="none" strike="noStrike" kern="1200" cap="none" spc="0" normalizeH="0" baseline="0" noProof="0" dirty="0">
+              <a:ln>
+                <a:noFill/>
+              </a:ln>
+              <a:solidFill>
+                <a:prstClr val="black"/>
+              </a:solidFill>
+              <a:effectLst/>
+              <a:uLnTx/>
+              <a:uFillTx/>
+              <a:latin typeface="Calibri" panose="020F0502020204030204"/>
+              <a:ea typeface="+mn-ea"/>
+              <a:cs typeface="+mn-cs"/>
+            </a:endParaRPr>
           </a:p>
         </p:txBody>
       </p:sp>
       <p:pic>
         <p:nvPicPr>
-          <p:cNvPr id="4" name="Image 0" descr="preencoded.png"/>
-          <p:cNvPicPr>
-            <a:picLocks noChangeAspect="1"/>
-          </p:cNvPicPr>
-          <p:nvPr/>
-        </p:nvPicPr>
-        <p:blipFill>
-          <a:blip r:embed="rId2"/>
-          <a:stretch>
-            <a:fillRect/>
-          </a:stretch>
-        </p:blipFill>
-        <p:spPr>
-          <a:xfrm>
-            <a:off x="708660" y="1837944"/>
-            <a:ext cx="320040" cy="320040"/>
-          </a:xfrm>
-          <a:prstGeom prst="rect">
-            <a:avLst/>
-          </a:prstGeom>
-        </p:spPr>
-      </p:pic>
-      <p:sp>
-        <p:nvSpPr>
-          <p:cNvPr id="5" name="Text 2"/>
-          <p:cNvSpPr txBox="1"/>
-          <p:nvPr/>
-        </p:nvSpPr>
-        <p:spPr>
-          <a:xfrm>
-            <a:off x="1508760" y="1508760"/>
-            <a:ext cx="10131552" cy="978408"/>
-          </a:xfrm>
-          <a:prstGeom prst="rect">
-            <a:avLst/>
-          </a:prstGeom>
-          <a:noFill/>
-          <a:ln/>
-        </p:spPr>
-        <p:txBody>
-          <a:bodyPr wrap="square" lIns="0" tIns="0" rIns="0" bIns="0" rtlCol="0" anchor="ctr"/>
-          <a:lstStyle/>
-          <a:p>
-            <a:pPr marL="0" indent="0">
-              <a:buNone/>
-            </a:pPr>
-            <a:r>
-              <a:rPr lang="en-US" sz="2600" b="1" dirty="0">
-                <a:solidFill>
-                  <a:srgbClr val="1A5C2C"/>
-                </a:solidFill>
-                <a:latin typeface="Cambria" pitchFamily="34" charset="0"/>
-                <a:ea typeface="Cambria" pitchFamily="34" charset="-122"/>
-                <a:cs typeface="Cambria" pitchFamily="34" charset="-120"/>
-              </a:rPr>
-              <a:t>Customer Service  </a:t>
-            </a:r>
-            <a:r>
-              <a:rPr lang="en-US" sz="2600" dirty="0">
-                <a:solidFill>
-                  <a:srgbClr val="1F2A22"/>
-                </a:solidFill>
-                <a:latin typeface="Calibri" pitchFamily="34" charset="0"/>
-                <a:ea typeface="Calibri" pitchFamily="34" charset="-122"/>
-                <a:cs typeface="Calibri" pitchFamily="34" charset="-120"/>
-              </a:rPr>
-              <a:t>resolve enquiries within 48 hours</a:t>
-            </a:r>
-            <a:endParaRPr lang="en-US" sz="2600" dirty="0"/>
-          </a:p>
-        </p:txBody>
-      </p:sp>
-      <p:sp>
-        <p:nvSpPr>
-          <p:cNvPr id="6" name="Shape 3"/>
-          <p:cNvSpPr/>
-          <p:nvPr/>
-        </p:nvSpPr>
-        <p:spPr>
-          <a:xfrm>
-            <a:off x="548640" y="2656332"/>
-            <a:ext cx="640080" cy="640080"/>
-          </a:xfrm>
-          <a:prstGeom prst="ellipse">
-            <a:avLst/>
-          </a:prstGeom>
-          <a:solidFill>
-            <a:srgbClr val="1A5C2C"/>
-          </a:solidFill>
-          <a:ln w="12700">
-            <a:solidFill>
-              <a:srgbClr val="1A5C2C"/>
-            </a:solidFill>
-            <a:prstDash val="solid"/>
-          </a:ln>
-        </p:spPr>
-        <p:txBody>
-          <a:bodyPr/>
-          <a:lstStyle/>
-          <a:p>
-            <a:endParaRPr lang="en-ZA"/>
-          </a:p>
-        </p:txBody>
-      </p:sp>
-      <p:pic>
-        <p:nvPicPr>
-          <p:cNvPr id="7" name="Image 1" descr="preencoded.png"/>
-          <p:cNvPicPr>
-            <a:picLocks noChangeAspect="1"/>
-          </p:cNvPicPr>
-          <p:nvPr/>
-        </p:nvPicPr>
-        <p:blipFill>
-          <a:blip r:embed="rId3"/>
-          <a:stretch>
-            <a:fillRect/>
-          </a:stretch>
-        </p:blipFill>
-        <p:spPr>
-          <a:xfrm>
-            <a:off x="708660" y="2816352"/>
-            <a:ext cx="320040" cy="320040"/>
-          </a:xfrm>
-          <a:prstGeom prst="rect">
-            <a:avLst/>
-          </a:prstGeom>
-        </p:spPr>
-      </p:pic>
-      <p:sp>
-        <p:nvSpPr>
-          <p:cNvPr id="8" name="Text 4"/>
-          <p:cNvSpPr txBox="1"/>
-          <p:nvPr/>
-        </p:nvSpPr>
-        <p:spPr>
-          <a:xfrm>
-            <a:off x="1508760" y="2487168"/>
-            <a:ext cx="10131552" cy="978408"/>
-          </a:xfrm>
-          <a:prstGeom prst="rect">
-            <a:avLst/>
-          </a:prstGeom>
-          <a:noFill/>
-          <a:ln/>
-        </p:spPr>
-        <p:txBody>
-          <a:bodyPr wrap="square" lIns="0" tIns="0" rIns="0" bIns="0" rtlCol="0" anchor="ctr"/>
-          <a:lstStyle/>
-          <a:p>
-            <a:pPr marL="0" indent="0">
-              <a:buNone/>
-            </a:pPr>
-            <a:r>
-              <a:rPr lang="en-US" sz="2600" b="1" dirty="0">
-                <a:solidFill>
-                  <a:srgbClr val="1A5C2C"/>
-                </a:solidFill>
-                <a:latin typeface="Cambria" pitchFamily="34" charset="0"/>
-                <a:ea typeface="Cambria" pitchFamily="34" charset="-122"/>
-                <a:cs typeface="Cambria" pitchFamily="34" charset="-120"/>
-              </a:rPr>
-              <a:t>IT  </a:t>
-            </a:r>
-            <a:r>
-              <a:rPr lang="en-US" sz="2600" dirty="0">
-                <a:solidFill>
-                  <a:srgbClr val="1F2A22"/>
-                </a:solidFill>
-                <a:latin typeface="Calibri" pitchFamily="34" charset="0"/>
-                <a:ea typeface="Calibri" pitchFamily="34" charset="-122"/>
-                <a:cs typeface="Calibri" pitchFamily="34" charset="-120"/>
-              </a:rPr>
-              <a:t>reliable customer management systems</a:t>
-            </a:r>
-            <a:endParaRPr lang="en-US" sz="2600" dirty="0"/>
-          </a:p>
-        </p:txBody>
-      </p:sp>
-      <p:sp>
-        <p:nvSpPr>
-          <p:cNvPr id="9" name="Shape 5"/>
-          <p:cNvSpPr/>
-          <p:nvPr/>
-        </p:nvSpPr>
-        <p:spPr>
-          <a:xfrm>
-            <a:off x="548640" y="3634740"/>
-            <a:ext cx="640080" cy="640080"/>
-          </a:xfrm>
-          <a:prstGeom prst="ellipse">
-            <a:avLst/>
-          </a:prstGeom>
-          <a:solidFill>
-            <a:srgbClr val="1A5C2C"/>
-          </a:solidFill>
-          <a:ln w="12700">
-            <a:solidFill>
-              <a:srgbClr val="1A5C2C"/>
-            </a:solidFill>
-            <a:prstDash val="solid"/>
-          </a:ln>
-        </p:spPr>
-        <p:txBody>
-          <a:bodyPr/>
-          <a:lstStyle/>
-          <a:p>
-            <a:endParaRPr lang="en-ZA"/>
-          </a:p>
-        </p:txBody>
-      </p:sp>
-      <p:pic>
-        <p:nvPicPr>
-          <p:cNvPr id="10" name="Image 2" descr="preencoded.png"/>
+          <p:cNvPr id="3" name="Reflection 3.2" descr="ref_3.2.png"/>
           <p:cNvPicPr>
             <a:picLocks noChangeAspect="1"/>
           </p:cNvPicPr>
@@ -18053,8 +19178,8 @@
         </p:blipFill>
         <p:spPr>
           <a:xfrm>
-            <a:off x="708660" y="3794760"/>
-            <a:ext cx="320040" cy="320040"/>
+            <a:off x="1691640" y="1463040"/>
+            <a:ext cx="10058400" cy="1066363"/>
           </a:xfrm>
           <a:prstGeom prst="rect">
             <a:avLst/>
@@ -18063,230 +19188,42 @@
       </p:pic>
       <p:sp>
         <p:nvSpPr>
-          <p:cNvPr id="11" name="Text 6"/>
-          <p:cNvSpPr txBox="1"/>
-          <p:nvPr/>
-        </p:nvSpPr>
-        <p:spPr>
-          <a:xfrm>
-            <a:off x="1508760" y="3465576"/>
-            <a:ext cx="10131552" cy="978408"/>
-          </a:xfrm>
-          <a:prstGeom prst="rect">
-            <a:avLst/>
-          </a:prstGeom>
-          <a:noFill/>
-          <a:ln/>
-        </p:spPr>
-        <p:txBody>
-          <a:bodyPr wrap="square" lIns="0" tIns="0" rIns="0" bIns="0" rtlCol="0" anchor="ctr"/>
-          <a:lstStyle/>
-          <a:p>
-            <a:pPr marL="0" indent="0">
-              <a:buNone/>
-            </a:pPr>
-            <a:r>
-              <a:rPr lang="en-US" sz="2600" b="1" dirty="0">
-                <a:solidFill>
-                  <a:srgbClr val="1A5C2C"/>
-                </a:solidFill>
-                <a:latin typeface="Cambria" pitchFamily="34" charset="0"/>
-                <a:ea typeface="Cambria" pitchFamily="34" charset="-122"/>
-                <a:cs typeface="Cambria" pitchFamily="34" charset="-120"/>
-              </a:rPr>
-              <a:t>Operations  </a:t>
-            </a:r>
-            <a:r>
-              <a:rPr lang="en-US" sz="2600" dirty="0">
-                <a:solidFill>
-                  <a:srgbClr val="1F2A22"/>
-                </a:solidFill>
-                <a:latin typeface="Calibri" pitchFamily="34" charset="0"/>
-                <a:ea typeface="Calibri" pitchFamily="34" charset="-122"/>
-                <a:cs typeface="Calibri" pitchFamily="34" charset="-120"/>
-              </a:rPr>
-              <a:t>processing and approvals in time</a:t>
-            </a:r>
-            <a:endParaRPr lang="en-US" sz="2600" dirty="0"/>
-          </a:p>
-        </p:txBody>
-      </p:sp>
-      <p:sp>
-        <p:nvSpPr>
-          <p:cNvPr id="12" name="Shape 7"/>
+          <p:cNvPr id="4" name="Part 3.2"/>
           <p:cNvSpPr/>
           <p:nvPr/>
         </p:nvSpPr>
         <p:spPr>
           <a:xfrm>
-            <a:off x="548640" y="4613148"/>
-            <a:ext cx="640080" cy="640080"/>
+            <a:off x="548640" y="1561881"/>
+            <a:ext cx="868680" cy="868680"/>
           </a:xfrm>
           <a:prstGeom prst="ellipse">
             <a:avLst/>
           </a:prstGeom>
           <a:solidFill>
-            <a:srgbClr val="1A5C2C"/>
+            <a:srgbClr val="C6A24C"/>
           </a:solidFill>
-          <a:ln w="12700">
+          <a:ln>
             <a:solidFill>
-              <a:srgbClr val="1A5C2C"/>
+              <a:srgbClr val="C6A24C"/>
             </a:solidFill>
-            <a:prstDash val="solid"/>
           </a:ln>
-        </p:spPr>
-        <p:txBody>
-          <a:bodyPr/>
-          <a:lstStyle/>
-          <a:p>
-            <a:endParaRPr lang="en-ZA"/>
-          </a:p>
-        </p:txBody>
-      </p:sp>
-      <p:pic>
-        <p:nvPicPr>
-          <p:cNvPr id="13" name="Image 3" descr="preencoded.png"/>
-          <p:cNvPicPr>
-            <a:picLocks noChangeAspect="1"/>
-          </p:cNvPicPr>
-          <p:nvPr/>
-        </p:nvPicPr>
-        <p:blipFill>
-          <a:blip r:embed="rId5"/>
-          <a:stretch>
-            <a:fillRect/>
-          </a:stretch>
-        </p:blipFill>
-        <p:spPr>
-          <a:xfrm>
-            <a:off x="708660" y="4773168"/>
-            <a:ext cx="320040" cy="320040"/>
-          </a:xfrm>
-          <a:prstGeom prst="rect">
-            <a:avLst/>
-          </a:prstGeom>
-        </p:spPr>
-      </p:pic>
-      <p:sp>
-        <p:nvSpPr>
-          <p:cNvPr id="14" name="Text 8"/>
-          <p:cNvSpPr txBox="1"/>
-          <p:nvPr/>
-        </p:nvSpPr>
-        <p:spPr>
-          <a:xfrm>
-            <a:off x="1508760" y="4443984"/>
-            <a:ext cx="10131552" cy="978408"/>
-          </a:xfrm>
-          <a:prstGeom prst="rect">
-            <a:avLst/>
-          </a:prstGeom>
-          <a:noFill/>
-          <a:ln/>
-        </p:spPr>
-        <p:txBody>
-          <a:bodyPr wrap="square" lIns="0" tIns="0" rIns="0" bIns="0" rtlCol="0" anchor="ctr"/>
-          <a:lstStyle/>
-          <a:p>
-            <a:pPr marL="0" indent="0">
-              <a:buNone/>
-            </a:pPr>
-            <a:r>
-              <a:rPr lang="en-US" sz="2600" b="1" dirty="0">
-                <a:solidFill>
-                  <a:srgbClr val="1A5C2C"/>
-                </a:solidFill>
-                <a:latin typeface="Cambria" pitchFamily="34" charset="0"/>
-                <a:ea typeface="Cambria" pitchFamily="34" charset="-122"/>
-                <a:cs typeface="Cambria" pitchFamily="34" charset="-120"/>
-              </a:rPr>
-              <a:t>Workforce Planning  </a:t>
-            </a:r>
-            <a:r>
-              <a:rPr lang="en-US" sz="2600" dirty="0">
-                <a:solidFill>
-                  <a:srgbClr val="1F2A22"/>
-                </a:solidFill>
-                <a:latin typeface="Calibri" pitchFamily="34" charset="0"/>
-                <a:ea typeface="Calibri" pitchFamily="34" charset="-122"/>
-                <a:cs typeface="Calibri" pitchFamily="34" charset="-120"/>
-              </a:rPr>
-              <a:t>enough staffing capacity</a:t>
-            </a:r>
-            <a:endParaRPr lang="en-US" sz="2600" dirty="0"/>
-          </a:p>
-        </p:txBody>
-      </p:sp>
-      <p:sp>
-        <p:nvSpPr>
-          <p:cNvPr id="18" name="Shape 13"/>
-          <p:cNvSpPr/>
-          <p:nvPr/>
-        </p:nvSpPr>
-        <p:spPr>
-          <a:xfrm>
-            <a:off x="548640" y="5623560"/>
-            <a:ext cx="11091672" cy="777240"/>
-          </a:xfrm>
-          <a:prstGeom prst="roundRect">
-            <a:avLst>
-              <a:gd name="adj" fmla="val 11765"/>
-            </a:avLst>
-          </a:prstGeom>
-          <a:solidFill>
-            <a:srgbClr val="0F3B1C"/>
-          </a:solidFill>
-          <a:ln w="12700">
-            <a:solidFill>
-              <a:srgbClr val="0F3B1C"/>
-            </a:solidFill>
-            <a:prstDash val="solid"/>
-          </a:ln>
-        </p:spPr>
-        <p:txBody>
-          <a:bodyPr/>
-          <a:lstStyle/>
-          <a:p>
-            <a:endParaRPr lang="en-ZA"/>
-          </a:p>
-        </p:txBody>
-      </p:sp>
-      <p:sp>
-        <p:nvSpPr>
-          <p:cNvPr id="19" name="Text 14"/>
-          <p:cNvSpPr txBox="1"/>
-          <p:nvPr/>
-        </p:nvSpPr>
-        <p:spPr>
-          <a:xfrm>
-            <a:off x="822960" y="5623560"/>
-            <a:ext cx="10607040" cy="777240"/>
-          </a:xfrm>
-          <a:prstGeom prst="rect">
-            <a:avLst/>
-          </a:prstGeom>
-          <a:noFill/>
-          <a:ln/>
-        </p:spPr>
-        <p:txBody>
-          <a:bodyPr wrap="square" lIns="0" tIns="0" rIns="0" bIns="0" rtlCol="0" anchor="ctr"/>
-          <a:lstStyle/>
-          <a:p>
-            <a:pPr marL="0" indent="0">
-              <a:buNone/>
-            </a:pPr>
-            <a:r>
-              <a:rPr lang="en-US" sz="2400" i="1" dirty="0">
+          <a:effectLst/>
+        </p:spPr>
+        <p:txBody>
+          <a:bodyPr wrap="none" lIns="0" tIns="0" rIns="0" bIns="0" rtlCol="0" anchor="ctr"/>
+          <a:lstStyle/>
+          <a:p>
+            <a:pPr algn="ctr"/>
+            <a:r>
+              <a:rPr lang="en-GB" sz="2400" b="1">
                 <a:solidFill>
                   <a:srgbClr val="FFFFFF"/>
                 </a:solidFill>
-                <a:latin typeface="Calibri" pitchFamily="34" charset="0"/>
-                <a:ea typeface="Calibri" pitchFamily="34" charset="-122"/>
-                <a:cs typeface="Calibri" pitchFamily="34" charset="-120"/>
-              </a:rPr>
-              <a:t>Key Result: 48-hour resolution from 65% to 90% by year-end</a:t>
-            </a:r>
-            <a:endParaRPr lang="en-US" sz="2400" dirty="0"/>
+                <a:latin typeface="Calibri"/>
+              </a:rPr>
+              <a:t>3.2</a:t>
+            </a:r>
           </a:p>
         </p:txBody>
       </p:sp>
@@ -18299,12 +19236,12 @@
 </file>
 
 <file path=ppt/slides/slide28.xml><?xml version="1.0" encoding="utf-8"?>
-<p:sld xmlns:a="http://schemas.openxmlformats.org/drawingml/2006/main" xmlns:p="http://schemas.openxmlformats.org/presentationml/2006/main" xmlns:r="http://schemas.openxmlformats.org/officeDocument/2006/relationships">
-  <p:cSld>
+<p:sld xmlns:a="http://schemas.openxmlformats.org/drawingml/2006/main" xmlns:r="http://schemas.openxmlformats.org/officeDocument/2006/relationships" xmlns:p="http://schemas.openxmlformats.org/presentationml/2006/main">
+  <p:cSld name="Slide 20">
     <p:bg>
       <p:bgPr>
         <a:solidFill>
-          <a:srgbClr val="FFFFFF"/>
+          <a:srgbClr val="1A5C2C"/>
         </a:solidFill>
         <a:effectLst/>
       </p:bgPr>
@@ -18315,7 +19252,14 @@
         <p:cNvGrpSpPr/>
         <p:nvPr/>
       </p:nvGrpSpPr>
-      <p:grpSpPr/>
+      <p:grpSpPr>
+        <a:xfrm>
+          <a:off x="0" y="0"/>
+          <a:ext cx="0" cy="0"/>
+          <a:chOff x="0" y="0"/>
+          <a:chExt cx="0" cy="0"/>
+        </a:xfrm>
+      </p:grpSpPr>
       <p:sp>
         <p:nvSpPr>
           <p:cNvPr id="2" name="Text 0"/>
@@ -18324,8 +19268,8 @@
         </p:nvSpPr>
         <p:spPr>
           <a:xfrm>
-            <a:off x="548640" y="411480"/>
-            <a:ext cx="11064240" cy="868680"/>
+            <a:off x="457200" y="822960"/>
+            <a:ext cx="2103120" cy="2194560"/>
           </a:xfrm>
           <a:prstGeom prst="rect">
             <a:avLst/>
@@ -18334,49 +19278,203 @@
           <a:ln/>
         </p:spPr>
         <p:txBody>
-          <a:bodyPr wrap="square" lIns="0" tIns="0" rIns="0" bIns="0" rtlCol="0" anchor="ctr"/>
+          <a:bodyPr wrap="square" lIns="0" tIns="0" rIns="0" bIns="0" rtlCol="0" anchor="t"/>
           <a:lstStyle/>
           <a:p>
             <a:pPr marL="0" indent="0">
               <a:buNone/>
             </a:pPr>
             <a:r>
-              <a:rPr lang="en-US" sz="3600" b="1" dirty="0">
-                <a:solidFill>
-                  <a:srgbClr val="1A5C2C"/>
+              <a:rPr lang="en-US" sz="15000" b="1" dirty="0">
+                <a:solidFill>
+                  <a:srgbClr val="C6A24C"/>
                 </a:solidFill>
                 <a:latin typeface="Cambria" pitchFamily="34" charset="0"/>
                 <a:ea typeface="Cambria" pitchFamily="34" charset="-122"/>
                 <a:cs typeface="Cambria" pitchFamily="34" charset="-120"/>
               </a:rPr>
-              <a:t>4.1 · Interpreting the Contribution Map</a:t>
-            </a:r>
-            <a:endParaRPr lang="en-US" sz="3600" dirty="0"/>
-          </a:p>
-        </p:txBody>
-      </p:sp>
-      <p:sp>
-        <p:nvSpPr>
-          <p:cNvPr id="3" name="Shape 1"/>
+              <a:t>4</a:t>
+            </a:r>
+            <a:endParaRPr lang="en-US" sz="15000" dirty="0"/>
+          </a:p>
+        </p:txBody>
+      </p:sp>
+      <p:sp>
+        <p:nvSpPr>
+          <p:cNvPr id="3" name="Text 1"/>
+          <p:cNvSpPr txBox="1"/>
+          <p:nvPr/>
+        </p:nvSpPr>
+        <p:spPr>
+          <a:xfrm>
+            <a:off x="2743200" y="914400"/>
+            <a:ext cx="8229600" cy="457200"/>
+          </a:xfrm>
+          <a:prstGeom prst="rect">
+            <a:avLst/>
+          </a:prstGeom>
+          <a:noFill/>
+          <a:ln/>
+        </p:spPr>
+        <p:txBody>
+          <a:bodyPr wrap="square" lIns="0" tIns="0" rIns="0" bIns="0" rtlCol="0" anchor="t"/>
+          <a:lstStyle/>
+          <a:p>
+            <a:pPr marL="0" indent="0">
+              <a:buNone/>
+            </a:pPr>
+            <a:r>
+              <a:rPr lang="en-US" sz="2400" b="1" dirty="0">
+                <a:solidFill>
+                  <a:srgbClr val="E6D3A0"/>
+                </a:solidFill>
+                <a:latin typeface="Calibri" pitchFamily="34" charset="0"/>
+                <a:ea typeface="Calibri" pitchFamily="34" charset="-122"/>
+                <a:cs typeface="Calibri" pitchFamily="34" charset="-120"/>
+              </a:rPr>
+              <a:t>Section 4</a:t>
+            </a:r>
+            <a:endParaRPr lang="en-US" sz="2400" dirty="0"/>
+          </a:p>
+        </p:txBody>
+      </p:sp>
+      <p:sp>
+        <p:nvSpPr>
+          <p:cNvPr id="4" name="Text 2"/>
+          <p:cNvSpPr txBox="1"/>
+          <p:nvPr/>
+        </p:nvSpPr>
+        <p:spPr>
+          <a:xfrm>
+            <a:off x="2743200" y="1371600"/>
+            <a:ext cx="8961120" cy="868680"/>
+          </a:xfrm>
+          <a:prstGeom prst="rect">
+            <a:avLst/>
+          </a:prstGeom>
+          <a:noFill/>
+          <a:ln/>
+        </p:spPr>
+        <p:txBody>
+          <a:bodyPr wrap="square" lIns="0" tIns="0" rIns="0" bIns="0" rtlCol="0" anchor="t"/>
+          <a:lstStyle/>
+          <a:p>
+            <a:pPr marL="0" indent="0">
+              <a:buNone/>
+            </a:pPr>
+            <a:r>
+              <a:rPr lang="en-US" sz="4400" b="1" dirty="0">
+                <a:solidFill>
+                  <a:srgbClr val="FFFFFF"/>
+                </a:solidFill>
+                <a:latin typeface="Cambria" pitchFamily="34" charset="0"/>
+                <a:ea typeface="Cambria" pitchFamily="34" charset="-122"/>
+                <a:cs typeface="Cambria" pitchFamily="34" charset="-120"/>
+              </a:rPr>
+              <a:t>Integration — Collective</a:t>
+            </a:r>
+            <a:endParaRPr lang="en-US" sz="4400" dirty="0"/>
+          </a:p>
+        </p:txBody>
+      </p:sp>
+      <p:sp>
+        <p:nvSpPr>
+          <p:cNvPr id="5" name="Text 3"/>
+          <p:cNvSpPr txBox="1"/>
+          <p:nvPr/>
+        </p:nvSpPr>
+        <p:spPr>
+          <a:xfrm>
+            <a:off x="2743200" y="2240280"/>
+            <a:ext cx="8961120" cy="868680"/>
+          </a:xfrm>
+          <a:prstGeom prst="rect">
+            <a:avLst/>
+          </a:prstGeom>
+          <a:noFill/>
+          <a:ln/>
+        </p:spPr>
+        <p:txBody>
+          <a:bodyPr wrap="square" lIns="0" tIns="0" rIns="0" bIns="0" rtlCol="0" anchor="t"/>
+          <a:lstStyle/>
+          <a:p>
+            <a:pPr marL="0" indent="0">
+              <a:buNone/>
+            </a:pPr>
+            <a:r>
+              <a:rPr lang="en-US" sz="2600" i="1" dirty="0">
+                <a:solidFill>
+                  <a:srgbClr val="DDE8DF"/>
+                </a:solidFill>
+                <a:latin typeface="Calibri" pitchFamily="34" charset="0"/>
+                <a:ea typeface="Calibri" pitchFamily="34" charset="-122"/>
+                <a:cs typeface="Calibri" pitchFamily="34" charset="-120"/>
+              </a:rPr>
+              <a:t>Integration of Human and Organisational Performance</a:t>
+            </a:r>
+            <a:endParaRPr lang="en-US" sz="2600" dirty="0"/>
+          </a:p>
+        </p:txBody>
+      </p:sp>
+      <p:sp>
+        <p:nvSpPr>
+          <p:cNvPr id="6" name="Text 4"/>
+          <p:cNvSpPr txBox="1"/>
+          <p:nvPr/>
+        </p:nvSpPr>
+        <p:spPr>
+          <a:xfrm>
+            <a:off x="2743200" y="3246120"/>
+            <a:ext cx="8229600" cy="457200"/>
+          </a:xfrm>
+          <a:prstGeom prst="rect">
+            <a:avLst/>
+          </a:prstGeom>
+          <a:noFill/>
+          <a:ln/>
+        </p:spPr>
+        <p:txBody>
+          <a:bodyPr wrap="square" lIns="0" tIns="0" rIns="0" bIns="0" rtlCol="0" anchor="t"/>
+          <a:lstStyle/>
+          <a:p>
+            <a:pPr marL="0" indent="0">
+              <a:buNone/>
+            </a:pPr>
+            <a:r>
+              <a:rPr lang="en-US" sz="2400" b="1" dirty="0">
+                <a:solidFill>
+                  <a:srgbClr val="C6A24C"/>
+                </a:solidFill>
+                <a:latin typeface="Calibri" pitchFamily="34" charset="0"/>
+                <a:ea typeface="Calibri" pitchFamily="34" charset="-122"/>
+                <a:cs typeface="Calibri" pitchFamily="34" charset="-120"/>
+              </a:rPr>
+              <a:t>Section learning outcomes</a:t>
+            </a:r>
+            <a:endParaRPr lang="en-US" sz="2400" dirty="0"/>
+          </a:p>
+        </p:txBody>
+      </p:sp>
+      <p:sp>
+        <p:nvSpPr>
+          <p:cNvPr id="7" name="Shape 5"/>
           <p:cNvSpPr/>
           <p:nvPr/>
         </p:nvSpPr>
         <p:spPr>
           <a:xfrm>
-            <a:off x="548640" y="1508760"/>
-            <a:ext cx="3514344" cy="4846320"/>
-          </a:xfrm>
-          <a:prstGeom prst="roundRect">
-            <a:avLst>
-              <a:gd name="adj" fmla="val 2602"/>
-            </a:avLst>
+            <a:off x="2743200" y="3822192"/>
+            <a:ext cx="384048" cy="384048"/>
+          </a:xfrm>
+          <a:prstGeom prst="ellipse">
+            <a:avLst/>
           </a:prstGeom>
           <a:solidFill>
-            <a:srgbClr val="EEF4EF"/>
+            <a:srgbClr val="C6A24C"/>
           </a:solidFill>
           <a:ln w="12700">
             <a:solidFill>
-              <a:srgbClr val="EEF4EF"/>
+              <a:srgbClr val="C6A24C"/>
             </a:solidFill>
             <a:prstDash val="solid"/>
           </a:ln>
@@ -18389,209 +19487,9 @@
           </a:p>
         </p:txBody>
       </p:sp>
-      <p:sp>
-        <p:nvSpPr>
-          <p:cNvPr id="4" name="Shape 2"/>
-          <p:cNvSpPr/>
-          <p:nvPr/>
-        </p:nvSpPr>
-        <p:spPr>
-          <a:xfrm>
-            <a:off x="777240" y="1737360"/>
-            <a:ext cx="640080" cy="640080"/>
-          </a:xfrm>
-          <a:prstGeom prst="ellipse">
-            <a:avLst/>
-          </a:prstGeom>
-          <a:solidFill>
-            <a:srgbClr val="1A5C2C"/>
-          </a:solidFill>
-          <a:ln w="12700">
-            <a:solidFill>
-              <a:srgbClr val="1A5C2C"/>
-            </a:solidFill>
-            <a:prstDash val="solid"/>
-          </a:ln>
-        </p:spPr>
-        <p:txBody>
-          <a:bodyPr/>
-          <a:lstStyle/>
-          <a:p>
-            <a:endParaRPr lang="en-ZA"/>
-          </a:p>
-        </p:txBody>
-      </p:sp>
       <p:pic>
         <p:nvPicPr>
-          <p:cNvPr id="5" name="Image 0" descr="preencoded.png"/>
-          <p:cNvPicPr>
-            <a:picLocks noChangeAspect="1"/>
-          </p:cNvPicPr>
-          <p:nvPr/>
-        </p:nvPicPr>
-        <p:blipFill>
-          <a:blip r:embed="rId2"/>
-          <a:stretch>
-            <a:fillRect/>
-          </a:stretch>
-        </p:blipFill>
-        <p:spPr>
-          <a:xfrm>
-            <a:off x="937260" y="1897380"/>
-            <a:ext cx="320040" cy="320040"/>
-          </a:xfrm>
-          <a:prstGeom prst="rect">
-            <a:avLst/>
-          </a:prstGeom>
-        </p:spPr>
-      </p:pic>
-      <p:sp>
-        <p:nvSpPr>
-          <p:cNvPr id="6" name="Text 3"/>
-          <p:cNvSpPr txBox="1"/>
-          <p:nvPr/>
-        </p:nvSpPr>
-        <p:spPr>
-          <a:xfrm>
-            <a:off x="777240" y="2514600"/>
-            <a:ext cx="3057144" cy="923544"/>
-          </a:xfrm>
-          <a:prstGeom prst="rect">
-            <a:avLst/>
-          </a:prstGeom>
-          <a:noFill/>
-          <a:ln/>
-        </p:spPr>
-        <p:txBody>
-          <a:bodyPr wrap="square" lIns="0" tIns="0" rIns="0" bIns="0" rtlCol="0" anchor="t"/>
-          <a:lstStyle/>
-          <a:p>
-            <a:pPr marL="0" indent="0">
-              <a:buNone/>
-            </a:pPr>
-            <a:r>
-              <a:rPr lang="en-US" sz="2600" b="1" dirty="0">
-                <a:solidFill>
-                  <a:srgbClr val="1A5C2C"/>
-                </a:solidFill>
-                <a:latin typeface="Cambria" pitchFamily="34" charset="0"/>
-                <a:ea typeface="Cambria" pitchFamily="34" charset="-122"/>
-                <a:cs typeface="Cambria" pitchFamily="34" charset="-120"/>
-              </a:rPr>
-              <a:t>1 · Function</a:t>
-            </a:r>
-            <a:endParaRPr lang="en-US" sz="2600" dirty="0"/>
-          </a:p>
-        </p:txBody>
-      </p:sp>
-      <p:sp>
-        <p:nvSpPr>
-          <p:cNvPr id="7" name="Text 4"/>
-          <p:cNvSpPr txBox="1"/>
-          <p:nvPr/>
-        </p:nvSpPr>
-        <p:spPr>
-          <a:xfrm>
-            <a:off x="777240" y="3575304"/>
-            <a:ext cx="3057144" cy="2642616"/>
-          </a:xfrm>
-          <a:prstGeom prst="rect">
-            <a:avLst/>
-          </a:prstGeom>
-          <a:noFill/>
-          <a:ln/>
-        </p:spPr>
-        <p:txBody>
-          <a:bodyPr wrap="square" lIns="0" tIns="0" rIns="0" bIns="0" rtlCol="0" anchor="t"/>
-          <a:lstStyle/>
-          <a:p>
-            <a:pPr marL="0" indent="0">
-              <a:buNone/>
-            </a:pPr>
-            <a:r>
-              <a:rPr lang="en-US" sz="2400" dirty="0">
-                <a:solidFill>
-                  <a:srgbClr val="1F2A22"/>
-                </a:solidFill>
-                <a:latin typeface="Calibri" pitchFamily="34" charset="0"/>
-                <a:ea typeface="Calibri" pitchFamily="34" charset="-122"/>
-                <a:cs typeface="Calibri" pitchFamily="34" charset="-120"/>
-              </a:rPr>
-              <a:t>What must the function deliver?</a:t>
-            </a:r>
-            <a:endParaRPr lang="en-US" sz="2400" dirty="0"/>
-          </a:p>
-        </p:txBody>
-      </p:sp>
-      <p:sp>
-        <p:nvSpPr>
-          <p:cNvPr id="8" name="Shape 5"/>
-          <p:cNvSpPr/>
-          <p:nvPr/>
-        </p:nvSpPr>
-        <p:spPr>
-          <a:xfrm>
-            <a:off x="4337304" y="1508760"/>
-            <a:ext cx="3514344" cy="4846320"/>
-          </a:xfrm>
-          <a:prstGeom prst="roundRect">
-            <a:avLst>
-              <a:gd name="adj" fmla="val 2602"/>
-            </a:avLst>
-          </a:prstGeom>
-          <a:solidFill>
-            <a:srgbClr val="EEF4EF"/>
-          </a:solidFill>
-          <a:ln w="12700">
-            <a:solidFill>
-              <a:srgbClr val="EEF4EF"/>
-            </a:solidFill>
-            <a:prstDash val="solid"/>
-          </a:ln>
-        </p:spPr>
-        <p:txBody>
-          <a:bodyPr/>
-          <a:lstStyle/>
-          <a:p>
-            <a:endParaRPr lang="en-ZA"/>
-          </a:p>
-        </p:txBody>
-      </p:sp>
-      <p:sp>
-        <p:nvSpPr>
-          <p:cNvPr id="9" name="Shape 6"/>
-          <p:cNvSpPr/>
-          <p:nvPr/>
-        </p:nvSpPr>
-        <p:spPr>
-          <a:xfrm>
-            <a:off x="4565904" y="1737360"/>
-            <a:ext cx="640080" cy="640080"/>
-          </a:xfrm>
-          <a:prstGeom prst="ellipse">
-            <a:avLst/>
-          </a:prstGeom>
-          <a:solidFill>
-            <a:srgbClr val="1A5C2C"/>
-          </a:solidFill>
-          <a:ln w="12700">
-            <a:solidFill>
-              <a:srgbClr val="1A5C2C"/>
-            </a:solidFill>
-            <a:prstDash val="solid"/>
-          </a:ln>
-        </p:spPr>
-        <p:txBody>
-          <a:bodyPr/>
-          <a:lstStyle/>
-          <a:p>
-            <a:endParaRPr lang="en-ZA"/>
-          </a:p>
-        </p:txBody>
-      </p:sp>
-      <p:pic>
-        <p:nvPicPr>
-          <p:cNvPr id="10" name="Image 1" descr="preencoded.png"/>
+          <p:cNvPr id="8" name="Image 0" descr="preencoded.png"/>
           <p:cNvPicPr>
             <a:picLocks noChangeAspect="1"/>
           </p:cNvPicPr>
@@ -18605,8 +19503,8 @@
         </p:blipFill>
         <p:spPr>
           <a:xfrm>
-            <a:off x="4725924" y="1897380"/>
-            <a:ext cx="320040" cy="320040"/>
+            <a:off x="2839212" y="3918204"/>
+            <a:ext cx="192024" cy="192024"/>
           </a:xfrm>
           <a:prstGeom prst="rect">
             <a:avLst/>
@@ -18615,14 +19513,14 @@
       </p:pic>
       <p:sp>
         <p:nvSpPr>
-          <p:cNvPr id="11" name="Text 7"/>
+          <p:cNvPr id="9" name="Text 6"/>
           <p:cNvSpPr txBox="1"/>
           <p:nvPr/>
         </p:nvSpPr>
         <p:spPr>
           <a:xfrm>
-            <a:off x="4565904" y="2514600"/>
-            <a:ext cx="3057144" cy="923544"/>
+            <a:off x="3291840" y="3749040"/>
+            <a:ext cx="8412480" cy="1097280"/>
           </a:xfrm>
           <a:prstGeom prst="rect">
             <a:avLst/>
@@ -18638,54 +19536,15 @@
               <a:buNone/>
             </a:pPr>
             <a:r>
-              <a:rPr lang="en-US" sz="2600" b="1" dirty="0">
-                <a:solidFill>
-                  <a:srgbClr val="1A5C2C"/>
-                </a:solidFill>
-                <a:latin typeface="Cambria" pitchFamily="34" charset="0"/>
-                <a:ea typeface="Cambria" pitchFamily="34" charset="-122"/>
-                <a:cs typeface="Cambria" pitchFamily="34" charset="-120"/>
-              </a:rPr>
-              <a:t>2 · People performance</a:t>
-            </a:r>
-            <a:endParaRPr lang="en-US" sz="2600" dirty="0"/>
-          </a:p>
-        </p:txBody>
-      </p:sp>
-      <p:sp>
-        <p:nvSpPr>
-          <p:cNvPr id="12" name="Text 8"/>
-          <p:cNvSpPr txBox="1"/>
-          <p:nvPr/>
-        </p:nvSpPr>
-        <p:spPr>
-          <a:xfrm>
-            <a:off x="4565904" y="3575304"/>
-            <a:ext cx="3057144" cy="2642616"/>
-          </a:xfrm>
-          <a:prstGeom prst="rect">
-            <a:avLst/>
-          </a:prstGeom>
-          <a:noFill/>
-          <a:ln/>
-        </p:spPr>
-        <p:txBody>
-          <a:bodyPr wrap="square" lIns="0" tIns="0" rIns="0" bIns="0" rtlCol="0" anchor="t"/>
-          <a:lstStyle/>
-          <a:p>
-            <a:pPr marL="0" indent="0">
-              <a:buNone/>
-            </a:pPr>
-            <a:r>
               <a:rPr lang="en-US" sz="2400" dirty="0">
                 <a:solidFill>
-                  <a:srgbClr val="1F2A22"/>
+                  <a:srgbClr val="FFFFFF"/>
                 </a:solidFill>
                 <a:latin typeface="Calibri" pitchFamily="34" charset="0"/>
                 <a:ea typeface="Calibri" pitchFamily="34" charset="-122"/>
                 <a:cs typeface="Calibri" pitchFamily="34" charset="-120"/>
               </a:rPr>
-              <a:t>What must individuals and teams deliver?</a:t>
+              <a:t>Map the functional, human and organisational contributions required for enterprise results.</a:t>
             </a:r>
             <a:endParaRPr lang="en-US" sz="2400" dirty="0"/>
           </a:p>
@@ -18693,26 +19552,24 @@
       </p:sp>
       <p:sp>
         <p:nvSpPr>
-          <p:cNvPr id="13" name="Shape 9"/>
+          <p:cNvPr id="10" name="Shape 7"/>
           <p:cNvSpPr/>
           <p:nvPr/>
         </p:nvSpPr>
         <p:spPr>
           <a:xfrm>
-            <a:off x="8125968" y="1508760"/>
-            <a:ext cx="3514344" cy="4846320"/>
-          </a:xfrm>
-          <a:prstGeom prst="roundRect">
-            <a:avLst>
-              <a:gd name="adj" fmla="val 2602"/>
-            </a:avLst>
+            <a:off x="2743200" y="5010912"/>
+            <a:ext cx="384048" cy="384048"/>
+          </a:xfrm>
+          <a:prstGeom prst="ellipse">
+            <a:avLst/>
           </a:prstGeom>
           <a:solidFill>
-            <a:srgbClr val="EEF4EF"/>
+            <a:srgbClr val="C6A24C"/>
           </a:solidFill>
           <a:ln w="12700">
             <a:solidFill>
-              <a:srgbClr val="EEF4EF"/>
+              <a:srgbClr val="C6A24C"/>
             </a:solidFill>
             <a:prstDash val="solid"/>
           </a:ln>
@@ -18725,56 +19582,24 @@
           </a:p>
         </p:txBody>
       </p:sp>
-      <p:sp>
-        <p:nvSpPr>
-          <p:cNvPr id="14" name="Shape 10"/>
-          <p:cNvSpPr/>
-          <p:nvPr/>
-        </p:nvSpPr>
-        <p:spPr>
-          <a:xfrm>
-            <a:off x="8354568" y="1737360"/>
-            <a:ext cx="640080" cy="640080"/>
-          </a:xfrm>
-          <a:prstGeom prst="ellipse">
-            <a:avLst/>
-          </a:prstGeom>
-          <a:solidFill>
-            <a:srgbClr val="1A5C2C"/>
-          </a:solidFill>
-          <a:ln w="12700">
-            <a:solidFill>
-              <a:srgbClr val="1A5C2C"/>
-            </a:solidFill>
-            <a:prstDash val="solid"/>
-          </a:ln>
-        </p:spPr>
-        <p:txBody>
-          <a:bodyPr/>
-          <a:lstStyle/>
-          <a:p>
-            <a:endParaRPr lang="en-ZA"/>
-          </a:p>
-        </p:txBody>
-      </p:sp>
       <p:pic>
         <p:nvPicPr>
-          <p:cNvPr id="15" name="Image 2" descr="preencoded.png"/>
+          <p:cNvPr id="11" name="Image 1" descr="preencoded.png"/>
           <p:cNvPicPr>
             <a:picLocks noChangeAspect="1"/>
           </p:cNvPicPr>
           <p:nvPr/>
         </p:nvPicPr>
         <p:blipFill>
-          <a:blip r:embed="rId4"/>
+          <a:blip r:embed="rId3"/>
           <a:stretch>
             <a:fillRect/>
           </a:stretch>
         </p:blipFill>
         <p:spPr>
           <a:xfrm>
-            <a:off x="8514588" y="1897380"/>
-            <a:ext cx="320040" cy="320040"/>
+            <a:off x="2839212" y="5106924"/>
+            <a:ext cx="192024" cy="192024"/>
           </a:xfrm>
           <a:prstGeom prst="rect">
             <a:avLst/>
@@ -18783,14 +19608,14 @@
       </p:pic>
       <p:sp>
         <p:nvSpPr>
-          <p:cNvPr id="16" name="Text 11"/>
+          <p:cNvPr id="12" name="Text 8"/>
           <p:cNvSpPr txBox="1"/>
           <p:nvPr/>
         </p:nvSpPr>
         <p:spPr>
           <a:xfrm>
-            <a:off x="8354568" y="2514600"/>
-            <a:ext cx="3057144" cy="923544"/>
+            <a:off x="3291840" y="4937760"/>
+            <a:ext cx="8412480" cy="1097280"/>
           </a:xfrm>
           <a:prstGeom prst="rect">
             <a:avLst/>
@@ -18806,54 +19631,15 @@
               <a:buNone/>
             </a:pPr>
             <a:r>
-              <a:rPr lang="en-US" sz="2600" b="1" dirty="0">
-                <a:solidFill>
-                  <a:srgbClr val="1A5C2C"/>
-                </a:solidFill>
-                <a:latin typeface="Cambria" pitchFamily="34" charset="0"/>
-                <a:ea typeface="Cambria" pitchFamily="34" charset="-122"/>
-                <a:cs typeface="Cambria" pitchFamily="34" charset="-120"/>
-              </a:rPr>
-              <a:t>3 · Organisational performance</a:t>
-            </a:r>
-            <a:endParaRPr lang="en-US" sz="2600" dirty="0"/>
-          </a:p>
-        </p:txBody>
-      </p:sp>
-      <p:sp>
-        <p:nvSpPr>
-          <p:cNvPr id="17" name="Text 12"/>
-          <p:cNvSpPr txBox="1"/>
-          <p:nvPr/>
-        </p:nvSpPr>
-        <p:spPr>
-          <a:xfrm>
-            <a:off x="8354568" y="3931920"/>
-            <a:ext cx="3057144" cy="1317538"/>
-          </a:xfrm>
-          <a:prstGeom prst="rect">
-            <a:avLst/>
-          </a:prstGeom>
-          <a:noFill/>
-          <a:ln/>
-        </p:spPr>
-        <p:txBody>
-          <a:bodyPr wrap="square" lIns="0" tIns="0" rIns="0" bIns="0" rtlCol="0" anchor="t"/>
-          <a:lstStyle/>
-          <a:p>
-            <a:pPr marL="0" indent="0">
-              <a:buNone/>
-            </a:pPr>
-            <a:r>
               <a:rPr lang="en-US" sz="2400" dirty="0">
                 <a:solidFill>
-                  <a:srgbClr val="1F2A22"/>
+                  <a:srgbClr val="FFFFFF"/>
                 </a:solidFill>
                 <a:latin typeface="Calibri" pitchFamily="34" charset="0"/>
                 <a:ea typeface="Calibri" pitchFamily="34" charset="-122"/>
                 <a:cs typeface="Calibri" pitchFamily="34" charset="-120"/>
               </a:rPr>
-              <a:t>What conditions must the organisation provide?</a:t>
+              <a:t>Coordinate cross-functional contributions and enabling conditions towards shared results.</a:t>
             </a:r>
             <a:endParaRPr lang="en-US" sz="2400" dirty="0"/>
           </a:p>
@@ -18918,7 +19704,7 @@
                 <a:ea typeface="Cambria" pitchFamily="34" charset="-122"/>
                 <a:cs typeface="Cambria" pitchFamily="34" charset="-120"/>
               </a:rPr>
-              <a:t>4.2 · Managing the contributions through FACES</a:t>
+              <a:t>4.1 · Mapping the contributions: customer service</a:t>
             </a:r>
             <a:endParaRPr lang="en-US" sz="3600" dirty="0"/>
           </a:p>
@@ -19013,7 +19799,7 @@
                 <a:ea typeface="Cambria" pitchFamily="34" charset="-122"/>
                 <a:cs typeface="Cambria" pitchFamily="34" charset="-120"/>
               </a:rPr>
-              <a:t>F  </a:t>
+              <a:t>Customer Service  </a:t>
             </a:r>
             <a:r>
               <a:rPr lang="en-US" sz="2600" dirty="0">
@@ -19024,7 +19810,7 @@
                 <a:ea typeface="Calibri" pitchFamily="34" charset="-122"/>
                 <a:cs typeface="Calibri" pitchFamily="34" charset="-120"/>
               </a:rPr>
-              <a:t>Foster: commitments and obstacles discussed openly</a:t>
+              <a:t>resolve enquiries within 48 hours</a:t>
             </a:r>
             <a:endParaRPr lang="en-US" sz="2600" dirty="0"/>
           </a:p>
@@ -19119,7 +19905,7 @@
                 <a:ea typeface="Cambria" pitchFamily="34" charset="-122"/>
                 <a:cs typeface="Cambria" pitchFamily="34" charset="-120"/>
               </a:rPr>
-              <a:t>A  </a:t>
+              <a:t>IT  </a:t>
             </a:r>
             <a:r>
               <a:rPr lang="en-US" sz="2600" dirty="0">
@@ -19130,7 +19916,7 @@
                 <a:ea typeface="Calibri" pitchFamily="34" charset="-122"/>
                 <a:cs typeface="Calibri" pitchFamily="34" charset="-120"/>
               </a:rPr>
-              <a:t>Align: tied to the enterprise Key Result</a:t>
+              <a:t>reliable customer management systems</a:t>
             </a:r>
             <a:endParaRPr lang="en-US" sz="2600" dirty="0"/>
           </a:p>
@@ -19225,7 +20011,7 @@
                 <a:ea typeface="Cambria" pitchFamily="34" charset="-122"/>
                 <a:cs typeface="Cambria" pitchFamily="34" charset="-120"/>
               </a:rPr>
-              <a:t>C  </a:t>
+              <a:t>Operations  </a:t>
             </a:r>
             <a:r>
               <a:rPr lang="en-US" sz="2600" dirty="0">
@@ -19236,7 +20022,7 @@
                 <a:ea typeface="Calibri" pitchFamily="34" charset="-122"/>
                 <a:cs typeface="Calibri" pitchFamily="34" charset="-120"/>
               </a:rPr>
-              <a:t>Transparency: people and constraints visible</a:t>
+              <a:t>processing and approvals in time</a:t>
             </a:r>
             <a:endParaRPr lang="en-US" sz="2600" dirty="0"/>
           </a:p>
@@ -19331,7 +20117,7 @@
                 <a:ea typeface="Cambria" pitchFamily="34" charset="-122"/>
                 <a:cs typeface="Cambria" pitchFamily="34" charset="-120"/>
               </a:rPr>
-              <a:t>E  </a:t>
+              <a:t>Workforce Planning  </a:t>
             </a:r>
             <a:r>
               <a:rPr lang="en-US" sz="2600" dirty="0">
@@ -19342,7 +20128,7 @@
                 <a:ea typeface="Calibri" pitchFamily="34" charset="-122"/>
                 <a:cs typeface="Calibri" pitchFamily="34" charset="-120"/>
               </a:rPr>
-              <a:t>Accountability: owners with the authority</a:t>
+              <a:t>enough staffing capacity</a:t>
             </a:r>
             <a:endParaRPr lang="en-US" sz="2600" dirty="0"/>
           </a:p>
@@ -19350,24 +20136,26 @@
       </p:sp>
       <p:sp>
         <p:nvSpPr>
-          <p:cNvPr id="15" name="Shape 9"/>
+          <p:cNvPr id="18" name="Shape 13"/>
           <p:cNvSpPr/>
           <p:nvPr/>
         </p:nvSpPr>
         <p:spPr>
           <a:xfrm>
-            <a:off x="548640" y="5591556"/>
-            <a:ext cx="640080" cy="640080"/>
-          </a:xfrm>
-          <a:prstGeom prst="ellipse">
-            <a:avLst/>
+            <a:off x="548640" y="5623560"/>
+            <a:ext cx="11091672" cy="777240"/>
+          </a:xfrm>
+          <a:prstGeom prst="roundRect">
+            <a:avLst>
+              <a:gd name="adj" fmla="val 11765"/>
+            </a:avLst>
           </a:prstGeom>
           <a:solidFill>
-            <a:srgbClr val="1A5C2C"/>
+            <a:srgbClr val="0F3B1C"/>
           </a:solidFill>
           <a:ln w="12700">
             <a:solidFill>
-              <a:srgbClr val="1A5C2C"/>
+              <a:srgbClr val="0F3B1C"/>
             </a:solidFill>
             <a:prstDash val="solid"/>
           </a:ln>
@@ -19380,40 +20168,16 @@
           </a:p>
         </p:txBody>
       </p:sp>
-      <p:pic>
-        <p:nvPicPr>
-          <p:cNvPr id="16" name="Image 4" descr="preencoded.png"/>
-          <p:cNvPicPr>
-            <a:picLocks noChangeAspect="1"/>
-          </p:cNvPicPr>
-          <p:nvPr/>
-        </p:nvPicPr>
-        <p:blipFill>
-          <a:blip r:embed="rId6"/>
-          <a:stretch>
-            <a:fillRect/>
-          </a:stretch>
-        </p:blipFill>
-        <p:spPr>
-          <a:xfrm>
-            <a:off x="708660" y="5751576"/>
-            <a:ext cx="320040" cy="320040"/>
-          </a:xfrm>
-          <a:prstGeom prst="rect">
-            <a:avLst/>
-          </a:prstGeom>
-        </p:spPr>
-      </p:pic>
-      <p:sp>
-        <p:nvSpPr>
-          <p:cNvPr id="17" name="Text 10"/>
+      <p:sp>
+        <p:nvSpPr>
+          <p:cNvPr id="19" name="Text 14"/>
           <p:cNvSpPr txBox="1"/>
           <p:nvPr/>
         </p:nvSpPr>
         <p:spPr>
           <a:xfrm>
-            <a:off x="1508760" y="5422392"/>
-            <a:ext cx="10131552" cy="978408"/>
+            <a:off x="822960" y="5623560"/>
+            <a:ext cx="10607040" cy="777240"/>
           </a:xfrm>
           <a:prstGeom prst="rect">
             <a:avLst/>
@@ -19429,28 +20193,17 @@
               <a:buNone/>
             </a:pPr>
             <a:r>
-              <a:rPr lang="en-US" sz="2600" b="1" dirty="0">
-                <a:solidFill>
-                  <a:srgbClr val="1A5C2C"/>
-                </a:solidFill>
-                <a:latin typeface="Cambria" pitchFamily="34" charset="0"/>
-                <a:ea typeface="Cambria" pitchFamily="34" charset="-122"/>
-                <a:cs typeface="Cambria" pitchFamily="34" charset="-120"/>
-              </a:rPr>
-              <a:t>S  </a:t>
-            </a:r>
-            <a:r>
-              <a:rPr lang="en-US" sz="2600" dirty="0">
-                <a:solidFill>
-                  <a:srgbClr val="1F2A22"/>
+              <a:rPr lang="en-US" sz="2400" i="1" dirty="0">
+                <a:solidFill>
+                  <a:srgbClr val="FFFFFF"/>
                 </a:solidFill>
                 <a:latin typeface="Calibri" pitchFamily="34" charset="0"/>
                 <a:ea typeface="Calibri" pitchFamily="34" charset="-122"/>
                 <a:cs typeface="Calibri" pitchFamily="34" charset="-120"/>
               </a:rPr>
-              <a:t>Development: capability and conditions improve</a:t>
-            </a:r>
-            <a:endParaRPr lang="en-US" sz="2600" dirty="0"/>
+              <a:t>Key Result: 48-hour resolution from 65% to 90% by year-end</a:t>
+            </a:r>
+            <a:endParaRPr lang="en-US" sz="2400" dirty="0"/>
           </a:p>
         </p:txBody>
       </p:sp>
@@ -20065,6 +20818,1170 @@
 </file>
 
 <file path=ppt/slides/slide30.xml><?xml version="1.0" encoding="utf-8"?>
+<p:sld xmlns:a="http://schemas.openxmlformats.org/drawingml/2006/main" xmlns:p="http://schemas.openxmlformats.org/presentationml/2006/main" xmlns:r="http://schemas.openxmlformats.org/officeDocument/2006/relationships">
+  <p:cSld>
+    <p:bg>
+      <p:bgPr>
+        <a:solidFill>
+          <a:srgbClr val="FFFFFF"/>
+        </a:solidFill>
+        <a:effectLst/>
+      </p:bgPr>
+    </p:bg>
+    <p:spTree>
+      <p:nvGrpSpPr>
+        <p:cNvPr id="1" name=""/>
+        <p:cNvGrpSpPr/>
+        <p:nvPr/>
+      </p:nvGrpSpPr>
+      <p:grpSpPr/>
+      <p:sp>
+        <p:nvSpPr>
+          <p:cNvPr id="2" name="Text 0"/>
+          <p:cNvSpPr txBox="1"/>
+          <p:nvPr/>
+        </p:nvSpPr>
+        <p:spPr>
+          <a:xfrm>
+            <a:off x="548640" y="411480"/>
+            <a:ext cx="11064240" cy="868680"/>
+          </a:xfrm>
+          <a:prstGeom prst="rect">
+            <a:avLst/>
+          </a:prstGeom>
+          <a:noFill/>
+          <a:ln/>
+        </p:spPr>
+        <p:txBody>
+          <a:bodyPr wrap="square" lIns="0" tIns="0" rIns="0" bIns="0" rtlCol="0" anchor="ctr"/>
+          <a:lstStyle/>
+          <a:p>
+            <a:pPr marL="0" indent="0">
+              <a:buNone/>
+            </a:pPr>
+            <a:r>
+              <a:rPr lang="en-US" sz="3600" b="1" dirty="0">
+                <a:solidFill>
+                  <a:srgbClr val="1A5C2C"/>
+                </a:solidFill>
+                <a:latin typeface="Cambria" pitchFamily="34" charset="0"/>
+                <a:ea typeface="Cambria" pitchFamily="34" charset="-122"/>
+                <a:cs typeface="Cambria" pitchFamily="34" charset="-120"/>
+              </a:rPr>
+              <a:t>4.1 · Interpreting the Contribution Map</a:t>
+            </a:r>
+            <a:endParaRPr lang="en-US" sz="3600" dirty="0"/>
+          </a:p>
+        </p:txBody>
+      </p:sp>
+      <p:sp>
+        <p:nvSpPr>
+          <p:cNvPr id="3" name="Shape 1"/>
+          <p:cNvSpPr/>
+          <p:nvPr/>
+        </p:nvSpPr>
+        <p:spPr>
+          <a:xfrm>
+            <a:off x="548640" y="1508760"/>
+            <a:ext cx="3514344" cy="4846320"/>
+          </a:xfrm>
+          <a:prstGeom prst="roundRect">
+            <a:avLst>
+              <a:gd name="adj" fmla="val 2602"/>
+            </a:avLst>
+          </a:prstGeom>
+          <a:solidFill>
+            <a:srgbClr val="EEF4EF"/>
+          </a:solidFill>
+          <a:ln w="12700">
+            <a:solidFill>
+              <a:srgbClr val="EEF4EF"/>
+            </a:solidFill>
+            <a:prstDash val="solid"/>
+          </a:ln>
+        </p:spPr>
+        <p:txBody>
+          <a:bodyPr/>
+          <a:lstStyle/>
+          <a:p>
+            <a:endParaRPr lang="en-ZA"/>
+          </a:p>
+        </p:txBody>
+      </p:sp>
+      <p:sp>
+        <p:nvSpPr>
+          <p:cNvPr id="4" name="Shape 2"/>
+          <p:cNvSpPr/>
+          <p:nvPr/>
+        </p:nvSpPr>
+        <p:spPr>
+          <a:xfrm>
+            <a:off x="777240" y="1737360"/>
+            <a:ext cx="640080" cy="640080"/>
+          </a:xfrm>
+          <a:prstGeom prst="ellipse">
+            <a:avLst/>
+          </a:prstGeom>
+          <a:solidFill>
+            <a:srgbClr val="1A5C2C"/>
+          </a:solidFill>
+          <a:ln w="12700">
+            <a:solidFill>
+              <a:srgbClr val="1A5C2C"/>
+            </a:solidFill>
+            <a:prstDash val="solid"/>
+          </a:ln>
+        </p:spPr>
+        <p:txBody>
+          <a:bodyPr/>
+          <a:lstStyle/>
+          <a:p>
+            <a:endParaRPr lang="en-ZA"/>
+          </a:p>
+        </p:txBody>
+      </p:sp>
+      <p:pic>
+        <p:nvPicPr>
+          <p:cNvPr id="5" name="Image 0" descr="preencoded.png"/>
+          <p:cNvPicPr>
+            <a:picLocks noChangeAspect="1"/>
+          </p:cNvPicPr>
+          <p:nvPr/>
+        </p:nvPicPr>
+        <p:blipFill>
+          <a:blip r:embed="rId2"/>
+          <a:stretch>
+            <a:fillRect/>
+          </a:stretch>
+        </p:blipFill>
+        <p:spPr>
+          <a:xfrm>
+            <a:off x="937260" y="1897380"/>
+            <a:ext cx="320040" cy="320040"/>
+          </a:xfrm>
+          <a:prstGeom prst="rect">
+            <a:avLst/>
+          </a:prstGeom>
+        </p:spPr>
+      </p:pic>
+      <p:sp>
+        <p:nvSpPr>
+          <p:cNvPr id="6" name="Text 3"/>
+          <p:cNvSpPr txBox="1"/>
+          <p:nvPr/>
+        </p:nvSpPr>
+        <p:spPr>
+          <a:xfrm>
+            <a:off x="777240" y="2514600"/>
+            <a:ext cx="3057144" cy="923544"/>
+          </a:xfrm>
+          <a:prstGeom prst="rect">
+            <a:avLst/>
+          </a:prstGeom>
+          <a:noFill/>
+          <a:ln/>
+        </p:spPr>
+        <p:txBody>
+          <a:bodyPr wrap="square" lIns="0" tIns="0" rIns="0" bIns="0" rtlCol="0" anchor="t"/>
+          <a:lstStyle/>
+          <a:p>
+            <a:pPr marL="0" indent="0">
+              <a:buNone/>
+            </a:pPr>
+            <a:r>
+              <a:rPr lang="en-US" sz="2600" b="1" dirty="0">
+                <a:solidFill>
+                  <a:srgbClr val="1A5C2C"/>
+                </a:solidFill>
+                <a:latin typeface="Cambria" pitchFamily="34" charset="0"/>
+                <a:ea typeface="Cambria" pitchFamily="34" charset="-122"/>
+                <a:cs typeface="Cambria" pitchFamily="34" charset="-120"/>
+              </a:rPr>
+              <a:t>1 · Function</a:t>
+            </a:r>
+            <a:endParaRPr lang="en-US" sz="2600" dirty="0"/>
+          </a:p>
+        </p:txBody>
+      </p:sp>
+      <p:sp>
+        <p:nvSpPr>
+          <p:cNvPr id="7" name="Text 4"/>
+          <p:cNvSpPr txBox="1"/>
+          <p:nvPr/>
+        </p:nvSpPr>
+        <p:spPr>
+          <a:xfrm>
+            <a:off x="777240" y="3575304"/>
+            <a:ext cx="3057144" cy="2642616"/>
+          </a:xfrm>
+          <a:prstGeom prst="rect">
+            <a:avLst/>
+          </a:prstGeom>
+          <a:noFill/>
+          <a:ln/>
+        </p:spPr>
+        <p:txBody>
+          <a:bodyPr wrap="square" lIns="0" tIns="0" rIns="0" bIns="0" rtlCol="0" anchor="t"/>
+          <a:lstStyle/>
+          <a:p>
+            <a:pPr marL="0" indent="0">
+              <a:buNone/>
+            </a:pPr>
+            <a:r>
+              <a:rPr lang="en-US" sz="2400" dirty="0">
+                <a:solidFill>
+                  <a:srgbClr val="1F2A22"/>
+                </a:solidFill>
+                <a:latin typeface="Calibri" pitchFamily="34" charset="0"/>
+                <a:ea typeface="Calibri" pitchFamily="34" charset="-122"/>
+                <a:cs typeface="Calibri" pitchFamily="34" charset="-120"/>
+              </a:rPr>
+              <a:t>What must the function deliver?</a:t>
+            </a:r>
+            <a:endParaRPr lang="en-US" sz="2400" dirty="0"/>
+          </a:p>
+        </p:txBody>
+      </p:sp>
+      <p:sp>
+        <p:nvSpPr>
+          <p:cNvPr id="8" name="Shape 5"/>
+          <p:cNvSpPr/>
+          <p:nvPr/>
+        </p:nvSpPr>
+        <p:spPr>
+          <a:xfrm>
+            <a:off x="4337304" y="1508760"/>
+            <a:ext cx="3514344" cy="4846320"/>
+          </a:xfrm>
+          <a:prstGeom prst="roundRect">
+            <a:avLst>
+              <a:gd name="adj" fmla="val 2602"/>
+            </a:avLst>
+          </a:prstGeom>
+          <a:solidFill>
+            <a:srgbClr val="EEF4EF"/>
+          </a:solidFill>
+          <a:ln w="12700">
+            <a:solidFill>
+              <a:srgbClr val="EEF4EF"/>
+            </a:solidFill>
+            <a:prstDash val="solid"/>
+          </a:ln>
+        </p:spPr>
+        <p:txBody>
+          <a:bodyPr/>
+          <a:lstStyle/>
+          <a:p>
+            <a:endParaRPr lang="en-ZA"/>
+          </a:p>
+        </p:txBody>
+      </p:sp>
+      <p:sp>
+        <p:nvSpPr>
+          <p:cNvPr id="9" name="Shape 6"/>
+          <p:cNvSpPr/>
+          <p:nvPr/>
+        </p:nvSpPr>
+        <p:spPr>
+          <a:xfrm>
+            <a:off x="4565904" y="1737360"/>
+            <a:ext cx="640080" cy="640080"/>
+          </a:xfrm>
+          <a:prstGeom prst="ellipse">
+            <a:avLst/>
+          </a:prstGeom>
+          <a:solidFill>
+            <a:srgbClr val="1A5C2C"/>
+          </a:solidFill>
+          <a:ln w="12700">
+            <a:solidFill>
+              <a:srgbClr val="1A5C2C"/>
+            </a:solidFill>
+            <a:prstDash val="solid"/>
+          </a:ln>
+        </p:spPr>
+        <p:txBody>
+          <a:bodyPr/>
+          <a:lstStyle/>
+          <a:p>
+            <a:endParaRPr lang="en-ZA"/>
+          </a:p>
+        </p:txBody>
+      </p:sp>
+      <p:pic>
+        <p:nvPicPr>
+          <p:cNvPr id="10" name="Image 1" descr="preencoded.png"/>
+          <p:cNvPicPr>
+            <a:picLocks noChangeAspect="1"/>
+          </p:cNvPicPr>
+          <p:nvPr/>
+        </p:nvPicPr>
+        <p:blipFill>
+          <a:blip r:embed="rId3"/>
+          <a:stretch>
+            <a:fillRect/>
+          </a:stretch>
+        </p:blipFill>
+        <p:spPr>
+          <a:xfrm>
+            <a:off x="4725924" y="1897380"/>
+            <a:ext cx="320040" cy="320040"/>
+          </a:xfrm>
+          <a:prstGeom prst="rect">
+            <a:avLst/>
+          </a:prstGeom>
+        </p:spPr>
+      </p:pic>
+      <p:sp>
+        <p:nvSpPr>
+          <p:cNvPr id="11" name="Text 7"/>
+          <p:cNvSpPr txBox="1"/>
+          <p:nvPr/>
+        </p:nvSpPr>
+        <p:spPr>
+          <a:xfrm>
+            <a:off x="4565904" y="2514600"/>
+            <a:ext cx="3057144" cy="923544"/>
+          </a:xfrm>
+          <a:prstGeom prst="rect">
+            <a:avLst/>
+          </a:prstGeom>
+          <a:noFill/>
+          <a:ln/>
+        </p:spPr>
+        <p:txBody>
+          <a:bodyPr wrap="square" lIns="0" tIns="0" rIns="0" bIns="0" rtlCol="0" anchor="t"/>
+          <a:lstStyle/>
+          <a:p>
+            <a:pPr marL="0" indent="0">
+              <a:buNone/>
+            </a:pPr>
+            <a:r>
+              <a:rPr lang="en-US" sz="2600" b="1" dirty="0">
+                <a:solidFill>
+                  <a:srgbClr val="1A5C2C"/>
+                </a:solidFill>
+                <a:latin typeface="Cambria" pitchFamily="34" charset="0"/>
+                <a:ea typeface="Cambria" pitchFamily="34" charset="-122"/>
+                <a:cs typeface="Cambria" pitchFamily="34" charset="-120"/>
+              </a:rPr>
+              <a:t>2 · People performance</a:t>
+            </a:r>
+            <a:endParaRPr lang="en-US" sz="2600" dirty="0"/>
+          </a:p>
+        </p:txBody>
+      </p:sp>
+      <p:sp>
+        <p:nvSpPr>
+          <p:cNvPr id="12" name="Text 8"/>
+          <p:cNvSpPr txBox="1"/>
+          <p:nvPr/>
+        </p:nvSpPr>
+        <p:spPr>
+          <a:xfrm>
+            <a:off x="4565904" y="3575304"/>
+            <a:ext cx="3057144" cy="2642616"/>
+          </a:xfrm>
+          <a:prstGeom prst="rect">
+            <a:avLst/>
+          </a:prstGeom>
+          <a:noFill/>
+          <a:ln/>
+        </p:spPr>
+        <p:txBody>
+          <a:bodyPr wrap="square" lIns="0" tIns="0" rIns="0" bIns="0" rtlCol="0" anchor="t"/>
+          <a:lstStyle/>
+          <a:p>
+            <a:pPr marL="0" indent="0">
+              <a:buNone/>
+            </a:pPr>
+            <a:r>
+              <a:rPr lang="en-US" sz="2400" dirty="0">
+                <a:solidFill>
+                  <a:srgbClr val="1F2A22"/>
+                </a:solidFill>
+                <a:latin typeface="Calibri" pitchFamily="34" charset="0"/>
+                <a:ea typeface="Calibri" pitchFamily="34" charset="-122"/>
+                <a:cs typeface="Calibri" pitchFamily="34" charset="-120"/>
+              </a:rPr>
+              <a:t>What must individuals and teams deliver?</a:t>
+            </a:r>
+            <a:endParaRPr lang="en-US" sz="2400" dirty="0"/>
+          </a:p>
+        </p:txBody>
+      </p:sp>
+      <p:sp>
+        <p:nvSpPr>
+          <p:cNvPr id="13" name="Shape 9"/>
+          <p:cNvSpPr/>
+          <p:nvPr/>
+        </p:nvSpPr>
+        <p:spPr>
+          <a:xfrm>
+            <a:off x="8125968" y="1508760"/>
+            <a:ext cx="3514344" cy="4846320"/>
+          </a:xfrm>
+          <a:prstGeom prst="roundRect">
+            <a:avLst>
+              <a:gd name="adj" fmla="val 2602"/>
+            </a:avLst>
+          </a:prstGeom>
+          <a:solidFill>
+            <a:srgbClr val="EEF4EF"/>
+          </a:solidFill>
+          <a:ln w="12700">
+            <a:solidFill>
+              <a:srgbClr val="EEF4EF"/>
+            </a:solidFill>
+            <a:prstDash val="solid"/>
+          </a:ln>
+        </p:spPr>
+        <p:txBody>
+          <a:bodyPr/>
+          <a:lstStyle/>
+          <a:p>
+            <a:endParaRPr lang="en-ZA"/>
+          </a:p>
+        </p:txBody>
+      </p:sp>
+      <p:sp>
+        <p:nvSpPr>
+          <p:cNvPr id="14" name="Shape 10"/>
+          <p:cNvSpPr/>
+          <p:nvPr/>
+        </p:nvSpPr>
+        <p:spPr>
+          <a:xfrm>
+            <a:off x="8354568" y="1737360"/>
+            <a:ext cx="640080" cy="640080"/>
+          </a:xfrm>
+          <a:prstGeom prst="ellipse">
+            <a:avLst/>
+          </a:prstGeom>
+          <a:solidFill>
+            <a:srgbClr val="1A5C2C"/>
+          </a:solidFill>
+          <a:ln w="12700">
+            <a:solidFill>
+              <a:srgbClr val="1A5C2C"/>
+            </a:solidFill>
+            <a:prstDash val="solid"/>
+          </a:ln>
+        </p:spPr>
+        <p:txBody>
+          <a:bodyPr/>
+          <a:lstStyle/>
+          <a:p>
+            <a:endParaRPr lang="en-ZA"/>
+          </a:p>
+        </p:txBody>
+      </p:sp>
+      <p:pic>
+        <p:nvPicPr>
+          <p:cNvPr id="15" name="Image 2" descr="preencoded.png"/>
+          <p:cNvPicPr>
+            <a:picLocks noChangeAspect="1"/>
+          </p:cNvPicPr>
+          <p:nvPr/>
+        </p:nvPicPr>
+        <p:blipFill>
+          <a:blip r:embed="rId4"/>
+          <a:stretch>
+            <a:fillRect/>
+          </a:stretch>
+        </p:blipFill>
+        <p:spPr>
+          <a:xfrm>
+            <a:off x="8514588" y="1897380"/>
+            <a:ext cx="320040" cy="320040"/>
+          </a:xfrm>
+          <a:prstGeom prst="rect">
+            <a:avLst/>
+          </a:prstGeom>
+        </p:spPr>
+      </p:pic>
+      <p:sp>
+        <p:nvSpPr>
+          <p:cNvPr id="16" name="Text 11"/>
+          <p:cNvSpPr txBox="1"/>
+          <p:nvPr/>
+        </p:nvSpPr>
+        <p:spPr>
+          <a:xfrm>
+            <a:off x="8354568" y="2514600"/>
+            <a:ext cx="3057144" cy="923544"/>
+          </a:xfrm>
+          <a:prstGeom prst="rect">
+            <a:avLst/>
+          </a:prstGeom>
+          <a:noFill/>
+          <a:ln/>
+        </p:spPr>
+        <p:txBody>
+          <a:bodyPr wrap="square" lIns="0" tIns="0" rIns="0" bIns="0" rtlCol="0" anchor="t"/>
+          <a:lstStyle/>
+          <a:p>
+            <a:pPr marL="0" indent="0">
+              <a:buNone/>
+            </a:pPr>
+            <a:r>
+              <a:rPr lang="en-US" sz="2600" b="1" dirty="0">
+                <a:solidFill>
+                  <a:srgbClr val="1A5C2C"/>
+                </a:solidFill>
+                <a:latin typeface="Cambria" pitchFamily="34" charset="0"/>
+                <a:ea typeface="Cambria" pitchFamily="34" charset="-122"/>
+                <a:cs typeface="Cambria" pitchFamily="34" charset="-120"/>
+              </a:rPr>
+              <a:t>3 · Organisational performance</a:t>
+            </a:r>
+            <a:endParaRPr lang="en-US" sz="2600" dirty="0"/>
+          </a:p>
+        </p:txBody>
+      </p:sp>
+      <p:sp>
+        <p:nvSpPr>
+          <p:cNvPr id="17" name="Text 12"/>
+          <p:cNvSpPr txBox="1"/>
+          <p:nvPr/>
+        </p:nvSpPr>
+        <p:spPr>
+          <a:xfrm>
+            <a:off x="8354568" y="3931920"/>
+            <a:ext cx="3057144" cy="1317538"/>
+          </a:xfrm>
+          <a:prstGeom prst="rect">
+            <a:avLst/>
+          </a:prstGeom>
+          <a:noFill/>
+          <a:ln/>
+        </p:spPr>
+        <p:txBody>
+          <a:bodyPr wrap="square" lIns="0" tIns="0" rIns="0" bIns="0" rtlCol="0" anchor="t"/>
+          <a:lstStyle/>
+          <a:p>
+            <a:pPr marL="0" indent="0">
+              <a:buNone/>
+            </a:pPr>
+            <a:r>
+              <a:rPr lang="en-US" sz="2400" dirty="0">
+                <a:solidFill>
+                  <a:srgbClr val="1F2A22"/>
+                </a:solidFill>
+                <a:latin typeface="Calibri" pitchFamily="34" charset="0"/>
+                <a:ea typeface="Calibri" pitchFamily="34" charset="-122"/>
+                <a:cs typeface="Calibri" pitchFamily="34" charset="-120"/>
+              </a:rPr>
+              <a:t>What conditions must the organisation provide?</a:t>
+            </a:r>
+            <a:endParaRPr lang="en-US" sz="2400" dirty="0"/>
+          </a:p>
+        </p:txBody>
+      </p:sp>
+    </p:spTree>
+  </p:cSld>
+  <p:clrMapOvr>
+    <a:masterClrMapping/>
+  </p:clrMapOvr>
+</p:sld>
+</file>
+
+<file path=ppt/slides/slide31.xml><?xml version="1.0" encoding="utf-8"?>
+<p:sld xmlns:a="http://schemas.openxmlformats.org/drawingml/2006/main" xmlns:p="http://schemas.openxmlformats.org/presentationml/2006/main" xmlns:r="http://schemas.openxmlformats.org/officeDocument/2006/relationships">
+  <p:cSld>
+    <p:bg>
+      <p:bgPr>
+        <a:solidFill>
+          <a:srgbClr val="FFFFFF"/>
+        </a:solidFill>
+        <a:effectLst/>
+      </p:bgPr>
+    </p:bg>
+    <p:spTree>
+      <p:nvGrpSpPr>
+        <p:cNvPr id="1" name=""/>
+        <p:cNvGrpSpPr/>
+        <p:nvPr/>
+      </p:nvGrpSpPr>
+      <p:grpSpPr/>
+      <p:sp>
+        <p:nvSpPr>
+          <p:cNvPr id="2" name="Text 0"/>
+          <p:cNvSpPr txBox="1"/>
+          <p:nvPr/>
+        </p:nvSpPr>
+        <p:spPr>
+          <a:xfrm>
+            <a:off x="548640" y="411480"/>
+            <a:ext cx="11064240" cy="868680"/>
+          </a:xfrm>
+          <a:prstGeom prst="rect">
+            <a:avLst/>
+          </a:prstGeom>
+          <a:noFill/>
+          <a:ln/>
+        </p:spPr>
+        <p:txBody>
+          <a:bodyPr wrap="square" lIns="0" tIns="0" rIns="0" bIns="0" rtlCol="0" anchor="ctr"/>
+          <a:lstStyle/>
+          <a:p>
+            <a:pPr marL="0" indent="0">
+              <a:buNone/>
+            </a:pPr>
+            <a:r>
+              <a:rPr lang="en-US" sz="3600" b="1" dirty="0">
+                <a:solidFill>
+                  <a:srgbClr val="1A5C2C"/>
+                </a:solidFill>
+                <a:latin typeface="Cambria" pitchFamily="34" charset="0"/>
+                <a:ea typeface="Cambria" pitchFamily="34" charset="-122"/>
+                <a:cs typeface="Cambria" pitchFamily="34" charset="-120"/>
+              </a:rPr>
+              <a:t>4.2 · Managing the contributions through FACES</a:t>
+            </a:r>
+            <a:endParaRPr lang="en-US" sz="3600" dirty="0"/>
+          </a:p>
+        </p:txBody>
+      </p:sp>
+      <p:sp>
+        <p:nvSpPr>
+          <p:cNvPr id="3" name="Shape 1"/>
+          <p:cNvSpPr/>
+          <p:nvPr/>
+        </p:nvSpPr>
+        <p:spPr>
+          <a:xfrm>
+            <a:off x="548640" y="1677924"/>
+            <a:ext cx="640080" cy="640080"/>
+          </a:xfrm>
+          <a:prstGeom prst="ellipse">
+            <a:avLst/>
+          </a:prstGeom>
+          <a:solidFill>
+            <a:srgbClr val="1A5C2C"/>
+          </a:solidFill>
+          <a:ln w="12700">
+            <a:solidFill>
+              <a:srgbClr val="1A5C2C"/>
+            </a:solidFill>
+            <a:prstDash val="solid"/>
+          </a:ln>
+        </p:spPr>
+        <p:txBody>
+          <a:bodyPr/>
+          <a:lstStyle/>
+          <a:p>
+            <a:endParaRPr lang="en-ZA"/>
+          </a:p>
+        </p:txBody>
+      </p:sp>
+      <p:pic>
+        <p:nvPicPr>
+          <p:cNvPr id="4" name="Image 0" descr="preencoded.png"/>
+          <p:cNvPicPr>
+            <a:picLocks noChangeAspect="1"/>
+          </p:cNvPicPr>
+          <p:nvPr/>
+        </p:nvPicPr>
+        <p:blipFill>
+          <a:blip r:embed="rId2"/>
+          <a:stretch>
+            <a:fillRect/>
+          </a:stretch>
+        </p:blipFill>
+        <p:spPr>
+          <a:xfrm>
+            <a:off x="708660" y="1837944"/>
+            <a:ext cx="320040" cy="320040"/>
+          </a:xfrm>
+          <a:prstGeom prst="rect">
+            <a:avLst/>
+          </a:prstGeom>
+        </p:spPr>
+      </p:pic>
+      <p:sp>
+        <p:nvSpPr>
+          <p:cNvPr id="5" name="Text 2"/>
+          <p:cNvSpPr txBox="1"/>
+          <p:nvPr/>
+        </p:nvSpPr>
+        <p:spPr>
+          <a:xfrm>
+            <a:off x="1508760" y="1508760"/>
+            <a:ext cx="10131552" cy="978408"/>
+          </a:xfrm>
+          <a:prstGeom prst="rect">
+            <a:avLst/>
+          </a:prstGeom>
+          <a:noFill/>
+          <a:ln/>
+        </p:spPr>
+        <p:txBody>
+          <a:bodyPr wrap="square" lIns="0" tIns="0" rIns="0" bIns="0" rtlCol="0" anchor="ctr"/>
+          <a:lstStyle/>
+          <a:p>
+            <a:pPr marL="0" indent="0">
+              <a:buNone/>
+            </a:pPr>
+            <a:r>
+              <a:rPr lang="en-US" sz="2600" b="1" dirty="0">
+                <a:solidFill>
+                  <a:srgbClr val="1A5C2C"/>
+                </a:solidFill>
+                <a:latin typeface="Cambria" pitchFamily="34" charset="0"/>
+                <a:ea typeface="Cambria" pitchFamily="34" charset="-122"/>
+                <a:cs typeface="Cambria" pitchFamily="34" charset="-120"/>
+              </a:rPr>
+              <a:t>F  </a:t>
+            </a:r>
+            <a:r>
+              <a:rPr lang="en-US" sz="2600" dirty="0">
+                <a:solidFill>
+                  <a:srgbClr val="1F2A22"/>
+                </a:solidFill>
+                <a:latin typeface="Calibri" pitchFamily="34" charset="0"/>
+                <a:ea typeface="Calibri" pitchFamily="34" charset="-122"/>
+                <a:cs typeface="Calibri" pitchFamily="34" charset="-120"/>
+              </a:rPr>
+              <a:t>Foster: commitments and obstacles discussed openly</a:t>
+            </a:r>
+            <a:endParaRPr lang="en-US" sz="2600" dirty="0"/>
+          </a:p>
+        </p:txBody>
+      </p:sp>
+      <p:sp>
+        <p:nvSpPr>
+          <p:cNvPr id="6" name="Shape 3"/>
+          <p:cNvSpPr/>
+          <p:nvPr/>
+        </p:nvSpPr>
+        <p:spPr>
+          <a:xfrm>
+            <a:off x="548640" y="2656332"/>
+            <a:ext cx="640080" cy="640080"/>
+          </a:xfrm>
+          <a:prstGeom prst="ellipse">
+            <a:avLst/>
+          </a:prstGeom>
+          <a:solidFill>
+            <a:srgbClr val="1A5C2C"/>
+          </a:solidFill>
+          <a:ln w="12700">
+            <a:solidFill>
+              <a:srgbClr val="1A5C2C"/>
+            </a:solidFill>
+            <a:prstDash val="solid"/>
+          </a:ln>
+        </p:spPr>
+        <p:txBody>
+          <a:bodyPr/>
+          <a:lstStyle/>
+          <a:p>
+            <a:endParaRPr lang="en-ZA"/>
+          </a:p>
+        </p:txBody>
+      </p:sp>
+      <p:pic>
+        <p:nvPicPr>
+          <p:cNvPr id="7" name="Image 1" descr="preencoded.png"/>
+          <p:cNvPicPr>
+            <a:picLocks noChangeAspect="1"/>
+          </p:cNvPicPr>
+          <p:nvPr/>
+        </p:nvPicPr>
+        <p:blipFill>
+          <a:blip r:embed="rId3"/>
+          <a:stretch>
+            <a:fillRect/>
+          </a:stretch>
+        </p:blipFill>
+        <p:spPr>
+          <a:xfrm>
+            <a:off x="708660" y="2816352"/>
+            <a:ext cx="320040" cy="320040"/>
+          </a:xfrm>
+          <a:prstGeom prst="rect">
+            <a:avLst/>
+          </a:prstGeom>
+        </p:spPr>
+      </p:pic>
+      <p:sp>
+        <p:nvSpPr>
+          <p:cNvPr id="8" name="Text 4"/>
+          <p:cNvSpPr txBox="1"/>
+          <p:nvPr/>
+        </p:nvSpPr>
+        <p:spPr>
+          <a:xfrm>
+            <a:off x="1508760" y="2487168"/>
+            <a:ext cx="10131552" cy="978408"/>
+          </a:xfrm>
+          <a:prstGeom prst="rect">
+            <a:avLst/>
+          </a:prstGeom>
+          <a:noFill/>
+          <a:ln/>
+        </p:spPr>
+        <p:txBody>
+          <a:bodyPr wrap="square" lIns="0" tIns="0" rIns="0" bIns="0" rtlCol="0" anchor="ctr"/>
+          <a:lstStyle/>
+          <a:p>
+            <a:pPr marL="0" indent="0">
+              <a:buNone/>
+            </a:pPr>
+            <a:r>
+              <a:rPr lang="en-US" sz="2600" b="1" dirty="0">
+                <a:solidFill>
+                  <a:srgbClr val="1A5C2C"/>
+                </a:solidFill>
+                <a:latin typeface="Cambria" pitchFamily="34" charset="0"/>
+                <a:ea typeface="Cambria" pitchFamily="34" charset="-122"/>
+                <a:cs typeface="Cambria" pitchFamily="34" charset="-120"/>
+              </a:rPr>
+              <a:t>A  </a:t>
+            </a:r>
+            <a:r>
+              <a:rPr lang="en-US" sz="2600" dirty="0">
+                <a:solidFill>
+                  <a:srgbClr val="1F2A22"/>
+                </a:solidFill>
+                <a:latin typeface="Calibri" pitchFamily="34" charset="0"/>
+                <a:ea typeface="Calibri" pitchFamily="34" charset="-122"/>
+                <a:cs typeface="Calibri" pitchFamily="34" charset="-120"/>
+              </a:rPr>
+              <a:t>Align: tied to the enterprise Key Result</a:t>
+            </a:r>
+            <a:endParaRPr lang="en-US" sz="2600" dirty="0"/>
+          </a:p>
+        </p:txBody>
+      </p:sp>
+      <p:sp>
+        <p:nvSpPr>
+          <p:cNvPr id="9" name="Shape 5"/>
+          <p:cNvSpPr/>
+          <p:nvPr/>
+        </p:nvSpPr>
+        <p:spPr>
+          <a:xfrm>
+            <a:off x="548640" y="3634740"/>
+            <a:ext cx="640080" cy="640080"/>
+          </a:xfrm>
+          <a:prstGeom prst="ellipse">
+            <a:avLst/>
+          </a:prstGeom>
+          <a:solidFill>
+            <a:srgbClr val="1A5C2C"/>
+          </a:solidFill>
+          <a:ln w="12700">
+            <a:solidFill>
+              <a:srgbClr val="1A5C2C"/>
+            </a:solidFill>
+            <a:prstDash val="solid"/>
+          </a:ln>
+        </p:spPr>
+        <p:txBody>
+          <a:bodyPr/>
+          <a:lstStyle/>
+          <a:p>
+            <a:endParaRPr lang="en-ZA"/>
+          </a:p>
+        </p:txBody>
+      </p:sp>
+      <p:pic>
+        <p:nvPicPr>
+          <p:cNvPr id="10" name="Image 2" descr="preencoded.png"/>
+          <p:cNvPicPr>
+            <a:picLocks noChangeAspect="1"/>
+          </p:cNvPicPr>
+          <p:nvPr/>
+        </p:nvPicPr>
+        <p:blipFill>
+          <a:blip r:embed="rId4"/>
+          <a:stretch>
+            <a:fillRect/>
+          </a:stretch>
+        </p:blipFill>
+        <p:spPr>
+          <a:xfrm>
+            <a:off x="708660" y="3794760"/>
+            <a:ext cx="320040" cy="320040"/>
+          </a:xfrm>
+          <a:prstGeom prst="rect">
+            <a:avLst/>
+          </a:prstGeom>
+        </p:spPr>
+      </p:pic>
+      <p:sp>
+        <p:nvSpPr>
+          <p:cNvPr id="11" name="Text 6"/>
+          <p:cNvSpPr txBox="1"/>
+          <p:nvPr/>
+        </p:nvSpPr>
+        <p:spPr>
+          <a:xfrm>
+            <a:off x="1508760" y="3465576"/>
+            <a:ext cx="10131552" cy="978408"/>
+          </a:xfrm>
+          <a:prstGeom prst="rect">
+            <a:avLst/>
+          </a:prstGeom>
+          <a:noFill/>
+          <a:ln/>
+        </p:spPr>
+        <p:txBody>
+          <a:bodyPr wrap="square" lIns="0" tIns="0" rIns="0" bIns="0" rtlCol="0" anchor="ctr"/>
+          <a:lstStyle/>
+          <a:p>
+            <a:pPr marL="0" indent="0">
+              <a:buNone/>
+            </a:pPr>
+            <a:r>
+              <a:rPr lang="en-US" sz="2600" b="1" dirty="0">
+                <a:solidFill>
+                  <a:srgbClr val="1A5C2C"/>
+                </a:solidFill>
+                <a:latin typeface="Cambria" pitchFamily="34" charset="0"/>
+                <a:ea typeface="Cambria" pitchFamily="34" charset="-122"/>
+                <a:cs typeface="Cambria" pitchFamily="34" charset="-120"/>
+              </a:rPr>
+              <a:t>C  </a:t>
+            </a:r>
+            <a:r>
+              <a:rPr lang="en-US" sz="2600" dirty="0">
+                <a:solidFill>
+                  <a:srgbClr val="1F2A22"/>
+                </a:solidFill>
+                <a:latin typeface="Calibri" pitchFamily="34" charset="0"/>
+                <a:ea typeface="Calibri" pitchFamily="34" charset="-122"/>
+                <a:cs typeface="Calibri" pitchFamily="34" charset="-120"/>
+              </a:rPr>
+              <a:t>Transparency: people and constraints visible</a:t>
+            </a:r>
+            <a:endParaRPr lang="en-US" sz="2600" dirty="0"/>
+          </a:p>
+        </p:txBody>
+      </p:sp>
+      <p:sp>
+        <p:nvSpPr>
+          <p:cNvPr id="12" name="Shape 7"/>
+          <p:cNvSpPr/>
+          <p:nvPr/>
+        </p:nvSpPr>
+        <p:spPr>
+          <a:xfrm>
+            <a:off x="548640" y="4613148"/>
+            <a:ext cx="640080" cy="640080"/>
+          </a:xfrm>
+          <a:prstGeom prst="ellipse">
+            <a:avLst/>
+          </a:prstGeom>
+          <a:solidFill>
+            <a:srgbClr val="1A5C2C"/>
+          </a:solidFill>
+          <a:ln w="12700">
+            <a:solidFill>
+              <a:srgbClr val="1A5C2C"/>
+            </a:solidFill>
+            <a:prstDash val="solid"/>
+          </a:ln>
+        </p:spPr>
+        <p:txBody>
+          <a:bodyPr/>
+          <a:lstStyle/>
+          <a:p>
+            <a:endParaRPr lang="en-ZA"/>
+          </a:p>
+        </p:txBody>
+      </p:sp>
+      <p:pic>
+        <p:nvPicPr>
+          <p:cNvPr id="13" name="Image 3" descr="preencoded.png"/>
+          <p:cNvPicPr>
+            <a:picLocks noChangeAspect="1"/>
+          </p:cNvPicPr>
+          <p:nvPr/>
+        </p:nvPicPr>
+        <p:blipFill>
+          <a:blip r:embed="rId5"/>
+          <a:stretch>
+            <a:fillRect/>
+          </a:stretch>
+        </p:blipFill>
+        <p:spPr>
+          <a:xfrm>
+            <a:off x="708660" y="4773168"/>
+            <a:ext cx="320040" cy="320040"/>
+          </a:xfrm>
+          <a:prstGeom prst="rect">
+            <a:avLst/>
+          </a:prstGeom>
+        </p:spPr>
+      </p:pic>
+      <p:sp>
+        <p:nvSpPr>
+          <p:cNvPr id="14" name="Text 8"/>
+          <p:cNvSpPr txBox="1"/>
+          <p:nvPr/>
+        </p:nvSpPr>
+        <p:spPr>
+          <a:xfrm>
+            <a:off x="1508760" y="4443984"/>
+            <a:ext cx="10131552" cy="978408"/>
+          </a:xfrm>
+          <a:prstGeom prst="rect">
+            <a:avLst/>
+          </a:prstGeom>
+          <a:noFill/>
+          <a:ln/>
+        </p:spPr>
+        <p:txBody>
+          <a:bodyPr wrap="square" lIns="0" tIns="0" rIns="0" bIns="0" rtlCol="0" anchor="ctr"/>
+          <a:lstStyle/>
+          <a:p>
+            <a:pPr marL="0" indent="0">
+              <a:buNone/>
+            </a:pPr>
+            <a:r>
+              <a:rPr lang="en-US" sz="2600" b="1" dirty="0">
+                <a:solidFill>
+                  <a:srgbClr val="1A5C2C"/>
+                </a:solidFill>
+                <a:latin typeface="Cambria" pitchFamily="34" charset="0"/>
+                <a:ea typeface="Cambria" pitchFamily="34" charset="-122"/>
+                <a:cs typeface="Cambria" pitchFamily="34" charset="-120"/>
+              </a:rPr>
+              <a:t>E  </a:t>
+            </a:r>
+            <a:r>
+              <a:rPr lang="en-US" sz="2600" dirty="0">
+                <a:solidFill>
+                  <a:srgbClr val="1F2A22"/>
+                </a:solidFill>
+                <a:latin typeface="Calibri" pitchFamily="34" charset="0"/>
+                <a:ea typeface="Calibri" pitchFamily="34" charset="-122"/>
+                <a:cs typeface="Calibri" pitchFamily="34" charset="-120"/>
+              </a:rPr>
+              <a:t>Accountability: owners with the authority</a:t>
+            </a:r>
+            <a:endParaRPr lang="en-US" sz="2600" dirty="0"/>
+          </a:p>
+        </p:txBody>
+      </p:sp>
+      <p:sp>
+        <p:nvSpPr>
+          <p:cNvPr id="15" name="Shape 9"/>
+          <p:cNvSpPr/>
+          <p:nvPr/>
+        </p:nvSpPr>
+        <p:spPr>
+          <a:xfrm>
+            <a:off x="548640" y="5591556"/>
+            <a:ext cx="640080" cy="640080"/>
+          </a:xfrm>
+          <a:prstGeom prst="ellipse">
+            <a:avLst/>
+          </a:prstGeom>
+          <a:solidFill>
+            <a:srgbClr val="1A5C2C"/>
+          </a:solidFill>
+          <a:ln w="12700">
+            <a:solidFill>
+              <a:srgbClr val="1A5C2C"/>
+            </a:solidFill>
+            <a:prstDash val="solid"/>
+          </a:ln>
+        </p:spPr>
+        <p:txBody>
+          <a:bodyPr/>
+          <a:lstStyle/>
+          <a:p>
+            <a:endParaRPr lang="en-ZA"/>
+          </a:p>
+        </p:txBody>
+      </p:sp>
+      <p:pic>
+        <p:nvPicPr>
+          <p:cNvPr id="16" name="Image 4" descr="preencoded.png"/>
+          <p:cNvPicPr>
+            <a:picLocks noChangeAspect="1"/>
+          </p:cNvPicPr>
+          <p:nvPr/>
+        </p:nvPicPr>
+        <p:blipFill>
+          <a:blip r:embed="rId6"/>
+          <a:stretch>
+            <a:fillRect/>
+          </a:stretch>
+        </p:blipFill>
+        <p:spPr>
+          <a:xfrm>
+            <a:off x="708660" y="5751576"/>
+            <a:ext cx="320040" cy="320040"/>
+          </a:xfrm>
+          <a:prstGeom prst="rect">
+            <a:avLst/>
+          </a:prstGeom>
+        </p:spPr>
+      </p:pic>
+      <p:sp>
+        <p:nvSpPr>
+          <p:cNvPr id="17" name="Text 10"/>
+          <p:cNvSpPr txBox="1"/>
+          <p:nvPr/>
+        </p:nvSpPr>
+        <p:spPr>
+          <a:xfrm>
+            <a:off x="1508760" y="5422392"/>
+            <a:ext cx="10131552" cy="978408"/>
+          </a:xfrm>
+          <a:prstGeom prst="rect">
+            <a:avLst/>
+          </a:prstGeom>
+          <a:noFill/>
+          <a:ln/>
+        </p:spPr>
+        <p:txBody>
+          <a:bodyPr wrap="square" lIns="0" tIns="0" rIns="0" bIns="0" rtlCol="0" anchor="ctr"/>
+          <a:lstStyle/>
+          <a:p>
+            <a:pPr marL="0" indent="0">
+              <a:buNone/>
+            </a:pPr>
+            <a:r>
+              <a:rPr lang="en-US" sz="2600" b="1" dirty="0">
+                <a:solidFill>
+                  <a:srgbClr val="1A5C2C"/>
+                </a:solidFill>
+                <a:latin typeface="Cambria" pitchFamily="34" charset="0"/>
+                <a:ea typeface="Cambria" pitchFamily="34" charset="-122"/>
+                <a:cs typeface="Cambria" pitchFamily="34" charset="-120"/>
+              </a:rPr>
+              <a:t>S  </a:t>
+            </a:r>
+            <a:r>
+              <a:rPr lang="en-US" sz="2600" dirty="0">
+                <a:solidFill>
+                  <a:srgbClr val="1F2A22"/>
+                </a:solidFill>
+                <a:latin typeface="Calibri" pitchFamily="34" charset="0"/>
+                <a:ea typeface="Calibri" pitchFamily="34" charset="-122"/>
+                <a:cs typeface="Calibri" pitchFamily="34" charset="-120"/>
+              </a:rPr>
+              <a:t>Development: capability and conditions improve</a:t>
+            </a:r>
+            <a:endParaRPr lang="en-US" sz="2600" dirty="0"/>
+          </a:p>
+        </p:txBody>
+      </p:sp>
+    </p:spTree>
+  </p:cSld>
+  <p:clrMapOvr>
+    <a:masterClrMapping/>
+  </p:clrMapOvr>
+</p:sld>
+</file>
+
+<file path=ppt/slides/slide32.xml><?xml version="1.0" encoding="utf-8"?>
 <p:sld xmlns:a="http://schemas.openxmlformats.org/drawingml/2006/main" xmlns:r="http://schemas.openxmlformats.org/officeDocument/2006/relationships" xmlns:p="http://schemas.openxmlformats.org/presentationml/2006/main">
   <p:cSld name="Slide 24">
     <p:bg>
@@ -20482,7 +22399,7 @@
 </p:sld>
 </file>
 
-<file path=ppt/slides/slide31.xml><?xml version="1.0" encoding="utf-8"?>
+<file path=ppt/slides/slide33.xml><?xml version="1.0" encoding="utf-8"?>
 <p:sld xmlns:a="http://schemas.openxmlformats.org/drawingml/2006/main" xmlns:r="http://schemas.openxmlformats.org/officeDocument/2006/relationships" xmlns:p="http://schemas.openxmlformats.org/presentationml/2006/main">
   <p:cSld name="Slide 25">
     <p:bg>
@@ -21131,7 +23048,7 @@
 </p:sld>
 </file>
 
-<file path=ppt/slides/slide32.xml><?xml version="1.0" encoding="utf-8"?>
+<file path=ppt/slides/slide34.xml><?xml version="1.0" encoding="utf-8"?>
 <p:sld xmlns:a="http://schemas.openxmlformats.org/drawingml/2006/main" xmlns:p="http://schemas.openxmlformats.org/presentationml/2006/main" xmlns:r="http://schemas.openxmlformats.org/officeDocument/2006/relationships">
   <p:cSld>
     <p:bg>
@@ -21726,7 +23643,488 @@
 </p:sld>
 </file>
 
-<file path=ppt/slides/slide33.xml><?xml version="1.0" encoding="utf-8"?>
+<file path=ppt/slides/slide35.xml><?xml version="1.0" encoding="utf-8"?>
+<p:sld xmlns:a="http://schemas.openxmlformats.org/drawingml/2006/main" xmlns:p="http://schemas.openxmlformats.org/presentationml/2006/main" xmlns:r="http://schemas.openxmlformats.org/officeDocument/2006/relationships">
+  <p:cSld>
+    <p:spTree>
+      <p:nvGrpSpPr>
+        <p:cNvPr id="1" name=""/>
+        <p:cNvGrpSpPr/>
+        <p:nvPr/>
+      </p:nvGrpSpPr>
+      <p:grpSpPr/>
+      <p:sp>
+        <p:nvSpPr>
+          <p:cNvPr id="2" name="Text 0"/>
+          <p:cNvSpPr txBox="1"/>
+          <p:nvPr/>
+        </p:nvSpPr>
+        <p:spPr>
+          <a:xfrm>
+            <a:off x="548640" y="411480"/>
+            <a:ext cx="11064240" cy="868680"/>
+          </a:xfrm>
+          <a:prstGeom prst="rect">
+            <a:avLst/>
+          </a:prstGeom>
+          <a:noFill/>
+          <a:ln/>
+        </p:spPr>
+        <p:txBody>
+          <a:bodyPr wrap="square" lIns="0" tIns="0" rIns="0" bIns="0" rtlCol="0" anchor="ctr"/>
+          <a:lstStyle/>
+          <a:p>
+            <a:pPr marL="0" indent="0">
+              <a:buNone/>
+            </a:pPr>
+            <a:r>
+              <a:rPr lang="en-US" sz="3600" b="1" dirty="0">
+                <a:solidFill>
+                  <a:srgbClr val="1A5C2C"/>
+                </a:solidFill>
+                <a:latin typeface="Cambria" pitchFamily="34" charset="0"/>
+                <a:ea typeface="Cambria" pitchFamily="34" charset="-122"/>
+                <a:cs typeface="Cambria" pitchFamily="34" charset="-120"/>
+              </a:rPr>
+              <a:t>5.3 · Activity 3: CEO Performance Scorecard</a:t>
+            </a:r>
+            <a:endParaRPr lang="en-US" sz="3600" dirty="0"/>
+          </a:p>
+        </p:txBody>
+      </p:sp>
+      <p:sp>
+        <p:nvSpPr>
+          <p:cNvPr id="3" name="Shape 1"/>
+          <p:cNvSpPr/>
+          <p:nvPr/>
+        </p:nvSpPr>
+        <p:spPr>
+          <a:xfrm>
+            <a:off x="548640" y="1677924"/>
+            <a:ext cx="640080" cy="640080"/>
+          </a:xfrm>
+          <a:prstGeom prst="ellipse">
+            <a:avLst/>
+          </a:prstGeom>
+          <a:solidFill>
+            <a:srgbClr val="1A5C2C"/>
+          </a:solidFill>
+          <a:ln w="12700">
+            <a:solidFill>
+              <a:srgbClr val="1A5C2C"/>
+            </a:solidFill>
+            <a:prstDash val="solid"/>
+          </a:ln>
+        </p:spPr>
+        <p:txBody>
+          <a:bodyPr/>
+          <a:lstStyle/>
+          <a:p>
+            <a:endParaRPr lang="en-ZA"/>
+          </a:p>
+        </p:txBody>
+      </p:sp>
+      <p:pic>
+        <p:nvPicPr>
+          <p:cNvPr id="4" name="Image 0" descr="preencoded.png"/>
+          <p:cNvPicPr>
+            <a:picLocks noChangeAspect="1"/>
+          </p:cNvPicPr>
+          <p:nvPr/>
+        </p:nvPicPr>
+        <p:blipFill>
+          <a:blip r:embed="rId7"/>
+          <a:stretch>
+            <a:fillRect/>
+          </a:stretch>
+        </p:blipFill>
+        <p:spPr>
+          <a:xfrm>
+            <a:off x="708660" y="1837944"/>
+            <a:ext cx="320040" cy="320040"/>
+          </a:xfrm>
+          <a:prstGeom prst="rect">
+            <a:avLst/>
+          </a:prstGeom>
+        </p:spPr>
+      </p:pic>
+      <p:sp>
+        <p:nvSpPr>
+          <p:cNvPr id="5" name="Text 2"/>
+          <p:cNvSpPr txBox="1"/>
+          <p:nvPr/>
+        </p:nvSpPr>
+        <p:spPr>
+          <a:xfrm>
+            <a:off x="1508760" y="1508760"/>
+            <a:ext cx="10131552" cy="978408"/>
+          </a:xfrm>
+          <a:prstGeom prst="rect">
+            <a:avLst/>
+          </a:prstGeom>
+          <a:noFill/>
+          <a:ln/>
+        </p:spPr>
+        <p:txBody>
+          <a:bodyPr wrap="square" lIns="0" tIns="0" rIns="0" bIns="0" rtlCol="0" anchor="ctr"/>
+          <a:lstStyle/>
+          <a:p>
+            <a:pPr marL="0" indent="0">
+              <a:buNone/>
+            </a:pPr>
+            <a:r>
+              <a:rPr lang="en-US" sz="2600" b="1" dirty="0">
+                <a:solidFill>
+                  <a:srgbClr val="1A5C2C"/>
+                </a:solidFill>
+                <a:latin typeface="Cambria" pitchFamily="34" charset="0"/>
+                <a:ea typeface="Cambria" pitchFamily="34" charset="-122"/>
+                <a:cs typeface="Cambria" pitchFamily="34" charset="-120"/>
+              </a:rPr>
+              <a:t>S  </a:t>
+            </a:r>
+            <a:r>
+              <a:rPr lang="en-US" sz="2600" dirty="0">
+                <a:solidFill>
+                  <a:srgbClr val="1F2A22"/>
+                </a:solidFill>
+                <a:latin typeface="Calibri" pitchFamily="34" charset="0"/>
+                <a:ea typeface="Calibri" pitchFamily="34" charset="-122"/>
+                <a:cs typeface="Calibri" pitchFamily="34" charset="-120"/>
+              </a:rPr>
+              <a:t>Strategy: Key Result measures and their weight</a:t>
+            </a:r>
+            <a:endParaRPr lang="en-US" sz="2600" dirty="0"/>
+          </a:p>
+        </p:txBody>
+      </p:sp>
+      <p:sp>
+        <p:nvSpPr>
+          <p:cNvPr id="6" name="Shape 3"/>
+          <p:cNvSpPr/>
+          <p:nvPr/>
+        </p:nvSpPr>
+        <p:spPr>
+          <a:xfrm>
+            <a:off x="548640" y="2656332"/>
+            <a:ext cx="640080" cy="640080"/>
+          </a:xfrm>
+          <a:prstGeom prst="ellipse">
+            <a:avLst/>
+          </a:prstGeom>
+          <a:solidFill>
+            <a:srgbClr val="1A5C2C"/>
+          </a:solidFill>
+          <a:ln w="12700">
+            <a:solidFill>
+              <a:srgbClr val="1A5C2C"/>
+            </a:solidFill>
+            <a:prstDash val="solid"/>
+          </a:ln>
+        </p:spPr>
+        <p:txBody>
+          <a:bodyPr/>
+          <a:lstStyle/>
+          <a:p>
+            <a:endParaRPr lang="en-ZA"/>
+          </a:p>
+        </p:txBody>
+      </p:sp>
+      <p:pic>
+        <p:nvPicPr>
+          <p:cNvPr id="7" name="Image 1" descr="preencoded.png"/>
+          <p:cNvPicPr>
+            <a:picLocks noChangeAspect="1"/>
+          </p:cNvPicPr>
+          <p:nvPr/>
+        </p:nvPicPr>
+        <p:blipFill>
+          <a:blip r:embed="rId8"/>
+          <a:stretch>
+            <a:fillRect/>
+          </a:stretch>
+        </p:blipFill>
+        <p:spPr>
+          <a:xfrm>
+            <a:off x="708660" y="2816352"/>
+            <a:ext cx="320040" cy="320040"/>
+          </a:xfrm>
+          <a:prstGeom prst="rect">
+            <a:avLst/>
+          </a:prstGeom>
+        </p:spPr>
+      </p:pic>
+      <p:sp>
+        <p:nvSpPr>
+          <p:cNvPr id="8" name="Text 4"/>
+          <p:cNvSpPr txBox="1"/>
+          <p:nvPr/>
+        </p:nvSpPr>
+        <p:spPr>
+          <a:xfrm>
+            <a:off x="1508760" y="2487168"/>
+            <a:ext cx="10131552" cy="978408"/>
+          </a:xfrm>
+          <a:prstGeom prst="rect">
+            <a:avLst/>
+          </a:prstGeom>
+          <a:noFill/>
+          <a:ln/>
+        </p:spPr>
+        <p:txBody>
+          <a:bodyPr wrap="square" lIns="0" tIns="0" rIns="0" bIns="0" rtlCol="0" anchor="ctr"/>
+          <a:lstStyle/>
+          <a:p>
+            <a:pPr marL="0" indent="0">
+              <a:buNone/>
+            </a:pPr>
+            <a:r>
+              <a:rPr lang="en-US" sz="2600" b="1" dirty="0">
+                <a:solidFill>
+                  <a:srgbClr val="1A5C2C"/>
+                </a:solidFill>
+                <a:latin typeface="Cambria" pitchFamily="34" charset="0"/>
+                <a:ea typeface="Cambria" pitchFamily="34" charset="-122"/>
+                <a:cs typeface="Cambria" pitchFamily="34" charset="-120"/>
+              </a:rPr>
+              <a:t>O  </a:t>
+            </a:r>
+            <a:r>
+              <a:rPr lang="en-US" sz="2600" dirty="0">
+                <a:solidFill>
+                  <a:srgbClr val="1F2A22"/>
+                </a:solidFill>
+                <a:latin typeface="Calibri" pitchFamily="34" charset="0"/>
+                <a:ea typeface="Calibri" pitchFamily="34" charset="-122"/>
+                <a:cs typeface="Calibri" pitchFamily="34" charset="-120"/>
+              </a:rPr>
+              <a:t>Operational: KPIs with targets and their weight</a:t>
+            </a:r>
+            <a:endParaRPr lang="en-US" sz="2600" dirty="0"/>
+          </a:p>
+        </p:txBody>
+      </p:sp>
+      <p:sp>
+        <p:nvSpPr>
+          <p:cNvPr id="9" name="Shape 5"/>
+          <p:cNvSpPr/>
+          <p:nvPr/>
+        </p:nvSpPr>
+        <p:spPr>
+          <a:xfrm>
+            <a:off x="548640" y="3634740"/>
+            <a:ext cx="640080" cy="640080"/>
+          </a:xfrm>
+          <a:prstGeom prst="ellipse">
+            <a:avLst/>
+          </a:prstGeom>
+          <a:solidFill>
+            <a:srgbClr val="1A5C2C"/>
+          </a:solidFill>
+          <a:ln w="12700">
+            <a:solidFill>
+              <a:srgbClr val="1A5C2C"/>
+            </a:solidFill>
+            <a:prstDash val="solid"/>
+          </a:ln>
+        </p:spPr>
+        <p:txBody>
+          <a:bodyPr/>
+          <a:lstStyle/>
+          <a:p>
+            <a:endParaRPr lang="en-ZA"/>
+          </a:p>
+        </p:txBody>
+      </p:sp>
+      <p:pic>
+        <p:nvPicPr>
+          <p:cNvPr id="10" name="Image 2" descr="preencoded.png"/>
+          <p:cNvPicPr>
+            <a:picLocks noChangeAspect="1"/>
+          </p:cNvPicPr>
+          <p:nvPr/>
+        </p:nvPicPr>
+        <p:blipFill>
+          <a:blip r:embed="rId9"/>
+          <a:stretch>
+            <a:fillRect/>
+          </a:stretch>
+        </p:blipFill>
+        <p:spPr>
+          <a:xfrm>
+            <a:off x="708660" y="3794760"/>
+            <a:ext cx="320040" cy="320040"/>
+          </a:xfrm>
+          <a:prstGeom prst="rect">
+            <a:avLst/>
+          </a:prstGeom>
+        </p:spPr>
+      </p:pic>
+      <p:sp>
+        <p:nvSpPr>
+          <p:cNvPr id="11" name="Text 6"/>
+          <p:cNvSpPr txBox="1"/>
+          <p:nvPr/>
+        </p:nvSpPr>
+        <p:spPr>
+          <a:xfrm>
+            <a:off x="1508760" y="3465576"/>
+            <a:ext cx="10131552" cy="978408"/>
+          </a:xfrm>
+          <a:prstGeom prst="rect">
+            <a:avLst/>
+          </a:prstGeom>
+          <a:noFill/>
+          <a:ln/>
+        </p:spPr>
+        <p:txBody>
+          <a:bodyPr wrap="square" lIns="0" tIns="0" rIns="0" bIns="0" rtlCol="0" anchor="ctr"/>
+          <a:lstStyle/>
+          <a:p>
+            <a:pPr marL="0" indent="0">
+              <a:buNone/>
+            </a:pPr>
+            <a:r>
+              <a:rPr lang="en-US" sz="2600" b="1" dirty="0">
+                <a:solidFill>
+                  <a:srgbClr val="1A5C2C"/>
+                </a:solidFill>
+                <a:latin typeface="Cambria" pitchFamily="34" charset="0"/>
+                <a:ea typeface="Cambria" pitchFamily="34" charset="-122"/>
+                <a:cs typeface="Cambria" pitchFamily="34" charset="-120"/>
+              </a:rPr>
+              <a:t>B  </a:t>
+            </a:r>
+            <a:r>
+              <a:rPr lang="en-US" sz="2600" dirty="0">
+                <a:solidFill>
+                  <a:srgbClr val="1F2A22"/>
+                </a:solidFill>
+                <a:latin typeface="Calibri" pitchFamily="34" charset="0"/>
+                <a:ea typeface="Calibri" pitchFamily="34" charset="-122"/>
+                <a:cs typeface="Calibri" pitchFamily="34" charset="-120"/>
+              </a:rPr>
+              <a:t>Behavioural: values and behaviours, how assessed</a:t>
+            </a:r>
+            <a:endParaRPr lang="en-US" sz="2600" dirty="0"/>
+          </a:p>
+        </p:txBody>
+      </p:sp>
+      <p:sp>
+        <p:nvSpPr>
+          <p:cNvPr id="12" name="Shape 7"/>
+          <p:cNvSpPr/>
+          <p:nvPr/>
+        </p:nvSpPr>
+        <p:spPr>
+          <a:xfrm>
+            <a:off x="548640" y="4613148"/>
+            <a:ext cx="640080" cy="640080"/>
+          </a:xfrm>
+          <a:prstGeom prst="ellipse">
+            <a:avLst/>
+          </a:prstGeom>
+          <a:solidFill>
+            <a:srgbClr val="1A5C2C"/>
+          </a:solidFill>
+          <a:ln w="12700">
+            <a:solidFill>
+              <a:srgbClr val="1A5C2C"/>
+            </a:solidFill>
+            <a:prstDash val="solid"/>
+          </a:ln>
+        </p:spPr>
+        <p:txBody>
+          <a:bodyPr/>
+          <a:lstStyle/>
+          <a:p>
+            <a:endParaRPr lang="en-ZA"/>
+          </a:p>
+        </p:txBody>
+      </p:sp>
+      <p:pic>
+        <p:nvPicPr>
+          <p:cNvPr id="13" name="Image 3" descr="preencoded.png"/>
+          <p:cNvPicPr>
+            <a:picLocks noChangeAspect="1"/>
+          </p:cNvPicPr>
+          <p:nvPr/>
+        </p:nvPicPr>
+        <p:blipFill>
+          <a:blip r:embed="rId4"/>
+          <a:stretch>
+            <a:fillRect/>
+          </a:stretch>
+        </p:blipFill>
+        <p:spPr>
+          <a:xfrm>
+            <a:off x="708660" y="4773168"/>
+            <a:ext cx="320040" cy="320040"/>
+          </a:xfrm>
+          <a:prstGeom prst="rect">
+            <a:avLst/>
+          </a:prstGeom>
+        </p:spPr>
+      </p:pic>
+      <p:sp>
+        <p:nvSpPr>
+          <p:cNvPr id="14" name="Text 8"/>
+          <p:cNvSpPr txBox="1"/>
+          <p:nvPr/>
+        </p:nvSpPr>
+        <p:spPr>
+          <a:xfrm>
+            <a:off x="1508760" y="4443984"/>
+            <a:ext cx="10131552" cy="978408"/>
+          </a:xfrm>
+          <a:prstGeom prst="rect">
+            <a:avLst/>
+          </a:prstGeom>
+          <a:noFill/>
+          <a:ln/>
+        </p:spPr>
+        <p:txBody>
+          <a:bodyPr wrap="square" lIns="0" tIns="0" rIns="0" bIns="0" rtlCol="0" anchor="ctr"/>
+          <a:lstStyle/>
+          <a:p>
+            <a:pPr marL="0" indent="0">
+              <a:buNone/>
+            </a:pPr>
+            <a:r>
+              <a:rPr lang="en-US" sz="2600" b="1" dirty="0">
+                <a:solidFill>
+                  <a:srgbClr val="1A5C2C"/>
+                </a:solidFill>
+                <a:latin typeface="Cambria" pitchFamily="34" charset="0"/>
+                <a:ea typeface="Cambria" pitchFamily="34" charset="-122"/>
+                <a:cs typeface="Cambria" pitchFamily="34" charset="-120"/>
+              </a:rPr>
+              <a:t>=  </a:t>
+            </a:r>
+            <a:r>
+              <a:rPr lang="en-US" sz="2600" dirty="0">
+                <a:solidFill>
+                  <a:srgbClr val="1F2A22"/>
+                </a:solidFill>
+                <a:latin typeface="Calibri" pitchFamily="34" charset="0"/>
+                <a:ea typeface="Calibri" pitchFamily="34" charset="-122"/>
+                <a:cs typeface="Calibri" pitchFamily="34" charset="-120"/>
+              </a:rPr>
+              <a:t>The three weights add up to 100%</a:t>
+            </a:r>
+            <a:endParaRPr lang="en-US" sz="2600" dirty="0"/>
+          </a:p>
+        </p:txBody>
+      </p:sp>
+    </p:spTree>
+  </p:cSld>
+  <p:clrMapOvr>
+    <a:masterClrMapping/>
+  </p:clrMapOvr>
+</p:sld>
+</file>
+
+<file path=ppt/slides/slide36.xml><?xml version="1.0" encoding="utf-8"?>
 <p:sld xmlns:a="http://schemas.openxmlformats.org/drawingml/2006/main" xmlns:p="http://schemas.openxmlformats.org/presentationml/2006/main" xmlns:r="http://schemas.openxmlformats.org/officeDocument/2006/relationships">
   <p:cSld>
     <p:bg>
@@ -22215,7 +24613,7 @@
 </p:sld>
 </file>
 
-<file path=ppt/slides/slide34.xml><?xml version="1.0" encoding="utf-8"?>
+<file path=ppt/slides/slide37.xml><?xml version="1.0" encoding="utf-8"?>
 <p:sld xmlns:a="http://schemas.openxmlformats.org/drawingml/2006/main" xmlns:r="http://schemas.openxmlformats.org/officeDocument/2006/relationships" xmlns:p="http://schemas.openxmlformats.org/presentationml/2006/main">
   <p:cSld name="Slide 28">
     <p:bg>
